--- a/python_course/chapter_06_dictionaries/dictionaries.pptx
+++ b/python_course/chapter_06_dictionaries/dictionaries.pptx
@@ -14,9 +14,6 @@
     <p:sldId id="262" r:id="rId13"/>
     <p:sldId id="263" r:id="rId14"/>
     <p:sldId id="264" r:id="rId15"/>
-    <p:sldId id="265" r:id="rId16"/>
-    <p:sldId id="266" r:id="rId17"/>
-    <p:sldId id="267" r:id="rId18"/>
   </p:sldIdLst>
   <p:sldSz cx="12191695" cy="6858000" type="screen4x3"/>
   <p:notesSz cx="6858000" cy="9144000"/>
@@ -3150,8 +3147,8 @@
         </p:nvSpPr>
         <p:spPr>
           <a:xfrm>
-            <a:off x="914400" y="1828800"/>
-            <a:ext cx="10360152" cy="1371600"/>
+            <a:off x="914400" y="2286000"/>
+            <a:ext cx="10360152" cy="1097280"/>
           </a:xfrm>
           <a:prstGeom prst="rect">
             <a:avLst/>
@@ -3165,14 +3162,14 @@
           <a:lstStyle/>
           <a:p>
             <a:pPr algn="ctr">
-              <a:defRPr sz="5400" b="1">
+              <a:defRPr sz="4800" b="1">
                 <a:solidFill>
                   <a:srgbClr val="003366"/>
                 </a:solidFill>
               </a:defRPr>
             </a:pPr>
             <a:r>
-              <a:t>Chapter 6</a:t>
+              <a:t>Chapter 6: Dictionaries</a:t>
             </a:r>
           </a:p>
         </p:txBody>
@@ -3186,7 +3183,7 @@
         <p:spPr>
           <a:xfrm>
             <a:off x="914400" y="3657600"/>
-            <a:ext cx="10360152" cy="548640"/>
+            <a:ext cx="10360152" cy="731520"/>
           </a:xfrm>
           <a:prstGeom prst="rect">
             <a:avLst/>
@@ -3207,42 +3204,7 @@
               </a:defRPr>
             </a:pPr>
             <a:r>
-              <a:t>Dictionaries - Key-Value Pairs</a:t>
-            </a:r>
-          </a:p>
-        </p:txBody>
-      </p:sp>
-      <p:sp>
-        <p:nvSpPr>
-          <p:cNvPr id="5" name="TextBox 4"/>
-          <p:cNvSpPr txBox="1"/>
-          <p:nvPr/>
-        </p:nvSpPr>
-        <p:spPr>
-          <a:xfrm>
-            <a:off x="914400" y="4297680"/>
-            <a:ext cx="10360152" cy="548640"/>
-          </a:xfrm>
-          <a:prstGeom prst="rect">
-            <a:avLst/>
-          </a:prstGeom>
-          <a:noFill/>
-        </p:spPr>
-        <p:txBody>
-          <a:bodyPr wrap="none">
-            <a:spAutoFit/>
-          </a:bodyPr>
-          <a:lstStyle/>
-          <a:p>
-            <a:pPr algn="ctr">
-              <a:defRPr sz="2800">
-                <a:solidFill>
-                  <a:srgbClr val="4682B4"/>
-                </a:solidFill>
-              </a:defRPr>
-            </a:pPr>
-            <a:r>
-              <a:t>Storing Connected Data</a:t>
+              <a:t>Key-Value Pairs and Mappings</a:t>
             </a:r>
           </a:p>
         </p:txBody>
@@ -3255,7 +3217,7 @@
 </p:sld>
 </file>
 
-<file path=ppt/slides/slide10.xml><?xml version="1.0" encoding="utf-8"?>
+<file path=ppt/slides/slide2.xml><?xml version="1.0" encoding="utf-8"?>
 <p:sld xmlns:a="http://schemas.openxmlformats.org/drawingml/2006/main" xmlns:p="http://schemas.openxmlformats.org/presentationml/2006/main" xmlns:r="http://schemas.openxmlformats.org/officeDocument/2006/relationships">
   <p:cSld>
     <p:spTree>
@@ -3359,8 +3321,8 @@
         </p:nvSpPr>
         <p:spPr>
           <a:xfrm>
-            <a:off x="457200" y="365760"/>
-            <a:ext cx="10972800" cy="731520"/>
+            <a:off x="457200" y="320040"/>
+            <a:ext cx="10972800" cy="640080"/>
           </a:xfrm>
           <a:prstGeom prst="rect">
             <a:avLst/>
@@ -3374,58 +3336,263 @@
           <a:lstStyle/>
           <a:p>
             <a:pPr>
-              <a:defRPr sz="4000" b="1">
+              <a:defRPr sz="3600" b="1">
                 <a:solidFill>
                   <a:srgbClr val="003366"/>
                 </a:solidFill>
               </a:defRPr>
             </a:pPr>
             <a:r>
-              <a:t>Real-World: Contact Book 📱</a:t>
-            </a:r>
-          </a:p>
-        </p:txBody>
-      </p:sp>
-      <p:sp>
-        <p:nvSpPr>
-          <p:cNvPr id="5" name="Rectangle 4"/>
-          <p:cNvSpPr/>
+              <a:t>What Are Dictionaries?</a:t>
+            </a:r>
+          </a:p>
+        </p:txBody>
+      </p:sp>
+      <p:sp>
+        <p:nvSpPr>
+          <p:cNvPr id="5" name="TextBox 4"/>
+          <p:cNvSpPr txBox="1"/>
           <p:nvPr/>
         </p:nvSpPr>
         <p:spPr>
           <a:xfrm>
-            <a:off x="457200" y="1005840"/>
-            <a:ext cx="1828800" cy="45720"/>
+            <a:off x="640080" y="1188720"/>
+            <a:ext cx="10789920" cy="5303520"/>
           </a:xfrm>
           <a:prstGeom prst="rect">
             <a:avLst/>
           </a:prstGeom>
-          <a:solidFill>
-            <a:srgbClr val="0066CC"/>
-          </a:solidFill>
-          <a:ln>
-            <a:noFill/>
-          </a:ln>
+          <a:noFill/>
         </p:spPr>
-        <p:style>
-          <a:lnRef idx="1">
-            <a:schemeClr val="accent1"/>
-          </a:lnRef>
-          <a:fillRef idx="3">
-            <a:schemeClr val="accent1"/>
-          </a:fillRef>
-          <a:effectRef idx="2">
-            <a:schemeClr val="accent1"/>
-          </a:effectRef>
-          <a:fontRef idx="minor">
-            <a:schemeClr val="lt1"/>
-          </a:fontRef>
-        </p:style>
-        <p:txBody>
-          <a:bodyPr rtlCol="0" anchor="ctr"/>
-          <a:lstStyle/>
-          <a:p>
-            <a:pPr algn="ctr"/>
+        <p:txBody>
+          <a:bodyPr wrap="square">
+            <a:spAutoFit/>
+          </a:bodyPr>
+          <a:lstStyle/>
+          <a:p>
+            <a:pPr>
+              <a:spcAft>
+                <a:spcPts val="600"/>
+              </a:spcAft>
+              <a:defRPr b="1" sz="2000">
+                <a:solidFill>
+                  <a:srgbClr val="333333"/>
+                </a:solidFill>
+              </a:defRPr>
+            </a:pPr>
+            <a:r>
+              <a:t>Dictionaries: Collections of key-value pairs</a:t>
+            </a:r>
+          </a:p>
+          <a:p>
+            <a:pPr lvl="1">
+              <a:spcAft>
+                <a:spcPts val="400"/>
+              </a:spcAft>
+              <a:defRPr sz="1600">
+                <a:solidFill>
+                  <a:srgbClr val="333333"/>
+                </a:solidFill>
+              </a:defRPr>
+            </a:pPr>
+            <a:r>
+              <a:t>• Unordered (Python 3.7+: insertion ordered)</a:t>
+            </a:r>
+          </a:p>
+          <a:p>
+            <a:pPr lvl="1">
+              <a:spcAft>
+                <a:spcPts val="400"/>
+              </a:spcAft>
+              <a:defRPr sz="1600">
+                <a:solidFill>
+                  <a:srgbClr val="333333"/>
+                </a:solidFill>
+              </a:defRPr>
+            </a:pPr>
+            <a:r>
+              <a:t>• Keys must be unique</a:t>
+            </a:r>
+          </a:p>
+          <a:p>
+            <a:pPr lvl="1">
+              <a:spcAft>
+                <a:spcPts val="400"/>
+              </a:spcAft>
+              <a:defRPr sz="1600">
+                <a:solidFill>
+                  <a:srgbClr val="333333"/>
+                </a:solidFill>
+              </a:defRPr>
+            </a:pPr>
+            <a:r>
+              <a:t>• Values can be any type</a:t>
+            </a:r>
+          </a:p>
+          <a:p>
+            <a:pPr lvl="1">
+              <a:spcAft>
+                <a:spcPts val="400"/>
+              </a:spcAft>
+              <a:defRPr sz="1600">
+                <a:solidFill>
+                  <a:srgbClr val="333333"/>
+                </a:solidFill>
+              </a:defRPr>
+            </a:pPr>
+            <a:r>
+              <a:t>• Mutable</a:t>
+            </a:r>
+          </a:p>
+          <a:p>
+            <a:pPr>
+              <a:spcAft>
+                <a:spcPts val="600"/>
+              </a:spcAft>
+              <a:defRPr b="1" sz="2000">
+                <a:solidFill>
+                  <a:srgbClr val="333333"/>
+                </a:solidFill>
+              </a:defRPr>
+            </a:pPr>
+            <a:r>
+              <a:t>Creating Dictionaries:</a:t>
+            </a:r>
+          </a:p>
+          <a:p>
+            <a:pPr>
+              <a:spcAft>
+                <a:spcPts val="600"/>
+              </a:spcAft>
+              <a:defRPr b="1" sz="2000">
+                <a:solidFill>
+                  <a:srgbClr val="333333"/>
+                </a:solidFill>
+              </a:defRPr>
+            </a:pPr>
+            <a:r>
+              <a:t>student = {"name": "Alice", "age": 20}</a:t>
+            </a:r>
+          </a:p>
+          <a:p>
+            <a:pPr>
+              <a:spcAft>
+                <a:spcPts val="600"/>
+              </a:spcAft>
+              <a:defRPr sz="1600">
+                <a:solidFill>
+                  <a:srgbClr val="333333"/>
+                </a:solidFill>
+              </a:defRPr>
+            </a:pPr>
+            <a:r>
+              <a:t>empty = {}</a:t>
+            </a:r>
+          </a:p>
+          <a:p>
+            <a:pPr>
+              <a:spcAft>
+                <a:spcPts val="600"/>
+              </a:spcAft>
+              <a:defRPr sz="1600">
+                <a:solidFill>
+                  <a:srgbClr val="333333"/>
+                </a:solidFill>
+              </a:defRPr>
+            </a:pPr>
+            <a:r>
+              <a:t>empty = dict()</a:t>
+            </a:r>
+          </a:p>
+          <a:p>
+            <a:pPr>
+              <a:spcAft>
+                <a:spcPts val="600"/>
+              </a:spcAft>
+              <a:defRPr b="1" sz="2000">
+                <a:solidFill>
+                  <a:srgbClr val="333333"/>
+                </a:solidFill>
+              </a:defRPr>
+            </a:pPr>
+            <a:r>
+              <a:t>When to Use:</a:t>
+            </a:r>
+          </a:p>
+          <a:p>
+            <a:pPr lvl="1">
+              <a:spcAft>
+                <a:spcPts val="400"/>
+              </a:spcAft>
+              <a:defRPr sz="1600">
+                <a:solidFill>
+                  <a:srgbClr val="333333"/>
+                </a:solidFill>
+              </a:defRPr>
+            </a:pPr>
+            <a:r>
+              <a:t>• Associate related data</a:t>
+            </a:r>
+          </a:p>
+          <a:p>
+            <a:pPr lvl="1">
+              <a:spcAft>
+                <a:spcPts val="400"/>
+              </a:spcAft>
+              <a:defRPr sz="1600">
+                <a:solidFill>
+                  <a:srgbClr val="333333"/>
+                </a:solidFill>
+              </a:defRPr>
+            </a:pPr>
+            <a:r>
+              <a:t>• Fast lookup by key</a:t>
+            </a:r>
+          </a:p>
+          <a:p>
+            <a:pPr lvl="1">
+              <a:spcAft>
+                <a:spcPts val="400"/>
+              </a:spcAft>
+              <a:defRPr sz="1600">
+                <a:solidFill>
+                  <a:srgbClr val="333333"/>
+                </a:solidFill>
+              </a:defRPr>
+            </a:pPr>
+            <a:r>
+              <a:t>• Represent real-world objects</a:t>
+            </a:r>
+          </a:p>
+          <a:p>
+            <a:pPr lvl="1">
+              <a:spcAft>
+                <a:spcPts val="400"/>
+              </a:spcAft>
+              <a:defRPr sz="1600">
+                <a:solidFill>
+                  <a:srgbClr val="333333"/>
+                </a:solidFill>
+              </a:defRPr>
+            </a:pPr>
+            <a:r>
+              <a:t>• Configuration settings</a:t>
+            </a:r>
+          </a:p>
+          <a:p>
+            <a:pPr lvl="1">
+              <a:spcAft>
+                <a:spcPts val="400"/>
+              </a:spcAft>
+              <a:defRPr sz="1600">
+                <a:solidFill>
+                  <a:srgbClr val="333333"/>
+                </a:solidFill>
+              </a:defRPr>
+            </a:pPr>
+            <a:r>
+              <a:t>• Counting and grouping</a:t>
+            </a:r>
           </a:p>
         </p:txBody>
       </p:sp>
@@ -3437,7 +3604,7 @@
 </p:sld>
 </file>
 
-<file path=ppt/slides/slide11.xml><?xml version="1.0" encoding="utf-8"?>
+<file path=ppt/slides/slide3.xml><?xml version="1.0" encoding="utf-8"?>
 <p:sld xmlns:a="http://schemas.openxmlformats.org/drawingml/2006/main" xmlns:p="http://schemas.openxmlformats.org/presentationml/2006/main" xmlns:r="http://schemas.openxmlformats.org/officeDocument/2006/relationships">
   <p:cSld>
     <p:spTree>
@@ -3541,8 +3708,8 @@
         </p:nvSpPr>
         <p:spPr>
           <a:xfrm>
-            <a:off x="457200" y="365760"/>
-            <a:ext cx="10972800" cy="731520"/>
+            <a:off x="457200" y="320040"/>
+            <a:ext cx="10972800" cy="640080"/>
           </a:xfrm>
           <a:prstGeom prst="rect">
             <a:avLst/>
@@ -3556,71 +3723,28 @@
           <a:lstStyle/>
           <a:p>
             <a:pPr>
-              <a:defRPr sz="4000" b="1">
+              <a:defRPr sz="3600" b="1">
                 <a:solidFill>
                   <a:srgbClr val="003366"/>
                 </a:solidFill>
               </a:defRPr>
             </a:pPr>
             <a:r>
-              <a:t>Nested Dictionaries 🎁</a:t>
-            </a:r>
-          </a:p>
-        </p:txBody>
-      </p:sp>
-      <p:sp>
-        <p:nvSpPr>
-          <p:cNvPr id="5" name="Rectangle 4"/>
-          <p:cNvSpPr/>
+              <a:t>Accessing and Modifying</a:t>
+            </a:r>
+          </a:p>
+        </p:txBody>
+      </p:sp>
+      <p:sp>
+        <p:nvSpPr>
+          <p:cNvPr id="5" name="TextBox 4"/>
+          <p:cNvSpPr txBox="1"/>
           <p:nvPr/>
         </p:nvSpPr>
         <p:spPr>
           <a:xfrm>
-            <a:off x="457200" y="1005840"/>
-            <a:ext cx="1828800" cy="45720"/>
-          </a:xfrm>
-          <a:prstGeom prst="rect">
-            <a:avLst/>
-          </a:prstGeom>
-          <a:solidFill>
-            <a:srgbClr val="0066CC"/>
-          </a:solidFill>
-          <a:ln>
-            <a:noFill/>
-          </a:ln>
-        </p:spPr>
-        <p:style>
-          <a:lnRef idx="1">
-            <a:schemeClr val="accent1"/>
-          </a:lnRef>
-          <a:fillRef idx="3">
-            <a:schemeClr val="accent1"/>
-          </a:fillRef>
-          <a:effectRef idx="2">
-            <a:schemeClr val="accent1"/>
-          </a:effectRef>
-          <a:fontRef idx="minor">
-            <a:schemeClr val="lt1"/>
-          </a:fontRef>
-        </p:style>
-        <p:txBody>
-          <a:bodyPr rtlCol="0" anchor="ctr"/>
-          <a:lstStyle/>
-          <a:p>
-            <a:pPr algn="ctr"/>
-          </a:p>
-        </p:txBody>
-      </p:sp>
-      <p:sp>
-        <p:nvSpPr>
-          <p:cNvPr id="6" name="TextBox 5"/>
-          <p:cNvSpPr txBox="1"/>
-          <p:nvPr/>
-        </p:nvSpPr>
-        <p:spPr>
-          <a:xfrm>
-            <a:off x="640080" y="1371600"/>
-            <a:ext cx="10789920" cy="4572000"/>
+            <a:off x="640080" y="1188720"/>
+            <a:ext cx="10789920" cy="5303520"/>
           </a:xfrm>
           <a:prstGeom prst="rect">
             <a:avLst/>
@@ -3635,46 +3759,226 @@
           <a:p>
             <a:pPr>
               <a:spcAft>
-                <a:spcPts val="800"/>
-              </a:spcAft>
-              <a:defRPr sz="2000" b="1">
-                <a:solidFill>
-                  <a:srgbClr val="333333"/>
-                </a:solidFill>
-              </a:defRPr>
-            </a:pPr>
-            <a:r>
-              <a:t>Dictionaries can contain other dictionaries!</a:t>
-            </a:r>
-          </a:p>
-          <a:p>
-            <a:pPr>
-              <a:spcAft>
-                <a:spcPts val="800"/>
-              </a:spcAft>
-              <a:defRPr sz="2000" b="1">
-                <a:solidFill>
-                  <a:srgbClr val="333333"/>
-                </a:solidFill>
-              </a:defRPr>
-            </a:pPr>
-            <a:r>
-              <a:t>Student Records Example</a:t>
-            </a:r>
-          </a:p>
-          <a:p>
-            <a:pPr>
-              <a:spcAft>
-                <a:spcPts val="800"/>
-              </a:spcAft>
-              <a:defRPr sz="2000" b="1">
-                <a:solidFill>
-                  <a:srgbClr val="333333"/>
-                </a:solidFill>
-              </a:defRPr>
-            </a:pPr>
-            <a:r>
-              <a:t>Accessing Nested Data</a:t>
+                <a:spcPts val="600"/>
+              </a:spcAft>
+              <a:defRPr b="1" sz="2000">
+                <a:solidFill>
+                  <a:srgbClr val="333333"/>
+                </a:solidFill>
+              </a:defRPr>
+            </a:pPr>
+            <a:r>
+              <a:t>Access by Key:</a:t>
+            </a:r>
+          </a:p>
+          <a:p>
+            <a:pPr>
+              <a:spcAft>
+                <a:spcPts val="600"/>
+              </a:spcAft>
+              <a:defRPr sz="1600">
+                <a:solidFill>
+                  <a:srgbClr val="333333"/>
+                </a:solidFill>
+              </a:defRPr>
+            </a:pPr>
+            <a:r>
+              <a:t>student["name"]  # "Alice"</a:t>
+            </a:r>
+          </a:p>
+          <a:p>
+            <a:pPr>
+              <a:spcAft>
+                <a:spcPts val="600"/>
+              </a:spcAft>
+              <a:defRPr sz="1600">
+                <a:solidFill>
+                  <a:srgbClr val="333333"/>
+                </a:solidFill>
+              </a:defRPr>
+            </a:pPr>
+            <a:r>
+              <a:t>student.get("age")  # 20</a:t>
+            </a:r>
+          </a:p>
+          <a:p>
+            <a:pPr>
+              <a:spcAft>
+                <a:spcPts val="600"/>
+              </a:spcAft>
+              <a:defRPr sz="1600">
+                <a:solidFill>
+                  <a:srgbClr val="333333"/>
+                </a:solidFill>
+              </a:defRPr>
+            </a:pPr>
+            <a:r>
+              <a:t>student.get("grade", "N/A")  # Default</a:t>
+            </a:r>
+          </a:p>
+          <a:p>
+            <a:pPr>
+              <a:spcAft>
+                <a:spcPts val="600"/>
+              </a:spcAft>
+              <a:defRPr b="1" sz="2000">
+                <a:solidFill>
+                  <a:srgbClr val="333333"/>
+                </a:solidFill>
+              </a:defRPr>
+            </a:pPr>
+            <a:r>
+              <a:t>Adding/Updating:</a:t>
+            </a:r>
+          </a:p>
+          <a:p>
+            <a:pPr>
+              <a:spcAft>
+                <a:spcPts val="600"/>
+              </a:spcAft>
+              <a:defRPr sz="1600">
+                <a:solidFill>
+                  <a:srgbClr val="333333"/>
+                </a:solidFill>
+              </a:defRPr>
+            </a:pPr>
+            <a:r>
+              <a:t>student["grade"] = "A"  # Add new</a:t>
+            </a:r>
+          </a:p>
+          <a:p>
+            <a:pPr>
+              <a:spcAft>
+                <a:spcPts val="600"/>
+              </a:spcAft>
+              <a:defRPr sz="1600">
+                <a:solidFill>
+                  <a:srgbClr val="333333"/>
+                </a:solidFill>
+              </a:defRPr>
+            </a:pPr>
+            <a:r>
+              <a:t>student["age"] = 21  # Update</a:t>
+            </a:r>
+          </a:p>
+          <a:p>
+            <a:pPr>
+              <a:spcAft>
+                <a:spcPts val="600"/>
+              </a:spcAft>
+              <a:defRPr b="1" sz="2000">
+                <a:solidFill>
+                  <a:srgbClr val="333333"/>
+                </a:solidFill>
+              </a:defRPr>
+            </a:pPr>
+            <a:r>
+              <a:t>student.update({"gpa": 4.0})</a:t>
+            </a:r>
+          </a:p>
+          <a:p>
+            <a:pPr>
+              <a:spcAft>
+                <a:spcPts val="600"/>
+              </a:spcAft>
+              <a:defRPr b="1" sz="2000">
+                <a:solidFill>
+                  <a:srgbClr val="333333"/>
+                </a:solidFill>
+              </a:defRPr>
+            </a:pPr>
+            <a:r>
+              <a:t>Removing:</a:t>
+            </a:r>
+          </a:p>
+          <a:p>
+            <a:pPr>
+              <a:spcAft>
+                <a:spcPts val="600"/>
+              </a:spcAft>
+              <a:defRPr sz="1600">
+                <a:solidFill>
+                  <a:srgbClr val="333333"/>
+                </a:solidFill>
+              </a:defRPr>
+            </a:pPr>
+            <a:r>
+              <a:t>del student["age"]</a:t>
+            </a:r>
+          </a:p>
+          <a:p>
+            <a:pPr>
+              <a:spcAft>
+                <a:spcPts val="600"/>
+              </a:spcAft>
+              <a:defRPr sz="1600">
+                <a:solidFill>
+                  <a:srgbClr val="333333"/>
+                </a:solidFill>
+              </a:defRPr>
+            </a:pPr>
+            <a:r>
+              <a:t>grade = student.pop("grade")</a:t>
+            </a:r>
+          </a:p>
+          <a:p>
+            <a:pPr>
+              <a:spcAft>
+                <a:spcPts val="600"/>
+              </a:spcAft>
+              <a:defRPr sz="1600">
+                <a:solidFill>
+                  <a:srgbClr val="333333"/>
+                </a:solidFill>
+              </a:defRPr>
+            </a:pPr>
+            <a:r>
+              <a:t>student.clear()  # Remove all</a:t>
+            </a:r>
+          </a:p>
+          <a:p>
+            <a:pPr>
+              <a:spcAft>
+                <a:spcPts val="600"/>
+              </a:spcAft>
+              <a:defRPr b="1" sz="2000">
+                <a:solidFill>
+                  <a:srgbClr val="333333"/>
+                </a:solidFill>
+              </a:defRPr>
+            </a:pPr>
+            <a:r>
+              <a:t>Checking Keys:</a:t>
+            </a:r>
+          </a:p>
+          <a:p>
+            <a:pPr>
+              <a:spcAft>
+                <a:spcPts val="600"/>
+              </a:spcAft>
+              <a:defRPr sz="1600">
+                <a:solidFill>
+                  <a:srgbClr val="333333"/>
+                </a:solidFill>
+              </a:defRPr>
+            </a:pPr>
+            <a:r>
+              <a:t>"name" in student  # True</a:t>
+            </a:r>
+          </a:p>
+          <a:p>
+            <a:pPr>
+              <a:spcAft>
+                <a:spcPts val="600"/>
+              </a:spcAft>
+              <a:defRPr sz="1600">
+                <a:solidFill>
+                  <a:srgbClr val="333333"/>
+                </a:solidFill>
+              </a:defRPr>
+            </a:pPr>
+            <a:r>
+              <a:t>"email" not in student  # True</a:t>
             </a:r>
           </a:p>
         </p:txBody>
@@ -3687,173 +3991,7 @@
 </p:sld>
 </file>
 
-<file path=ppt/slides/slide12.xml><?xml version="1.0" encoding="utf-8"?>
-<p:sld xmlns:a="http://schemas.openxmlformats.org/drawingml/2006/main" xmlns:p="http://schemas.openxmlformats.org/presentationml/2006/main" xmlns:r="http://schemas.openxmlformats.org/officeDocument/2006/relationships">
-  <p:cSld>
-    <p:spTree>
-      <p:nvGrpSpPr>
-        <p:cNvPr id="1" name=""/>
-        <p:cNvGrpSpPr/>
-        <p:nvPr/>
-      </p:nvGrpSpPr>
-      <p:grpSpPr/>
-      <p:sp>
-        <p:nvSpPr>
-          <p:cNvPr id="2" name="Rectangle 1"/>
-          <p:cNvSpPr/>
-          <p:nvPr/>
-        </p:nvSpPr>
-        <p:spPr>
-          <a:xfrm>
-            <a:off x="0" y="0"/>
-            <a:ext cx="12191695" cy="6858000"/>
-          </a:xfrm>
-          <a:prstGeom prst="rect">
-            <a:avLst/>
-          </a:prstGeom>
-          <a:solidFill>
-            <a:srgbClr val="F0F8FF"/>
-          </a:solidFill>
-          <a:ln>
-            <a:noFill/>
-          </a:ln>
-        </p:spPr>
-        <p:style>
-          <a:lnRef idx="1">
-            <a:schemeClr val="accent1"/>
-          </a:lnRef>
-          <a:fillRef idx="3">
-            <a:schemeClr val="accent1"/>
-          </a:fillRef>
-          <a:effectRef idx="2">
-            <a:schemeClr val="accent1"/>
-          </a:effectRef>
-          <a:fontRef idx="minor">
-            <a:schemeClr val="lt1"/>
-          </a:fontRef>
-        </p:style>
-        <p:txBody>
-          <a:bodyPr rtlCol="0" anchor="ctr"/>
-          <a:lstStyle/>
-          <a:p>
-            <a:pPr algn="ctr"/>
-          </a:p>
-        </p:txBody>
-      </p:sp>
-      <p:sp>
-        <p:nvSpPr>
-          <p:cNvPr id="3" name="TextBox 2"/>
-          <p:cNvSpPr txBox="1"/>
-          <p:nvPr/>
-        </p:nvSpPr>
-        <p:spPr>
-          <a:xfrm>
-            <a:off x="914400" y="1828800"/>
-            <a:ext cx="10360152" cy="1371600"/>
-          </a:xfrm>
-          <a:prstGeom prst="rect">
-            <a:avLst/>
-          </a:prstGeom>
-          <a:noFill/>
-        </p:spPr>
-        <p:txBody>
-          <a:bodyPr wrap="none">
-            <a:spAutoFit/>
-          </a:bodyPr>
-          <a:lstStyle/>
-          <a:p>
-            <a:pPr algn="ctr">
-              <a:defRPr sz="5400" b="1">
-                <a:solidFill>
-                  <a:srgbClr val="003366"/>
-                </a:solidFill>
-              </a:defRPr>
-            </a:pPr>
-            <a:r>
-              <a:t>Time to Practice!</a:t>
-            </a:r>
-          </a:p>
-        </p:txBody>
-      </p:sp>
-      <p:sp>
-        <p:nvSpPr>
-          <p:cNvPr id="4" name="TextBox 3"/>
-          <p:cNvSpPr txBox="1"/>
-          <p:nvPr/>
-        </p:nvSpPr>
-        <p:spPr>
-          <a:xfrm>
-            <a:off x="914400" y="3657600"/>
-            <a:ext cx="10360152" cy="548640"/>
-          </a:xfrm>
-          <a:prstGeom prst="rect">
-            <a:avLst/>
-          </a:prstGeom>
-          <a:noFill/>
-        </p:spPr>
-        <p:txBody>
-          <a:bodyPr wrap="none">
-            <a:spAutoFit/>
-          </a:bodyPr>
-          <a:lstStyle/>
-          <a:p>
-            <a:pPr algn="ctr">
-              <a:defRPr sz="2800">
-                <a:solidFill>
-                  <a:srgbClr val="4682B4"/>
-                </a:solidFill>
-              </a:defRPr>
-            </a:pPr>
-            <a:r>
-              <a:t>Open the practice notebook and master dictionaries</a:t>
-            </a:r>
-          </a:p>
-        </p:txBody>
-      </p:sp>
-      <p:sp>
-        <p:nvSpPr>
-          <p:cNvPr id="5" name="TextBox 4"/>
-          <p:cNvSpPr txBox="1"/>
-          <p:nvPr/>
-        </p:nvSpPr>
-        <p:spPr>
-          <a:xfrm>
-            <a:off x="914400" y="4297680"/>
-            <a:ext cx="10360152" cy="548640"/>
-          </a:xfrm>
-          <a:prstGeom prst="rect">
-            <a:avLst/>
-          </a:prstGeom>
-          <a:noFill/>
-        </p:spPr>
-        <p:txBody>
-          <a:bodyPr wrap="none">
-            <a:spAutoFit/>
-          </a:bodyPr>
-          <a:lstStyle/>
-          <a:p>
-            <a:pPr algn="ctr">
-              <a:defRPr sz="2800">
-                <a:solidFill>
-                  <a:srgbClr val="4682B4"/>
-                </a:solidFill>
-              </a:defRPr>
-            </a:pPr>
-            <a:r>
-              <a:t>Dictionaries unlock powerful data storage!</a:t>
-            </a:r>
-          </a:p>
-        </p:txBody>
-      </p:sp>
-    </p:spTree>
-  </p:cSld>
-  <p:clrMapOvr>
-    <a:masterClrMapping/>
-  </p:clrMapOvr>
-</p:sld>
-</file>
-
-<file path=ppt/slides/slide2.xml><?xml version="1.0" encoding="utf-8"?>
+<file path=ppt/slides/slide4.xml><?xml version="1.0" encoding="utf-8"?>
 <p:sld xmlns:a="http://schemas.openxmlformats.org/drawingml/2006/main" xmlns:p="http://schemas.openxmlformats.org/presentationml/2006/main" xmlns:r="http://schemas.openxmlformats.org/officeDocument/2006/relationships">
   <p:cSld>
     <p:spTree>
@@ -3957,8 +4095,8 @@
         </p:nvSpPr>
         <p:spPr>
           <a:xfrm>
-            <a:off x="457200" y="365760"/>
-            <a:ext cx="10972800" cy="731520"/>
+            <a:off x="457200" y="320040"/>
+            <a:ext cx="10972800" cy="640080"/>
           </a:xfrm>
           <a:prstGeom prst="rect">
             <a:avLst/>
@@ -3972,71 +4110,28 @@
           <a:lstStyle/>
           <a:p>
             <a:pPr>
-              <a:defRPr sz="4000" b="1">
+              <a:defRPr sz="3600" b="1">
                 <a:solidFill>
                   <a:srgbClr val="003366"/>
                 </a:solidFill>
               </a:defRPr>
             </a:pPr>
             <a:r>
-              <a:t>What Are Dictionaries? 📖</a:t>
-            </a:r>
-          </a:p>
-        </p:txBody>
-      </p:sp>
-      <p:sp>
-        <p:nvSpPr>
-          <p:cNvPr id="5" name="Rectangle 4"/>
-          <p:cNvSpPr/>
+              <a:t>Dictionary Methods</a:t>
+            </a:r>
+          </a:p>
+        </p:txBody>
+      </p:sp>
+      <p:sp>
+        <p:nvSpPr>
+          <p:cNvPr id="5" name="TextBox 4"/>
+          <p:cNvSpPr txBox="1"/>
           <p:nvPr/>
         </p:nvSpPr>
         <p:spPr>
           <a:xfrm>
-            <a:off x="457200" y="1005840"/>
-            <a:ext cx="1828800" cy="45720"/>
-          </a:xfrm>
-          <a:prstGeom prst="rect">
-            <a:avLst/>
-          </a:prstGeom>
-          <a:solidFill>
-            <a:srgbClr val="0066CC"/>
-          </a:solidFill>
-          <a:ln>
-            <a:noFill/>
-          </a:ln>
-        </p:spPr>
-        <p:style>
-          <a:lnRef idx="1">
-            <a:schemeClr val="accent1"/>
-          </a:lnRef>
-          <a:fillRef idx="3">
-            <a:schemeClr val="accent1"/>
-          </a:fillRef>
-          <a:effectRef idx="2">
-            <a:schemeClr val="accent1"/>
-          </a:effectRef>
-          <a:fontRef idx="minor">
-            <a:schemeClr val="lt1"/>
-          </a:fontRef>
-        </p:style>
-        <p:txBody>
-          <a:bodyPr rtlCol="0" anchor="ctr"/>
-          <a:lstStyle/>
-          <a:p>
-            <a:pPr algn="ctr"/>
-          </a:p>
-        </p:txBody>
-      </p:sp>
-      <p:sp>
-        <p:nvSpPr>
-          <p:cNvPr id="6" name="TextBox 5"/>
-          <p:cNvSpPr txBox="1"/>
-          <p:nvPr/>
-        </p:nvSpPr>
-        <p:spPr>
-          <a:xfrm>
-            <a:off x="640080" y="1371600"/>
-            <a:ext cx="10789920" cy="4572000"/>
+            <a:off x="640080" y="1188720"/>
+            <a:ext cx="10789920" cy="5303520"/>
           </a:xfrm>
           <a:prstGeom prst="rect">
             <a:avLst/>
@@ -4051,61 +4146,211 @@
           <a:p>
             <a:pPr>
               <a:spcAft>
-                <a:spcPts val="800"/>
-              </a:spcAft>
-              <a:defRPr sz="2000" b="1">
-                <a:solidFill>
-                  <a:srgbClr val="333333"/>
-                </a:solidFill>
-              </a:defRPr>
-            </a:pPr>
-            <a:r>
-              <a:t>A dictionary stores data as key-value pairs - like a real dictionary!</a:t>
-            </a:r>
-          </a:p>
-          <a:p>
-            <a:pPr>
-              <a:spcAft>
-                <a:spcPts val="800"/>
-              </a:spcAft>
-              <a:defRPr sz="2000" b="1">
-                <a:solidFill>
-                  <a:srgbClr val="333333"/>
-                </a:solidFill>
-              </a:defRPr>
-            </a:pPr>
-            <a:r>
-              <a:t>Real Dictionary</a:t>
-            </a:r>
-          </a:p>
-          <a:p>
-            <a:pPr>
-              <a:spcAft>
-                <a:spcPts val="800"/>
-              </a:spcAft>
-              <a:defRPr sz="2000" b="1">
-                <a:solidFill>
-                  <a:srgbClr val="333333"/>
-                </a:solidFill>
-              </a:defRPr>
-            </a:pPr>
-            <a:r>
-              <a:t>Python Dictionary</a:t>
-            </a:r>
-          </a:p>
-          <a:p>
-            <a:pPr>
-              <a:spcAft>
-                <a:spcPts val="800"/>
-              </a:spcAft>
-              <a:defRPr sz="2000" b="1">
-                <a:solidFill>
-                  <a:srgbClr val="333333"/>
-                </a:solidFill>
-              </a:defRPr>
-            </a:pPr>
-            <a:r>
-              <a:t>Each key maps to a specific value!</a:t>
+                <a:spcPts val="600"/>
+              </a:spcAft>
+              <a:defRPr b="1" sz="2000">
+                <a:solidFill>
+                  <a:srgbClr val="333333"/>
+                </a:solidFill>
+              </a:defRPr>
+            </a:pPr>
+            <a:r>
+              <a:t>Keys, Values, Items:</a:t>
+            </a:r>
+          </a:p>
+          <a:p>
+            <a:pPr>
+              <a:spcAft>
+                <a:spcPts val="600"/>
+              </a:spcAft>
+              <a:defRPr sz="1600">
+                <a:solidFill>
+                  <a:srgbClr val="333333"/>
+                </a:solidFill>
+              </a:defRPr>
+            </a:pPr>
+            <a:r>
+              <a:t>student.keys()  # dict_keys([...])</a:t>
+            </a:r>
+          </a:p>
+          <a:p>
+            <a:pPr>
+              <a:spcAft>
+                <a:spcPts val="600"/>
+              </a:spcAft>
+              <a:defRPr sz="1600">
+                <a:solidFill>
+                  <a:srgbClr val="333333"/>
+                </a:solidFill>
+              </a:defRPr>
+            </a:pPr>
+            <a:r>
+              <a:t>student.values()  # dict_values([...])</a:t>
+            </a:r>
+          </a:p>
+          <a:p>
+            <a:pPr>
+              <a:spcAft>
+                <a:spcPts val="600"/>
+              </a:spcAft>
+              <a:defRPr sz="1600">
+                <a:solidFill>
+                  <a:srgbClr val="333333"/>
+                </a:solidFill>
+              </a:defRPr>
+            </a:pPr>
+            <a:r>
+              <a:t>student.items()  # dict_items([...])</a:t>
+            </a:r>
+          </a:p>
+          <a:p>
+            <a:pPr>
+              <a:spcAft>
+                <a:spcPts val="600"/>
+              </a:spcAft>
+              <a:defRPr b="1" sz="2000">
+                <a:solidFill>
+                  <a:srgbClr val="333333"/>
+                </a:solidFill>
+              </a:defRPr>
+            </a:pPr>
+            <a:r>
+              <a:t>Iterating:</a:t>
+            </a:r>
+          </a:p>
+          <a:p>
+            <a:pPr>
+              <a:spcAft>
+                <a:spcPts val="600"/>
+              </a:spcAft>
+              <a:defRPr b="1" sz="2000">
+                <a:solidFill>
+                  <a:srgbClr val="333333"/>
+                </a:solidFill>
+              </a:defRPr>
+            </a:pPr>
+            <a:r>
+              <a:t>for key in student:</a:t>
+            </a:r>
+          </a:p>
+          <a:p>
+            <a:pPr>
+              <a:spcAft>
+                <a:spcPts val="600"/>
+              </a:spcAft>
+              <a:defRPr sz="1600">
+                <a:solidFill>
+                  <a:srgbClr val="333333"/>
+                </a:solidFill>
+              </a:defRPr>
+            </a:pPr>
+            <a:r>
+              <a:t>    print(key, student[key])</a:t>
+            </a:r>
+          </a:p>
+          <a:p>
+            <a:pPr>
+              <a:spcAft>
+                <a:spcPts val="600"/>
+              </a:spcAft>
+              <a:defRPr b="1" sz="2000">
+                <a:solidFill>
+                  <a:srgbClr val="333333"/>
+                </a:solidFill>
+              </a:defRPr>
+            </a:pPr>
+            <a:r>
+              <a:t>for key, value in student.items():</a:t>
+            </a:r>
+          </a:p>
+          <a:p>
+            <a:pPr>
+              <a:spcAft>
+                <a:spcPts val="600"/>
+              </a:spcAft>
+              <a:defRPr sz="1600">
+                <a:solidFill>
+                  <a:srgbClr val="333333"/>
+                </a:solidFill>
+              </a:defRPr>
+            </a:pPr>
+            <a:r>
+              <a:t>    print(f"{key}: {value}")</a:t>
+            </a:r>
+          </a:p>
+          <a:p>
+            <a:pPr>
+              <a:spcAft>
+                <a:spcPts val="600"/>
+              </a:spcAft>
+              <a:defRPr b="1" sz="2000">
+                <a:solidFill>
+                  <a:srgbClr val="333333"/>
+                </a:solidFill>
+              </a:defRPr>
+            </a:pPr>
+            <a:r>
+              <a:t>Other Methods:</a:t>
+            </a:r>
+          </a:p>
+          <a:p>
+            <a:pPr>
+              <a:spcAft>
+                <a:spcPts val="600"/>
+              </a:spcAft>
+              <a:defRPr sz="1600">
+                <a:solidFill>
+                  <a:srgbClr val="333333"/>
+                </a:solidFill>
+              </a:defRPr>
+            </a:pPr>
+            <a:r>
+              <a:t>student.get(key, default)</a:t>
+            </a:r>
+          </a:p>
+          <a:p>
+            <a:pPr>
+              <a:spcAft>
+                <a:spcPts val="600"/>
+              </a:spcAft>
+              <a:defRPr sz="1600">
+                <a:solidFill>
+                  <a:srgbClr val="333333"/>
+                </a:solidFill>
+              </a:defRPr>
+            </a:pPr>
+            <a:r>
+              <a:t>student.setdefault(key, default)</a:t>
+            </a:r>
+          </a:p>
+          <a:p>
+            <a:pPr>
+              <a:spcAft>
+                <a:spcPts val="600"/>
+              </a:spcAft>
+              <a:defRPr sz="1600">
+                <a:solidFill>
+                  <a:srgbClr val="333333"/>
+                </a:solidFill>
+              </a:defRPr>
+            </a:pPr>
+            <a:r>
+              <a:t>student.update(other_dict)</a:t>
+            </a:r>
+          </a:p>
+          <a:p>
+            <a:pPr>
+              <a:spcAft>
+                <a:spcPts val="600"/>
+              </a:spcAft>
+              <a:defRPr sz="1600">
+                <a:solidFill>
+                  <a:srgbClr val="333333"/>
+                </a:solidFill>
+              </a:defRPr>
+            </a:pPr>
+            <a:r>
+              <a:t>student.copy()  # Shallow copy</a:t>
             </a:r>
           </a:p>
         </p:txBody>
@@ -4118,7 +4363,7 @@
 </p:sld>
 </file>
 
-<file path=ppt/slides/slide3.xml><?xml version="1.0" encoding="utf-8"?>
+<file path=ppt/slides/slide5.xml><?xml version="1.0" encoding="utf-8"?>
 <p:sld xmlns:a="http://schemas.openxmlformats.org/drawingml/2006/main" xmlns:p="http://schemas.openxmlformats.org/presentationml/2006/main" xmlns:r="http://schemas.openxmlformats.org/officeDocument/2006/relationships">
   <p:cSld>
     <p:spTree>
@@ -4222,8 +4467,8 @@
         </p:nvSpPr>
         <p:spPr>
           <a:xfrm>
-            <a:off x="457200" y="365760"/>
-            <a:ext cx="10972800" cy="731520"/>
+            <a:off x="457200" y="320040"/>
+            <a:ext cx="10972800" cy="640080"/>
           </a:xfrm>
           <a:prstGeom prst="rect">
             <a:avLst/>
@@ -4237,71 +4482,28 @@
           <a:lstStyle/>
           <a:p>
             <a:pPr>
-              <a:defRPr sz="4000" b="1">
+              <a:defRPr sz="3600" b="1">
                 <a:solidFill>
                   <a:srgbClr val="003366"/>
                 </a:solidFill>
               </a:defRPr>
             </a:pPr>
             <a:r>
-              <a:t>Why Use Dictionaries? 🤔</a:t>
-            </a:r>
-          </a:p>
-        </p:txBody>
-      </p:sp>
-      <p:sp>
-        <p:nvSpPr>
-          <p:cNvPr id="5" name="Rectangle 4"/>
-          <p:cNvSpPr/>
+              <a:t>Dictionary Comprehensions</a:t>
+            </a:r>
+          </a:p>
+        </p:txBody>
+      </p:sp>
+      <p:sp>
+        <p:nvSpPr>
+          <p:cNvPr id="5" name="TextBox 4"/>
+          <p:cNvSpPr txBox="1"/>
           <p:nvPr/>
         </p:nvSpPr>
         <p:spPr>
           <a:xfrm>
-            <a:off x="457200" y="1005840"/>
-            <a:ext cx="1828800" cy="45720"/>
-          </a:xfrm>
-          <a:prstGeom prst="rect">
-            <a:avLst/>
-          </a:prstGeom>
-          <a:solidFill>
-            <a:srgbClr val="0066CC"/>
-          </a:solidFill>
-          <a:ln>
-            <a:noFill/>
-          </a:ln>
-        </p:spPr>
-        <p:style>
-          <a:lnRef idx="1">
-            <a:schemeClr val="accent1"/>
-          </a:lnRef>
-          <a:fillRef idx="3">
-            <a:schemeClr val="accent1"/>
-          </a:fillRef>
-          <a:effectRef idx="2">
-            <a:schemeClr val="accent1"/>
-          </a:effectRef>
-          <a:fontRef idx="minor">
-            <a:schemeClr val="lt1"/>
-          </a:fontRef>
-        </p:style>
-        <p:txBody>
-          <a:bodyPr rtlCol="0" anchor="ctr"/>
-          <a:lstStyle/>
-          <a:p>
-            <a:pPr algn="ctr"/>
-          </a:p>
-        </p:txBody>
-      </p:sp>
-      <p:sp>
-        <p:nvSpPr>
-          <p:cNvPr id="6" name="TextBox 5"/>
-          <p:cNvSpPr txBox="1"/>
-          <p:nvPr/>
-        </p:nvSpPr>
-        <p:spPr>
-          <a:xfrm>
-            <a:off x="640080" y="1371600"/>
-            <a:ext cx="10789920" cy="4572000"/>
+            <a:off x="640080" y="1188720"/>
+            <a:ext cx="10789920" cy="5303520"/>
           </a:xfrm>
           <a:prstGeom prst="rect">
             <a:avLst/>
@@ -4316,136 +4518,181 @@
           <a:p>
             <a:pPr>
               <a:spcAft>
-                <a:spcPts val="800"/>
-              </a:spcAft>
-              <a:defRPr sz="2000" b="1">
-                <a:solidFill>
-                  <a:srgbClr val="333333"/>
-                </a:solidFill>
-              </a:defRPr>
-            </a:pPr>
-            <a:r>
-              <a:t>Connect Related Data</a:t>
-            </a:r>
-          </a:p>
-          <a:p>
-            <a:pPr>
-              <a:spcAft>
-                <a:spcPts val="800"/>
-              </a:spcAft>
-              <a:defRPr sz="2000" b="1">
-                <a:solidFill>
-                  <a:srgbClr val="333333"/>
-                </a:solidFill>
-              </a:defRPr>
-            </a:pPr>
-            <a:r>
-              <a:t>Store attributes that belong together</a:t>
-            </a:r>
-          </a:p>
-          <a:p>
-            <a:pPr>
-              <a:spcAft>
-                <a:spcPts val="800"/>
-              </a:spcAft>
-              <a:defRPr sz="2000" b="1">
-                <a:solidFill>
-                  <a:srgbClr val="333333"/>
-                </a:solidFill>
-              </a:defRPr>
-            </a:pPr>
-            <a:r>
-              <a:t>Fast Lookup</a:t>
-            </a:r>
-          </a:p>
-          <a:p>
-            <a:pPr>
-              <a:spcAft>
-                <a:spcPts val="800"/>
-              </a:spcAft>
-              <a:defRPr sz="2000" b="1">
-                <a:solidFill>
-                  <a:srgbClr val="333333"/>
-                </a:solidFill>
-              </a:defRPr>
-            </a:pPr>
-            <a:r>
-              <a:t>Find values instantly using keys</a:t>
-            </a:r>
-          </a:p>
-          <a:p>
-            <a:pPr>
-              <a:spcAft>
-                <a:spcPts val="800"/>
-              </a:spcAft>
-              <a:defRPr sz="2000" b="1">
-                <a:solidFill>
-                  <a:srgbClr val="333333"/>
-                </a:solidFill>
-              </a:defRPr>
-            </a:pPr>
-            <a:r>
-              <a:t>Meaningful Names</a:t>
-            </a:r>
-          </a:p>
-          <a:p>
-            <a:pPr>
-              <a:spcAft>
-                <a:spcPts val="800"/>
-              </a:spcAft>
-              <a:defRPr sz="2000" b="1">
-                <a:solidFill>
-                  <a:srgbClr val="333333"/>
-                </a:solidFill>
-              </a:defRPr>
-            </a:pPr>
-            <a:r>
-              <a:t>Use descriptive keys instead of indices</a:t>
-            </a:r>
-          </a:p>
-          <a:p>
-            <a:pPr>
-              <a:spcAft>
-                <a:spcPts val="800"/>
-              </a:spcAft>
-              <a:defRPr sz="2000" b="1">
-                <a:solidFill>
-                  <a:srgbClr val="333333"/>
-                </a:solidFill>
-              </a:defRPr>
-            </a:pPr>
-            <a:r>
-              <a:t>Flexible</a:t>
-            </a:r>
-          </a:p>
-          <a:p>
-            <a:pPr>
-              <a:spcAft>
-                <a:spcPts val="800"/>
-              </a:spcAft>
-              <a:defRPr sz="2000" b="1">
-                <a:solidFill>
-                  <a:srgbClr val="333333"/>
-                </a:solidFill>
-              </a:defRPr>
-            </a:pPr>
-            <a:r>
-              <a:t>Add, modify, or remove data easily</a:t>
-            </a:r>
-          </a:p>
-          <a:p>
-            <a:pPr>
-              <a:spcAft>
-                <a:spcPts val="800"/>
-              </a:spcAft>
-              <a:defRPr sz="2000" b="1">
-                <a:solidFill>
-                  <a:srgbClr val="333333"/>
-                </a:solidFill>
-              </a:defRPr>
-            </a:pPr>
-            <a:r>
-              <a:t>Real-world examples:Contact information, product details, settings, user profiles</a:t>
+                <a:spcPts val="600"/>
+              </a:spcAft>
+              <a:defRPr b="1" sz="2000">
+                <a:solidFill>
+                  <a:srgbClr val="333333"/>
+                </a:solidFill>
+              </a:defRPr>
+            </a:pPr>
+            <a:r>
+              <a:t>Creating from Lists:</a:t>
+            </a:r>
+          </a:p>
+          <a:p>
+            <a:pPr>
+              <a:spcAft>
+                <a:spcPts val="600"/>
+              </a:spcAft>
+              <a:defRPr sz="1600">
+                <a:solidFill>
+                  <a:srgbClr val="333333"/>
+                </a:solidFill>
+              </a:defRPr>
+            </a:pPr>
+            <a:r>
+              <a:t>keys = ["a", "b", "c"]</a:t>
+            </a:r>
+          </a:p>
+          <a:p>
+            <a:pPr>
+              <a:spcAft>
+                <a:spcPts val="600"/>
+              </a:spcAft>
+              <a:defRPr sz="1600">
+                <a:solidFill>
+                  <a:srgbClr val="333333"/>
+                </a:solidFill>
+              </a:defRPr>
+            </a:pPr>
+            <a:r>
+              <a:t>values = [1, 2, 3]</a:t>
+            </a:r>
+          </a:p>
+          <a:p>
+            <a:pPr>
+              <a:spcAft>
+                <a:spcPts val="600"/>
+              </a:spcAft>
+              <a:defRPr b="1" sz="2000">
+                <a:solidFill>
+                  <a:srgbClr val="333333"/>
+                </a:solidFill>
+              </a:defRPr>
+            </a:pPr>
+            <a:r>
+              <a:t>d = {k: v for k, v in zip(keys, values)}</a:t>
+            </a:r>
+          </a:p>
+          <a:p>
+            <a:pPr>
+              <a:spcAft>
+                <a:spcPts val="600"/>
+              </a:spcAft>
+              <a:defRPr b="1" sz="2000">
+                <a:solidFill>
+                  <a:srgbClr val="333333"/>
+                </a:solidFill>
+              </a:defRPr>
+            </a:pPr>
+            <a:r>
+              <a:t>Transforming:</a:t>
+            </a:r>
+          </a:p>
+          <a:p>
+            <a:pPr>
+              <a:spcAft>
+                <a:spcPts val="600"/>
+              </a:spcAft>
+              <a:defRPr b="1" sz="2000">
+                <a:solidFill>
+                  <a:srgbClr val="333333"/>
+                </a:solidFill>
+              </a:defRPr>
+            </a:pPr>
+            <a:r>
+              <a:t>squares = {x: x**2 for x in range(5)}</a:t>
+            </a:r>
+          </a:p>
+          <a:p>
+            <a:pPr>
+              <a:spcAft>
+                <a:spcPts val="600"/>
+              </a:spcAft>
+              <a:defRPr b="1" sz="2000">
+                <a:solidFill>
+                  <a:srgbClr val="333333"/>
+                </a:solidFill>
+              </a:defRPr>
+            </a:pPr>
+            <a:r>
+              <a:t># {0: 0, 1: 1, 2: 4, 3: 9, 4: 16}</a:t>
+            </a:r>
+          </a:p>
+          <a:p>
+            <a:pPr>
+              <a:spcAft>
+                <a:spcPts val="600"/>
+              </a:spcAft>
+              <a:defRPr b="1" sz="2000">
+                <a:solidFill>
+                  <a:srgbClr val="333333"/>
+                </a:solidFill>
+              </a:defRPr>
+            </a:pPr>
+            <a:r>
+              <a:t>Filtering:</a:t>
+            </a:r>
+          </a:p>
+          <a:p>
+            <a:pPr>
+              <a:spcAft>
+                <a:spcPts val="600"/>
+              </a:spcAft>
+              <a:defRPr b="1" sz="2000">
+                <a:solidFill>
+                  <a:srgbClr val="333333"/>
+                </a:solidFill>
+              </a:defRPr>
+            </a:pPr>
+            <a:r>
+              <a:t>scores = {"Alice": 90, "Bob": 75, "Charlie": 85}</a:t>
+            </a:r>
+          </a:p>
+          <a:p>
+            <a:pPr>
+              <a:spcAft>
+                <a:spcPts val="600"/>
+              </a:spcAft>
+              <a:defRPr b="1" sz="2000">
+                <a:solidFill>
+                  <a:srgbClr val="333333"/>
+                </a:solidFill>
+              </a:defRPr>
+            </a:pPr>
+            <a:r>
+              <a:t>high_scores = {k: v for k, v in scores.items() if v &gt;= 80}</a:t>
+            </a:r>
+          </a:p>
+          <a:p>
+            <a:pPr>
+              <a:spcAft>
+                <a:spcPts val="600"/>
+              </a:spcAft>
+              <a:defRPr b="1" sz="2000">
+                <a:solidFill>
+                  <a:srgbClr val="333333"/>
+                </a:solidFill>
+              </a:defRPr>
+            </a:pPr>
+            <a:r>
+              <a:t>Case Transform:</a:t>
+            </a:r>
+          </a:p>
+          <a:p>
+            <a:pPr>
+              <a:spcAft>
+                <a:spcPts val="600"/>
+              </a:spcAft>
+              <a:defRPr b="1" sz="2000">
+                <a:solidFill>
+                  <a:srgbClr val="333333"/>
+                </a:solidFill>
+              </a:defRPr>
+            </a:pPr>
+            <a:r>
+              <a:t>upper = {k.upper(): v for k, v in data.items()}</a:t>
             </a:r>
           </a:p>
         </p:txBody>
@@ -4458,7 +4705,7 @@
 </p:sld>
 </file>
 
-<file path=ppt/slides/slide4.xml><?xml version="1.0" encoding="utf-8"?>
+<file path=ppt/slides/slide6.xml><?xml version="1.0" encoding="utf-8"?>
 <p:sld xmlns:a="http://schemas.openxmlformats.org/drawingml/2006/main" xmlns:p="http://schemas.openxmlformats.org/presentationml/2006/main" xmlns:r="http://schemas.openxmlformats.org/officeDocument/2006/relationships">
   <p:cSld>
     <p:spTree>
@@ -4562,8 +4809,8 @@
         </p:nvSpPr>
         <p:spPr>
           <a:xfrm>
-            <a:off x="457200" y="365760"/>
-            <a:ext cx="10972800" cy="731520"/>
+            <a:off x="457200" y="320040"/>
+            <a:ext cx="10972800" cy="640080"/>
           </a:xfrm>
           <a:prstGeom prst="rect">
             <a:avLst/>
@@ -4577,71 +4824,28 @@
           <a:lstStyle/>
           <a:p>
             <a:pPr>
-              <a:defRPr sz="4000" b="1">
+              <a:defRPr sz="3600" b="1">
                 <a:solidFill>
                   <a:srgbClr val="003366"/>
                 </a:solidFill>
               </a:defRPr>
             </a:pPr>
             <a:r>
-              <a:t>Creating Dictionaries ✨</a:t>
-            </a:r>
-          </a:p>
-        </p:txBody>
-      </p:sp>
-      <p:sp>
-        <p:nvSpPr>
-          <p:cNvPr id="5" name="Rectangle 4"/>
-          <p:cNvSpPr/>
+              <a:t>Nested Dictionaries</a:t>
+            </a:r>
+          </a:p>
+        </p:txBody>
+      </p:sp>
+      <p:sp>
+        <p:nvSpPr>
+          <p:cNvPr id="5" name="TextBox 4"/>
+          <p:cNvSpPr txBox="1"/>
           <p:nvPr/>
         </p:nvSpPr>
         <p:spPr>
           <a:xfrm>
-            <a:off x="457200" y="1005840"/>
-            <a:ext cx="1828800" cy="45720"/>
-          </a:xfrm>
-          <a:prstGeom prst="rect">
-            <a:avLst/>
-          </a:prstGeom>
-          <a:solidFill>
-            <a:srgbClr val="0066CC"/>
-          </a:solidFill>
-          <a:ln>
-            <a:noFill/>
-          </a:ln>
-        </p:spPr>
-        <p:style>
-          <a:lnRef idx="1">
-            <a:schemeClr val="accent1"/>
-          </a:lnRef>
-          <a:fillRef idx="3">
-            <a:schemeClr val="accent1"/>
-          </a:fillRef>
-          <a:effectRef idx="2">
-            <a:schemeClr val="accent1"/>
-          </a:effectRef>
-          <a:fontRef idx="minor">
-            <a:schemeClr val="lt1"/>
-          </a:fontRef>
-        </p:style>
-        <p:txBody>
-          <a:bodyPr rtlCol="0" anchor="ctr"/>
-          <a:lstStyle/>
-          <a:p>
-            <a:pPr algn="ctr"/>
-          </a:p>
-        </p:txBody>
-      </p:sp>
-      <p:sp>
-        <p:nvSpPr>
-          <p:cNvPr id="6" name="TextBox 5"/>
-          <p:cNvSpPr txBox="1"/>
-          <p:nvPr/>
-        </p:nvSpPr>
-        <p:spPr>
-          <a:xfrm>
-            <a:off x="640080" y="1371600"/>
-            <a:ext cx="10789920" cy="4572000"/>
+            <a:off x="640080" y="1188720"/>
+            <a:ext cx="10789920" cy="5303520"/>
           </a:xfrm>
           <a:prstGeom prst="rect">
             <a:avLst/>
@@ -4656,46 +4860,256 @@
           <a:p>
             <a:pPr>
               <a:spcAft>
-                <a:spcPts val="800"/>
-              </a:spcAft>
-              <a:defRPr sz="2000" b="1">
-                <a:solidFill>
-                  <a:srgbClr val="333333"/>
-                </a:solidFill>
-              </a:defRPr>
-            </a:pPr>
-            <a:r>
-              <a:t>Empty Dictionary</a:t>
-            </a:r>
-          </a:p>
-          <a:p>
-            <a:pPr>
-              <a:spcAft>
-                <a:spcPts val="800"/>
-              </a:spcAft>
-              <a:defRPr sz="2000" b="1">
-                <a:solidFill>
-                  <a:srgbClr val="333333"/>
-                </a:solidFill>
-              </a:defRPr>
-            </a:pPr>
-            <a:r>
-              <a:t>Dictionary with Data</a:t>
-            </a:r>
-          </a:p>
-          <a:p>
-            <a:pPr>
-              <a:spcAft>
-                <a:spcPts val="800"/>
-              </a:spcAft>
-              <a:defRPr sz="2000" b="1">
-                <a:solidFill>
-                  <a:srgbClr val="333333"/>
-                </a:solidFill>
-              </a:defRPr>
-            </a:pPr>
-            <a:r>
-              <a:t>Different Value Types</a:t>
+                <a:spcPts val="600"/>
+              </a:spcAft>
+              <a:defRPr b="1" sz="2000">
+                <a:solidFill>
+                  <a:srgbClr val="333333"/>
+                </a:solidFill>
+              </a:defRPr>
+            </a:pPr>
+            <a:r>
+              <a:t>Structure:</a:t>
+            </a:r>
+          </a:p>
+          <a:p>
+            <a:pPr>
+              <a:spcAft>
+                <a:spcPts val="600"/>
+              </a:spcAft>
+              <a:defRPr sz="1600">
+                <a:solidFill>
+                  <a:srgbClr val="333333"/>
+                </a:solidFill>
+              </a:defRPr>
+            </a:pPr>
+            <a:r>
+              <a:t>students = {</a:t>
+            </a:r>
+          </a:p>
+          <a:p>
+            <a:pPr>
+              <a:spcAft>
+                <a:spcPts val="600"/>
+              </a:spcAft>
+              <a:defRPr sz="1600">
+                <a:solidFill>
+                  <a:srgbClr val="333333"/>
+                </a:solidFill>
+              </a:defRPr>
+            </a:pPr>
+            <a:r>
+              <a:t>    "student1": {"name": "Alice", "grade": "A"},</a:t>
+            </a:r>
+          </a:p>
+          <a:p>
+            <a:pPr>
+              <a:spcAft>
+                <a:spcPts val="600"/>
+              </a:spcAft>
+              <a:defRPr sz="1600">
+                <a:solidFill>
+                  <a:srgbClr val="333333"/>
+                </a:solidFill>
+              </a:defRPr>
+            </a:pPr>
+            <a:r>
+              <a:t>    "student2": {"name": "Bob", "grade": "B"}</a:t>
+            </a:r>
+          </a:p>
+          <a:p>
+            <a:pPr>
+              <a:spcAft>
+                <a:spcPts val="600"/>
+              </a:spcAft>
+              <a:defRPr sz="1600">
+                <a:solidFill>
+                  <a:srgbClr val="333333"/>
+                </a:solidFill>
+              </a:defRPr>
+            </a:pPr>
+            <a:r>
+              <a:t>}</a:t>
+            </a:r>
+          </a:p>
+          <a:p>
+            <a:pPr>
+              <a:spcAft>
+                <a:spcPts val="600"/>
+              </a:spcAft>
+              <a:defRPr b="1" sz="2000">
+                <a:solidFill>
+                  <a:srgbClr val="333333"/>
+                </a:solidFill>
+              </a:defRPr>
+            </a:pPr>
+            <a:r>
+              <a:t>Accessing:</a:t>
+            </a:r>
+          </a:p>
+          <a:p>
+            <a:pPr>
+              <a:spcAft>
+                <a:spcPts val="600"/>
+              </a:spcAft>
+              <a:defRPr sz="1600">
+                <a:solidFill>
+                  <a:srgbClr val="333333"/>
+                </a:solidFill>
+              </a:defRPr>
+            </a:pPr>
+            <a:r>
+              <a:t>students["student1"]["name"]  # "Alice"</a:t>
+            </a:r>
+          </a:p>
+          <a:p>
+            <a:pPr>
+              <a:spcAft>
+                <a:spcPts val="600"/>
+              </a:spcAft>
+              <a:defRPr b="1" sz="2000">
+                <a:solidFill>
+                  <a:srgbClr val="333333"/>
+                </a:solidFill>
+              </a:defRPr>
+            </a:pPr>
+            <a:r>
+              <a:t>Iterating:</a:t>
+            </a:r>
+          </a:p>
+          <a:p>
+            <a:pPr>
+              <a:spcAft>
+                <a:spcPts val="600"/>
+              </a:spcAft>
+              <a:defRPr b="1" sz="2000">
+                <a:solidFill>
+                  <a:srgbClr val="333333"/>
+                </a:solidFill>
+              </a:defRPr>
+            </a:pPr>
+            <a:r>
+              <a:t>for student_id, info in students.items():</a:t>
+            </a:r>
+          </a:p>
+          <a:p>
+            <a:pPr>
+              <a:spcAft>
+                <a:spcPts val="600"/>
+              </a:spcAft>
+              <a:defRPr sz="1600">
+                <a:solidFill>
+                  <a:srgbClr val="333333"/>
+                </a:solidFill>
+              </a:defRPr>
+            </a:pPr>
+            <a:r>
+              <a:t>    print(f"{student_id}:")</a:t>
+            </a:r>
+          </a:p>
+          <a:p>
+            <a:pPr>
+              <a:spcAft>
+                <a:spcPts val="600"/>
+              </a:spcAft>
+              <a:defRPr sz="1600">
+                <a:solidFill>
+                  <a:srgbClr val="333333"/>
+                </a:solidFill>
+              </a:defRPr>
+            </a:pPr>
+            <a:r>
+              <a:t>    for key, value in info.items():</a:t>
+            </a:r>
+          </a:p>
+          <a:p>
+            <a:pPr>
+              <a:spcAft>
+                <a:spcPts val="600"/>
+              </a:spcAft>
+              <a:defRPr sz="1600">
+                <a:solidFill>
+                  <a:srgbClr val="333333"/>
+                </a:solidFill>
+              </a:defRPr>
+            </a:pPr>
+            <a:r>
+              <a:t>        print(f"  {key}: {value}")</a:t>
+            </a:r>
+          </a:p>
+          <a:p>
+            <a:pPr>
+              <a:spcAft>
+                <a:spcPts val="600"/>
+              </a:spcAft>
+              <a:defRPr b="1" sz="2000">
+                <a:solidFill>
+                  <a:srgbClr val="333333"/>
+                </a:solidFill>
+              </a:defRPr>
+            </a:pPr>
+            <a:r>
+              <a:t>Use Cases:</a:t>
+            </a:r>
+          </a:p>
+          <a:p>
+            <a:pPr lvl="1">
+              <a:spcAft>
+                <a:spcPts val="400"/>
+              </a:spcAft>
+              <a:defRPr sz="1600">
+                <a:solidFill>
+                  <a:srgbClr val="333333"/>
+                </a:solidFill>
+              </a:defRPr>
+            </a:pPr>
+            <a:r>
+              <a:t>• Database-like structures</a:t>
+            </a:r>
+          </a:p>
+          <a:p>
+            <a:pPr lvl="1">
+              <a:spcAft>
+                <a:spcPts val="400"/>
+              </a:spcAft>
+              <a:defRPr sz="1600">
+                <a:solidFill>
+                  <a:srgbClr val="333333"/>
+                </a:solidFill>
+              </a:defRPr>
+            </a:pPr>
+            <a:r>
+              <a:t>• Configuration files</a:t>
+            </a:r>
+          </a:p>
+          <a:p>
+            <a:pPr lvl="1">
+              <a:spcAft>
+                <a:spcPts val="400"/>
+              </a:spcAft>
+              <a:defRPr sz="1600">
+                <a:solidFill>
+                  <a:srgbClr val="333333"/>
+                </a:solidFill>
+              </a:defRPr>
+            </a:pPr>
+            <a:r>
+              <a:t>• API responses</a:t>
+            </a:r>
+          </a:p>
+          <a:p>
+            <a:pPr lvl="1">
+              <a:spcAft>
+                <a:spcPts val="400"/>
+              </a:spcAft>
+              <a:defRPr sz="1600">
+                <a:solidFill>
+                  <a:srgbClr val="333333"/>
+                </a:solidFill>
+              </a:defRPr>
+            </a:pPr>
+            <a:r>
+              <a:t>• Complex data models</a:t>
             </a:r>
           </a:p>
         </p:txBody>
@@ -4708,7 +5122,7 @@
 </p:sld>
 </file>
 
-<file path=ppt/slides/slide5.xml><?xml version="1.0" encoding="utf-8"?>
+<file path=ppt/slides/slide7.xml><?xml version="1.0" encoding="utf-8"?>
 <p:sld xmlns:a="http://schemas.openxmlformats.org/drawingml/2006/main" xmlns:p="http://schemas.openxmlformats.org/presentationml/2006/main" xmlns:r="http://schemas.openxmlformats.org/officeDocument/2006/relationships">
   <p:cSld>
     <p:spTree>
@@ -4812,8 +5226,8 @@
         </p:nvSpPr>
         <p:spPr>
           <a:xfrm>
-            <a:off x="457200" y="365760"/>
-            <a:ext cx="10972800" cy="731520"/>
+            <a:off x="457200" y="320040"/>
+            <a:ext cx="10972800" cy="640080"/>
           </a:xfrm>
           <a:prstGeom prst="rect">
             <a:avLst/>
@@ -4827,71 +5241,28 @@
           <a:lstStyle/>
           <a:p>
             <a:pPr>
-              <a:defRPr sz="4000" b="1">
+              <a:defRPr sz="3600" b="1">
                 <a:solidFill>
                   <a:srgbClr val="003366"/>
                 </a:solidFill>
               </a:defRPr>
             </a:pPr>
             <a:r>
-              <a:t>Accessing Values 🔍</a:t>
-            </a:r>
-          </a:p>
-        </p:txBody>
-      </p:sp>
-      <p:sp>
-        <p:nvSpPr>
-          <p:cNvPr id="5" name="Rectangle 4"/>
-          <p:cNvSpPr/>
+              <a:t>Common Patterns</a:t>
+            </a:r>
+          </a:p>
+        </p:txBody>
+      </p:sp>
+      <p:sp>
+        <p:nvSpPr>
+          <p:cNvPr id="5" name="TextBox 4"/>
+          <p:cNvSpPr txBox="1"/>
           <p:nvPr/>
         </p:nvSpPr>
         <p:spPr>
           <a:xfrm>
-            <a:off x="457200" y="1005840"/>
-            <a:ext cx="1828800" cy="45720"/>
-          </a:xfrm>
-          <a:prstGeom prst="rect">
-            <a:avLst/>
-          </a:prstGeom>
-          <a:solidFill>
-            <a:srgbClr val="0066CC"/>
-          </a:solidFill>
-          <a:ln>
-            <a:noFill/>
-          </a:ln>
-        </p:spPr>
-        <p:style>
-          <a:lnRef idx="1">
-            <a:schemeClr val="accent1"/>
-          </a:lnRef>
-          <a:fillRef idx="3">
-            <a:schemeClr val="accent1"/>
-          </a:fillRef>
-          <a:effectRef idx="2">
-            <a:schemeClr val="accent1"/>
-          </a:effectRef>
-          <a:fontRef idx="minor">
-            <a:schemeClr val="lt1"/>
-          </a:fontRef>
-        </p:style>
-        <p:txBody>
-          <a:bodyPr rtlCol="0" anchor="ctr"/>
-          <a:lstStyle/>
-          <a:p>
-            <a:pPr algn="ctr"/>
-          </a:p>
-        </p:txBody>
-      </p:sp>
-      <p:sp>
-        <p:nvSpPr>
-          <p:cNvPr id="6" name="TextBox 5"/>
-          <p:cNvSpPr txBox="1"/>
-          <p:nvPr/>
-        </p:nvSpPr>
-        <p:spPr>
-          <a:xfrm>
-            <a:off x="640080" y="1371600"/>
-            <a:ext cx="10789920" cy="4572000"/>
+            <a:off x="640080" y="1188720"/>
+            <a:ext cx="10789920" cy="5303520"/>
           </a:xfrm>
           <a:prstGeom prst="rect">
             <a:avLst/>
@@ -4906,61 +5277,226 @@
           <a:p>
             <a:pPr>
               <a:spcAft>
-                <a:spcPts val="800"/>
-              </a:spcAft>
-              <a:defRPr sz="2000" b="1">
-                <a:solidFill>
-                  <a:srgbClr val="333333"/>
-                </a:solidFill>
-              </a:defRPr>
-            </a:pPr>
-            <a:r>
-              <a:t>Use keys (not indices) to access values</a:t>
-            </a:r>
-          </a:p>
-          <a:p>
-            <a:pPr>
-              <a:spcAft>
-                <a:spcPts val="800"/>
-              </a:spcAft>
-              <a:defRPr sz="2000" b="1">
-                <a:solidFill>
-                  <a:srgbClr val="333333"/>
-                </a:solidFill>
-              </a:defRPr>
-            </a:pPr>
-            <a:r>
-              <a:t>Square Bracket Notation</a:t>
-            </a:r>
-          </a:p>
-          <a:p>
-            <a:pPr>
-              <a:spcAft>
-                <a:spcPts val="800"/>
-              </a:spcAft>
-              <a:defRPr sz="2000" b="1">
-                <a:solidFill>
-                  <a:srgbClr val="333333"/>
-                </a:solidFill>
-              </a:defRPr>
-            </a:pPr>
-            <a:r>
-              <a:t>get() Method (Safer)</a:t>
-            </a:r>
-          </a:p>
-          <a:p>
-            <a:pPr>
-              <a:spcAft>
-                <a:spcPts val="800"/>
-              </a:spcAft>
-              <a:defRPr sz="2000" b="1">
-                <a:solidFill>
-                  <a:srgbClr val="333333"/>
-                </a:solidFill>
-              </a:defRPr>
-            </a:pPr>
-            <a:r>
-              <a:t>💡 Tip:Use get() to avoid errors when key might not exist</a:t>
+                <a:spcPts val="600"/>
+              </a:spcAft>
+              <a:defRPr b="1" sz="2000">
+                <a:solidFill>
+                  <a:srgbClr val="333333"/>
+                </a:solidFill>
+              </a:defRPr>
+            </a:pPr>
+            <a:r>
+              <a:t>Counting:</a:t>
+            </a:r>
+          </a:p>
+          <a:p>
+            <a:pPr>
+              <a:spcAft>
+                <a:spcPts val="600"/>
+              </a:spcAft>
+              <a:defRPr sz="1600">
+                <a:solidFill>
+                  <a:srgbClr val="333333"/>
+                </a:solidFill>
+              </a:defRPr>
+            </a:pPr>
+            <a:r>
+              <a:t>word_count = {}</a:t>
+            </a:r>
+          </a:p>
+          <a:p>
+            <a:pPr>
+              <a:spcAft>
+                <a:spcPts val="600"/>
+              </a:spcAft>
+              <a:defRPr b="1" sz="2000">
+                <a:solidFill>
+                  <a:srgbClr val="333333"/>
+                </a:solidFill>
+              </a:defRPr>
+            </a:pPr>
+            <a:r>
+              <a:t>for word in words:</a:t>
+            </a:r>
+          </a:p>
+          <a:p>
+            <a:pPr>
+              <a:spcAft>
+                <a:spcPts val="600"/>
+              </a:spcAft>
+              <a:defRPr sz="1600">
+                <a:solidFill>
+                  <a:srgbClr val="333333"/>
+                </a:solidFill>
+              </a:defRPr>
+            </a:pPr>
+            <a:r>
+              <a:t>    word_count[word] = word_count.get(word, 0) + 1</a:t>
+            </a:r>
+          </a:p>
+          <a:p>
+            <a:pPr>
+              <a:spcAft>
+                <a:spcPts val="600"/>
+              </a:spcAft>
+              <a:defRPr b="1" sz="2000">
+                <a:solidFill>
+                  <a:srgbClr val="333333"/>
+                </a:solidFill>
+              </a:defRPr>
+            </a:pPr>
+            <a:r>
+              <a:t>Grouping:</a:t>
+            </a:r>
+          </a:p>
+          <a:p>
+            <a:pPr>
+              <a:spcAft>
+                <a:spcPts val="600"/>
+              </a:spcAft>
+              <a:defRPr sz="1600">
+                <a:solidFill>
+                  <a:srgbClr val="333333"/>
+                </a:solidFill>
+              </a:defRPr>
+            </a:pPr>
+            <a:r>
+              <a:t>by_grade = {}</a:t>
+            </a:r>
+          </a:p>
+          <a:p>
+            <a:pPr>
+              <a:spcAft>
+                <a:spcPts val="600"/>
+              </a:spcAft>
+              <a:defRPr b="1" sz="2000">
+                <a:solidFill>
+                  <a:srgbClr val="333333"/>
+                </a:solidFill>
+              </a:defRPr>
+            </a:pPr>
+            <a:r>
+              <a:t>for student in students:</a:t>
+            </a:r>
+          </a:p>
+          <a:p>
+            <a:pPr>
+              <a:spcAft>
+                <a:spcPts val="600"/>
+              </a:spcAft>
+              <a:defRPr sz="1600">
+                <a:solidFill>
+                  <a:srgbClr val="333333"/>
+                </a:solidFill>
+              </a:defRPr>
+            </a:pPr>
+            <a:r>
+              <a:t>    grade = student["grade"]</a:t>
+            </a:r>
+          </a:p>
+          <a:p>
+            <a:pPr>
+              <a:spcAft>
+                <a:spcPts val="600"/>
+              </a:spcAft>
+              <a:defRPr sz="1600">
+                <a:solidFill>
+                  <a:srgbClr val="333333"/>
+                </a:solidFill>
+              </a:defRPr>
+            </a:pPr>
+            <a:r>
+              <a:t>    if grade not in by_grade:</a:t>
+            </a:r>
+          </a:p>
+          <a:p>
+            <a:pPr>
+              <a:spcAft>
+                <a:spcPts val="600"/>
+              </a:spcAft>
+              <a:defRPr sz="1600">
+                <a:solidFill>
+                  <a:srgbClr val="333333"/>
+                </a:solidFill>
+              </a:defRPr>
+            </a:pPr>
+            <a:r>
+              <a:t>        by_grade[grade] = []</a:t>
+            </a:r>
+          </a:p>
+          <a:p>
+            <a:pPr>
+              <a:spcAft>
+                <a:spcPts val="600"/>
+              </a:spcAft>
+              <a:defRPr sz="1600">
+                <a:solidFill>
+                  <a:srgbClr val="333333"/>
+                </a:solidFill>
+              </a:defRPr>
+            </a:pPr>
+            <a:r>
+              <a:t>    by_grade[grade].append(student)</a:t>
+            </a:r>
+          </a:p>
+          <a:p>
+            <a:pPr>
+              <a:spcAft>
+                <a:spcPts val="600"/>
+              </a:spcAft>
+              <a:defRPr b="1" sz="2000">
+                <a:solidFill>
+                  <a:srgbClr val="333333"/>
+                </a:solidFill>
+              </a:defRPr>
+            </a:pPr>
+            <a:r>
+              <a:t>Merging:</a:t>
+            </a:r>
+          </a:p>
+          <a:p>
+            <a:pPr>
+              <a:spcAft>
+                <a:spcPts val="600"/>
+              </a:spcAft>
+              <a:defRPr sz="1600">
+                <a:solidFill>
+                  <a:srgbClr val="333333"/>
+                </a:solidFill>
+              </a:defRPr>
+            </a:pPr>
+            <a:r>
+              <a:t>dict1.update(dict2)</a:t>
+            </a:r>
+          </a:p>
+          <a:p>
+            <a:pPr>
+              <a:spcAft>
+                <a:spcPts val="600"/>
+              </a:spcAft>
+              <a:defRPr sz="1600">
+                <a:solidFill>
+                  <a:srgbClr val="333333"/>
+                </a:solidFill>
+              </a:defRPr>
+            </a:pPr>
+            <a:r>
+              <a:t>merged = {**dict1, **dict2}  # Python 3.5+</a:t>
+            </a:r>
+          </a:p>
+          <a:p>
+            <a:pPr>
+              <a:spcAft>
+                <a:spcPts val="600"/>
+              </a:spcAft>
+              <a:defRPr sz="1600">
+                <a:solidFill>
+                  <a:srgbClr val="333333"/>
+                </a:solidFill>
+              </a:defRPr>
+            </a:pPr>
+            <a:r>
+              <a:t>merged = dict1 | dict2  # Python 3.9+</a:t>
             </a:r>
           </a:p>
         </p:txBody>
@@ -4973,7 +5509,7 @@
 </p:sld>
 </file>
 
-<file path=ppt/slides/slide6.xml><?xml version="1.0" encoding="utf-8"?>
+<file path=ppt/slides/slide8.xml><?xml version="1.0" encoding="utf-8"?>
 <p:sld xmlns:a="http://schemas.openxmlformats.org/drawingml/2006/main" xmlns:p="http://schemas.openxmlformats.org/presentationml/2006/main" xmlns:r="http://schemas.openxmlformats.org/officeDocument/2006/relationships">
   <p:cSld>
     <p:spTree>
@@ -5077,8 +5613,8 @@
         </p:nvSpPr>
         <p:spPr>
           <a:xfrm>
-            <a:off x="457200" y="365760"/>
-            <a:ext cx="10972800" cy="731520"/>
+            <a:off x="457200" y="320040"/>
+            <a:ext cx="10972800" cy="640080"/>
           </a:xfrm>
           <a:prstGeom prst="rect">
             <a:avLst/>
@@ -5092,71 +5628,28 @@
           <a:lstStyle/>
           <a:p>
             <a:pPr>
-              <a:defRPr sz="4000" b="1">
+              <a:defRPr sz="3600" b="1">
                 <a:solidFill>
                   <a:srgbClr val="003366"/>
                 </a:solidFill>
               </a:defRPr>
             </a:pPr>
             <a:r>
-              <a:t>Modifying Dictionaries 🔧</a:t>
-            </a:r>
-          </a:p>
-        </p:txBody>
-      </p:sp>
-      <p:sp>
-        <p:nvSpPr>
-          <p:cNvPr id="5" name="Rectangle 4"/>
-          <p:cNvSpPr/>
+              <a:t>Dictionary vs List</a:t>
+            </a:r>
+          </a:p>
+        </p:txBody>
+      </p:sp>
+      <p:sp>
+        <p:nvSpPr>
+          <p:cNvPr id="5" name="TextBox 4"/>
+          <p:cNvSpPr txBox="1"/>
           <p:nvPr/>
         </p:nvSpPr>
         <p:spPr>
           <a:xfrm>
-            <a:off x="457200" y="1005840"/>
-            <a:ext cx="1828800" cy="45720"/>
-          </a:xfrm>
-          <a:prstGeom prst="rect">
-            <a:avLst/>
-          </a:prstGeom>
-          <a:solidFill>
-            <a:srgbClr val="0066CC"/>
-          </a:solidFill>
-          <a:ln>
-            <a:noFill/>
-          </a:ln>
-        </p:spPr>
-        <p:style>
-          <a:lnRef idx="1">
-            <a:schemeClr val="accent1"/>
-          </a:lnRef>
-          <a:fillRef idx="3">
-            <a:schemeClr val="accent1"/>
-          </a:fillRef>
-          <a:effectRef idx="2">
-            <a:schemeClr val="accent1"/>
-          </a:effectRef>
-          <a:fontRef idx="minor">
-            <a:schemeClr val="lt1"/>
-          </a:fontRef>
-        </p:style>
-        <p:txBody>
-          <a:bodyPr rtlCol="0" anchor="ctr"/>
-          <a:lstStyle/>
-          <a:p>
-            <a:pPr algn="ctr"/>
-          </a:p>
-        </p:txBody>
-      </p:sp>
-      <p:sp>
-        <p:nvSpPr>
-          <p:cNvPr id="6" name="TextBox 5"/>
-          <p:cNvSpPr txBox="1"/>
-          <p:nvPr/>
-        </p:nvSpPr>
-        <p:spPr>
-          <a:xfrm>
-            <a:off x="640080" y="1371600"/>
-            <a:ext cx="10789920" cy="4572000"/>
+            <a:off x="640080" y="1188720"/>
+            <a:ext cx="10789920" cy="5303520"/>
           </a:xfrm>
           <a:prstGeom prst="rect">
             <a:avLst/>
@@ -5171,46 +5664,256 @@
           <a:p>
             <a:pPr>
               <a:spcAft>
-                <a:spcPts val="800"/>
-              </a:spcAft>
-              <a:defRPr sz="2000" b="1">
-                <a:solidFill>
-                  <a:srgbClr val="333333"/>
-                </a:solidFill>
-              </a:defRPr>
-            </a:pPr>
-            <a:r>
-              <a:t>Change Existing Value</a:t>
-            </a:r>
-          </a:p>
-          <a:p>
-            <a:pPr>
-              <a:spcAft>
-                <a:spcPts val="800"/>
-              </a:spcAft>
-              <a:defRPr sz="2000" b="1">
-                <a:solidFill>
-                  <a:srgbClr val="333333"/>
-                </a:solidFill>
-              </a:defRPr>
-            </a:pPr>
-            <a:r>
-              <a:t>Add New Key-Value Pair</a:t>
-            </a:r>
-          </a:p>
-          <a:p>
-            <a:pPr>
-              <a:spcAft>
-                <a:spcPts val="800"/>
-              </a:spcAft>
-              <a:defRPr sz="2000" b="1">
-                <a:solidFill>
-                  <a:srgbClr val="333333"/>
-                </a:solidFill>
-              </a:defRPr>
-            </a:pPr>
-            <a:r>
-              <a:t>Remove Items</a:t>
+                <a:spcPts val="600"/>
+              </a:spcAft>
+              <a:defRPr b="1" sz="2000">
+                <a:solidFill>
+                  <a:srgbClr val="333333"/>
+                </a:solidFill>
+              </a:defRPr>
+            </a:pPr>
+            <a:r>
+              <a:t>Use Dictionary When:</a:t>
+            </a:r>
+          </a:p>
+          <a:p>
+            <a:pPr lvl="1">
+              <a:spcAft>
+                <a:spcPts val="400"/>
+              </a:spcAft>
+              <a:defRPr sz="1600">
+                <a:solidFill>
+                  <a:srgbClr val="333333"/>
+                </a:solidFill>
+              </a:defRPr>
+            </a:pPr>
+            <a:r>
+              <a:t>• Need key-value associations</a:t>
+            </a:r>
+          </a:p>
+          <a:p>
+            <a:pPr lvl="1">
+              <a:spcAft>
+                <a:spcPts val="400"/>
+              </a:spcAft>
+              <a:defRPr sz="1600">
+                <a:solidFill>
+                  <a:srgbClr val="333333"/>
+                </a:solidFill>
+              </a:defRPr>
+            </a:pPr>
+            <a:r>
+              <a:t>• Fast lookup is important</a:t>
+            </a:r>
+          </a:p>
+          <a:p>
+            <a:pPr lvl="1">
+              <a:spcAft>
+                <a:spcPts val="400"/>
+              </a:spcAft>
+              <a:defRPr sz="1600">
+                <a:solidFill>
+                  <a:srgbClr val="333333"/>
+                </a:solidFill>
+              </a:defRPr>
+            </a:pPr>
+            <a:r>
+              <a:t>• Keys are meaningful</a:t>
+            </a:r>
+          </a:p>
+          <a:p>
+            <a:pPr lvl="1">
+              <a:spcAft>
+                <a:spcPts val="400"/>
+              </a:spcAft>
+              <a:defRPr sz="1600">
+                <a:solidFill>
+                  <a:srgbClr val="333333"/>
+                </a:solidFill>
+              </a:defRPr>
+            </a:pPr>
+            <a:r>
+              <a:t>• Order doesn't matter much</a:t>
+            </a:r>
+          </a:p>
+          <a:p>
+            <a:pPr>
+              <a:spcAft>
+                <a:spcPts val="600"/>
+              </a:spcAft>
+              <a:defRPr b="1" sz="2000">
+                <a:solidFill>
+                  <a:srgbClr val="333333"/>
+                </a:solidFill>
+              </a:defRPr>
+            </a:pPr>
+            <a:r>
+              <a:t>Use List When:</a:t>
+            </a:r>
+          </a:p>
+          <a:p>
+            <a:pPr lvl="1">
+              <a:spcAft>
+                <a:spcPts val="400"/>
+              </a:spcAft>
+              <a:defRPr sz="1600">
+                <a:solidFill>
+                  <a:srgbClr val="333333"/>
+                </a:solidFill>
+              </a:defRPr>
+            </a:pPr>
+            <a:r>
+              <a:t>• Order is important</a:t>
+            </a:r>
+          </a:p>
+          <a:p>
+            <a:pPr lvl="1">
+              <a:spcAft>
+                <a:spcPts val="400"/>
+              </a:spcAft>
+              <a:defRPr sz="1600">
+                <a:solidFill>
+                  <a:srgbClr val="333333"/>
+                </a:solidFill>
+              </a:defRPr>
+            </a:pPr>
+            <a:r>
+              <a:t>• Need indexing by position</a:t>
+            </a:r>
+          </a:p>
+          <a:p>
+            <a:pPr lvl="1">
+              <a:spcAft>
+                <a:spcPts val="400"/>
+              </a:spcAft>
+              <a:defRPr sz="1600">
+                <a:solidFill>
+                  <a:srgbClr val="333333"/>
+                </a:solidFill>
+              </a:defRPr>
+            </a:pPr>
+            <a:r>
+              <a:t>• All items same type</a:t>
+            </a:r>
+          </a:p>
+          <a:p>
+            <a:pPr lvl="1">
+              <a:spcAft>
+                <a:spcPts val="400"/>
+              </a:spcAft>
+              <a:defRPr sz="1600">
+                <a:solidFill>
+                  <a:srgbClr val="333333"/>
+                </a:solidFill>
+              </a:defRPr>
+            </a:pPr>
+            <a:r>
+              <a:t>• Frequent iteration</a:t>
+            </a:r>
+          </a:p>
+          <a:p>
+            <a:pPr>
+              <a:spcAft>
+                <a:spcPts val="600"/>
+              </a:spcAft>
+              <a:defRPr b="1" sz="2000">
+                <a:solidFill>
+                  <a:srgbClr val="333333"/>
+                </a:solidFill>
+              </a:defRPr>
+            </a:pPr>
+            <a:r>
+              <a:t>Performance:</a:t>
+            </a:r>
+          </a:p>
+          <a:p>
+            <a:pPr lvl="1">
+              <a:spcAft>
+                <a:spcPts val="400"/>
+              </a:spcAft>
+              <a:defRPr sz="1600">
+                <a:solidFill>
+                  <a:srgbClr val="333333"/>
+                </a:solidFill>
+              </a:defRPr>
+            </a:pPr>
+            <a:r>
+              <a:t>• Dictionary lookup: O(1)</a:t>
+            </a:r>
+          </a:p>
+          <a:p>
+            <a:pPr lvl="1">
+              <a:spcAft>
+                <a:spcPts val="400"/>
+              </a:spcAft>
+              <a:defRPr sz="1600">
+                <a:solidFill>
+                  <a:srgbClr val="333333"/>
+                </a:solidFill>
+              </a:defRPr>
+            </a:pPr>
+            <a:r>
+              <a:t>• List search: O(n)</a:t>
+            </a:r>
+          </a:p>
+          <a:p>
+            <a:pPr lvl="1">
+              <a:spcAft>
+                <a:spcPts val="400"/>
+              </a:spcAft>
+              <a:defRPr sz="1600">
+                <a:solidFill>
+                  <a:srgbClr val="333333"/>
+                </a:solidFill>
+              </a:defRPr>
+            </a:pPr>
+            <a:r>
+              <a:t>• Dictionary more memory</a:t>
+            </a:r>
+          </a:p>
+          <a:p>
+            <a:pPr>
+              <a:spcAft>
+                <a:spcPts val="600"/>
+              </a:spcAft>
+              <a:defRPr b="1" sz="2000">
+                <a:solidFill>
+                  <a:srgbClr val="333333"/>
+                </a:solidFill>
+              </a:defRPr>
+            </a:pPr>
+            <a:r>
+              <a:t>Example:</a:t>
+            </a:r>
+          </a:p>
+          <a:p>
+            <a:pPr>
+              <a:spcAft>
+                <a:spcPts val="600"/>
+              </a:spcAft>
+              <a:defRPr b="1" sz="2000">
+                <a:solidFill>
+                  <a:srgbClr val="333333"/>
+                </a:solidFill>
+              </a:defRPr>
+            </a:pPr>
+            <a:r>
+              <a:t>phone_book = {"Alice": "555-1234"}  # Dict</a:t>
+            </a:r>
+          </a:p>
+          <a:p>
+            <a:pPr>
+              <a:spcAft>
+                <a:spcPts val="600"/>
+              </a:spcAft>
+              <a:defRPr sz="1600">
+                <a:solidFill>
+                  <a:srgbClr val="333333"/>
+                </a:solidFill>
+              </a:defRPr>
+            </a:pPr>
+            <a:r>
+              <a:t>names = ["Alice", "Bob"]  # List</a:t>
             </a:r>
           </a:p>
         </p:txBody>
@@ -5223,7 +5926,7 @@
 </p:sld>
 </file>
 
-<file path=ppt/slides/slide7.xml><?xml version="1.0" encoding="utf-8"?>
+<file path=ppt/slides/slide9.xml><?xml version="1.0" encoding="utf-8"?>
 <p:sld xmlns:a="http://schemas.openxmlformats.org/drawingml/2006/main" xmlns:p="http://schemas.openxmlformats.org/presentationml/2006/main" xmlns:r="http://schemas.openxmlformats.org/officeDocument/2006/relationships">
   <p:cSld>
     <p:spTree>
@@ -5327,8 +6030,8 @@
         </p:nvSpPr>
         <p:spPr>
           <a:xfrm>
-            <a:off x="457200" y="365760"/>
-            <a:ext cx="10972800" cy="731520"/>
+            <a:off x="457200" y="320040"/>
+            <a:ext cx="10972800" cy="640080"/>
           </a:xfrm>
           <a:prstGeom prst="rect">
             <a:avLst/>
@@ -5342,71 +6045,28 @@
           <a:lstStyle/>
           <a:p>
             <a:pPr>
-              <a:defRPr sz="4000" b="1">
+              <a:defRPr sz="3600" b="1">
                 <a:solidFill>
                   <a:srgbClr val="003366"/>
                 </a:solidFill>
               </a:defRPr>
             </a:pPr>
             <a:r>
-              <a:t>Dictionary Methods ️</a:t>
-            </a:r>
-          </a:p>
-        </p:txBody>
-      </p:sp>
-      <p:sp>
-        <p:nvSpPr>
-          <p:cNvPr id="5" name="Rectangle 4"/>
-          <p:cNvSpPr/>
+              <a:t>Best Practices</a:t>
+            </a:r>
+          </a:p>
+        </p:txBody>
+      </p:sp>
+      <p:sp>
+        <p:nvSpPr>
+          <p:cNvPr id="5" name="TextBox 4"/>
+          <p:cNvSpPr txBox="1"/>
           <p:nvPr/>
         </p:nvSpPr>
         <p:spPr>
           <a:xfrm>
-            <a:off x="457200" y="1005840"/>
-            <a:ext cx="1828800" cy="45720"/>
-          </a:xfrm>
-          <a:prstGeom prst="rect">
-            <a:avLst/>
-          </a:prstGeom>
-          <a:solidFill>
-            <a:srgbClr val="0066CC"/>
-          </a:solidFill>
-          <a:ln>
-            <a:noFill/>
-          </a:ln>
-        </p:spPr>
-        <p:style>
-          <a:lnRef idx="1">
-            <a:schemeClr val="accent1"/>
-          </a:lnRef>
-          <a:fillRef idx="3">
-            <a:schemeClr val="accent1"/>
-          </a:fillRef>
-          <a:effectRef idx="2">
-            <a:schemeClr val="accent1"/>
-          </a:effectRef>
-          <a:fontRef idx="minor">
-            <a:schemeClr val="lt1"/>
-          </a:fontRef>
-        </p:style>
-        <p:txBody>
-          <a:bodyPr rtlCol="0" anchor="ctr"/>
-          <a:lstStyle/>
-          <a:p>
-            <a:pPr algn="ctr"/>
-          </a:p>
-        </p:txBody>
-      </p:sp>
-      <p:sp>
-        <p:nvSpPr>
-          <p:cNvPr id="6" name="TextBox 5"/>
-          <p:cNvSpPr txBox="1"/>
-          <p:nvPr/>
-        </p:nvSpPr>
-        <p:spPr>
-          <a:xfrm>
-            <a:off x="640080" y="1371600"/>
-            <a:ext cx="10789920" cy="4572000"/>
+            <a:off x="640080" y="1188720"/>
+            <a:ext cx="10789920" cy="5303520"/>
           </a:xfrm>
           <a:prstGeom prst="rect">
             <a:avLst/>
@@ -5421,576 +6081,256 @@
           <a:p>
             <a:pPr>
               <a:spcAft>
-                <a:spcPts val="800"/>
-              </a:spcAft>
-              <a:defRPr sz="2000" b="1">
-                <a:solidFill>
-                  <a:srgbClr val="333333"/>
-                </a:solidFill>
-              </a:defRPr>
-            </a:pPr>
-            <a:r>
-              <a:t>keys() - Get all keys</a:t>
-            </a:r>
-          </a:p>
-          <a:p>
-            <a:pPr>
-              <a:spcAft>
-                <a:spcPts val="800"/>
-              </a:spcAft>
-              <a:defRPr sz="2000" b="1">
-                <a:solidFill>
-                  <a:srgbClr val="333333"/>
-                </a:solidFill>
-              </a:defRPr>
-            </a:pPr>
-            <a:r>
-              <a:t>values() - Get all values</a:t>
-            </a:r>
-          </a:p>
-          <a:p>
-            <a:pPr>
-              <a:spcAft>
-                <a:spcPts val="800"/>
-              </a:spcAft>
-              <a:defRPr sz="2000" b="1">
-                <a:solidFill>
-                  <a:srgbClr val="333333"/>
-                </a:solidFill>
-              </a:defRPr>
-            </a:pPr>
-            <a:r>
-              <a:t>items() - Get key-value pairs</a:t>
-            </a:r>
-          </a:p>
-          <a:p>
-            <a:pPr>
-              <a:spcAft>
-                <a:spcPts val="800"/>
-              </a:spcAft>
-              <a:defRPr sz="2000" b="1">
-                <a:solidFill>
-                  <a:srgbClr val="333333"/>
-                </a:solidFill>
-              </a:defRPr>
-            </a:pPr>
-            <a:r>
-              <a:t>update() - Add multiple items</a:t>
-            </a:r>
-          </a:p>
-          <a:p>
-            <a:pPr>
-              <a:spcAft>
-                <a:spcPts val="800"/>
-              </a:spcAft>
-              <a:defRPr sz="2000" b="1">
-                <a:solidFill>
-                  <a:srgbClr val="333333"/>
-                </a:solidFill>
-              </a:defRPr>
-            </a:pPr>
-            <a:r>
-              <a:t>pop() - Remove and return value</a:t>
-            </a:r>
-          </a:p>
-        </p:txBody>
-      </p:sp>
-    </p:spTree>
-  </p:cSld>
-  <p:clrMapOvr>
-    <a:masterClrMapping/>
-  </p:clrMapOvr>
-</p:sld>
-</file>
-
-<file path=ppt/slides/slide8.xml><?xml version="1.0" encoding="utf-8"?>
-<p:sld xmlns:a="http://schemas.openxmlformats.org/drawingml/2006/main" xmlns:p="http://schemas.openxmlformats.org/presentationml/2006/main" xmlns:r="http://schemas.openxmlformats.org/officeDocument/2006/relationships">
-  <p:cSld>
-    <p:spTree>
-      <p:nvGrpSpPr>
-        <p:cNvPr id="1" name=""/>
-        <p:cNvGrpSpPr/>
-        <p:nvPr/>
-      </p:nvGrpSpPr>
-      <p:grpSpPr/>
-      <p:sp>
-        <p:nvSpPr>
-          <p:cNvPr id="2" name="Rectangle 1"/>
-          <p:cNvSpPr/>
-          <p:nvPr/>
-        </p:nvSpPr>
-        <p:spPr>
-          <a:xfrm>
-            <a:off x="0" y="0"/>
-            <a:ext cx="12191695" cy="6858000"/>
-          </a:xfrm>
-          <a:prstGeom prst="rect">
-            <a:avLst/>
-          </a:prstGeom>
-          <a:solidFill>
-            <a:srgbClr val="FFFFFF"/>
-          </a:solidFill>
-          <a:ln>
-            <a:noFill/>
-          </a:ln>
-        </p:spPr>
-        <p:style>
-          <a:lnRef idx="1">
-            <a:schemeClr val="accent1"/>
-          </a:lnRef>
-          <a:fillRef idx="3">
-            <a:schemeClr val="accent1"/>
-          </a:fillRef>
-          <a:effectRef idx="2">
-            <a:schemeClr val="accent1"/>
-          </a:effectRef>
-          <a:fontRef idx="minor">
-            <a:schemeClr val="lt1"/>
-          </a:fontRef>
-        </p:style>
-        <p:txBody>
-          <a:bodyPr rtlCol="0" anchor="ctr"/>
-          <a:lstStyle/>
-          <a:p>
-            <a:pPr algn="ctr"/>
-          </a:p>
-        </p:txBody>
-      </p:sp>
-      <p:sp>
-        <p:nvSpPr>
-          <p:cNvPr id="3" name="Rectangle 2"/>
-          <p:cNvSpPr/>
-          <p:nvPr/>
-        </p:nvSpPr>
-        <p:spPr>
-          <a:xfrm>
-            <a:off x="0" y="0"/>
-            <a:ext cx="12191695" cy="137160"/>
-          </a:xfrm>
-          <a:prstGeom prst="rect">
-            <a:avLst/>
-          </a:prstGeom>
-          <a:solidFill>
-            <a:srgbClr val="0066CC"/>
-          </a:solidFill>
-          <a:ln>
-            <a:noFill/>
-          </a:ln>
-        </p:spPr>
-        <p:style>
-          <a:lnRef idx="1">
-            <a:schemeClr val="accent1"/>
-          </a:lnRef>
-          <a:fillRef idx="3">
-            <a:schemeClr val="accent1"/>
-          </a:fillRef>
-          <a:effectRef idx="2">
-            <a:schemeClr val="accent1"/>
-          </a:effectRef>
-          <a:fontRef idx="minor">
-            <a:schemeClr val="lt1"/>
-          </a:fontRef>
-        </p:style>
-        <p:txBody>
-          <a:bodyPr rtlCol="0" anchor="ctr"/>
-          <a:lstStyle/>
-          <a:p>
-            <a:pPr algn="ctr"/>
-          </a:p>
-        </p:txBody>
-      </p:sp>
-      <p:sp>
-        <p:nvSpPr>
-          <p:cNvPr id="4" name="TextBox 3"/>
-          <p:cNvSpPr txBox="1"/>
-          <p:nvPr/>
-        </p:nvSpPr>
-        <p:spPr>
-          <a:xfrm>
-            <a:off x="457200" y="365760"/>
-            <a:ext cx="10972800" cy="731520"/>
-          </a:xfrm>
-          <a:prstGeom prst="rect">
-            <a:avLst/>
-          </a:prstGeom>
-          <a:noFill/>
-        </p:spPr>
-        <p:txBody>
-          <a:bodyPr wrap="none">
-            <a:spAutoFit/>
-          </a:bodyPr>
-          <a:lstStyle/>
-          <a:p>
-            <a:pPr>
-              <a:defRPr sz="4000" b="1">
-                <a:solidFill>
-                  <a:srgbClr val="003366"/>
-                </a:solidFill>
-              </a:defRPr>
-            </a:pPr>
-            <a:r>
-              <a:t>Iterating Through Dictionaries 🔄</a:t>
-            </a:r>
-          </a:p>
-        </p:txBody>
-      </p:sp>
-      <p:sp>
-        <p:nvSpPr>
-          <p:cNvPr id="5" name="Rectangle 4"/>
-          <p:cNvSpPr/>
-          <p:nvPr/>
-        </p:nvSpPr>
-        <p:spPr>
-          <a:xfrm>
-            <a:off x="457200" y="1005840"/>
-            <a:ext cx="1828800" cy="45720"/>
-          </a:xfrm>
-          <a:prstGeom prst="rect">
-            <a:avLst/>
-          </a:prstGeom>
-          <a:solidFill>
-            <a:srgbClr val="0066CC"/>
-          </a:solidFill>
-          <a:ln>
-            <a:noFill/>
-          </a:ln>
-        </p:spPr>
-        <p:style>
-          <a:lnRef idx="1">
-            <a:schemeClr val="accent1"/>
-          </a:lnRef>
-          <a:fillRef idx="3">
-            <a:schemeClr val="accent1"/>
-          </a:fillRef>
-          <a:effectRef idx="2">
-            <a:schemeClr val="accent1"/>
-          </a:effectRef>
-          <a:fontRef idx="minor">
-            <a:schemeClr val="lt1"/>
-          </a:fontRef>
-        </p:style>
-        <p:txBody>
-          <a:bodyPr rtlCol="0" anchor="ctr"/>
-          <a:lstStyle/>
-          <a:p>
-            <a:pPr algn="ctr"/>
-          </a:p>
-        </p:txBody>
-      </p:sp>
-      <p:sp>
-        <p:nvSpPr>
-          <p:cNvPr id="6" name="TextBox 5"/>
-          <p:cNvSpPr txBox="1"/>
-          <p:nvPr/>
-        </p:nvSpPr>
-        <p:spPr>
-          <a:xfrm>
-            <a:off x="640080" y="1371600"/>
-            <a:ext cx="10789920" cy="4572000"/>
-          </a:xfrm>
-          <a:prstGeom prst="rect">
-            <a:avLst/>
-          </a:prstGeom>
-          <a:noFill/>
-        </p:spPr>
-        <p:txBody>
-          <a:bodyPr wrap="square">
-            <a:spAutoFit/>
-          </a:bodyPr>
-          <a:lstStyle/>
-          <a:p>
-            <a:pPr>
-              <a:spcAft>
-                <a:spcPts val="800"/>
-              </a:spcAft>
-              <a:defRPr sz="2000" b="1">
-                <a:solidFill>
-                  <a:srgbClr val="333333"/>
-                </a:solidFill>
-              </a:defRPr>
-            </a:pPr>
-            <a:r>
-              <a:t>Loop Through Keys</a:t>
-            </a:r>
-          </a:p>
-          <a:p>
-            <a:pPr>
-              <a:spcAft>
-                <a:spcPts val="800"/>
-              </a:spcAft>
-              <a:defRPr sz="2000" b="1">
-                <a:solidFill>
-                  <a:srgbClr val="333333"/>
-                </a:solidFill>
-              </a:defRPr>
-            </a:pPr>
-            <a:r>
-              <a:t>Loop Through Values</a:t>
-            </a:r>
-          </a:p>
-          <a:p>
-            <a:pPr>
-              <a:spcAft>
-                <a:spcPts val="800"/>
-              </a:spcAft>
-              <a:defRPr sz="2000" b="1">
-                <a:solidFill>
-                  <a:srgbClr val="333333"/>
-                </a:solidFill>
-              </a:defRPr>
-            </a:pPr>
-            <a:r>
-              <a:t>Loop Through Key-Value Pairs (Best!)</a:t>
-            </a:r>
-          </a:p>
-        </p:txBody>
-      </p:sp>
-    </p:spTree>
-  </p:cSld>
-  <p:clrMapOvr>
-    <a:masterClrMapping/>
-  </p:clrMapOvr>
-</p:sld>
-</file>
-
-<file path=ppt/slides/slide9.xml><?xml version="1.0" encoding="utf-8"?>
-<p:sld xmlns:a="http://schemas.openxmlformats.org/drawingml/2006/main" xmlns:p="http://schemas.openxmlformats.org/presentationml/2006/main" xmlns:r="http://schemas.openxmlformats.org/officeDocument/2006/relationships">
-  <p:cSld>
-    <p:spTree>
-      <p:nvGrpSpPr>
-        <p:cNvPr id="1" name=""/>
-        <p:cNvGrpSpPr/>
-        <p:nvPr/>
-      </p:nvGrpSpPr>
-      <p:grpSpPr/>
-      <p:sp>
-        <p:nvSpPr>
-          <p:cNvPr id="2" name="Rectangle 1"/>
-          <p:cNvSpPr/>
-          <p:nvPr/>
-        </p:nvSpPr>
-        <p:spPr>
-          <a:xfrm>
-            <a:off x="0" y="0"/>
-            <a:ext cx="12191695" cy="6858000"/>
-          </a:xfrm>
-          <a:prstGeom prst="rect">
-            <a:avLst/>
-          </a:prstGeom>
-          <a:solidFill>
-            <a:srgbClr val="FFFFFF"/>
-          </a:solidFill>
-          <a:ln>
-            <a:noFill/>
-          </a:ln>
-        </p:spPr>
-        <p:style>
-          <a:lnRef idx="1">
-            <a:schemeClr val="accent1"/>
-          </a:lnRef>
-          <a:fillRef idx="3">
-            <a:schemeClr val="accent1"/>
-          </a:fillRef>
-          <a:effectRef idx="2">
-            <a:schemeClr val="accent1"/>
-          </a:effectRef>
-          <a:fontRef idx="minor">
-            <a:schemeClr val="lt1"/>
-          </a:fontRef>
-        </p:style>
-        <p:txBody>
-          <a:bodyPr rtlCol="0" anchor="ctr"/>
-          <a:lstStyle/>
-          <a:p>
-            <a:pPr algn="ctr"/>
-          </a:p>
-        </p:txBody>
-      </p:sp>
-      <p:sp>
-        <p:nvSpPr>
-          <p:cNvPr id="3" name="Rectangle 2"/>
-          <p:cNvSpPr/>
-          <p:nvPr/>
-        </p:nvSpPr>
-        <p:spPr>
-          <a:xfrm>
-            <a:off x="0" y="0"/>
-            <a:ext cx="12191695" cy="137160"/>
-          </a:xfrm>
-          <a:prstGeom prst="rect">
-            <a:avLst/>
-          </a:prstGeom>
-          <a:solidFill>
-            <a:srgbClr val="0066CC"/>
-          </a:solidFill>
-          <a:ln>
-            <a:noFill/>
-          </a:ln>
-        </p:spPr>
-        <p:style>
-          <a:lnRef idx="1">
-            <a:schemeClr val="accent1"/>
-          </a:lnRef>
-          <a:fillRef idx="3">
-            <a:schemeClr val="accent1"/>
-          </a:fillRef>
-          <a:effectRef idx="2">
-            <a:schemeClr val="accent1"/>
-          </a:effectRef>
-          <a:fontRef idx="minor">
-            <a:schemeClr val="lt1"/>
-          </a:fontRef>
-        </p:style>
-        <p:txBody>
-          <a:bodyPr rtlCol="0" anchor="ctr"/>
-          <a:lstStyle/>
-          <a:p>
-            <a:pPr algn="ctr"/>
-          </a:p>
-        </p:txBody>
-      </p:sp>
-      <p:sp>
-        <p:nvSpPr>
-          <p:cNvPr id="4" name="TextBox 3"/>
-          <p:cNvSpPr txBox="1"/>
-          <p:nvPr/>
-        </p:nvSpPr>
-        <p:spPr>
-          <a:xfrm>
-            <a:off x="457200" y="365760"/>
-            <a:ext cx="10972800" cy="731520"/>
-          </a:xfrm>
-          <a:prstGeom prst="rect">
-            <a:avLst/>
-          </a:prstGeom>
-          <a:noFill/>
-        </p:spPr>
-        <p:txBody>
-          <a:bodyPr wrap="none">
-            <a:spAutoFit/>
-          </a:bodyPr>
-          <a:lstStyle/>
-          <a:p>
-            <a:pPr>
-              <a:defRPr sz="4000" b="1">
-                <a:solidFill>
-                  <a:srgbClr val="003366"/>
-                </a:solidFill>
-              </a:defRPr>
-            </a:pPr>
-            <a:r>
-              <a:t>Dictionary vs List ⚖️</a:t>
-            </a:r>
-          </a:p>
-        </p:txBody>
-      </p:sp>
-      <p:sp>
-        <p:nvSpPr>
-          <p:cNvPr id="5" name="Rectangle 4"/>
-          <p:cNvSpPr/>
-          <p:nvPr/>
-        </p:nvSpPr>
-        <p:spPr>
-          <a:xfrm>
-            <a:off x="457200" y="1005840"/>
-            <a:ext cx="1828800" cy="45720"/>
-          </a:xfrm>
-          <a:prstGeom prst="rect">
-            <a:avLst/>
-          </a:prstGeom>
-          <a:solidFill>
-            <a:srgbClr val="0066CC"/>
-          </a:solidFill>
-          <a:ln>
-            <a:noFill/>
-          </a:ln>
-        </p:spPr>
-        <p:style>
-          <a:lnRef idx="1">
-            <a:schemeClr val="accent1"/>
-          </a:lnRef>
-          <a:fillRef idx="3">
-            <a:schemeClr val="accent1"/>
-          </a:fillRef>
-          <a:effectRef idx="2">
-            <a:schemeClr val="accent1"/>
-          </a:effectRef>
-          <a:fontRef idx="minor">
-            <a:schemeClr val="lt1"/>
-          </a:fontRef>
-        </p:style>
-        <p:txBody>
-          <a:bodyPr rtlCol="0" anchor="ctr"/>
-          <a:lstStyle/>
-          <a:p>
-            <a:pPr algn="ctr"/>
-          </a:p>
-        </p:txBody>
-      </p:sp>
-      <p:sp>
-        <p:nvSpPr>
-          <p:cNvPr id="6" name="TextBox 5"/>
-          <p:cNvSpPr txBox="1"/>
-          <p:nvPr/>
-        </p:nvSpPr>
-        <p:spPr>
-          <a:xfrm>
-            <a:off x="640080" y="1371600"/>
-            <a:ext cx="10789920" cy="4572000"/>
-          </a:xfrm>
-          <a:prstGeom prst="rect">
-            <a:avLst/>
-          </a:prstGeom>
-          <a:noFill/>
-        </p:spPr>
-        <p:txBody>
-          <a:bodyPr wrap="square">
-            <a:spAutoFit/>
-          </a:bodyPr>
-          <a:lstStyle/>
-          <a:p>
-            <a:pPr>
-              <a:spcAft>
-                <a:spcPts val="800"/>
-              </a:spcAft>
-              <a:defRPr sz="2000" b="1">
-                <a:solidFill>
-                  <a:srgbClr val="333333"/>
-                </a:solidFill>
-              </a:defRPr>
-            </a:pPr>
-            <a:r>
-              <a:t>Lists 📋</a:t>
-            </a:r>
-          </a:p>
-          <a:p>
-            <a:pPr>
-              <a:spcAft>
-                <a:spcPts val="800"/>
-              </a:spcAft>
-              <a:defRPr sz="2000" b="1">
-                <a:solidFill>
-                  <a:srgbClr val="333333"/>
-                </a:solidFill>
-              </a:defRPr>
-            </a:pPr>
-            <a:r>
-              <a:t>Dictionaries 📖</a:t>
-            </a:r>
-          </a:p>
-          <a:p>
-            <a:pPr>
-              <a:spcAft>
-                <a:spcPts val="800"/>
-              </a:spcAft>
-              <a:defRPr sz="2000" b="1">
-                <a:solidFill>
-                  <a:srgbClr val="333333"/>
-                </a:solidFill>
-              </a:defRPr>
-            </a:pPr>
-            <a:r>
-              <a:t>Use Lists:for ordered items |Use Dictionaries:for labeled data</a:t>
+                <a:spcPts val="600"/>
+              </a:spcAft>
+              <a:defRPr b="1" sz="2000">
+                <a:solidFill>
+                  <a:srgbClr val="333333"/>
+                </a:solidFill>
+              </a:defRPr>
+            </a:pPr>
+            <a:r>
+              <a:t>Good Practices:</a:t>
+            </a:r>
+          </a:p>
+          <a:p>
+            <a:pPr lvl="1">
+              <a:spcAft>
+                <a:spcPts val="400"/>
+              </a:spcAft>
+              <a:defRPr sz="1600">
+                <a:solidFill>
+                  <a:srgbClr val="333333"/>
+                </a:solidFill>
+              </a:defRPr>
+            </a:pPr>
+            <a:r>
+              <a:t>• Use .get() for safe access</a:t>
+            </a:r>
+          </a:p>
+          <a:p>
+            <a:pPr lvl="1">
+              <a:spcAft>
+                <a:spcPts val="400"/>
+              </a:spcAft>
+              <a:defRPr sz="1600">
+                <a:solidFill>
+                  <a:srgbClr val="333333"/>
+                </a:solidFill>
+              </a:defRPr>
+            </a:pPr>
+            <a:r>
+              <a:t>• Check keys before accessing</a:t>
+            </a:r>
+          </a:p>
+          <a:p>
+            <a:pPr lvl="1">
+              <a:spcAft>
+                <a:spcPts val="400"/>
+              </a:spcAft>
+              <a:defRPr sz="1600">
+                <a:solidFill>
+                  <a:srgbClr val="333333"/>
+                </a:solidFill>
+              </a:defRPr>
+            </a:pPr>
+            <a:r>
+              <a:t>• Use descriptive keys</a:t>
+            </a:r>
+          </a:p>
+          <a:p>
+            <a:pPr lvl="1">
+              <a:spcAft>
+                <a:spcPts val="400"/>
+              </a:spcAft>
+              <a:defRPr sz="1600">
+                <a:solidFill>
+                  <a:srgbClr val="333333"/>
+                </a:solidFill>
+              </a:defRPr>
+            </a:pPr>
+            <a:r>
+              <a:t>• Keep structure simple</a:t>
+            </a:r>
+          </a:p>
+          <a:p>
+            <a:pPr>
+              <a:spcAft>
+                <a:spcPts val="600"/>
+              </a:spcAft>
+              <a:defRPr b="1" sz="2000">
+                <a:solidFill>
+                  <a:srgbClr val="333333"/>
+                </a:solidFill>
+              </a:defRPr>
+            </a:pPr>
+            <a:r>
+              <a:t>Common Mistakes:</a:t>
+            </a:r>
+          </a:p>
+          <a:p>
+            <a:pPr lvl="1">
+              <a:spcAft>
+                <a:spcPts val="400"/>
+              </a:spcAft>
+              <a:defRPr sz="1600">
+                <a:solidFill>
+                  <a:srgbClr val="333333"/>
+                </a:solidFill>
+              </a:defRPr>
+            </a:pPr>
+            <a:r>
+              <a:t>• KeyError from missing key</a:t>
+            </a:r>
+          </a:p>
+          <a:p>
+            <a:pPr lvl="1">
+              <a:spcAft>
+                <a:spcPts val="400"/>
+              </a:spcAft>
+              <a:defRPr sz="1600">
+                <a:solidFill>
+                  <a:srgbClr val="333333"/>
+                </a:solidFill>
+              </a:defRPr>
+            </a:pPr>
+            <a:r>
+              <a:t>• Using mutable objects as keys</a:t>
+            </a:r>
+          </a:p>
+          <a:p>
+            <a:pPr lvl="1">
+              <a:spcAft>
+                <a:spcPts val="400"/>
+              </a:spcAft>
+              <a:defRPr sz="1600">
+                <a:solidFill>
+                  <a:srgbClr val="333333"/>
+                </a:solidFill>
+              </a:defRPr>
+            </a:pPr>
+            <a:r>
+              <a:t>• Not initializing nested structures</a:t>
+            </a:r>
+          </a:p>
+          <a:p>
+            <a:pPr lvl="1">
+              <a:spcAft>
+                <a:spcPts val="400"/>
+              </a:spcAft>
+              <a:defRPr sz="1600">
+                <a:solidFill>
+                  <a:srgbClr val="333333"/>
+                </a:solidFill>
+              </a:defRPr>
+            </a:pPr>
+            <a:r>
+              <a:t>• Comparing with == when need "is"</a:t>
+            </a:r>
+          </a:p>
+          <a:p>
+            <a:pPr>
+              <a:spcAft>
+                <a:spcPts val="600"/>
+              </a:spcAft>
+              <a:defRPr b="1" sz="2000">
+                <a:solidFill>
+                  <a:srgbClr val="333333"/>
+                </a:solidFill>
+              </a:defRPr>
+            </a:pPr>
+            <a:r>
+              <a:t>Performance Tips:</a:t>
+            </a:r>
+          </a:p>
+          <a:p>
+            <a:pPr lvl="1">
+              <a:spcAft>
+                <a:spcPts val="400"/>
+              </a:spcAft>
+              <a:defRPr sz="1600">
+                <a:solidFill>
+                  <a:srgbClr val="333333"/>
+                </a:solidFill>
+              </a:defRPr>
+            </a:pPr>
+            <a:r>
+              <a:t>• in operator is fast for keys</a:t>
+            </a:r>
+          </a:p>
+          <a:p>
+            <a:pPr lvl="1">
+              <a:spcAft>
+                <a:spcPts val="400"/>
+              </a:spcAft>
+              <a:defRPr sz="1600">
+                <a:solidFill>
+                  <a:srgbClr val="333333"/>
+                </a:solidFill>
+              </a:defRPr>
+            </a:pPr>
+            <a:r>
+              <a:t>• Use defaultdict for counting</a:t>
+            </a:r>
+          </a:p>
+          <a:p>
+            <a:pPr lvl="1">
+              <a:spcAft>
+                <a:spcPts val="400"/>
+              </a:spcAft>
+              <a:defRPr sz="1600">
+                <a:solidFill>
+                  <a:srgbClr val="333333"/>
+                </a:solidFill>
+              </a:defRPr>
+            </a:pPr>
+            <a:r>
+              <a:t>• Consider frozenset for immutable keys</a:t>
+            </a:r>
+          </a:p>
+          <a:p>
+            <a:pPr>
+              <a:spcAft>
+                <a:spcPts val="600"/>
+              </a:spcAft>
+              <a:defRPr b="1" sz="2000">
+                <a:solidFill>
+                  <a:srgbClr val="333333"/>
+                </a:solidFill>
+              </a:defRPr>
+            </a:pPr>
+            <a:r>
+              <a:t>Code Style:</a:t>
+            </a:r>
+          </a:p>
+          <a:p>
+            <a:pPr lvl="1">
+              <a:spcAft>
+                <a:spcPts val="400"/>
+              </a:spcAft>
+              <a:defRPr sz="1600">
+                <a:solidFill>
+                  <a:srgbClr val="333333"/>
+                </a:solidFill>
+              </a:defRPr>
+            </a:pPr>
+            <a:r>
+              <a:t>• One key-value per line for readability</a:t>
+            </a:r>
+          </a:p>
+          <a:p>
+            <a:pPr lvl="1">
+              <a:spcAft>
+                <a:spcPts val="400"/>
+              </a:spcAft>
+              <a:defRPr sz="1600">
+                <a:solidFill>
+                  <a:srgbClr val="333333"/>
+                </a:solidFill>
+              </a:defRPr>
+            </a:pPr>
+            <a:r>
+              <a:t>• Use trailing comma in multi-line</a:t>
             </a:r>
           </a:p>
         </p:txBody>

--- a/python_course/chapter_06_dictionaries/dictionaries.pptx
+++ b/python_course/chapter_06_dictionaries/dictionaries.pptx
@@ -14,6 +14,8 @@
     <p:sldId id="262" r:id="rId13"/>
     <p:sldId id="263" r:id="rId14"/>
     <p:sldId id="264" r:id="rId15"/>
+    <p:sldId id="265" r:id="rId16"/>
+    <p:sldId id="266" r:id="rId17"/>
   </p:sldIdLst>
   <p:sldSz cx="12191695" cy="6858000" type="screen4x3"/>
   <p:notesSz cx="6858000" cy="9144000"/>
@@ -3111,7 +3113,7 @@
             <a:avLst/>
           </a:prstGeom>
           <a:solidFill>
-            <a:srgbClr val="F0F8FF"/>
+            <a:srgbClr val="14468C"/>
           </a:solidFill>
           <a:ln>
             <a:noFill/>
@@ -3141,14 +3143,100 @@
       </p:sp>
       <p:sp>
         <p:nvSpPr>
-          <p:cNvPr id="3" name="TextBox 2"/>
+          <p:cNvPr id="3" name="Rectangle 2"/>
+          <p:cNvSpPr/>
+          <p:nvPr/>
+        </p:nvSpPr>
+        <p:spPr>
+          <a:xfrm>
+            <a:off x="0" y="0"/>
+            <a:ext cx="12191695" cy="1828800"/>
+          </a:xfrm>
+          <a:prstGeom prst="rect">
+            <a:avLst/>
+          </a:prstGeom>
+          <a:solidFill>
+            <a:srgbClr val="0078D7"/>
+          </a:solidFill>
+          <a:ln>
+            <a:noFill/>
+          </a:ln>
+        </p:spPr>
+        <p:style>
+          <a:lnRef idx="1">
+            <a:schemeClr val="accent1"/>
+          </a:lnRef>
+          <a:fillRef idx="3">
+            <a:schemeClr val="accent1"/>
+          </a:fillRef>
+          <a:effectRef idx="2">
+            <a:schemeClr val="accent1"/>
+          </a:effectRef>
+          <a:fontRef idx="minor">
+            <a:schemeClr val="lt1"/>
+          </a:fontRef>
+        </p:style>
+        <p:txBody>
+          <a:bodyPr rtlCol="0" anchor="ctr"/>
+          <a:lstStyle/>
+          <a:p>
+            <a:pPr algn="ctr"/>
+          </a:p>
+        </p:txBody>
+      </p:sp>
+      <p:sp>
+        <p:nvSpPr>
+          <p:cNvPr id="4" name="Rectangle 3"/>
+          <p:cNvSpPr/>
+          <p:nvPr/>
+        </p:nvSpPr>
+        <p:spPr>
+          <a:xfrm>
+            <a:off x="0" y="1828800"/>
+            <a:ext cx="274320" cy="5029200"/>
+          </a:xfrm>
+          <a:prstGeom prst="rect">
+            <a:avLst/>
+          </a:prstGeom>
+          <a:solidFill>
+            <a:srgbClr val="FFBB33"/>
+          </a:solidFill>
+          <a:ln>
+            <a:noFill/>
+          </a:ln>
+        </p:spPr>
+        <p:style>
+          <a:lnRef idx="1">
+            <a:schemeClr val="accent1"/>
+          </a:lnRef>
+          <a:fillRef idx="3">
+            <a:schemeClr val="accent1"/>
+          </a:fillRef>
+          <a:effectRef idx="2">
+            <a:schemeClr val="accent1"/>
+          </a:effectRef>
+          <a:fontRef idx="minor">
+            <a:schemeClr val="lt1"/>
+          </a:fontRef>
+        </p:style>
+        <p:txBody>
+          <a:bodyPr rtlCol="0" anchor="ctr"/>
+          <a:lstStyle/>
+          <a:p>
+            <a:pPr algn="ctr"/>
+          </a:p>
+        </p:txBody>
+      </p:sp>
+      <p:sp>
+        <p:nvSpPr>
+          <p:cNvPr id="5" name="TextBox 4"/>
           <p:cNvSpPr txBox="1"/>
           <p:nvPr/>
         </p:nvSpPr>
         <p:spPr>
           <a:xfrm>
-            <a:off x="914400" y="2286000"/>
-            <a:ext cx="10360152" cy="1097280"/>
+            <a:off x="1371600" y="2560320"/>
+            <a:ext cx="10058400" cy="1371600"/>
           </a:xfrm>
           <a:prstGeom prst="rect">
             <a:avLst/>
@@ -3162,9 +3250,9 @@
           <a:lstStyle/>
           <a:p>
             <a:pPr algn="ctr">
-              <a:defRPr sz="4800" b="1">
-                <a:solidFill>
-                  <a:srgbClr val="003366"/>
+              <a:defRPr sz="5200" b="1">
+                <a:solidFill>
+                  <a:srgbClr val="FFFFFF"/>
                 </a:solidFill>
               </a:defRPr>
             </a:pPr>
@@ -3176,14 +3264,57 @@
       </p:sp>
       <p:sp>
         <p:nvSpPr>
-          <p:cNvPr id="4" name="TextBox 3"/>
+          <p:cNvPr id="6" name="Rectangle 5"/>
+          <p:cNvSpPr/>
+          <p:nvPr/>
+        </p:nvSpPr>
+        <p:spPr>
+          <a:xfrm>
+            <a:off x="2743200" y="4114800"/>
+            <a:ext cx="6702552" cy="1097280"/>
+          </a:xfrm>
+          <a:prstGeom prst="rect">
+            <a:avLst/>
+          </a:prstGeom>
+          <a:solidFill>
+            <a:srgbClr val="0066CC"/>
+          </a:solidFill>
+          <a:ln>
+            <a:noFill/>
+          </a:ln>
+        </p:spPr>
+        <p:style>
+          <a:lnRef idx="1">
+            <a:schemeClr val="accent1"/>
+          </a:lnRef>
+          <a:fillRef idx="3">
+            <a:schemeClr val="accent1"/>
+          </a:fillRef>
+          <a:effectRef idx="2">
+            <a:schemeClr val="accent1"/>
+          </a:effectRef>
+          <a:fontRef idx="minor">
+            <a:schemeClr val="lt1"/>
+          </a:fontRef>
+        </p:style>
+        <p:txBody>
+          <a:bodyPr rtlCol="0" anchor="ctr"/>
+          <a:lstStyle/>
+          <a:p>
+            <a:pPr algn="ctr"/>
+          </a:p>
+        </p:txBody>
+      </p:sp>
+      <p:sp>
+        <p:nvSpPr>
+          <p:cNvPr id="7" name="TextBox 6"/>
           <p:cNvSpPr txBox="1"/>
           <p:nvPr/>
         </p:nvSpPr>
         <p:spPr>
           <a:xfrm>
-            <a:off x="914400" y="3657600"/>
-            <a:ext cx="10360152" cy="731520"/>
+            <a:off x="2926080" y="4297680"/>
+            <a:ext cx="6336792" cy="731520"/>
           </a:xfrm>
           <a:prstGeom prst="rect">
             <a:avLst/>
@@ -3199,12 +3330,1250 @@
             <a:pPr algn="ctr">
               <a:defRPr sz="2800">
                 <a:solidFill>
-                  <a:srgbClr val="4682B4"/>
+                  <a:srgbClr val="FFFFFF"/>
                 </a:solidFill>
               </a:defRPr>
             </a:pPr>
             <a:r>
               <a:t>Key-Value Pairs and Mappings</a:t>
+            </a:r>
+          </a:p>
+        </p:txBody>
+      </p:sp>
+    </p:spTree>
+  </p:cSld>
+  <p:clrMapOvr>
+    <a:masterClrMapping/>
+  </p:clrMapOvr>
+</p:sld>
+</file>
+
+<file path=ppt/slides/slide10.xml><?xml version="1.0" encoding="utf-8"?>
+<p:sld xmlns:a="http://schemas.openxmlformats.org/drawingml/2006/main" xmlns:p="http://schemas.openxmlformats.org/presentationml/2006/main" xmlns:r="http://schemas.openxmlformats.org/officeDocument/2006/relationships">
+  <p:cSld>
+    <p:spTree>
+      <p:nvGrpSpPr>
+        <p:cNvPr id="1" name=""/>
+        <p:cNvGrpSpPr/>
+        <p:nvPr/>
+      </p:nvGrpSpPr>
+      <p:grpSpPr/>
+      <p:sp>
+        <p:nvSpPr>
+          <p:cNvPr id="2" name="Rectangle 1"/>
+          <p:cNvSpPr/>
+          <p:nvPr/>
+        </p:nvSpPr>
+        <p:spPr>
+          <a:xfrm>
+            <a:off x="0" y="0"/>
+            <a:ext cx="12191695" cy="6858000"/>
+          </a:xfrm>
+          <a:prstGeom prst="rect">
+            <a:avLst/>
+          </a:prstGeom>
+          <a:solidFill>
+            <a:srgbClr val="FAFAFA"/>
+          </a:solidFill>
+          <a:ln>
+            <a:noFill/>
+          </a:ln>
+        </p:spPr>
+        <p:style>
+          <a:lnRef idx="1">
+            <a:schemeClr val="accent1"/>
+          </a:lnRef>
+          <a:fillRef idx="3">
+            <a:schemeClr val="accent1"/>
+          </a:fillRef>
+          <a:effectRef idx="2">
+            <a:schemeClr val="accent1"/>
+          </a:effectRef>
+          <a:fontRef idx="minor">
+            <a:schemeClr val="lt1"/>
+          </a:fontRef>
+        </p:style>
+        <p:txBody>
+          <a:bodyPr rtlCol="0" anchor="ctr"/>
+          <a:lstStyle/>
+          <a:p>
+            <a:pPr algn="ctr"/>
+          </a:p>
+        </p:txBody>
+      </p:sp>
+      <p:sp>
+        <p:nvSpPr>
+          <p:cNvPr id="3" name="Rectangle 2"/>
+          <p:cNvSpPr/>
+          <p:nvPr/>
+        </p:nvSpPr>
+        <p:spPr>
+          <a:xfrm>
+            <a:off x="0" y="0"/>
+            <a:ext cx="12191695" cy="1097280"/>
+          </a:xfrm>
+          <a:prstGeom prst="rect">
+            <a:avLst/>
+          </a:prstGeom>
+          <a:solidFill>
+            <a:srgbClr val="0066CC"/>
+          </a:solidFill>
+          <a:ln>
+            <a:noFill/>
+          </a:ln>
+        </p:spPr>
+        <p:style>
+          <a:lnRef idx="1">
+            <a:schemeClr val="accent1"/>
+          </a:lnRef>
+          <a:fillRef idx="3">
+            <a:schemeClr val="accent1"/>
+          </a:fillRef>
+          <a:effectRef idx="2">
+            <a:schemeClr val="accent1"/>
+          </a:effectRef>
+          <a:fontRef idx="minor">
+            <a:schemeClr val="lt1"/>
+          </a:fontRef>
+        </p:style>
+        <p:txBody>
+          <a:bodyPr rtlCol="0" anchor="ctr"/>
+          <a:lstStyle/>
+          <a:p>
+            <a:pPr algn="ctr"/>
+          </a:p>
+        </p:txBody>
+      </p:sp>
+      <p:sp>
+        <p:nvSpPr>
+          <p:cNvPr id="4" name="Rectangle 3"/>
+          <p:cNvSpPr/>
+          <p:nvPr/>
+        </p:nvSpPr>
+        <p:spPr>
+          <a:xfrm>
+            <a:off x="0" y="1097280"/>
+            <a:ext cx="137160" cy="5760720"/>
+          </a:xfrm>
+          <a:prstGeom prst="rect">
+            <a:avLst/>
+          </a:prstGeom>
+          <a:solidFill>
+            <a:srgbClr val="FFBB33"/>
+          </a:solidFill>
+          <a:ln>
+            <a:noFill/>
+          </a:ln>
+        </p:spPr>
+        <p:style>
+          <a:lnRef idx="1">
+            <a:schemeClr val="accent1"/>
+          </a:lnRef>
+          <a:fillRef idx="3">
+            <a:schemeClr val="accent1"/>
+          </a:fillRef>
+          <a:effectRef idx="2">
+            <a:schemeClr val="accent1"/>
+          </a:effectRef>
+          <a:fontRef idx="minor">
+            <a:schemeClr val="lt1"/>
+          </a:fontRef>
+        </p:style>
+        <p:txBody>
+          <a:bodyPr rtlCol="0" anchor="ctr"/>
+          <a:lstStyle/>
+          <a:p>
+            <a:pPr algn="ctr"/>
+          </a:p>
+        </p:txBody>
+      </p:sp>
+      <p:sp>
+        <p:nvSpPr>
+          <p:cNvPr id="5" name="TextBox 4"/>
+          <p:cNvSpPr txBox="1"/>
+          <p:nvPr/>
+        </p:nvSpPr>
+        <p:spPr>
+          <a:xfrm>
+            <a:off x="365760" y="274320"/>
+            <a:ext cx="10972800" cy="640080"/>
+          </a:xfrm>
+          <a:prstGeom prst="rect">
+            <a:avLst/>
+          </a:prstGeom>
+          <a:noFill/>
+        </p:spPr>
+        <p:txBody>
+          <a:bodyPr wrap="none">
+            <a:spAutoFit/>
+          </a:bodyPr>
+          <a:lstStyle/>
+          <a:p>
+            <a:pPr>
+              <a:defRPr sz="3600" b="1">
+                <a:solidFill>
+                  <a:srgbClr val="FFFFFF"/>
+                </a:solidFill>
+              </a:defRPr>
+            </a:pPr>
+            <a:r>
+              <a:t>Best Practices</a:t>
+            </a:r>
+          </a:p>
+        </p:txBody>
+      </p:sp>
+      <p:sp>
+        <p:nvSpPr>
+          <p:cNvPr id="6" name="Rectangle 5"/>
+          <p:cNvSpPr/>
+          <p:nvPr/>
+        </p:nvSpPr>
+        <p:spPr>
+          <a:xfrm>
+            <a:off x="365760" y="1325880"/>
+            <a:ext cx="11430000" cy="365760"/>
+          </a:xfrm>
+          <a:prstGeom prst="rect">
+            <a:avLst/>
+          </a:prstGeom>
+          <a:solidFill>
+            <a:srgbClr val="0078D7"/>
+          </a:solidFill>
+          <a:ln>
+            <a:noFill/>
+          </a:ln>
+        </p:spPr>
+        <p:style>
+          <a:lnRef idx="1">
+            <a:schemeClr val="accent1"/>
+          </a:lnRef>
+          <a:fillRef idx="3">
+            <a:schemeClr val="accent1"/>
+          </a:fillRef>
+          <a:effectRef idx="2">
+            <a:schemeClr val="accent1"/>
+          </a:effectRef>
+          <a:fontRef idx="minor">
+            <a:schemeClr val="lt1"/>
+          </a:fontRef>
+        </p:style>
+        <p:txBody>
+          <a:bodyPr rtlCol="0" anchor="ctr"/>
+          <a:lstStyle/>
+          <a:p>
+            <a:pPr algn="ctr"/>
+          </a:p>
+        </p:txBody>
+      </p:sp>
+      <p:sp>
+        <p:nvSpPr>
+          <p:cNvPr id="7" name="TextBox 6"/>
+          <p:cNvSpPr txBox="1"/>
+          <p:nvPr/>
+        </p:nvSpPr>
+        <p:spPr>
+          <a:xfrm>
+            <a:off x="548640" y="1371600"/>
+            <a:ext cx="10972800" cy="274320"/>
+          </a:xfrm>
+          <a:prstGeom prst="rect">
+            <a:avLst/>
+          </a:prstGeom>
+          <a:noFill/>
+        </p:spPr>
+        <p:txBody>
+          <a:bodyPr wrap="none">
+            <a:spAutoFit/>
+          </a:bodyPr>
+          <a:lstStyle/>
+          <a:p>
+            <a:pPr>
+              <a:defRPr sz="2000" b="1">
+                <a:solidFill>
+                  <a:srgbClr val="FFFFFF"/>
+                </a:solidFill>
+              </a:defRPr>
+            </a:pPr>
+            <a:r>
+              <a:t>Good Practices:</a:t>
+            </a:r>
+          </a:p>
+        </p:txBody>
+      </p:sp>
+      <p:sp>
+        <p:nvSpPr>
+          <p:cNvPr id="8" name="Rectangle 7"/>
+          <p:cNvSpPr/>
+          <p:nvPr/>
+        </p:nvSpPr>
+        <p:spPr>
+          <a:xfrm>
+            <a:off x="640080" y="1783080"/>
+            <a:ext cx="10789920" cy="411480"/>
+          </a:xfrm>
+          <a:prstGeom prst="rect">
+            <a:avLst/>
+          </a:prstGeom>
+          <a:solidFill>
+            <a:srgbClr val="282C34"/>
+          </a:solidFill>
+          <a:ln>
+            <a:noFill/>
+          </a:ln>
+        </p:spPr>
+        <p:style>
+          <a:lnRef idx="1">
+            <a:schemeClr val="accent1"/>
+          </a:lnRef>
+          <a:fillRef idx="3">
+            <a:schemeClr val="accent1"/>
+          </a:fillRef>
+          <a:effectRef idx="2">
+            <a:schemeClr val="accent1"/>
+          </a:effectRef>
+          <a:fontRef idx="minor">
+            <a:schemeClr val="lt1"/>
+          </a:fontRef>
+        </p:style>
+        <p:txBody>
+          <a:bodyPr rtlCol="0" anchor="ctr"/>
+          <a:lstStyle/>
+          <a:p>
+            <a:pPr algn="ctr"/>
+          </a:p>
+        </p:txBody>
+      </p:sp>
+      <p:sp>
+        <p:nvSpPr>
+          <p:cNvPr id="9" name="Rectangle 8"/>
+          <p:cNvSpPr/>
+          <p:nvPr/>
+        </p:nvSpPr>
+        <p:spPr>
+          <a:xfrm>
+            <a:off x="640080" y="1783080"/>
+            <a:ext cx="73152" cy="411480"/>
+          </a:xfrm>
+          <a:prstGeom prst="rect">
+            <a:avLst/>
+          </a:prstGeom>
+          <a:solidFill>
+            <a:srgbClr val="61AFEF"/>
+          </a:solidFill>
+          <a:ln>
+            <a:noFill/>
+          </a:ln>
+        </p:spPr>
+        <p:style>
+          <a:lnRef idx="1">
+            <a:schemeClr val="accent1"/>
+          </a:lnRef>
+          <a:fillRef idx="3">
+            <a:schemeClr val="accent1"/>
+          </a:fillRef>
+          <a:effectRef idx="2">
+            <a:schemeClr val="accent1"/>
+          </a:effectRef>
+          <a:fontRef idx="minor">
+            <a:schemeClr val="lt1"/>
+          </a:fontRef>
+        </p:style>
+        <p:txBody>
+          <a:bodyPr rtlCol="0" anchor="ctr"/>
+          <a:lstStyle/>
+          <a:p>
+            <a:pPr algn="ctr"/>
+          </a:p>
+        </p:txBody>
+      </p:sp>
+      <p:sp>
+        <p:nvSpPr>
+          <p:cNvPr id="10" name="TextBox 9"/>
+          <p:cNvSpPr txBox="1"/>
+          <p:nvPr/>
+        </p:nvSpPr>
+        <p:spPr>
+          <a:xfrm>
+            <a:off x="914400" y="1828800"/>
+            <a:ext cx="10241280" cy="320040"/>
+          </a:xfrm>
+          <a:prstGeom prst="rect">
+            <a:avLst/>
+          </a:prstGeom>
+          <a:noFill/>
+        </p:spPr>
+        <p:txBody>
+          <a:bodyPr wrap="none">
+            <a:spAutoFit/>
+          </a:bodyPr>
+          <a:lstStyle/>
+          <a:p>
+            <a:pPr>
+              <a:spcAft>
+                <a:spcPts val="200"/>
+              </a:spcAft>
+              <a:defRPr sz="1400">
+                <a:solidFill>
+                  <a:srgbClr val="ABB2BF"/>
+                </a:solidFill>
+                <a:latin typeface="Consolas"/>
+              </a:defRPr>
+            </a:pPr>
+            <a:r>
+              <a:t>• Use .get() for safe access</a:t>
+            </a:r>
+          </a:p>
+        </p:txBody>
+      </p:sp>
+      <p:sp>
+        <p:nvSpPr>
+          <p:cNvPr id="11" name="TextBox 10"/>
+          <p:cNvSpPr txBox="1"/>
+          <p:nvPr/>
+        </p:nvSpPr>
+        <p:spPr>
+          <a:xfrm>
+            <a:off x="457200" y="2377440"/>
+            <a:ext cx="11247120" cy="320040"/>
+          </a:xfrm>
+          <a:prstGeom prst="rect">
+            <a:avLst/>
+          </a:prstGeom>
+          <a:noFill/>
+        </p:spPr>
+        <p:txBody>
+          <a:bodyPr wrap="none">
+            <a:spAutoFit/>
+          </a:bodyPr>
+          <a:lstStyle/>
+          <a:p>
+            <a:pPr lvl="1">
+              <a:defRPr sz="1600">
+                <a:solidFill>
+                  <a:srgbClr val="333333"/>
+                </a:solidFill>
+              </a:defRPr>
+            </a:pPr>
+            <a:r>
+              <a:t>• Check keys before accessing</a:t>
+            </a:r>
+          </a:p>
+        </p:txBody>
+      </p:sp>
+      <p:sp>
+        <p:nvSpPr>
+          <p:cNvPr id="12" name="TextBox 11"/>
+          <p:cNvSpPr txBox="1"/>
+          <p:nvPr/>
+        </p:nvSpPr>
+        <p:spPr>
+          <a:xfrm>
+            <a:off x="457200" y="2651760"/>
+            <a:ext cx="11247120" cy="320040"/>
+          </a:xfrm>
+          <a:prstGeom prst="rect">
+            <a:avLst/>
+          </a:prstGeom>
+          <a:noFill/>
+        </p:spPr>
+        <p:txBody>
+          <a:bodyPr wrap="none">
+            <a:spAutoFit/>
+          </a:bodyPr>
+          <a:lstStyle/>
+          <a:p>
+            <a:pPr lvl="1">
+              <a:defRPr sz="1600">
+                <a:solidFill>
+                  <a:srgbClr val="333333"/>
+                </a:solidFill>
+              </a:defRPr>
+            </a:pPr>
+            <a:r>
+              <a:t>• Use descriptive keys</a:t>
+            </a:r>
+          </a:p>
+        </p:txBody>
+      </p:sp>
+      <p:sp>
+        <p:nvSpPr>
+          <p:cNvPr id="13" name="TextBox 12"/>
+          <p:cNvSpPr txBox="1"/>
+          <p:nvPr/>
+        </p:nvSpPr>
+        <p:spPr>
+          <a:xfrm>
+            <a:off x="457200" y="2926079"/>
+            <a:ext cx="11247120" cy="320040"/>
+          </a:xfrm>
+          <a:prstGeom prst="rect">
+            <a:avLst/>
+          </a:prstGeom>
+          <a:noFill/>
+        </p:spPr>
+        <p:txBody>
+          <a:bodyPr wrap="none">
+            <a:spAutoFit/>
+          </a:bodyPr>
+          <a:lstStyle/>
+          <a:p>
+            <a:pPr lvl="1">
+              <a:defRPr sz="1600">
+                <a:solidFill>
+                  <a:srgbClr val="333333"/>
+                </a:solidFill>
+              </a:defRPr>
+            </a:pPr>
+            <a:r>
+              <a:t>• Keep structure simple</a:t>
+            </a:r>
+          </a:p>
+        </p:txBody>
+      </p:sp>
+      <p:sp>
+        <p:nvSpPr>
+          <p:cNvPr id="14" name="Rectangle 13"/>
+          <p:cNvSpPr/>
+          <p:nvPr/>
+        </p:nvSpPr>
+        <p:spPr>
+          <a:xfrm>
+            <a:off x="365760" y="3154679"/>
+            <a:ext cx="11430000" cy="365760"/>
+          </a:xfrm>
+          <a:prstGeom prst="rect">
+            <a:avLst/>
+          </a:prstGeom>
+          <a:solidFill>
+            <a:srgbClr val="0078D7"/>
+          </a:solidFill>
+          <a:ln>
+            <a:noFill/>
+          </a:ln>
+        </p:spPr>
+        <p:style>
+          <a:lnRef idx="1">
+            <a:schemeClr val="accent1"/>
+          </a:lnRef>
+          <a:fillRef idx="3">
+            <a:schemeClr val="accent1"/>
+          </a:fillRef>
+          <a:effectRef idx="2">
+            <a:schemeClr val="accent1"/>
+          </a:effectRef>
+          <a:fontRef idx="minor">
+            <a:schemeClr val="lt1"/>
+          </a:fontRef>
+        </p:style>
+        <p:txBody>
+          <a:bodyPr rtlCol="0" anchor="ctr"/>
+          <a:lstStyle/>
+          <a:p>
+            <a:pPr algn="ctr"/>
+          </a:p>
+        </p:txBody>
+      </p:sp>
+      <p:sp>
+        <p:nvSpPr>
+          <p:cNvPr id="15" name="TextBox 14"/>
+          <p:cNvSpPr txBox="1"/>
+          <p:nvPr/>
+        </p:nvSpPr>
+        <p:spPr>
+          <a:xfrm>
+            <a:off x="548640" y="3200399"/>
+            <a:ext cx="10972800" cy="274320"/>
+          </a:xfrm>
+          <a:prstGeom prst="rect">
+            <a:avLst/>
+          </a:prstGeom>
+          <a:noFill/>
+        </p:spPr>
+        <p:txBody>
+          <a:bodyPr wrap="none">
+            <a:spAutoFit/>
+          </a:bodyPr>
+          <a:lstStyle/>
+          <a:p>
+            <a:pPr>
+              <a:defRPr sz="2000" b="1">
+                <a:solidFill>
+                  <a:srgbClr val="FFFFFF"/>
+                </a:solidFill>
+              </a:defRPr>
+            </a:pPr>
+            <a:r>
+              <a:t>Common Mistakes:</a:t>
+            </a:r>
+          </a:p>
+        </p:txBody>
+      </p:sp>
+      <p:sp>
+        <p:nvSpPr>
+          <p:cNvPr id="16" name="TextBox 15"/>
+          <p:cNvSpPr txBox="1"/>
+          <p:nvPr/>
+        </p:nvSpPr>
+        <p:spPr>
+          <a:xfrm>
+            <a:off x="457200" y="3657599"/>
+            <a:ext cx="11247120" cy="320040"/>
+          </a:xfrm>
+          <a:prstGeom prst="rect">
+            <a:avLst/>
+          </a:prstGeom>
+          <a:noFill/>
+        </p:spPr>
+        <p:txBody>
+          <a:bodyPr wrap="none">
+            <a:spAutoFit/>
+          </a:bodyPr>
+          <a:lstStyle/>
+          <a:p>
+            <a:pPr lvl="1">
+              <a:defRPr sz="1600">
+                <a:solidFill>
+                  <a:srgbClr val="333333"/>
+                </a:solidFill>
+              </a:defRPr>
+            </a:pPr>
+            <a:r>
+              <a:t>• KeyError from missing key</a:t>
+            </a:r>
+          </a:p>
+        </p:txBody>
+      </p:sp>
+      <p:sp>
+        <p:nvSpPr>
+          <p:cNvPr id="17" name="TextBox 16"/>
+          <p:cNvSpPr txBox="1"/>
+          <p:nvPr/>
+        </p:nvSpPr>
+        <p:spPr>
+          <a:xfrm>
+            <a:off x="457200" y="3931920"/>
+            <a:ext cx="11247120" cy="320040"/>
+          </a:xfrm>
+          <a:prstGeom prst="rect">
+            <a:avLst/>
+          </a:prstGeom>
+          <a:noFill/>
+        </p:spPr>
+        <p:txBody>
+          <a:bodyPr wrap="none">
+            <a:spAutoFit/>
+          </a:bodyPr>
+          <a:lstStyle/>
+          <a:p>
+            <a:pPr lvl="1">
+              <a:defRPr sz="1600">
+                <a:solidFill>
+                  <a:srgbClr val="333333"/>
+                </a:solidFill>
+              </a:defRPr>
+            </a:pPr>
+            <a:r>
+              <a:t>• Using mutable objects as keys</a:t>
+            </a:r>
+          </a:p>
+        </p:txBody>
+      </p:sp>
+      <p:sp>
+        <p:nvSpPr>
+          <p:cNvPr id="18" name="TextBox 17"/>
+          <p:cNvSpPr txBox="1"/>
+          <p:nvPr/>
+        </p:nvSpPr>
+        <p:spPr>
+          <a:xfrm>
+            <a:off x="457200" y="4206240"/>
+            <a:ext cx="11247120" cy="320040"/>
+          </a:xfrm>
+          <a:prstGeom prst="rect">
+            <a:avLst/>
+          </a:prstGeom>
+          <a:noFill/>
+        </p:spPr>
+        <p:txBody>
+          <a:bodyPr wrap="none">
+            <a:spAutoFit/>
+          </a:bodyPr>
+          <a:lstStyle/>
+          <a:p>
+            <a:pPr lvl="1">
+              <a:defRPr sz="1600">
+                <a:solidFill>
+                  <a:srgbClr val="333333"/>
+                </a:solidFill>
+              </a:defRPr>
+            </a:pPr>
+            <a:r>
+              <a:t>• Not initializing nested structures</a:t>
+            </a:r>
+          </a:p>
+        </p:txBody>
+      </p:sp>
+      <p:sp>
+        <p:nvSpPr>
+          <p:cNvPr id="19" name="TextBox 18"/>
+          <p:cNvSpPr txBox="1"/>
+          <p:nvPr/>
+        </p:nvSpPr>
+        <p:spPr>
+          <a:xfrm>
+            <a:off x="457200" y="4480559"/>
+            <a:ext cx="11247120" cy="320040"/>
+          </a:xfrm>
+          <a:prstGeom prst="rect">
+            <a:avLst/>
+          </a:prstGeom>
+          <a:noFill/>
+        </p:spPr>
+        <p:txBody>
+          <a:bodyPr wrap="none">
+            <a:spAutoFit/>
+          </a:bodyPr>
+          <a:lstStyle/>
+          <a:p>
+            <a:pPr lvl="1">
+              <a:defRPr sz="1600">
+                <a:solidFill>
+                  <a:srgbClr val="333333"/>
+                </a:solidFill>
+              </a:defRPr>
+            </a:pPr>
+            <a:r>
+              <a:t>• Comparing with == when need "is"</a:t>
+            </a:r>
+          </a:p>
+        </p:txBody>
+      </p:sp>
+      <p:sp>
+        <p:nvSpPr>
+          <p:cNvPr id="20" name="Rectangle 19"/>
+          <p:cNvSpPr/>
+          <p:nvPr/>
+        </p:nvSpPr>
+        <p:spPr>
+          <a:xfrm>
+            <a:off x="365760" y="4709159"/>
+            <a:ext cx="11430000" cy="365760"/>
+          </a:xfrm>
+          <a:prstGeom prst="rect">
+            <a:avLst/>
+          </a:prstGeom>
+          <a:solidFill>
+            <a:srgbClr val="0078D7"/>
+          </a:solidFill>
+          <a:ln>
+            <a:noFill/>
+          </a:ln>
+        </p:spPr>
+        <p:style>
+          <a:lnRef idx="1">
+            <a:schemeClr val="accent1"/>
+          </a:lnRef>
+          <a:fillRef idx="3">
+            <a:schemeClr val="accent1"/>
+          </a:fillRef>
+          <a:effectRef idx="2">
+            <a:schemeClr val="accent1"/>
+          </a:effectRef>
+          <a:fontRef idx="minor">
+            <a:schemeClr val="lt1"/>
+          </a:fontRef>
+        </p:style>
+        <p:txBody>
+          <a:bodyPr rtlCol="0" anchor="ctr"/>
+          <a:lstStyle/>
+          <a:p>
+            <a:pPr algn="ctr"/>
+          </a:p>
+        </p:txBody>
+      </p:sp>
+      <p:sp>
+        <p:nvSpPr>
+          <p:cNvPr id="21" name="TextBox 20"/>
+          <p:cNvSpPr txBox="1"/>
+          <p:nvPr/>
+        </p:nvSpPr>
+        <p:spPr>
+          <a:xfrm>
+            <a:off x="548640" y="4754879"/>
+            <a:ext cx="10972800" cy="274320"/>
+          </a:xfrm>
+          <a:prstGeom prst="rect">
+            <a:avLst/>
+          </a:prstGeom>
+          <a:noFill/>
+        </p:spPr>
+        <p:txBody>
+          <a:bodyPr wrap="none">
+            <a:spAutoFit/>
+          </a:bodyPr>
+          <a:lstStyle/>
+          <a:p>
+            <a:pPr>
+              <a:defRPr sz="2000" b="1">
+                <a:solidFill>
+                  <a:srgbClr val="FFFFFF"/>
+                </a:solidFill>
+              </a:defRPr>
+            </a:pPr>
+            <a:r>
+              <a:t>Performance Tips:</a:t>
+            </a:r>
+          </a:p>
+        </p:txBody>
+      </p:sp>
+      <p:sp>
+        <p:nvSpPr>
+          <p:cNvPr id="22" name="Rectangle 21"/>
+          <p:cNvSpPr/>
+          <p:nvPr/>
+        </p:nvSpPr>
+        <p:spPr>
+          <a:xfrm>
+            <a:off x="640080" y="5166359"/>
+            <a:ext cx="10789920" cy="868680"/>
+          </a:xfrm>
+          <a:prstGeom prst="rect">
+            <a:avLst/>
+          </a:prstGeom>
+          <a:solidFill>
+            <a:srgbClr val="282C34"/>
+          </a:solidFill>
+          <a:ln>
+            <a:noFill/>
+          </a:ln>
+        </p:spPr>
+        <p:style>
+          <a:lnRef idx="1">
+            <a:schemeClr val="accent1"/>
+          </a:lnRef>
+          <a:fillRef idx="3">
+            <a:schemeClr val="accent1"/>
+          </a:fillRef>
+          <a:effectRef idx="2">
+            <a:schemeClr val="accent1"/>
+          </a:effectRef>
+          <a:fontRef idx="minor">
+            <a:schemeClr val="lt1"/>
+          </a:fontRef>
+        </p:style>
+        <p:txBody>
+          <a:bodyPr rtlCol="0" anchor="ctr"/>
+          <a:lstStyle/>
+          <a:p>
+            <a:pPr algn="ctr"/>
+          </a:p>
+        </p:txBody>
+      </p:sp>
+      <p:sp>
+        <p:nvSpPr>
+          <p:cNvPr id="23" name="Rectangle 22"/>
+          <p:cNvSpPr/>
+          <p:nvPr/>
+        </p:nvSpPr>
+        <p:spPr>
+          <a:xfrm>
+            <a:off x="640080" y="5166359"/>
+            <a:ext cx="73152" cy="868680"/>
+          </a:xfrm>
+          <a:prstGeom prst="rect">
+            <a:avLst/>
+          </a:prstGeom>
+          <a:solidFill>
+            <a:srgbClr val="61AFEF"/>
+          </a:solidFill>
+          <a:ln>
+            <a:noFill/>
+          </a:ln>
+        </p:spPr>
+        <p:style>
+          <a:lnRef idx="1">
+            <a:schemeClr val="accent1"/>
+          </a:lnRef>
+          <a:fillRef idx="3">
+            <a:schemeClr val="accent1"/>
+          </a:fillRef>
+          <a:effectRef idx="2">
+            <a:schemeClr val="accent1"/>
+          </a:effectRef>
+          <a:fontRef idx="minor">
+            <a:schemeClr val="lt1"/>
+          </a:fontRef>
+        </p:style>
+        <p:txBody>
+          <a:bodyPr rtlCol="0" anchor="ctr"/>
+          <a:lstStyle/>
+          <a:p>
+            <a:pPr algn="ctr"/>
+          </a:p>
+        </p:txBody>
+      </p:sp>
+      <p:sp>
+        <p:nvSpPr>
+          <p:cNvPr id="24" name="TextBox 23"/>
+          <p:cNvSpPr txBox="1"/>
+          <p:nvPr/>
+        </p:nvSpPr>
+        <p:spPr>
+          <a:xfrm>
+            <a:off x="914400" y="5212079"/>
+            <a:ext cx="10241280" cy="777240"/>
+          </a:xfrm>
+          <a:prstGeom prst="rect">
+            <a:avLst/>
+          </a:prstGeom>
+          <a:noFill/>
+        </p:spPr>
+        <p:txBody>
+          <a:bodyPr wrap="none">
+            <a:spAutoFit/>
+          </a:bodyPr>
+          <a:lstStyle/>
+          <a:p>
+            <a:pPr>
+              <a:spcAft>
+                <a:spcPts val="200"/>
+              </a:spcAft>
+              <a:defRPr sz="1400">
+                <a:solidFill>
+                  <a:srgbClr val="ABB2BF"/>
+                </a:solidFill>
+                <a:latin typeface="Consolas"/>
+              </a:defRPr>
+            </a:pPr>
+            <a:r>
+              <a:t>• in operator is fast for keys</a:t>
+            </a:r>
+          </a:p>
+          <a:p>
+            <a:pPr>
+              <a:spcAft>
+                <a:spcPts val="200"/>
+              </a:spcAft>
+              <a:defRPr sz="1400">
+                <a:solidFill>
+                  <a:srgbClr val="ABB2BF"/>
+                </a:solidFill>
+                <a:latin typeface="Consolas"/>
+              </a:defRPr>
+            </a:pPr>
+            <a:r>
+              <a:t>• Use defaultdict for counting</a:t>
+            </a:r>
+          </a:p>
+          <a:p>
+            <a:pPr>
+              <a:spcAft>
+                <a:spcPts val="200"/>
+              </a:spcAft>
+              <a:defRPr sz="1400">
+                <a:solidFill>
+                  <a:srgbClr val="ABB2BF"/>
+                </a:solidFill>
+                <a:latin typeface="Consolas"/>
+              </a:defRPr>
+            </a:pPr>
+            <a:r>
+              <a:t>• Consider frozenset for immutable keys</a:t>
+            </a:r>
+          </a:p>
+        </p:txBody>
+      </p:sp>
+      <p:sp>
+        <p:nvSpPr>
+          <p:cNvPr id="25" name="Rectangle 24"/>
+          <p:cNvSpPr/>
+          <p:nvPr/>
+        </p:nvSpPr>
+        <p:spPr>
+          <a:xfrm>
+            <a:off x="365760" y="6172200"/>
+            <a:ext cx="11430000" cy="365760"/>
+          </a:xfrm>
+          <a:prstGeom prst="rect">
+            <a:avLst/>
+          </a:prstGeom>
+          <a:solidFill>
+            <a:srgbClr val="0078D7"/>
+          </a:solidFill>
+          <a:ln>
+            <a:noFill/>
+          </a:ln>
+        </p:spPr>
+        <p:style>
+          <a:lnRef idx="1">
+            <a:schemeClr val="accent1"/>
+          </a:lnRef>
+          <a:fillRef idx="3">
+            <a:schemeClr val="accent1"/>
+          </a:fillRef>
+          <a:effectRef idx="2">
+            <a:schemeClr val="accent1"/>
+          </a:effectRef>
+          <a:fontRef idx="minor">
+            <a:schemeClr val="lt1"/>
+          </a:fontRef>
+        </p:style>
+        <p:txBody>
+          <a:bodyPr rtlCol="0" anchor="ctr"/>
+          <a:lstStyle/>
+          <a:p>
+            <a:pPr algn="ctr"/>
+          </a:p>
+        </p:txBody>
+      </p:sp>
+      <p:sp>
+        <p:nvSpPr>
+          <p:cNvPr id="26" name="TextBox 25"/>
+          <p:cNvSpPr txBox="1"/>
+          <p:nvPr/>
+        </p:nvSpPr>
+        <p:spPr>
+          <a:xfrm>
+            <a:off x="548640" y="6217920"/>
+            <a:ext cx="10972800" cy="274320"/>
+          </a:xfrm>
+          <a:prstGeom prst="rect">
+            <a:avLst/>
+          </a:prstGeom>
+          <a:noFill/>
+        </p:spPr>
+        <p:txBody>
+          <a:bodyPr wrap="none">
+            <a:spAutoFit/>
+          </a:bodyPr>
+          <a:lstStyle/>
+          <a:p>
+            <a:pPr>
+              <a:defRPr sz="2000" b="1">
+                <a:solidFill>
+                  <a:srgbClr val="FFFFFF"/>
+                </a:solidFill>
+              </a:defRPr>
+            </a:pPr>
+            <a:r>
+              <a:t>Code Style:</a:t>
+            </a:r>
+          </a:p>
+        </p:txBody>
+      </p:sp>
+    </p:spTree>
+  </p:cSld>
+  <p:clrMapOvr>
+    <a:masterClrMapping/>
+  </p:clrMapOvr>
+</p:sld>
+</file>
+
+<file path=ppt/slides/slide11.xml><?xml version="1.0" encoding="utf-8"?>
+<p:sld xmlns:a="http://schemas.openxmlformats.org/drawingml/2006/main" xmlns:p="http://schemas.openxmlformats.org/presentationml/2006/main" xmlns:r="http://schemas.openxmlformats.org/officeDocument/2006/relationships">
+  <p:cSld>
+    <p:spTree>
+      <p:nvGrpSpPr>
+        <p:cNvPr id="1" name=""/>
+        <p:cNvGrpSpPr/>
+        <p:nvPr/>
+      </p:nvGrpSpPr>
+      <p:grpSpPr/>
+      <p:sp>
+        <p:nvSpPr>
+          <p:cNvPr id="2" name="Rectangle 1"/>
+          <p:cNvSpPr/>
+          <p:nvPr/>
+        </p:nvSpPr>
+        <p:spPr>
+          <a:xfrm>
+            <a:off x="0" y="0"/>
+            <a:ext cx="12191695" cy="6858000"/>
+          </a:xfrm>
+          <a:prstGeom prst="rect">
+            <a:avLst/>
+          </a:prstGeom>
+          <a:solidFill>
+            <a:srgbClr val="0066CC"/>
+          </a:solidFill>
+          <a:ln>
+            <a:noFill/>
+          </a:ln>
+        </p:spPr>
+        <p:style>
+          <a:lnRef idx="1">
+            <a:schemeClr val="accent1"/>
+          </a:lnRef>
+          <a:fillRef idx="3">
+            <a:schemeClr val="accent1"/>
+          </a:fillRef>
+          <a:effectRef idx="2">
+            <a:schemeClr val="accent1"/>
+          </a:effectRef>
+          <a:fontRef idx="minor">
+            <a:schemeClr val="lt1"/>
+          </a:fontRef>
+        </p:style>
+        <p:txBody>
+          <a:bodyPr rtlCol="0" anchor="ctr"/>
+          <a:lstStyle/>
+          <a:p>
+            <a:pPr algn="ctr"/>
+          </a:p>
+        </p:txBody>
+      </p:sp>
+      <p:sp>
+        <p:nvSpPr>
+          <p:cNvPr id="3" name="Rectangle 2"/>
+          <p:cNvSpPr/>
+          <p:nvPr/>
+        </p:nvSpPr>
+        <p:spPr>
+          <a:xfrm>
+            <a:off x="0" y="2743200"/>
+            <a:ext cx="3657600" cy="137160"/>
+          </a:xfrm>
+          <a:prstGeom prst="rect">
+            <a:avLst/>
+          </a:prstGeom>
+          <a:solidFill>
+            <a:srgbClr val="FFBB33"/>
+          </a:solidFill>
+          <a:ln>
+            <a:noFill/>
+          </a:ln>
+        </p:spPr>
+        <p:style>
+          <a:lnRef idx="1">
+            <a:schemeClr val="accent1"/>
+          </a:lnRef>
+          <a:fillRef idx="3">
+            <a:schemeClr val="accent1"/>
+          </a:fillRef>
+          <a:effectRef idx="2">
+            <a:schemeClr val="accent1"/>
+          </a:effectRef>
+          <a:fontRef idx="minor">
+            <a:schemeClr val="lt1"/>
+          </a:fontRef>
+        </p:style>
+        <p:txBody>
+          <a:bodyPr rtlCol="0" anchor="ctr"/>
+          <a:lstStyle/>
+          <a:p>
+            <a:pPr algn="ctr"/>
+          </a:p>
+        </p:txBody>
+      </p:sp>
+      <p:sp>
+        <p:nvSpPr>
+          <p:cNvPr id="4" name="Rectangle 3"/>
+          <p:cNvSpPr/>
+          <p:nvPr/>
+        </p:nvSpPr>
+        <p:spPr>
+          <a:xfrm>
+            <a:off x="8531352" y="4114800"/>
+            <a:ext cx="3657600" cy="137160"/>
+          </a:xfrm>
+          <a:prstGeom prst="rect">
+            <a:avLst/>
+          </a:prstGeom>
+          <a:solidFill>
+            <a:srgbClr val="FFBB33"/>
+          </a:solidFill>
+          <a:ln>
+            <a:noFill/>
+          </a:ln>
+        </p:spPr>
+        <p:style>
+          <a:lnRef idx="1">
+            <a:schemeClr val="accent1"/>
+          </a:lnRef>
+          <a:fillRef idx="3">
+            <a:schemeClr val="accent1"/>
+          </a:fillRef>
+          <a:effectRef idx="2">
+            <a:schemeClr val="accent1"/>
+          </a:effectRef>
+          <a:fontRef idx="minor">
+            <a:schemeClr val="lt1"/>
+          </a:fontRef>
+        </p:style>
+        <p:txBody>
+          <a:bodyPr rtlCol="0" anchor="ctr"/>
+          <a:lstStyle/>
+          <a:p>
+            <a:pPr algn="ctr"/>
+          </a:p>
+        </p:txBody>
+      </p:sp>
+      <p:sp>
+        <p:nvSpPr>
+          <p:cNvPr id="5" name="TextBox 4"/>
+          <p:cNvSpPr txBox="1"/>
+          <p:nvPr/>
+        </p:nvSpPr>
+        <p:spPr>
+          <a:xfrm>
+            <a:off x="914400" y="2560320"/>
+            <a:ext cx="10360152" cy="1371600"/>
+          </a:xfrm>
+          <a:prstGeom prst="rect">
+            <a:avLst/>
+          </a:prstGeom>
+          <a:noFill/>
+        </p:spPr>
+        <p:txBody>
+          <a:bodyPr wrap="none">
+            <a:spAutoFit/>
+          </a:bodyPr>
+          <a:lstStyle/>
+          <a:p>
+            <a:pPr algn="ctr">
+              <a:defRPr sz="4800" b="1">
+                <a:solidFill>
+                  <a:srgbClr val="FFFFFF"/>
+                </a:solidFill>
+              </a:defRPr>
+            </a:pPr>
+            <a:r>
+              <a:t>Time to Practice!</a:t>
+            </a:r>
+          </a:p>
+        </p:txBody>
+      </p:sp>
+      <p:sp>
+        <p:nvSpPr>
+          <p:cNvPr id="6" name="TextBox 5"/>
+          <p:cNvSpPr txBox="1"/>
+          <p:nvPr/>
+        </p:nvSpPr>
+        <p:spPr>
+          <a:xfrm>
+            <a:off x="1828800" y="4389120"/>
+            <a:ext cx="8531352" cy="914400"/>
+          </a:xfrm>
+          <a:prstGeom prst="rect">
+            <a:avLst/>
+          </a:prstGeom>
+          <a:noFill/>
+        </p:spPr>
+        <p:txBody>
+          <a:bodyPr wrap="none">
+            <a:spAutoFit/>
+          </a:bodyPr>
+          <a:lstStyle/>
+          <a:p>
+            <a:pPr algn="ctr">
+              <a:defRPr sz="2400">
+                <a:solidFill>
+                  <a:srgbClr val="FFFFFF"/>
+                </a:solidFill>
+              </a:defRPr>
+            </a:pPr>
+            <a:r>
+              <a:t>Chapter 6 Exercises</a:t>
             </a:r>
           </a:p>
         </p:txBody>
@@ -3242,7 +4611,7 @@
             <a:avLst/>
           </a:prstGeom>
           <a:solidFill>
-            <a:srgbClr val="FFFFFF"/>
+            <a:srgbClr val="FAFAFA"/>
           </a:solidFill>
           <a:ln>
             <a:noFill/>
@@ -3279,7 +4648,7 @@
         <p:spPr>
           <a:xfrm>
             <a:off x="0" y="0"/>
-            <a:ext cx="12191695" cy="137160"/>
+            <a:ext cx="12191695" cy="1097280"/>
           </a:xfrm>
           <a:prstGeom prst="rect">
             <a:avLst/>
@@ -3315,13 +4684,56 @@
       </p:sp>
       <p:sp>
         <p:nvSpPr>
-          <p:cNvPr id="4" name="TextBox 3"/>
+          <p:cNvPr id="4" name="Rectangle 3"/>
+          <p:cNvSpPr/>
+          <p:nvPr/>
+        </p:nvSpPr>
+        <p:spPr>
+          <a:xfrm>
+            <a:off x="0" y="1097280"/>
+            <a:ext cx="137160" cy="5760720"/>
+          </a:xfrm>
+          <a:prstGeom prst="rect">
+            <a:avLst/>
+          </a:prstGeom>
+          <a:solidFill>
+            <a:srgbClr val="FFBB33"/>
+          </a:solidFill>
+          <a:ln>
+            <a:noFill/>
+          </a:ln>
+        </p:spPr>
+        <p:style>
+          <a:lnRef idx="1">
+            <a:schemeClr val="accent1"/>
+          </a:lnRef>
+          <a:fillRef idx="3">
+            <a:schemeClr val="accent1"/>
+          </a:fillRef>
+          <a:effectRef idx="2">
+            <a:schemeClr val="accent1"/>
+          </a:effectRef>
+          <a:fontRef idx="minor">
+            <a:schemeClr val="lt1"/>
+          </a:fontRef>
+        </p:style>
+        <p:txBody>
+          <a:bodyPr rtlCol="0" anchor="ctr"/>
+          <a:lstStyle/>
+          <a:p>
+            <a:pPr algn="ctr"/>
+          </a:p>
+        </p:txBody>
+      </p:sp>
+      <p:sp>
+        <p:nvSpPr>
+          <p:cNvPr id="5" name="TextBox 4"/>
           <p:cNvSpPr txBox="1"/>
           <p:nvPr/>
         </p:nvSpPr>
         <p:spPr>
           <a:xfrm>
-            <a:off x="457200" y="320040"/>
+            <a:off x="365760" y="274320"/>
             <a:ext cx="10972800" cy="640080"/>
           </a:xfrm>
           <a:prstGeom prst="rect">
@@ -3338,7 +4750,7 @@
             <a:pPr>
               <a:defRPr sz="3600" b="1">
                 <a:solidFill>
-                  <a:srgbClr val="003366"/>
+                  <a:srgbClr val="FFFFFF"/>
                 </a:solidFill>
               </a:defRPr>
             </a:pPr>
@@ -3350,14 +4762,57 @@
       </p:sp>
       <p:sp>
         <p:nvSpPr>
-          <p:cNvPr id="5" name="TextBox 4"/>
+          <p:cNvPr id="6" name="Rectangle 5"/>
+          <p:cNvSpPr/>
+          <p:nvPr/>
+        </p:nvSpPr>
+        <p:spPr>
+          <a:xfrm>
+            <a:off x="365760" y="1325880"/>
+            <a:ext cx="11430000" cy="365760"/>
+          </a:xfrm>
+          <a:prstGeom prst="rect">
+            <a:avLst/>
+          </a:prstGeom>
+          <a:solidFill>
+            <a:srgbClr val="0078D7"/>
+          </a:solidFill>
+          <a:ln>
+            <a:noFill/>
+          </a:ln>
+        </p:spPr>
+        <p:style>
+          <a:lnRef idx="1">
+            <a:schemeClr val="accent1"/>
+          </a:lnRef>
+          <a:fillRef idx="3">
+            <a:schemeClr val="accent1"/>
+          </a:fillRef>
+          <a:effectRef idx="2">
+            <a:schemeClr val="accent1"/>
+          </a:effectRef>
+          <a:fontRef idx="minor">
+            <a:schemeClr val="lt1"/>
+          </a:fontRef>
+        </p:style>
+        <p:txBody>
+          <a:bodyPr rtlCol="0" anchor="ctr"/>
+          <a:lstStyle/>
+          <a:p>
+            <a:pPr algn="ctr"/>
+          </a:p>
+        </p:txBody>
+      </p:sp>
+      <p:sp>
+        <p:nvSpPr>
+          <p:cNvPr id="7" name="TextBox 6"/>
           <p:cNvSpPr txBox="1"/>
           <p:nvPr/>
         </p:nvSpPr>
         <p:spPr>
           <a:xfrm>
-            <a:off x="640080" y="1188720"/>
-            <a:ext cx="10789920" cy="5303520"/>
+            <a:off x="548640" y="1371600"/>
+            <a:ext cx="10972800" cy="274320"/>
           </a:xfrm>
           <a:prstGeom prst="rect">
             <a:avLst/>
@@ -3365,30 +4820,82 @@
           <a:noFill/>
         </p:spPr>
         <p:txBody>
-          <a:bodyPr wrap="square">
+          <a:bodyPr wrap="none">
             <a:spAutoFit/>
           </a:bodyPr>
           <a:lstStyle/>
           <a:p>
             <a:pPr>
-              <a:spcAft>
-                <a:spcPts val="600"/>
-              </a:spcAft>
-              <a:defRPr b="1" sz="2000">
+              <a:defRPr sz="2000" b="1">
+                <a:solidFill>
+                  <a:srgbClr val="FFFFFF"/>
+                </a:solidFill>
+              </a:defRPr>
+            </a:pPr>
+            <a:r>
+              <a:t>Dictionaries: Collections of key-value pairs</a:t>
+            </a:r>
+          </a:p>
+        </p:txBody>
+      </p:sp>
+      <p:sp>
+        <p:nvSpPr>
+          <p:cNvPr id="8" name="TextBox 7"/>
+          <p:cNvSpPr txBox="1"/>
+          <p:nvPr/>
+        </p:nvSpPr>
+        <p:spPr>
+          <a:xfrm>
+            <a:off x="457200" y="1828800"/>
+            <a:ext cx="11247120" cy="320040"/>
+          </a:xfrm>
+          <a:prstGeom prst="rect">
+            <a:avLst/>
+          </a:prstGeom>
+          <a:noFill/>
+        </p:spPr>
+        <p:txBody>
+          <a:bodyPr wrap="none">
+            <a:spAutoFit/>
+          </a:bodyPr>
+          <a:lstStyle/>
+          <a:p>
+            <a:pPr lvl="1">
+              <a:defRPr sz="1600">
                 <a:solidFill>
                   <a:srgbClr val="333333"/>
                 </a:solidFill>
               </a:defRPr>
             </a:pPr>
             <a:r>
-              <a:t>Dictionaries: Collections of key-value pairs</a:t>
-            </a:r>
-          </a:p>
+              <a:t>• Unordered (Python 3.7+: insertion ordered)</a:t>
+            </a:r>
+          </a:p>
+        </p:txBody>
+      </p:sp>
+      <p:sp>
+        <p:nvSpPr>
+          <p:cNvPr id="9" name="TextBox 8"/>
+          <p:cNvSpPr txBox="1"/>
+          <p:nvPr/>
+        </p:nvSpPr>
+        <p:spPr>
+          <a:xfrm>
+            <a:off x="457200" y="2103120"/>
+            <a:ext cx="11247120" cy="320040"/>
+          </a:xfrm>
+          <a:prstGeom prst="rect">
+            <a:avLst/>
+          </a:prstGeom>
+          <a:noFill/>
+        </p:spPr>
+        <p:txBody>
+          <a:bodyPr wrap="none">
+            <a:spAutoFit/>
+          </a:bodyPr>
+          <a:lstStyle/>
           <a:p>
             <a:pPr lvl="1">
-              <a:spcAft>
-                <a:spcPts val="400"/>
-              </a:spcAft>
               <a:defRPr sz="1600">
                 <a:solidFill>
                   <a:srgbClr val="333333"/>
@@ -3396,14 +4903,34 @@
               </a:defRPr>
             </a:pPr>
             <a:r>
-              <a:t>• Unordered (Python 3.7+: insertion ordered)</a:t>
-            </a:r>
-          </a:p>
+              <a:t>• Keys must be unique</a:t>
+            </a:r>
+          </a:p>
+        </p:txBody>
+      </p:sp>
+      <p:sp>
+        <p:nvSpPr>
+          <p:cNvPr id="10" name="TextBox 9"/>
+          <p:cNvSpPr txBox="1"/>
+          <p:nvPr/>
+        </p:nvSpPr>
+        <p:spPr>
+          <a:xfrm>
+            <a:off x="457200" y="2377439"/>
+            <a:ext cx="11247120" cy="320040"/>
+          </a:xfrm>
+          <a:prstGeom prst="rect">
+            <a:avLst/>
+          </a:prstGeom>
+          <a:noFill/>
+        </p:spPr>
+        <p:txBody>
+          <a:bodyPr wrap="none">
+            <a:spAutoFit/>
+          </a:bodyPr>
+          <a:lstStyle/>
           <a:p>
             <a:pPr lvl="1">
-              <a:spcAft>
-                <a:spcPts val="400"/>
-              </a:spcAft>
               <a:defRPr sz="1600">
                 <a:solidFill>
                   <a:srgbClr val="333333"/>
@@ -3411,14 +4938,34 @@
               </a:defRPr>
             </a:pPr>
             <a:r>
-              <a:t>• Keys must be unique</a:t>
-            </a:r>
-          </a:p>
+              <a:t>• Values can be any type</a:t>
+            </a:r>
+          </a:p>
+        </p:txBody>
+      </p:sp>
+      <p:sp>
+        <p:nvSpPr>
+          <p:cNvPr id="11" name="TextBox 10"/>
+          <p:cNvSpPr txBox="1"/>
+          <p:nvPr/>
+        </p:nvSpPr>
+        <p:spPr>
+          <a:xfrm>
+            <a:off x="457200" y="2651759"/>
+            <a:ext cx="11247120" cy="320040"/>
+          </a:xfrm>
+          <a:prstGeom prst="rect">
+            <a:avLst/>
+          </a:prstGeom>
+          <a:noFill/>
+        </p:spPr>
+        <p:txBody>
+          <a:bodyPr wrap="none">
+            <a:spAutoFit/>
+          </a:bodyPr>
+          <a:lstStyle/>
           <a:p>
             <a:pPr lvl="1">
-              <a:spcAft>
-                <a:spcPts val="400"/>
-              </a:spcAft>
               <a:defRPr sz="1600">
                 <a:solidFill>
                   <a:srgbClr val="333333"/>
@@ -3426,59 +4973,401 @@
               </a:defRPr>
             </a:pPr>
             <a:r>
-              <a:t>• Values can be any type</a:t>
-            </a:r>
-          </a:p>
-          <a:p>
-            <a:pPr lvl="1">
-              <a:spcAft>
-                <a:spcPts val="400"/>
-              </a:spcAft>
-              <a:defRPr sz="1600">
+              <a:t>• Mutable</a:t>
+            </a:r>
+          </a:p>
+        </p:txBody>
+      </p:sp>
+      <p:sp>
+        <p:nvSpPr>
+          <p:cNvPr id="12" name="Rectangle 11"/>
+          <p:cNvSpPr/>
+          <p:nvPr/>
+        </p:nvSpPr>
+        <p:spPr>
+          <a:xfrm>
+            <a:off x="365760" y="2880359"/>
+            <a:ext cx="11430000" cy="365760"/>
+          </a:xfrm>
+          <a:prstGeom prst="rect">
+            <a:avLst/>
+          </a:prstGeom>
+          <a:solidFill>
+            <a:srgbClr val="0078D7"/>
+          </a:solidFill>
+          <a:ln>
+            <a:noFill/>
+          </a:ln>
+        </p:spPr>
+        <p:style>
+          <a:lnRef idx="1">
+            <a:schemeClr val="accent1"/>
+          </a:lnRef>
+          <a:fillRef idx="3">
+            <a:schemeClr val="accent1"/>
+          </a:fillRef>
+          <a:effectRef idx="2">
+            <a:schemeClr val="accent1"/>
+          </a:effectRef>
+          <a:fontRef idx="minor">
+            <a:schemeClr val="lt1"/>
+          </a:fontRef>
+        </p:style>
+        <p:txBody>
+          <a:bodyPr rtlCol="0" anchor="ctr"/>
+          <a:lstStyle/>
+          <a:p>
+            <a:pPr algn="ctr"/>
+          </a:p>
+        </p:txBody>
+      </p:sp>
+      <p:sp>
+        <p:nvSpPr>
+          <p:cNvPr id="13" name="TextBox 12"/>
+          <p:cNvSpPr txBox="1"/>
+          <p:nvPr/>
+        </p:nvSpPr>
+        <p:spPr>
+          <a:xfrm>
+            <a:off x="548640" y="2926079"/>
+            <a:ext cx="10972800" cy="274320"/>
+          </a:xfrm>
+          <a:prstGeom prst="rect">
+            <a:avLst/>
+          </a:prstGeom>
+          <a:noFill/>
+        </p:spPr>
+        <p:txBody>
+          <a:bodyPr wrap="none">
+            <a:spAutoFit/>
+          </a:bodyPr>
+          <a:lstStyle/>
+          <a:p>
+            <a:pPr>
+              <a:defRPr sz="2000" b="1">
+                <a:solidFill>
+                  <a:srgbClr val="FFFFFF"/>
+                </a:solidFill>
+              </a:defRPr>
+            </a:pPr>
+            <a:r>
+              <a:t>Creating Dictionaries:</a:t>
+            </a:r>
+          </a:p>
+        </p:txBody>
+      </p:sp>
+      <p:sp>
+        <p:nvSpPr>
+          <p:cNvPr id="14" name="TextBox 13"/>
+          <p:cNvSpPr txBox="1"/>
+          <p:nvPr/>
+        </p:nvSpPr>
+        <p:spPr>
+          <a:xfrm>
+            <a:off x="457200" y="3383279"/>
+            <a:ext cx="11247120" cy="320040"/>
+          </a:xfrm>
+          <a:prstGeom prst="rect">
+            <a:avLst/>
+          </a:prstGeom>
+          <a:noFill/>
+        </p:spPr>
+        <p:txBody>
+          <a:bodyPr wrap="none">
+            <a:spAutoFit/>
+          </a:bodyPr>
+          <a:lstStyle/>
+          <a:p>
+            <a:pPr>
+              <a:defRPr sz="1700">
                 <a:solidFill>
                   <a:srgbClr val="333333"/>
                 </a:solidFill>
               </a:defRPr>
             </a:pPr>
             <a:r>
-              <a:t>• Mutable</a:t>
-            </a:r>
-          </a:p>
+              <a:t>student = {"name": "Alice", "age": 20}</a:t>
+            </a:r>
+          </a:p>
+        </p:txBody>
+      </p:sp>
+      <p:sp>
+        <p:nvSpPr>
+          <p:cNvPr id="15" name="Rectangle 14"/>
+          <p:cNvSpPr/>
+          <p:nvPr/>
+        </p:nvSpPr>
+        <p:spPr>
+          <a:xfrm>
+            <a:off x="640080" y="3611879"/>
+            <a:ext cx="10789920" cy="640080"/>
+          </a:xfrm>
+          <a:prstGeom prst="rect">
+            <a:avLst/>
+          </a:prstGeom>
+          <a:solidFill>
+            <a:srgbClr val="282C34"/>
+          </a:solidFill>
+          <a:ln>
+            <a:noFill/>
+          </a:ln>
+        </p:spPr>
+        <p:style>
+          <a:lnRef idx="1">
+            <a:schemeClr val="accent1"/>
+          </a:lnRef>
+          <a:fillRef idx="3">
+            <a:schemeClr val="accent1"/>
+          </a:fillRef>
+          <a:effectRef idx="2">
+            <a:schemeClr val="accent1"/>
+          </a:effectRef>
+          <a:fontRef idx="minor">
+            <a:schemeClr val="lt1"/>
+          </a:fontRef>
+        </p:style>
+        <p:txBody>
+          <a:bodyPr rtlCol="0" anchor="ctr"/>
+          <a:lstStyle/>
+          <a:p>
+            <a:pPr algn="ctr"/>
+          </a:p>
+        </p:txBody>
+      </p:sp>
+      <p:sp>
+        <p:nvSpPr>
+          <p:cNvPr id="16" name="Rectangle 15"/>
+          <p:cNvSpPr/>
+          <p:nvPr/>
+        </p:nvSpPr>
+        <p:spPr>
+          <a:xfrm>
+            <a:off x="640080" y="3611879"/>
+            <a:ext cx="73152" cy="640080"/>
+          </a:xfrm>
+          <a:prstGeom prst="rect">
+            <a:avLst/>
+          </a:prstGeom>
+          <a:solidFill>
+            <a:srgbClr val="61AFEF"/>
+          </a:solidFill>
+          <a:ln>
+            <a:noFill/>
+          </a:ln>
+        </p:spPr>
+        <p:style>
+          <a:lnRef idx="1">
+            <a:schemeClr val="accent1"/>
+          </a:lnRef>
+          <a:fillRef idx="3">
+            <a:schemeClr val="accent1"/>
+          </a:fillRef>
+          <a:effectRef idx="2">
+            <a:schemeClr val="accent1"/>
+          </a:effectRef>
+          <a:fontRef idx="minor">
+            <a:schemeClr val="lt1"/>
+          </a:fontRef>
+        </p:style>
+        <p:txBody>
+          <a:bodyPr rtlCol="0" anchor="ctr"/>
+          <a:lstStyle/>
+          <a:p>
+            <a:pPr algn="ctr"/>
+          </a:p>
+        </p:txBody>
+      </p:sp>
+      <p:sp>
+        <p:nvSpPr>
+          <p:cNvPr id="17" name="TextBox 16"/>
+          <p:cNvSpPr txBox="1"/>
+          <p:nvPr/>
+        </p:nvSpPr>
+        <p:spPr>
+          <a:xfrm>
+            <a:off x="914400" y="3657599"/>
+            <a:ext cx="10241280" cy="548640"/>
+          </a:xfrm>
+          <a:prstGeom prst="rect">
+            <a:avLst/>
+          </a:prstGeom>
+          <a:noFill/>
+        </p:spPr>
+        <p:txBody>
+          <a:bodyPr wrap="none">
+            <a:spAutoFit/>
+          </a:bodyPr>
+          <a:lstStyle/>
           <a:p>
             <a:pPr>
               <a:spcAft>
-                <a:spcPts val="600"/>
+                <a:spcPts val="200"/>
               </a:spcAft>
-              <a:defRPr b="1" sz="2000">
-                <a:solidFill>
-                  <a:srgbClr val="333333"/>
-                </a:solidFill>
-              </a:defRPr>
-            </a:pPr>
-            <a:r>
-              <a:t>Creating Dictionaries:</a:t>
+              <a:defRPr sz="1400">
+                <a:solidFill>
+                  <a:srgbClr val="ABB2BF"/>
+                </a:solidFill>
+                <a:latin typeface="Consolas"/>
+              </a:defRPr>
+            </a:pPr>
+            <a:r>
+              <a:t>empty = {}</a:t>
             </a:r>
           </a:p>
           <a:p>
             <a:pPr>
               <a:spcAft>
-                <a:spcPts val="600"/>
+                <a:spcPts val="200"/>
               </a:spcAft>
-              <a:defRPr b="1" sz="2000">
+              <a:defRPr sz="1400">
+                <a:solidFill>
+                  <a:srgbClr val="ABB2BF"/>
+                </a:solidFill>
+                <a:latin typeface="Consolas"/>
+              </a:defRPr>
+            </a:pPr>
+            <a:r>
+              <a:t>empty = dict()</a:t>
+            </a:r>
+          </a:p>
+        </p:txBody>
+      </p:sp>
+      <p:sp>
+        <p:nvSpPr>
+          <p:cNvPr id="18" name="Rectangle 17"/>
+          <p:cNvSpPr/>
+          <p:nvPr/>
+        </p:nvSpPr>
+        <p:spPr>
+          <a:xfrm>
+            <a:off x="365760" y="4389120"/>
+            <a:ext cx="11430000" cy="365760"/>
+          </a:xfrm>
+          <a:prstGeom prst="rect">
+            <a:avLst/>
+          </a:prstGeom>
+          <a:solidFill>
+            <a:srgbClr val="0078D7"/>
+          </a:solidFill>
+          <a:ln>
+            <a:noFill/>
+          </a:ln>
+        </p:spPr>
+        <p:style>
+          <a:lnRef idx="1">
+            <a:schemeClr val="accent1"/>
+          </a:lnRef>
+          <a:fillRef idx="3">
+            <a:schemeClr val="accent1"/>
+          </a:fillRef>
+          <a:effectRef idx="2">
+            <a:schemeClr val="accent1"/>
+          </a:effectRef>
+          <a:fontRef idx="minor">
+            <a:schemeClr val="lt1"/>
+          </a:fontRef>
+        </p:style>
+        <p:txBody>
+          <a:bodyPr rtlCol="0" anchor="ctr"/>
+          <a:lstStyle/>
+          <a:p>
+            <a:pPr algn="ctr"/>
+          </a:p>
+        </p:txBody>
+      </p:sp>
+      <p:sp>
+        <p:nvSpPr>
+          <p:cNvPr id="19" name="TextBox 18"/>
+          <p:cNvSpPr txBox="1"/>
+          <p:nvPr/>
+        </p:nvSpPr>
+        <p:spPr>
+          <a:xfrm>
+            <a:off x="548640" y="4434840"/>
+            <a:ext cx="10972800" cy="274320"/>
+          </a:xfrm>
+          <a:prstGeom prst="rect">
+            <a:avLst/>
+          </a:prstGeom>
+          <a:noFill/>
+        </p:spPr>
+        <p:txBody>
+          <a:bodyPr wrap="none">
+            <a:spAutoFit/>
+          </a:bodyPr>
+          <a:lstStyle/>
+          <a:p>
+            <a:pPr>
+              <a:defRPr sz="2000" b="1">
+                <a:solidFill>
+                  <a:srgbClr val="FFFFFF"/>
+                </a:solidFill>
+              </a:defRPr>
+            </a:pPr>
+            <a:r>
+              <a:t>When to Use:</a:t>
+            </a:r>
+          </a:p>
+        </p:txBody>
+      </p:sp>
+      <p:sp>
+        <p:nvSpPr>
+          <p:cNvPr id="20" name="TextBox 19"/>
+          <p:cNvSpPr txBox="1"/>
+          <p:nvPr/>
+        </p:nvSpPr>
+        <p:spPr>
+          <a:xfrm>
+            <a:off x="457200" y="4892040"/>
+            <a:ext cx="11247120" cy="320040"/>
+          </a:xfrm>
+          <a:prstGeom prst="rect">
+            <a:avLst/>
+          </a:prstGeom>
+          <a:noFill/>
+        </p:spPr>
+        <p:txBody>
+          <a:bodyPr wrap="none">
+            <a:spAutoFit/>
+          </a:bodyPr>
+          <a:lstStyle/>
+          <a:p>
+            <a:pPr lvl="1">
+              <a:defRPr sz="1600">
                 <a:solidFill>
                   <a:srgbClr val="333333"/>
                 </a:solidFill>
               </a:defRPr>
             </a:pPr>
             <a:r>
-              <a:t>student = {"name": "Alice", "age": 20}</a:t>
-            </a:r>
-          </a:p>
-          <a:p>
-            <a:pPr>
-              <a:spcAft>
-                <a:spcPts val="600"/>
-              </a:spcAft>
+              <a:t>• Associate related data</a:t>
+            </a:r>
+          </a:p>
+        </p:txBody>
+      </p:sp>
+      <p:sp>
+        <p:nvSpPr>
+          <p:cNvPr id="21" name="TextBox 20"/>
+          <p:cNvSpPr txBox="1"/>
+          <p:nvPr/>
+        </p:nvSpPr>
+        <p:spPr>
+          <a:xfrm>
+            <a:off x="457200" y="5166359"/>
+            <a:ext cx="11247120" cy="320040"/>
+          </a:xfrm>
+          <a:prstGeom prst="rect">
+            <a:avLst/>
+          </a:prstGeom>
+          <a:noFill/>
+        </p:spPr>
+        <p:txBody>
+          <a:bodyPr wrap="none">
+            <a:spAutoFit/>
+          </a:bodyPr>
+          <a:lstStyle/>
+          <a:p>
+            <a:pPr lvl="1">
               <a:defRPr sz="1600">
                 <a:solidFill>
                   <a:srgbClr val="333333"/>
@@ -3486,14 +5375,34 @@
               </a:defRPr>
             </a:pPr>
             <a:r>
-              <a:t>empty = {}</a:t>
-            </a:r>
-          </a:p>
-          <a:p>
-            <a:pPr>
-              <a:spcAft>
-                <a:spcPts val="600"/>
-              </a:spcAft>
+              <a:t>• Fast lookup by key</a:t>
+            </a:r>
+          </a:p>
+        </p:txBody>
+      </p:sp>
+      <p:sp>
+        <p:nvSpPr>
+          <p:cNvPr id="22" name="TextBox 21"/>
+          <p:cNvSpPr txBox="1"/>
+          <p:nvPr/>
+        </p:nvSpPr>
+        <p:spPr>
+          <a:xfrm>
+            <a:off x="457200" y="5440679"/>
+            <a:ext cx="11247120" cy="320040"/>
+          </a:xfrm>
+          <a:prstGeom prst="rect">
+            <a:avLst/>
+          </a:prstGeom>
+          <a:noFill/>
+        </p:spPr>
+        <p:txBody>
+          <a:bodyPr wrap="none">
+            <a:spAutoFit/>
+          </a:bodyPr>
+          <a:lstStyle/>
+          <a:p>
+            <a:pPr lvl="1">
               <a:defRPr sz="1600">
                 <a:solidFill>
                   <a:srgbClr val="333333"/>
@@ -3501,89 +5410,69 @@
               </a:defRPr>
             </a:pPr>
             <a:r>
-              <a:t>empty = dict()</a:t>
-            </a:r>
-          </a:p>
-          <a:p>
-            <a:pPr>
-              <a:spcAft>
-                <a:spcPts val="600"/>
-              </a:spcAft>
-              <a:defRPr b="1" sz="2000">
+              <a:t>• Represent real-world objects</a:t>
+            </a:r>
+          </a:p>
+        </p:txBody>
+      </p:sp>
+      <p:sp>
+        <p:nvSpPr>
+          <p:cNvPr id="23" name="TextBox 22"/>
+          <p:cNvSpPr txBox="1"/>
+          <p:nvPr/>
+        </p:nvSpPr>
+        <p:spPr>
+          <a:xfrm>
+            <a:off x="457200" y="5714999"/>
+            <a:ext cx="11247120" cy="320040"/>
+          </a:xfrm>
+          <a:prstGeom prst="rect">
+            <a:avLst/>
+          </a:prstGeom>
+          <a:noFill/>
+        </p:spPr>
+        <p:txBody>
+          <a:bodyPr wrap="none">
+            <a:spAutoFit/>
+          </a:bodyPr>
+          <a:lstStyle/>
+          <a:p>
+            <a:pPr lvl="1">
+              <a:defRPr sz="1600">
                 <a:solidFill>
                   <a:srgbClr val="333333"/>
                 </a:solidFill>
               </a:defRPr>
             </a:pPr>
             <a:r>
-              <a:t>When to Use:</a:t>
-            </a:r>
-          </a:p>
+              <a:t>• Configuration settings</a:t>
+            </a:r>
+          </a:p>
+        </p:txBody>
+      </p:sp>
+      <p:sp>
+        <p:nvSpPr>
+          <p:cNvPr id="24" name="TextBox 23"/>
+          <p:cNvSpPr txBox="1"/>
+          <p:nvPr/>
+        </p:nvSpPr>
+        <p:spPr>
+          <a:xfrm>
+            <a:off x="457200" y="5989319"/>
+            <a:ext cx="11247120" cy="320040"/>
+          </a:xfrm>
+          <a:prstGeom prst="rect">
+            <a:avLst/>
+          </a:prstGeom>
+          <a:noFill/>
+        </p:spPr>
+        <p:txBody>
+          <a:bodyPr wrap="none">
+            <a:spAutoFit/>
+          </a:bodyPr>
+          <a:lstStyle/>
           <a:p>
             <a:pPr lvl="1">
-              <a:spcAft>
-                <a:spcPts val="400"/>
-              </a:spcAft>
-              <a:defRPr sz="1600">
-                <a:solidFill>
-                  <a:srgbClr val="333333"/>
-                </a:solidFill>
-              </a:defRPr>
-            </a:pPr>
-            <a:r>
-              <a:t>• Associate related data</a:t>
-            </a:r>
-          </a:p>
-          <a:p>
-            <a:pPr lvl="1">
-              <a:spcAft>
-                <a:spcPts val="400"/>
-              </a:spcAft>
-              <a:defRPr sz="1600">
-                <a:solidFill>
-                  <a:srgbClr val="333333"/>
-                </a:solidFill>
-              </a:defRPr>
-            </a:pPr>
-            <a:r>
-              <a:t>• Fast lookup by key</a:t>
-            </a:r>
-          </a:p>
-          <a:p>
-            <a:pPr lvl="1">
-              <a:spcAft>
-                <a:spcPts val="400"/>
-              </a:spcAft>
-              <a:defRPr sz="1600">
-                <a:solidFill>
-                  <a:srgbClr val="333333"/>
-                </a:solidFill>
-              </a:defRPr>
-            </a:pPr>
-            <a:r>
-              <a:t>• Represent real-world objects</a:t>
-            </a:r>
-          </a:p>
-          <a:p>
-            <a:pPr lvl="1">
-              <a:spcAft>
-                <a:spcPts val="400"/>
-              </a:spcAft>
-              <a:defRPr sz="1600">
-                <a:solidFill>
-                  <a:srgbClr val="333333"/>
-                </a:solidFill>
-              </a:defRPr>
-            </a:pPr>
-            <a:r>
-              <a:t>• Configuration settings</a:t>
-            </a:r>
-          </a:p>
-          <a:p>
-            <a:pPr lvl="1">
-              <a:spcAft>
-                <a:spcPts val="400"/>
-              </a:spcAft>
               <a:defRPr sz="1600">
                 <a:solidFill>
                   <a:srgbClr val="333333"/>
@@ -3629,7 +5518,7 @@
             <a:avLst/>
           </a:prstGeom>
           <a:solidFill>
-            <a:srgbClr val="FFFFFF"/>
+            <a:srgbClr val="FAFAFA"/>
           </a:solidFill>
           <a:ln>
             <a:noFill/>
@@ -3666,7 +5555,7 @@
         <p:spPr>
           <a:xfrm>
             <a:off x="0" y="0"/>
-            <a:ext cx="12191695" cy="137160"/>
+            <a:ext cx="12191695" cy="1097280"/>
           </a:xfrm>
           <a:prstGeom prst="rect">
             <a:avLst/>
@@ -3702,13 +5591,56 @@
       </p:sp>
       <p:sp>
         <p:nvSpPr>
-          <p:cNvPr id="4" name="TextBox 3"/>
+          <p:cNvPr id="4" name="Rectangle 3"/>
+          <p:cNvSpPr/>
+          <p:nvPr/>
+        </p:nvSpPr>
+        <p:spPr>
+          <a:xfrm>
+            <a:off x="0" y="1097280"/>
+            <a:ext cx="137160" cy="5760720"/>
+          </a:xfrm>
+          <a:prstGeom prst="rect">
+            <a:avLst/>
+          </a:prstGeom>
+          <a:solidFill>
+            <a:srgbClr val="FFBB33"/>
+          </a:solidFill>
+          <a:ln>
+            <a:noFill/>
+          </a:ln>
+        </p:spPr>
+        <p:style>
+          <a:lnRef idx="1">
+            <a:schemeClr val="accent1"/>
+          </a:lnRef>
+          <a:fillRef idx="3">
+            <a:schemeClr val="accent1"/>
+          </a:fillRef>
+          <a:effectRef idx="2">
+            <a:schemeClr val="accent1"/>
+          </a:effectRef>
+          <a:fontRef idx="minor">
+            <a:schemeClr val="lt1"/>
+          </a:fontRef>
+        </p:style>
+        <p:txBody>
+          <a:bodyPr rtlCol="0" anchor="ctr"/>
+          <a:lstStyle/>
+          <a:p>
+            <a:pPr algn="ctr"/>
+          </a:p>
+        </p:txBody>
+      </p:sp>
+      <p:sp>
+        <p:nvSpPr>
+          <p:cNvPr id="5" name="TextBox 4"/>
           <p:cNvSpPr txBox="1"/>
           <p:nvPr/>
         </p:nvSpPr>
         <p:spPr>
           <a:xfrm>
-            <a:off x="457200" y="320040"/>
+            <a:off x="365760" y="274320"/>
             <a:ext cx="10972800" cy="640080"/>
           </a:xfrm>
           <a:prstGeom prst="rect">
@@ -3725,7 +5657,7 @@
             <a:pPr>
               <a:defRPr sz="3600" b="1">
                 <a:solidFill>
-                  <a:srgbClr val="003366"/>
+                  <a:srgbClr val="FFFFFF"/>
                 </a:solidFill>
               </a:defRPr>
             </a:pPr>
@@ -3737,14 +5669,57 @@
       </p:sp>
       <p:sp>
         <p:nvSpPr>
-          <p:cNvPr id="5" name="TextBox 4"/>
+          <p:cNvPr id="6" name="Rectangle 5"/>
+          <p:cNvSpPr/>
+          <p:nvPr/>
+        </p:nvSpPr>
+        <p:spPr>
+          <a:xfrm>
+            <a:off x="365760" y="1325880"/>
+            <a:ext cx="11430000" cy="365760"/>
+          </a:xfrm>
+          <a:prstGeom prst="rect">
+            <a:avLst/>
+          </a:prstGeom>
+          <a:solidFill>
+            <a:srgbClr val="0078D7"/>
+          </a:solidFill>
+          <a:ln>
+            <a:noFill/>
+          </a:ln>
+        </p:spPr>
+        <p:style>
+          <a:lnRef idx="1">
+            <a:schemeClr val="accent1"/>
+          </a:lnRef>
+          <a:fillRef idx="3">
+            <a:schemeClr val="accent1"/>
+          </a:fillRef>
+          <a:effectRef idx="2">
+            <a:schemeClr val="accent1"/>
+          </a:effectRef>
+          <a:fontRef idx="minor">
+            <a:schemeClr val="lt1"/>
+          </a:fontRef>
+        </p:style>
+        <p:txBody>
+          <a:bodyPr rtlCol="0" anchor="ctr"/>
+          <a:lstStyle/>
+          <a:p>
+            <a:pPr algn="ctr"/>
+          </a:p>
+        </p:txBody>
+      </p:sp>
+      <p:sp>
+        <p:nvSpPr>
+          <p:cNvPr id="7" name="TextBox 6"/>
           <p:cNvSpPr txBox="1"/>
           <p:nvPr/>
         </p:nvSpPr>
         <p:spPr>
           <a:xfrm>
-            <a:off x="640080" y="1188720"/>
-            <a:ext cx="10789920" cy="5303520"/>
+            <a:off x="548640" y="1371600"/>
+            <a:ext cx="10972800" cy="274320"/>
           </a:xfrm>
           <a:prstGeom prst="rect">
             <a:avLst/>
@@ -3752,233 +5727,773 @@
           <a:noFill/>
         </p:spPr>
         <p:txBody>
-          <a:bodyPr wrap="square">
+          <a:bodyPr wrap="none">
             <a:spAutoFit/>
           </a:bodyPr>
           <a:lstStyle/>
           <a:p>
             <a:pPr>
-              <a:spcAft>
-                <a:spcPts val="600"/>
-              </a:spcAft>
-              <a:defRPr b="1" sz="2000">
+              <a:defRPr sz="2000" b="1">
+                <a:solidFill>
+                  <a:srgbClr val="FFFFFF"/>
+                </a:solidFill>
+              </a:defRPr>
+            </a:pPr>
+            <a:r>
+              <a:t>Access by Key:</a:t>
+            </a:r>
+          </a:p>
+        </p:txBody>
+      </p:sp>
+      <p:sp>
+        <p:nvSpPr>
+          <p:cNvPr id="8" name="TextBox 7"/>
+          <p:cNvSpPr txBox="1"/>
+          <p:nvPr/>
+        </p:nvSpPr>
+        <p:spPr>
+          <a:xfrm>
+            <a:off x="457200" y="1828800"/>
+            <a:ext cx="11247120" cy="320040"/>
+          </a:xfrm>
+          <a:prstGeom prst="rect">
+            <a:avLst/>
+          </a:prstGeom>
+          <a:noFill/>
+        </p:spPr>
+        <p:txBody>
+          <a:bodyPr wrap="none">
+            <a:spAutoFit/>
+          </a:bodyPr>
+          <a:lstStyle/>
+          <a:p>
+            <a:pPr>
+              <a:defRPr sz="1700">
                 <a:solidFill>
                   <a:srgbClr val="333333"/>
                 </a:solidFill>
               </a:defRPr>
             </a:pPr>
             <a:r>
-              <a:t>Access by Key:</a:t>
-            </a:r>
-          </a:p>
+              <a:t>student["name"]  # "Alice"</a:t>
+            </a:r>
+          </a:p>
+        </p:txBody>
+      </p:sp>
+      <p:sp>
+        <p:nvSpPr>
+          <p:cNvPr id="9" name="TextBox 8"/>
+          <p:cNvSpPr txBox="1"/>
+          <p:nvPr/>
+        </p:nvSpPr>
+        <p:spPr>
+          <a:xfrm>
+            <a:off x="457200" y="2103120"/>
+            <a:ext cx="11247120" cy="320040"/>
+          </a:xfrm>
+          <a:prstGeom prst="rect">
+            <a:avLst/>
+          </a:prstGeom>
+          <a:noFill/>
+        </p:spPr>
+        <p:txBody>
+          <a:bodyPr wrap="none">
+            <a:spAutoFit/>
+          </a:bodyPr>
+          <a:lstStyle/>
+          <a:p>
+            <a:pPr>
+              <a:defRPr sz="1700">
+                <a:solidFill>
+                  <a:srgbClr val="333333"/>
+                </a:solidFill>
+              </a:defRPr>
+            </a:pPr>
+            <a:r>
+              <a:t>student.get("age")  # 20</a:t>
+            </a:r>
+          </a:p>
+        </p:txBody>
+      </p:sp>
+      <p:sp>
+        <p:nvSpPr>
+          <p:cNvPr id="10" name="TextBox 9"/>
+          <p:cNvSpPr txBox="1"/>
+          <p:nvPr/>
+        </p:nvSpPr>
+        <p:spPr>
+          <a:xfrm>
+            <a:off x="457200" y="2377439"/>
+            <a:ext cx="11247120" cy="320040"/>
+          </a:xfrm>
+          <a:prstGeom prst="rect">
+            <a:avLst/>
+          </a:prstGeom>
+          <a:noFill/>
+        </p:spPr>
+        <p:txBody>
+          <a:bodyPr wrap="none">
+            <a:spAutoFit/>
+          </a:bodyPr>
+          <a:lstStyle/>
+          <a:p>
+            <a:pPr>
+              <a:defRPr sz="1700">
+                <a:solidFill>
+                  <a:srgbClr val="333333"/>
+                </a:solidFill>
+              </a:defRPr>
+            </a:pPr>
+            <a:r>
+              <a:t>student.get("grade", "N/A")  # Default</a:t>
+            </a:r>
+          </a:p>
+        </p:txBody>
+      </p:sp>
+      <p:sp>
+        <p:nvSpPr>
+          <p:cNvPr id="11" name="Rectangle 10"/>
+          <p:cNvSpPr/>
+          <p:nvPr/>
+        </p:nvSpPr>
+        <p:spPr>
+          <a:xfrm>
+            <a:off x="365760" y="2606039"/>
+            <a:ext cx="11430000" cy="365760"/>
+          </a:xfrm>
+          <a:prstGeom prst="rect">
+            <a:avLst/>
+          </a:prstGeom>
+          <a:solidFill>
+            <a:srgbClr val="0078D7"/>
+          </a:solidFill>
+          <a:ln>
+            <a:noFill/>
+          </a:ln>
+        </p:spPr>
+        <p:style>
+          <a:lnRef idx="1">
+            <a:schemeClr val="accent1"/>
+          </a:lnRef>
+          <a:fillRef idx="3">
+            <a:schemeClr val="accent1"/>
+          </a:fillRef>
+          <a:effectRef idx="2">
+            <a:schemeClr val="accent1"/>
+          </a:effectRef>
+          <a:fontRef idx="minor">
+            <a:schemeClr val="lt1"/>
+          </a:fontRef>
+        </p:style>
+        <p:txBody>
+          <a:bodyPr rtlCol="0" anchor="ctr"/>
+          <a:lstStyle/>
+          <a:p>
+            <a:pPr algn="ctr"/>
+          </a:p>
+        </p:txBody>
+      </p:sp>
+      <p:sp>
+        <p:nvSpPr>
+          <p:cNvPr id="12" name="TextBox 11"/>
+          <p:cNvSpPr txBox="1"/>
+          <p:nvPr/>
+        </p:nvSpPr>
+        <p:spPr>
+          <a:xfrm>
+            <a:off x="548640" y="2651759"/>
+            <a:ext cx="10972800" cy="274320"/>
+          </a:xfrm>
+          <a:prstGeom prst="rect">
+            <a:avLst/>
+          </a:prstGeom>
+          <a:noFill/>
+        </p:spPr>
+        <p:txBody>
+          <a:bodyPr wrap="none">
+            <a:spAutoFit/>
+          </a:bodyPr>
+          <a:lstStyle/>
+          <a:p>
+            <a:pPr>
+              <a:defRPr sz="2000" b="1">
+                <a:solidFill>
+                  <a:srgbClr val="FFFFFF"/>
+                </a:solidFill>
+              </a:defRPr>
+            </a:pPr>
+            <a:r>
+              <a:t>Adding/Updating:</a:t>
+            </a:r>
+          </a:p>
+        </p:txBody>
+      </p:sp>
+      <p:sp>
+        <p:nvSpPr>
+          <p:cNvPr id="13" name="Rectangle 12"/>
+          <p:cNvSpPr/>
+          <p:nvPr/>
+        </p:nvSpPr>
+        <p:spPr>
+          <a:xfrm>
+            <a:off x="640080" y="3063239"/>
+            <a:ext cx="10789920" cy="640080"/>
+          </a:xfrm>
+          <a:prstGeom prst="rect">
+            <a:avLst/>
+          </a:prstGeom>
+          <a:solidFill>
+            <a:srgbClr val="282C34"/>
+          </a:solidFill>
+          <a:ln>
+            <a:noFill/>
+          </a:ln>
+        </p:spPr>
+        <p:style>
+          <a:lnRef idx="1">
+            <a:schemeClr val="accent1"/>
+          </a:lnRef>
+          <a:fillRef idx="3">
+            <a:schemeClr val="accent1"/>
+          </a:fillRef>
+          <a:effectRef idx="2">
+            <a:schemeClr val="accent1"/>
+          </a:effectRef>
+          <a:fontRef idx="minor">
+            <a:schemeClr val="lt1"/>
+          </a:fontRef>
+        </p:style>
+        <p:txBody>
+          <a:bodyPr rtlCol="0" anchor="ctr"/>
+          <a:lstStyle/>
+          <a:p>
+            <a:pPr algn="ctr"/>
+          </a:p>
+        </p:txBody>
+      </p:sp>
+      <p:sp>
+        <p:nvSpPr>
+          <p:cNvPr id="14" name="Rectangle 13"/>
+          <p:cNvSpPr/>
+          <p:nvPr/>
+        </p:nvSpPr>
+        <p:spPr>
+          <a:xfrm>
+            <a:off x="640080" y="3063239"/>
+            <a:ext cx="73152" cy="640080"/>
+          </a:xfrm>
+          <a:prstGeom prst="rect">
+            <a:avLst/>
+          </a:prstGeom>
+          <a:solidFill>
+            <a:srgbClr val="61AFEF"/>
+          </a:solidFill>
+          <a:ln>
+            <a:noFill/>
+          </a:ln>
+        </p:spPr>
+        <p:style>
+          <a:lnRef idx="1">
+            <a:schemeClr val="accent1"/>
+          </a:lnRef>
+          <a:fillRef idx="3">
+            <a:schemeClr val="accent1"/>
+          </a:fillRef>
+          <a:effectRef idx="2">
+            <a:schemeClr val="accent1"/>
+          </a:effectRef>
+          <a:fontRef idx="minor">
+            <a:schemeClr val="lt1"/>
+          </a:fontRef>
+        </p:style>
+        <p:txBody>
+          <a:bodyPr rtlCol="0" anchor="ctr"/>
+          <a:lstStyle/>
+          <a:p>
+            <a:pPr algn="ctr"/>
+          </a:p>
+        </p:txBody>
+      </p:sp>
+      <p:sp>
+        <p:nvSpPr>
+          <p:cNvPr id="15" name="TextBox 14"/>
+          <p:cNvSpPr txBox="1"/>
+          <p:nvPr/>
+        </p:nvSpPr>
+        <p:spPr>
+          <a:xfrm>
+            <a:off x="914400" y="3108959"/>
+            <a:ext cx="10241280" cy="548640"/>
+          </a:xfrm>
+          <a:prstGeom prst="rect">
+            <a:avLst/>
+          </a:prstGeom>
+          <a:noFill/>
+        </p:spPr>
+        <p:txBody>
+          <a:bodyPr wrap="none">
+            <a:spAutoFit/>
+          </a:bodyPr>
+          <a:lstStyle/>
           <a:p>
             <a:pPr>
               <a:spcAft>
-                <a:spcPts val="600"/>
+                <a:spcPts val="200"/>
               </a:spcAft>
-              <a:defRPr sz="1600">
-                <a:solidFill>
-                  <a:srgbClr val="333333"/>
-                </a:solidFill>
-              </a:defRPr>
-            </a:pPr>
-            <a:r>
-              <a:t>student["name"]  # "Alice"</a:t>
+              <a:defRPr sz="1400">
+                <a:solidFill>
+                  <a:srgbClr val="ABB2BF"/>
+                </a:solidFill>
+                <a:latin typeface="Consolas"/>
+              </a:defRPr>
+            </a:pPr>
+            <a:r>
+              <a:t>student["grade"] = "A"  # Add new</a:t>
             </a:r>
           </a:p>
           <a:p>
             <a:pPr>
               <a:spcAft>
-                <a:spcPts val="600"/>
+                <a:spcPts val="200"/>
               </a:spcAft>
-              <a:defRPr sz="1600">
+              <a:defRPr sz="1400">
+                <a:solidFill>
+                  <a:srgbClr val="ABB2BF"/>
+                </a:solidFill>
+                <a:latin typeface="Consolas"/>
+              </a:defRPr>
+            </a:pPr>
+            <a:r>
+              <a:t>student["age"] = 21  # Update</a:t>
+            </a:r>
+          </a:p>
+        </p:txBody>
+      </p:sp>
+      <p:sp>
+        <p:nvSpPr>
+          <p:cNvPr id="16" name="Rectangle 15"/>
+          <p:cNvSpPr/>
+          <p:nvPr/>
+        </p:nvSpPr>
+        <p:spPr>
+          <a:xfrm>
+            <a:off x="365760" y="3840480"/>
+            <a:ext cx="11430000" cy="365760"/>
+          </a:xfrm>
+          <a:prstGeom prst="rect">
+            <a:avLst/>
+          </a:prstGeom>
+          <a:solidFill>
+            <a:srgbClr val="0078D7"/>
+          </a:solidFill>
+          <a:ln>
+            <a:noFill/>
+          </a:ln>
+        </p:spPr>
+        <p:style>
+          <a:lnRef idx="1">
+            <a:schemeClr val="accent1"/>
+          </a:lnRef>
+          <a:fillRef idx="3">
+            <a:schemeClr val="accent1"/>
+          </a:fillRef>
+          <a:effectRef idx="2">
+            <a:schemeClr val="accent1"/>
+          </a:effectRef>
+          <a:fontRef idx="minor">
+            <a:schemeClr val="lt1"/>
+          </a:fontRef>
+        </p:style>
+        <p:txBody>
+          <a:bodyPr rtlCol="0" anchor="ctr"/>
+          <a:lstStyle/>
+          <a:p>
+            <a:pPr algn="ctr"/>
+          </a:p>
+        </p:txBody>
+      </p:sp>
+      <p:sp>
+        <p:nvSpPr>
+          <p:cNvPr id="17" name="TextBox 16"/>
+          <p:cNvSpPr txBox="1"/>
+          <p:nvPr/>
+        </p:nvSpPr>
+        <p:spPr>
+          <a:xfrm>
+            <a:off x="548640" y="3886200"/>
+            <a:ext cx="10972800" cy="274320"/>
+          </a:xfrm>
+          <a:prstGeom prst="rect">
+            <a:avLst/>
+          </a:prstGeom>
+          <a:noFill/>
+        </p:spPr>
+        <p:txBody>
+          <a:bodyPr wrap="none">
+            <a:spAutoFit/>
+          </a:bodyPr>
+          <a:lstStyle/>
+          <a:p>
+            <a:pPr>
+              <a:defRPr sz="2000" b="1">
+                <a:solidFill>
+                  <a:srgbClr val="FFFFFF"/>
+                </a:solidFill>
+              </a:defRPr>
+            </a:pPr>
+            <a:r>
+              <a:t>student.update({"gpa": 4.0})</a:t>
+            </a:r>
+          </a:p>
+        </p:txBody>
+      </p:sp>
+      <p:sp>
+        <p:nvSpPr>
+          <p:cNvPr id="18" name="Rectangle 17"/>
+          <p:cNvSpPr/>
+          <p:nvPr/>
+        </p:nvSpPr>
+        <p:spPr>
+          <a:xfrm>
+            <a:off x="365760" y="4297680"/>
+            <a:ext cx="11430000" cy="365760"/>
+          </a:xfrm>
+          <a:prstGeom prst="rect">
+            <a:avLst/>
+          </a:prstGeom>
+          <a:solidFill>
+            <a:srgbClr val="0078D7"/>
+          </a:solidFill>
+          <a:ln>
+            <a:noFill/>
+          </a:ln>
+        </p:spPr>
+        <p:style>
+          <a:lnRef idx="1">
+            <a:schemeClr val="accent1"/>
+          </a:lnRef>
+          <a:fillRef idx="3">
+            <a:schemeClr val="accent1"/>
+          </a:fillRef>
+          <a:effectRef idx="2">
+            <a:schemeClr val="accent1"/>
+          </a:effectRef>
+          <a:fontRef idx="minor">
+            <a:schemeClr val="lt1"/>
+          </a:fontRef>
+        </p:style>
+        <p:txBody>
+          <a:bodyPr rtlCol="0" anchor="ctr"/>
+          <a:lstStyle/>
+          <a:p>
+            <a:pPr algn="ctr"/>
+          </a:p>
+        </p:txBody>
+      </p:sp>
+      <p:sp>
+        <p:nvSpPr>
+          <p:cNvPr id="19" name="TextBox 18"/>
+          <p:cNvSpPr txBox="1"/>
+          <p:nvPr/>
+        </p:nvSpPr>
+        <p:spPr>
+          <a:xfrm>
+            <a:off x="548640" y="4343400"/>
+            <a:ext cx="10972800" cy="274320"/>
+          </a:xfrm>
+          <a:prstGeom prst="rect">
+            <a:avLst/>
+          </a:prstGeom>
+          <a:noFill/>
+        </p:spPr>
+        <p:txBody>
+          <a:bodyPr wrap="none">
+            <a:spAutoFit/>
+          </a:bodyPr>
+          <a:lstStyle/>
+          <a:p>
+            <a:pPr>
+              <a:defRPr sz="2000" b="1">
+                <a:solidFill>
+                  <a:srgbClr val="FFFFFF"/>
+                </a:solidFill>
+              </a:defRPr>
+            </a:pPr>
+            <a:r>
+              <a:t>Removing:</a:t>
+            </a:r>
+          </a:p>
+        </p:txBody>
+      </p:sp>
+      <p:sp>
+        <p:nvSpPr>
+          <p:cNvPr id="20" name="TextBox 19"/>
+          <p:cNvSpPr txBox="1"/>
+          <p:nvPr/>
+        </p:nvSpPr>
+        <p:spPr>
+          <a:xfrm>
+            <a:off x="457200" y="4800600"/>
+            <a:ext cx="11247120" cy="320040"/>
+          </a:xfrm>
+          <a:prstGeom prst="rect">
+            <a:avLst/>
+          </a:prstGeom>
+          <a:noFill/>
+        </p:spPr>
+        <p:txBody>
+          <a:bodyPr wrap="none">
+            <a:spAutoFit/>
+          </a:bodyPr>
+          <a:lstStyle/>
+          <a:p>
+            <a:pPr>
+              <a:defRPr sz="1700">
                 <a:solidFill>
                   <a:srgbClr val="333333"/>
                 </a:solidFill>
               </a:defRPr>
             </a:pPr>
             <a:r>
-              <a:t>student.get("age")  # 20</a:t>
-            </a:r>
-          </a:p>
+              <a:t>del student["age"]</a:t>
+            </a:r>
+          </a:p>
+        </p:txBody>
+      </p:sp>
+      <p:sp>
+        <p:nvSpPr>
+          <p:cNvPr id="21" name="Rectangle 20"/>
+          <p:cNvSpPr/>
+          <p:nvPr/>
+        </p:nvSpPr>
+        <p:spPr>
+          <a:xfrm>
+            <a:off x="640080" y="5029200"/>
+            <a:ext cx="10789920" cy="411480"/>
+          </a:xfrm>
+          <a:prstGeom prst="rect">
+            <a:avLst/>
+          </a:prstGeom>
+          <a:solidFill>
+            <a:srgbClr val="282C34"/>
+          </a:solidFill>
+          <a:ln>
+            <a:noFill/>
+          </a:ln>
+        </p:spPr>
+        <p:style>
+          <a:lnRef idx="1">
+            <a:schemeClr val="accent1"/>
+          </a:lnRef>
+          <a:fillRef idx="3">
+            <a:schemeClr val="accent1"/>
+          </a:fillRef>
+          <a:effectRef idx="2">
+            <a:schemeClr val="accent1"/>
+          </a:effectRef>
+          <a:fontRef idx="minor">
+            <a:schemeClr val="lt1"/>
+          </a:fontRef>
+        </p:style>
+        <p:txBody>
+          <a:bodyPr rtlCol="0" anchor="ctr"/>
+          <a:lstStyle/>
+          <a:p>
+            <a:pPr algn="ctr"/>
+          </a:p>
+        </p:txBody>
+      </p:sp>
+      <p:sp>
+        <p:nvSpPr>
+          <p:cNvPr id="22" name="Rectangle 21"/>
+          <p:cNvSpPr/>
+          <p:nvPr/>
+        </p:nvSpPr>
+        <p:spPr>
+          <a:xfrm>
+            <a:off x="640080" y="5029200"/>
+            <a:ext cx="73152" cy="411480"/>
+          </a:xfrm>
+          <a:prstGeom prst="rect">
+            <a:avLst/>
+          </a:prstGeom>
+          <a:solidFill>
+            <a:srgbClr val="61AFEF"/>
+          </a:solidFill>
+          <a:ln>
+            <a:noFill/>
+          </a:ln>
+        </p:spPr>
+        <p:style>
+          <a:lnRef idx="1">
+            <a:schemeClr val="accent1"/>
+          </a:lnRef>
+          <a:fillRef idx="3">
+            <a:schemeClr val="accent1"/>
+          </a:fillRef>
+          <a:effectRef idx="2">
+            <a:schemeClr val="accent1"/>
+          </a:effectRef>
+          <a:fontRef idx="minor">
+            <a:schemeClr val="lt1"/>
+          </a:fontRef>
+        </p:style>
+        <p:txBody>
+          <a:bodyPr rtlCol="0" anchor="ctr"/>
+          <a:lstStyle/>
+          <a:p>
+            <a:pPr algn="ctr"/>
+          </a:p>
+        </p:txBody>
+      </p:sp>
+      <p:sp>
+        <p:nvSpPr>
+          <p:cNvPr id="23" name="TextBox 22"/>
+          <p:cNvSpPr txBox="1"/>
+          <p:nvPr/>
+        </p:nvSpPr>
+        <p:spPr>
+          <a:xfrm>
+            <a:off x="914400" y="5074920"/>
+            <a:ext cx="10241280" cy="320040"/>
+          </a:xfrm>
+          <a:prstGeom prst="rect">
+            <a:avLst/>
+          </a:prstGeom>
+          <a:noFill/>
+        </p:spPr>
+        <p:txBody>
+          <a:bodyPr wrap="none">
+            <a:spAutoFit/>
+          </a:bodyPr>
+          <a:lstStyle/>
           <a:p>
             <a:pPr>
               <a:spcAft>
-                <a:spcPts val="600"/>
+                <a:spcPts val="200"/>
               </a:spcAft>
-              <a:defRPr sz="1600">
+              <a:defRPr sz="1400">
+                <a:solidFill>
+                  <a:srgbClr val="ABB2BF"/>
+                </a:solidFill>
+                <a:latin typeface="Consolas"/>
+              </a:defRPr>
+            </a:pPr>
+            <a:r>
+              <a:t>grade = student.pop("grade")</a:t>
+            </a:r>
+          </a:p>
+        </p:txBody>
+      </p:sp>
+      <p:sp>
+        <p:nvSpPr>
+          <p:cNvPr id="24" name="TextBox 23"/>
+          <p:cNvSpPr txBox="1"/>
+          <p:nvPr/>
+        </p:nvSpPr>
+        <p:spPr>
+          <a:xfrm>
+            <a:off x="457200" y="5623560"/>
+            <a:ext cx="11247120" cy="320040"/>
+          </a:xfrm>
+          <a:prstGeom prst="rect">
+            <a:avLst/>
+          </a:prstGeom>
+          <a:noFill/>
+        </p:spPr>
+        <p:txBody>
+          <a:bodyPr wrap="none">
+            <a:spAutoFit/>
+          </a:bodyPr>
+          <a:lstStyle/>
+          <a:p>
+            <a:pPr>
+              <a:defRPr sz="1700">
                 <a:solidFill>
                   <a:srgbClr val="333333"/>
                 </a:solidFill>
               </a:defRPr>
             </a:pPr>
             <a:r>
-              <a:t>student.get("grade", "N/A")  # Default</a:t>
-            </a:r>
-          </a:p>
+              <a:t>student.clear()  # Remove all</a:t>
+            </a:r>
+          </a:p>
+        </p:txBody>
+      </p:sp>
+      <p:sp>
+        <p:nvSpPr>
+          <p:cNvPr id="25" name="Rectangle 24"/>
+          <p:cNvSpPr/>
+          <p:nvPr/>
+        </p:nvSpPr>
+        <p:spPr>
+          <a:xfrm>
+            <a:off x="365760" y="5852160"/>
+            <a:ext cx="11430000" cy="365760"/>
+          </a:xfrm>
+          <a:prstGeom prst="rect">
+            <a:avLst/>
+          </a:prstGeom>
+          <a:solidFill>
+            <a:srgbClr val="0078D7"/>
+          </a:solidFill>
+          <a:ln>
+            <a:noFill/>
+          </a:ln>
+        </p:spPr>
+        <p:style>
+          <a:lnRef idx="1">
+            <a:schemeClr val="accent1"/>
+          </a:lnRef>
+          <a:fillRef idx="3">
+            <a:schemeClr val="accent1"/>
+          </a:fillRef>
+          <a:effectRef idx="2">
+            <a:schemeClr val="accent1"/>
+          </a:effectRef>
+          <a:fontRef idx="minor">
+            <a:schemeClr val="lt1"/>
+          </a:fontRef>
+        </p:style>
+        <p:txBody>
+          <a:bodyPr rtlCol="0" anchor="ctr"/>
+          <a:lstStyle/>
+          <a:p>
+            <a:pPr algn="ctr"/>
+          </a:p>
+        </p:txBody>
+      </p:sp>
+      <p:sp>
+        <p:nvSpPr>
+          <p:cNvPr id="26" name="TextBox 25"/>
+          <p:cNvSpPr txBox="1"/>
+          <p:nvPr/>
+        </p:nvSpPr>
+        <p:spPr>
+          <a:xfrm>
+            <a:off x="548640" y="5897880"/>
+            <a:ext cx="10972800" cy="274320"/>
+          </a:xfrm>
+          <a:prstGeom prst="rect">
+            <a:avLst/>
+          </a:prstGeom>
+          <a:noFill/>
+        </p:spPr>
+        <p:txBody>
+          <a:bodyPr wrap="none">
+            <a:spAutoFit/>
+          </a:bodyPr>
+          <a:lstStyle/>
           <a:p>
             <a:pPr>
-              <a:spcAft>
-                <a:spcPts val="600"/>
-              </a:spcAft>
-              <a:defRPr b="1" sz="2000">
-                <a:solidFill>
-                  <a:srgbClr val="333333"/>
-                </a:solidFill>
-              </a:defRPr>
-            </a:pPr>
-            <a:r>
-              <a:t>Adding/Updating:</a:t>
-            </a:r>
-          </a:p>
-          <a:p>
-            <a:pPr>
-              <a:spcAft>
-                <a:spcPts val="600"/>
-              </a:spcAft>
-              <a:defRPr sz="1600">
-                <a:solidFill>
-                  <a:srgbClr val="333333"/>
-                </a:solidFill>
-              </a:defRPr>
-            </a:pPr>
-            <a:r>
-              <a:t>student["grade"] = "A"  # Add new</a:t>
-            </a:r>
-          </a:p>
-          <a:p>
-            <a:pPr>
-              <a:spcAft>
-                <a:spcPts val="600"/>
-              </a:spcAft>
-              <a:defRPr sz="1600">
-                <a:solidFill>
-                  <a:srgbClr val="333333"/>
-                </a:solidFill>
-              </a:defRPr>
-            </a:pPr>
-            <a:r>
-              <a:t>student["age"] = 21  # Update</a:t>
-            </a:r>
-          </a:p>
-          <a:p>
-            <a:pPr>
-              <a:spcAft>
-                <a:spcPts val="600"/>
-              </a:spcAft>
-              <a:defRPr b="1" sz="2000">
-                <a:solidFill>
-                  <a:srgbClr val="333333"/>
-                </a:solidFill>
-              </a:defRPr>
-            </a:pPr>
-            <a:r>
-              <a:t>student.update({"gpa": 4.0})</a:t>
-            </a:r>
-          </a:p>
-          <a:p>
-            <a:pPr>
-              <a:spcAft>
-                <a:spcPts val="600"/>
-              </a:spcAft>
-              <a:defRPr b="1" sz="2000">
-                <a:solidFill>
-                  <a:srgbClr val="333333"/>
-                </a:solidFill>
-              </a:defRPr>
-            </a:pPr>
-            <a:r>
-              <a:t>Removing:</a:t>
-            </a:r>
-          </a:p>
-          <a:p>
-            <a:pPr>
-              <a:spcAft>
-                <a:spcPts val="600"/>
-              </a:spcAft>
-              <a:defRPr sz="1600">
-                <a:solidFill>
-                  <a:srgbClr val="333333"/>
-                </a:solidFill>
-              </a:defRPr>
-            </a:pPr>
-            <a:r>
-              <a:t>del student["age"]</a:t>
-            </a:r>
-          </a:p>
-          <a:p>
-            <a:pPr>
-              <a:spcAft>
-                <a:spcPts val="600"/>
-              </a:spcAft>
-              <a:defRPr sz="1600">
-                <a:solidFill>
-                  <a:srgbClr val="333333"/>
-                </a:solidFill>
-              </a:defRPr>
-            </a:pPr>
-            <a:r>
-              <a:t>grade = student.pop("grade")</a:t>
-            </a:r>
-          </a:p>
-          <a:p>
-            <a:pPr>
-              <a:spcAft>
-                <a:spcPts val="600"/>
-              </a:spcAft>
-              <a:defRPr sz="1600">
-                <a:solidFill>
-                  <a:srgbClr val="333333"/>
-                </a:solidFill>
-              </a:defRPr>
-            </a:pPr>
-            <a:r>
-              <a:t>student.clear()  # Remove all</a:t>
-            </a:r>
-          </a:p>
-          <a:p>
-            <a:pPr>
-              <a:spcAft>
-                <a:spcPts val="600"/>
-              </a:spcAft>
-              <a:defRPr b="1" sz="2000">
-                <a:solidFill>
-                  <a:srgbClr val="333333"/>
+              <a:defRPr sz="2000" b="1">
+                <a:solidFill>
+                  <a:srgbClr val="FFFFFF"/>
                 </a:solidFill>
               </a:defRPr>
             </a:pPr>
             <a:r>
               <a:t>Checking Keys:</a:t>
-            </a:r>
-          </a:p>
-          <a:p>
-            <a:pPr>
-              <a:spcAft>
-                <a:spcPts val="600"/>
-              </a:spcAft>
-              <a:defRPr sz="1600">
-                <a:solidFill>
-                  <a:srgbClr val="333333"/>
-                </a:solidFill>
-              </a:defRPr>
-            </a:pPr>
-            <a:r>
-              <a:t>"name" in student  # True</a:t>
-            </a:r>
-          </a:p>
-          <a:p>
-            <a:pPr>
-              <a:spcAft>
-                <a:spcPts val="600"/>
-              </a:spcAft>
-              <a:defRPr sz="1600">
-                <a:solidFill>
-                  <a:srgbClr val="333333"/>
-                </a:solidFill>
-              </a:defRPr>
-            </a:pPr>
-            <a:r>
-              <a:t>"email" not in student  # True</a:t>
             </a:r>
           </a:p>
         </p:txBody>
@@ -4016,7 +6531,7 @@
             <a:avLst/>
           </a:prstGeom>
           <a:solidFill>
-            <a:srgbClr val="FFFFFF"/>
+            <a:srgbClr val="FAFAFA"/>
           </a:solidFill>
           <a:ln>
             <a:noFill/>
@@ -4053,7 +6568,7 @@
         <p:spPr>
           <a:xfrm>
             <a:off x="0" y="0"/>
-            <a:ext cx="12191695" cy="137160"/>
+            <a:ext cx="12191695" cy="1097280"/>
           </a:xfrm>
           <a:prstGeom prst="rect">
             <a:avLst/>
@@ -4089,13 +6604,56 @@
       </p:sp>
       <p:sp>
         <p:nvSpPr>
-          <p:cNvPr id="4" name="TextBox 3"/>
+          <p:cNvPr id="4" name="Rectangle 3"/>
+          <p:cNvSpPr/>
+          <p:nvPr/>
+        </p:nvSpPr>
+        <p:spPr>
+          <a:xfrm>
+            <a:off x="0" y="1097280"/>
+            <a:ext cx="137160" cy="5760720"/>
+          </a:xfrm>
+          <a:prstGeom prst="rect">
+            <a:avLst/>
+          </a:prstGeom>
+          <a:solidFill>
+            <a:srgbClr val="FFBB33"/>
+          </a:solidFill>
+          <a:ln>
+            <a:noFill/>
+          </a:ln>
+        </p:spPr>
+        <p:style>
+          <a:lnRef idx="1">
+            <a:schemeClr val="accent1"/>
+          </a:lnRef>
+          <a:fillRef idx="3">
+            <a:schemeClr val="accent1"/>
+          </a:fillRef>
+          <a:effectRef idx="2">
+            <a:schemeClr val="accent1"/>
+          </a:effectRef>
+          <a:fontRef idx="minor">
+            <a:schemeClr val="lt1"/>
+          </a:fontRef>
+        </p:style>
+        <p:txBody>
+          <a:bodyPr rtlCol="0" anchor="ctr"/>
+          <a:lstStyle/>
+          <a:p>
+            <a:pPr algn="ctr"/>
+          </a:p>
+        </p:txBody>
+      </p:sp>
+      <p:sp>
+        <p:nvSpPr>
+          <p:cNvPr id="5" name="TextBox 4"/>
           <p:cNvSpPr txBox="1"/>
           <p:nvPr/>
         </p:nvSpPr>
         <p:spPr>
           <a:xfrm>
-            <a:off x="457200" y="320040"/>
+            <a:off x="365760" y="274320"/>
             <a:ext cx="10972800" cy="640080"/>
           </a:xfrm>
           <a:prstGeom prst="rect">
@@ -4112,7 +6670,7 @@
             <a:pPr>
               <a:defRPr sz="3600" b="1">
                 <a:solidFill>
-                  <a:srgbClr val="003366"/>
+                  <a:srgbClr val="FFFFFF"/>
                 </a:solidFill>
               </a:defRPr>
             </a:pPr>
@@ -4124,14 +6682,57 @@
       </p:sp>
       <p:sp>
         <p:nvSpPr>
-          <p:cNvPr id="5" name="TextBox 4"/>
+          <p:cNvPr id="6" name="Rectangle 5"/>
+          <p:cNvSpPr/>
+          <p:nvPr/>
+        </p:nvSpPr>
+        <p:spPr>
+          <a:xfrm>
+            <a:off x="365760" y="1325880"/>
+            <a:ext cx="11430000" cy="365760"/>
+          </a:xfrm>
+          <a:prstGeom prst="rect">
+            <a:avLst/>
+          </a:prstGeom>
+          <a:solidFill>
+            <a:srgbClr val="0078D7"/>
+          </a:solidFill>
+          <a:ln>
+            <a:noFill/>
+          </a:ln>
+        </p:spPr>
+        <p:style>
+          <a:lnRef idx="1">
+            <a:schemeClr val="accent1"/>
+          </a:lnRef>
+          <a:fillRef idx="3">
+            <a:schemeClr val="accent1"/>
+          </a:fillRef>
+          <a:effectRef idx="2">
+            <a:schemeClr val="accent1"/>
+          </a:effectRef>
+          <a:fontRef idx="minor">
+            <a:schemeClr val="lt1"/>
+          </a:fontRef>
+        </p:style>
+        <p:txBody>
+          <a:bodyPr rtlCol="0" anchor="ctr"/>
+          <a:lstStyle/>
+          <a:p>
+            <a:pPr algn="ctr"/>
+          </a:p>
+        </p:txBody>
+      </p:sp>
+      <p:sp>
+        <p:nvSpPr>
+          <p:cNvPr id="7" name="TextBox 6"/>
           <p:cNvSpPr txBox="1"/>
           <p:nvPr/>
         </p:nvSpPr>
         <p:spPr>
           <a:xfrm>
-            <a:off x="640080" y="1188720"/>
-            <a:ext cx="10789920" cy="5303520"/>
+            <a:off x="548640" y="1371600"/>
+            <a:ext cx="10972800" cy="274320"/>
           </a:xfrm>
           <a:prstGeom prst="rect">
             <a:avLst/>
@@ -4139,211 +6740,587 @@
           <a:noFill/>
         </p:spPr>
         <p:txBody>
-          <a:bodyPr wrap="square">
+          <a:bodyPr wrap="none">
             <a:spAutoFit/>
           </a:bodyPr>
           <a:lstStyle/>
           <a:p>
             <a:pPr>
-              <a:spcAft>
-                <a:spcPts val="600"/>
-              </a:spcAft>
-              <a:defRPr b="1" sz="2000">
+              <a:defRPr sz="2000" b="1">
+                <a:solidFill>
+                  <a:srgbClr val="FFFFFF"/>
+                </a:solidFill>
+              </a:defRPr>
+            </a:pPr>
+            <a:r>
+              <a:t>Keys, Values, Items:</a:t>
+            </a:r>
+          </a:p>
+        </p:txBody>
+      </p:sp>
+      <p:sp>
+        <p:nvSpPr>
+          <p:cNvPr id="8" name="TextBox 7"/>
+          <p:cNvSpPr txBox="1"/>
+          <p:nvPr/>
+        </p:nvSpPr>
+        <p:spPr>
+          <a:xfrm>
+            <a:off x="457200" y="1828800"/>
+            <a:ext cx="11247120" cy="320040"/>
+          </a:xfrm>
+          <a:prstGeom prst="rect">
+            <a:avLst/>
+          </a:prstGeom>
+          <a:noFill/>
+        </p:spPr>
+        <p:txBody>
+          <a:bodyPr wrap="none">
+            <a:spAutoFit/>
+          </a:bodyPr>
+          <a:lstStyle/>
+          <a:p>
+            <a:pPr>
+              <a:defRPr sz="1700">
                 <a:solidFill>
                   <a:srgbClr val="333333"/>
                 </a:solidFill>
               </a:defRPr>
             </a:pPr>
             <a:r>
-              <a:t>Keys, Values, Items:</a:t>
-            </a:r>
-          </a:p>
+              <a:t>student.keys()  # dict_keys([...])</a:t>
+            </a:r>
+          </a:p>
+        </p:txBody>
+      </p:sp>
+      <p:sp>
+        <p:nvSpPr>
+          <p:cNvPr id="9" name="TextBox 8"/>
+          <p:cNvSpPr txBox="1"/>
+          <p:nvPr/>
+        </p:nvSpPr>
+        <p:spPr>
+          <a:xfrm>
+            <a:off x="457200" y="2103120"/>
+            <a:ext cx="11247120" cy="320040"/>
+          </a:xfrm>
+          <a:prstGeom prst="rect">
+            <a:avLst/>
+          </a:prstGeom>
+          <a:noFill/>
+        </p:spPr>
+        <p:txBody>
+          <a:bodyPr wrap="none">
+            <a:spAutoFit/>
+          </a:bodyPr>
+          <a:lstStyle/>
+          <a:p>
+            <a:pPr>
+              <a:defRPr sz="1700">
+                <a:solidFill>
+                  <a:srgbClr val="333333"/>
+                </a:solidFill>
+              </a:defRPr>
+            </a:pPr>
+            <a:r>
+              <a:t>student.values()  # dict_values([...])</a:t>
+            </a:r>
+          </a:p>
+        </p:txBody>
+      </p:sp>
+      <p:sp>
+        <p:nvSpPr>
+          <p:cNvPr id="10" name="TextBox 9"/>
+          <p:cNvSpPr txBox="1"/>
+          <p:nvPr/>
+        </p:nvSpPr>
+        <p:spPr>
+          <a:xfrm>
+            <a:off x="457200" y="2377439"/>
+            <a:ext cx="11247120" cy="320040"/>
+          </a:xfrm>
+          <a:prstGeom prst="rect">
+            <a:avLst/>
+          </a:prstGeom>
+          <a:noFill/>
+        </p:spPr>
+        <p:txBody>
+          <a:bodyPr wrap="none">
+            <a:spAutoFit/>
+          </a:bodyPr>
+          <a:lstStyle/>
+          <a:p>
+            <a:pPr>
+              <a:defRPr sz="1700">
+                <a:solidFill>
+                  <a:srgbClr val="333333"/>
+                </a:solidFill>
+              </a:defRPr>
+            </a:pPr>
+            <a:r>
+              <a:t>student.items()  # dict_items([...])</a:t>
+            </a:r>
+          </a:p>
+        </p:txBody>
+      </p:sp>
+      <p:sp>
+        <p:nvSpPr>
+          <p:cNvPr id="11" name="Rectangle 10"/>
+          <p:cNvSpPr/>
+          <p:nvPr/>
+        </p:nvSpPr>
+        <p:spPr>
+          <a:xfrm>
+            <a:off x="365760" y="2606039"/>
+            <a:ext cx="11430000" cy="365760"/>
+          </a:xfrm>
+          <a:prstGeom prst="rect">
+            <a:avLst/>
+          </a:prstGeom>
+          <a:solidFill>
+            <a:srgbClr val="0078D7"/>
+          </a:solidFill>
+          <a:ln>
+            <a:noFill/>
+          </a:ln>
+        </p:spPr>
+        <p:style>
+          <a:lnRef idx="1">
+            <a:schemeClr val="accent1"/>
+          </a:lnRef>
+          <a:fillRef idx="3">
+            <a:schemeClr val="accent1"/>
+          </a:fillRef>
+          <a:effectRef idx="2">
+            <a:schemeClr val="accent1"/>
+          </a:effectRef>
+          <a:fontRef idx="minor">
+            <a:schemeClr val="lt1"/>
+          </a:fontRef>
+        </p:style>
+        <p:txBody>
+          <a:bodyPr rtlCol="0" anchor="ctr"/>
+          <a:lstStyle/>
+          <a:p>
+            <a:pPr algn="ctr"/>
+          </a:p>
+        </p:txBody>
+      </p:sp>
+      <p:sp>
+        <p:nvSpPr>
+          <p:cNvPr id="12" name="TextBox 11"/>
+          <p:cNvSpPr txBox="1"/>
+          <p:nvPr/>
+        </p:nvSpPr>
+        <p:spPr>
+          <a:xfrm>
+            <a:off x="548640" y="2651759"/>
+            <a:ext cx="10972800" cy="274320"/>
+          </a:xfrm>
+          <a:prstGeom prst="rect">
+            <a:avLst/>
+          </a:prstGeom>
+          <a:noFill/>
+        </p:spPr>
+        <p:txBody>
+          <a:bodyPr wrap="none">
+            <a:spAutoFit/>
+          </a:bodyPr>
+          <a:lstStyle/>
+          <a:p>
+            <a:pPr>
+              <a:defRPr sz="2000" b="1">
+                <a:solidFill>
+                  <a:srgbClr val="FFFFFF"/>
+                </a:solidFill>
+              </a:defRPr>
+            </a:pPr>
+            <a:r>
+              <a:t>Iterating:</a:t>
+            </a:r>
+          </a:p>
+        </p:txBody>
+      </p:sp>
+      <p:sp>
+        <p:nvSpPr>
+          <p:cNvPr id="13" name="Rectangle 12"/>
+          <p:cNvSpPr/>
+          <p:nvPr/>
+        </p:nvSpPr>
+        <p:spPr>
+          <a:xfrm>
+            <a:off x="640080" y="3063239"/>
+            <a:ext cx="10789920" cy="1097280"/>
+          </a:xfrm>
+          <a:prstGeom prst="rect">
+            <a:avLst/>
+          </a:prstGeom>
+          <a:solidFill>
+            <a:srgbClr val="282C34"/>
+          </a:solidFill>
+          <a:ln>
+            <a:noFill/>
+          </a:ln>
+        </p:spPr>
+        <p:style>
+          <a:lnRef idx="1">
+            <a:schemeClr val="accent1"/>
+          </a:lnRef>
+          <a:fillRef idx="3">
+            <a:schemeClr val="accent1"/>
+          </a:fillRef>
+          <a:effectRef idx="2">
+            <a:schemeClr val="accent1"/>
+          </a:effectRef>
+          <a:fontRef idx="minor">
+            <a:schemeClr val="lt1"/>
+          </a:fontRef>
+        </p:style>
+        <p:txBody>
+          <a:bodyPr rtlCol="0" anchor="ctr"/>
+          <a:lstStyle/>
+          <a:p>
+            <a:pPr algn="ctr"/>
+          </a:p>
+        </p:txBody>
+      </p:sp>
+      <p:sp>
+        <p:nvSpPr>
+          <p:cNvPr id="14" name="Rectangle 13"/>
+          <p:cNvSpPr/>
+          <p:nvPr/>
+        </p:nvSpPr>
+        <p:spPr>
+          <a:xfrm>
+            <a:off x="640080" y="3063239"/>
+            <a:ext cx="73152" cy="1097280"/>
+          </a:xfrm>
+          <a:prstGeom prst="rect">
+            <a:avLst/>
+          </a:prstGeom>
+          <a:solidFill>
+            <a:srgbClr val="61AFEF"/>
+          </a:solidFill>
+          <a:ln>
+            <a:noFill/>
+          </a:ln>
+        </p:spPr>
+        <p:style>
+          <a:lnRef idx="1">
+            <a:schemeClr val="accent1"/>
+          </a:lnRef>
+          <a:fillRef idx="3">
+            <a:schemeClr val="accent1"/>
+          </a:fillRef>
+          <a:effectRef idx="2">
+            <a:schemeClr val="accent1"/>
+          </a:effectRef>
+          <a:fontRef idx="minor">
+            <a:schemeClr val="lt1"/>
+          </a:fontRef>
+        </p:style>
+        <p:txBody>
+          <a:bodyPr rtlCol="0" anchor="ctr"/>
+          <a:lstStyle/>
+          <a:p>
+            <a:pPr algn="ctr"/>
+          </a:p>
+        </p:txBody>
+      </p:sp>
+      <p:sp>
+        <p:nvSpPr>
+          <p:cNvPr id="15" name="TextBox 14"/>
+          <p:cNvSpPr txBox="1"/>
+          <p:nvPr/>
+        </p:nvSpPr>
+        <p:spPr>
+          <a:xfrm>
+            <a:off x="914400" y="3108959"/>
+            <a:ext cx="10241280" cy="1005839"/>
+          </a:xfrm>
+          <a:prstGeom prst="rect">
+            <a:avLst/>
+          </a:prstGeom>
+          <a:noFill/>
+        </p:spPr>
+        <p:txBody>
+          <a:bodyPr wrap="none">
+            <a:spAutoFit/>
+          </a:bodyPr>
+          <a:lstStyle/>
           <a:p>
             <a:pPr>
               <a:spcAft>
-                <a:spcPts val="600"/>
+                <a:spcPts val="200"/>
               </a:spcAft>
-              <a:defRPr sz="1600">
-                <a:solidFill>
-                  <a:srgbClr val="333333"/>
-                </a:solidFill>
-              </a:defRPr>
-            </a:pPr>
-            <a:r>
-              <a:t>student.keys()  # dict_keys([...])</a:t>
+              <a:defRPr sz="1400">
+                <a:solidFill>
+                  <a:srgbClr val="ABB2BF"/>
+                </a:solidFill>
+                <a:latin typeface="Consolas"/>
+              </a:defRPr>
+            </a:pPr>
+            <a:r>
+              <a:t>for key in student:</a:t>
             </a:r>
           </a:p>
           <a:p>
             <a:pPr>
               <a:spcAft>
-                <a:spcPts val="600"/>
+                <a:spcPts val="200"/>
               </a:spcAft>
-              <a:defRPr sz="1600">
-                <a:solidFill>
-                  <a:srgbClr val="333333"/>
-                </a:solidFill>
-              </a:defRPr>
-            </a:pPr>
-            <a:r>
-              <a:t>student.values()  # dict_values([...])</a:t>
+              <a:defRPr sz="1400">
+                <a:solidFill>
+                  <a:srgbClr val="ABB2BF"/>
+                </a:solidFill>
+                <a:latin typeface="Consolas"/>
+              </a:defRPr>
+            </a:pPr>
+            <a:r>
+              <a:t>    print(key, student[key])</a:t>
             </a:r>
           </a:p>
           <a:p>
             <a:pPr>
               <a:spcAft>
-                <a:spcPts val="600"/>
+                <a:spcPts val="200"/>
               </a:spcAft>
-              <a:defRPr sz="1600">
-                <a:solidFill>
-                  <a:srgbClr val="333333"/>
-                </a:solidFill>
-              </a:defRPr>
-            </a:pPr>
-            <a:r>
-              <a:t>student.items()  # dict_items([...])</a:t>
+              <a:defRPr sz="1400">
+                <a:solidFill>
+                  <a:srgbClr val="ABB2BF"/>
+                </a:solidFill>
+                <a:latin typeface="Consolas"/>
+              </a:defRPr>
+            </a:pPr>
+            <a:r>
+              <a:t>for key, value in student.items():</a:t>
             </a:r>
           </a:p>
           <a:p>
             <a:pPr>
               <a:spcAft>
-                <a:spcPts val="600"/>
+                <a:spcPts val="200"/>
               </a:spcAft>
-              <a:defRPr b="1" sz="2000">
+              <a:defRPr sz="1400">
+                <a:solidFill>
+                  <a:srgbClr val="ABB2BF"/>
+                </a:solidFill>
+                <a:latin typeface="Consolas"/>
+              </a:defRPr>
+            </a:pPr>
+            <a:r>
+              <a:t>    print(f"{key}: {value}")</a:t>
+            </a:r>
+          </a:p>
+        </p:txBody>
+      </p:sp>
+      <p:sp>
+        <p:nvSpPr>
+          <p:cNvPr id="16" name="Rectangle 15"/>
+          <p:cNvSpPr/>
+          <p:nvPr/>
+        </p:nvSpPr>
+        <p:spPr>
+          <a:xfrm>
+            <a:off x="365760" y="4297680"/>
+            <a:ext cx="11430000" cy="365760"/>
+          </a:xfrm>
+          <a:prstGeom prst="rect">
+            <a:avLst/>
+          </a:prstGeom>
+          <a:solidFill>
+            <a:srgbClr val="0078D7"/>
+          </a:solidFill>
+          <a:ln>
+            <a:noFill/>
+          </a:ln>
+        </p:spPr>
+        <p:style>
+          <a:lnRef idx="1">
+            <a:schemeClr val="accent1"/>
+          </a:lnRef>
+          <a:fillRef idx="3">
+            <a:schemeClr val="accent1"/>
+          </a:fillRef>
+          <a:effectRef idx="2">
+            <a:schemeClr val="accent1"/>
+          </a:effectRef>
+          <a:fontRef idx="minor">
+            <a:schemeClr val="lt1"/>
+          </a:fontRef>
+        </p:style>
+        <p:txBody>
+          <a:bodyPr rtlCol="0" anchor="ctr"/>
+          <a:lstStyle/>
+          <a:p>
+            <a:pPr algn="ctr"/>
+          </a:p>
+        </p:txBody>
+      </p:sp>
+      <p:sp>
+        <p:nvSpPr>
+          <p:cNvPr id="17" name="TextBox 16"/>
+          <p:cNvSpPr txBox="1"/>
+          <p:nvPr/>
+        </p:nvSpPr>
+        <p:spPr>
+          <a:xfrm>
+            <a:off x="548640" y="4343400"/>
+            <a:ext cx="10972800" cy="274320"/>
+          </a:xfrm>
+          <a:prstGeom prst="rect">
+            <a:avLst/>
+          </a:prstGeom>
+          <a:noFill/>
+        </p:spPr>
+        <p:txBody>
+          <a:bodyPr wrap="none">
+            <a:spAutoFit/>
+          </a:bodyPr>
+          <a:lstStyle/>
+          <a:p>
+            <a:pPr>
+              <a:defRPr sz="2000" b="1">
+                <a:solidFill>
+                  <a:srgbClr val="FFFFFF"/>
+                </a:solidFill>
+              </a:defRPr>
+            </a:pPr>
+            <a:r>
+              <a:t>Other Methods:</a:t>
+            </a:r>
+          </a:p>
+        </p:txBody>
+      </p:sp>
+      <p:sp>
+        <p:nvSpPr>
+          <p:cNvPr id="18" name="TextBox 17"/>
+          <p:cNvSpPr txBox="1"/>
+          <p:nvPr/>
+        </p:nvSpPr>
+        <p:spPr>
+          <a:xfrm>
+            <a:off x="457200" y="4800600"/>
+            <a:ext cx="11247120" cy="320040"/>
+          </a:xfrm>
+          <a:prstGeom prst="rect">
+            <a:avLst/>
+          </a:prstGeom>
+          <a:noFill/>
+        </p:spPr>
+        <p:txBody>
+          <a:bodyPr wrap="none">
+            <a:spAutoFit/>
+          </a:bodyPr>
+          <a:lstStyle/>
+          <a:p>
+            <a:pPr>
+              <a:defRPr sz="1700">
                 <a:solidFill>
                   <a:srgbClr val="333333"/>
                 </a:solidFill>
               </a:defRPr>
             </a:pPr>
             <a:r>
-              <a:t>Iterating:</a:t>
-            </a:r>
-          </a:p>
+              <a:t>student.get(key, default)</a:t>
+            </a:r>
+          </a:p>
+        </p:txBody>
+      </p:sp>
+      <p:sp>
+        <p:nvSpPr>
+          <p:cNvPr id="19" name="TextBox 18"/>
+          <p:cNvSpPr txBox="1"/>
+          <p:nvPr/>
+        </p:nvSpPr>
+        <p:spPr>
+          <a:xfrm>
+            <a:off x="457200" y="5074920"/>
+            <a:ext cx="11247120" cy="320040"/>
+          </a:xfrm>
+          <a:prstGeom prst="rect">
+            <a:avLst/>
+          </a:prstGeom>
+          <a:noFill/>
+        </p:spPr>
+        <p:txBody>
+          <a:bodyPr wrap="none">
+            <a:spAutoFit/>
+          </a:bodyPr>
+          <a:lstStyle/>
           <a:p>
             <a:pPr>
-              <a:spcAft>
-                <a:spcPts val="600"/>
-              </a:spcAft>
-              <a:defRPr b="1" sz="2000">
+              <a:defRPr sz="1700">
                 <a:solidFill>
                   <a:srgbClr val="333333"/>
                 </a:solidFill>
               </a:defRPr>
             </a:pPr>
             <a:r>
-              <a:t>for key in student:</a:t>
-            </a:r>
-          </a:p>
+              <a:t>student.setdefault(key, default)</a:t>
+            </a:r>
+          </a:p>
+        </p:txBody>
+      </p:sp>
+      <p:sp>
+        <p:nvSpPr>
+          <p:cNvPr id="20" name="TextBox 19"/>
+          <p:cNvSpPr txBox="1"/>
+          <p:nvPr/>
+        </p:nvSpPr>
+        <p:spPr>
+          <a:xfrm>
+            <a:off x="457200" y="5349240"/>
+            <a:ext cx="11247120" cy="320040"/>
+          </a:xfrm>
+          <a:prstGeom prst="rect">
+            <a:avLst/>
+          </a:prstGeom>
+          <a:noFill/>
+        </p:spPr>
+        <p:txBody>
+          <a:bodyPr wrap="none">
+            <a:spAutoFit/>
+          </a:bodyPr>
+          <a:lstStyle/>
           <a:p>
             <a:pPr>
-              <a:spcAft>
-                <a:spcPts val="600"/>
-              </a:spcAft>
-              <a:defRPr sz="1600">
+              <a:defRPr sz="1700">
                 <a:solidFill>
                   <a:srgbClr val="333333"/>
                 </a:solidFill>
               </a:defRPr>
             </a:pPr>
             <a:r>
-              <a:t>    print(key, student[key])</a:t>
-            </a:r>
-          </a:p>
+              <a:t>student.update(other_dict)</a:t>
+            </a:r>
+          </a:p>
+        </p:txBody>
+      </p:sp>
+      <p:sp>
+        <p:nvSpPr>
+          <p:cNvPr id="21" name="TextBox 20"/>
+          <p:cNvSpPr txBox="1"/>
+          <p:nvPr/>
+        </p:nvSpPr>
+        <p:spPr>
+          <a:xfrm>
+            <a:off x="457200" y="5623559"/>
+            <a:ext cx="11247120" cy="320040"/>
+          </a:xfrm>
+          <a:prstGeom prst="rect">
+            <a:avLst/>
+          </a:prstGeom>
+          <a:noFill/>
+        </p:spPr>
+        <p:txBody>
+          <a:bodyPr wrap="none">
+            <a:spAutoFit/>
+          </a:bodyPr>
+          <a:lstStyle/>
           <a:p>
             <a:pPr>
-              <a:spcAft>
-                <a:spcPts val="600"/>
-              </a:spcAft>
-              <a:defRPr b="1" sz="2000">
-                <a:solidFill>
-                  <a:srgbClr val="333333"/>
-                </a:solidFill>
-              </a:defRPr>
-            </a:pPr>
-            <a:r>
-              <a:t>for key, value in student.items():</a:t>
-            </a:r>
-          </a:p>
-          <a:p>
-            <a:pPr>
-              <a:spcAft>
-                <a:spcPts val="600"/>
-              </a:spcAft>
-              <a:defRPr sz="1600">
-                <a:solidFill>
-                  <a:srgbClr val="333333"/>
-                </a:solidFill>
-              </a:defRPr>
-            </a:pPr>
-            <a:r>
-              <a:t>    print(f"{key}: {value}")</a:t>
-            </a:r>
-          </a:p>
-          <a:p>
-            <a:pPr>
-              <a:spcAft>
-                <a:spcPts val="600"/>
-              </a:spcAft>
-              <a:defRPr b="1" sz="2000">
-                <a:solidFill>
-                  <a:srgbClr val="333333"/>
-                </a:solidFill>
-              </a:defRPr>
-            </a:pPr>
-            <a:r>
-              <a:t>Other Methods:</a:t>
-            </a:r>
-          </a:p>
-          <a:p>
-            <a:pPr>
-              <a:spcAft>
-                <a:spcPts val="600"/>
-              </a:spcAft>
-              <a:defRPr sz="1600">
-                <a:solidFill>
-                  <a:srgbClr val="333333"/>
-                </a:solidFill>
-              </a:defRPr>
-            </a:pPr>
-            <a:r>
-              <a:t>student.get(key, default)</a:t>
-            </a:r>
-          </a:p>
-          <a:p>
-            <a:pPr>
-              <a:spcAft>
-                <a:spcPts val="600"/>
-              </a:spcAft>
-              <a:defRPr sz="1600">
-                <a:solidFill>
-                  <a:srgbClr val="333333"/>
-                </a:solidFill>
-              </a:defRPr>
-            </a:pPr>
-            <a:r>
-              <a:t>student.setdefault(key, default)</a:t>
-            </a:r>
-          </a:p>
-          <a:p>
-            <a:pPr>
-              <a:spcAft>
-                <a:spcPts val="600"/>
-              </a:spcAft>
-              <a:defRPr sz="1600">
-                <a:solidFill>
-                  <a:srgbClr val="333333"/>
-                </a:solidFill>
-              </a:defRPr>
-            </a:pPr>
-            <a:r>
-              <a:t>student.update(other_dict)</a:t>
-            </a:r>
-          </a:p>
-          <a:p>
-            <a:pPr>
-              <a:spcAft>
-                <a:spcPts val="600"/>
-              </a:spcAft>
-              <a:defRPr sz="1600">
+              <a:defRPr sz="1700">
                 <a:solidFill>
                   <a:srgbClr val="333333"/>
                 </a:solidFill>
@@ -4388,7 +7365,7 @@
             <a:avLst/>
           </a:prstGeom>
           <a:solidFill>
-            <a:srgbClr val="FFFFFF"/>
+            <a:srgbClr val="FAFAFA"/>
           </a:solidFill>
           <a:ln>
             <a:noFill/>
@@ -4425,7 +7402,7 @@
         <p:spPr>
           <a:xfrm>
             <a:off x="0" y="0"/>
-            <a:ext cx="12191695" cy="137160"/>
+            <a:ext cx="12191695" cy="1097280"/>
           </a:xfrm>
           <a:prstGeom prst="rect">
             <a:avLst/>
@@ -4461,13 +7438,56 @@
       </p:sp>
       <p:sp>
         <p:nvSpPr>
-          <p:cNvPr id="4" name="TextBox 3"/>
+          <p:cNvPr id="4" name="Rectangle 3"/>
+          <p:cNvSpPr/>
+          <p:nvPr/>
+        </p:nvSpPr>
+        <p:spPr>
+          <a:xfrm>
+            <a:off x="0" y="1097280"/>
+            <a:ext cx="137160" cy="5760720"/>
+          </a:xfrm>
+          <a:prstGeom prst="rect">
+            <a:avLst/>
+          </a:prstGeom>
+          <a:solidFill>
+            <a:srgbClr val="FFBB33"/>
+          </a:solidFill>
+          <a:ln>
+            <a:noFill/>
+          </a:ln>
+        </p:spPr>
+        <p:style>
+          <a:lnRef idx="1">
+            <a:schemeClr val="accent1"/>
+          </a:lnRef>
+          <a:fillRef idx="3">
+            <a:schemeClr val="accent1"/>
+          </a:fillRef>
+          <a:effectRef idx="2">
+            <a:schemeClr val="accent1"/>
+          </a:effectRef>
+          <a:fontRef idx="minor">
+            <a:schemeClr val="lt1"/>
+          </a:fontRef>
+        </p:style>
+        <p:txBody>
+          <a:bodyPr rtlCol="0" anchor="ctr"/>
+          <a:lstStyle/>
+          <a:p>
+            <a:pPr algn="ctr"/>
+          </a:p>
+        </p:txBody>
+      </p:sp>
+      <p:sp>
+        <p:nvSpPr>
+          <p:cNvPr id="5" name="TextBox 4"/>
           <p:cNvSpPr txBox="1"/>
           <p:nvPr/>
         </p:nvSpPr>
         <p:spPr>
           <a:xfrm>
-            <a:off x="457200" y="320040"/>
+            <a:off x="365760" y="274320"/>
             <a:ext cx="10972800" cy="640080"/>
           </a:xfrm>
           <a:prstGeom prst="rect">
@@ -4484,7 +7504,7 @@
             <a:pPr>
               <a:defRPr sz="3600" b="1">
                 <a:solidFill>
-                  <a:srgbClr val="003366"/>
+                  <a:srgbClr val="FFFFFF"/>
                 </a:solidFill>
               </a:defRPr>
             </a:pPr>
@@ -4496,14 +7516,57 @@
       </p:sp>
       <p:sp>
         <p:nvSpPr>
-          <p:cNvPr id="5" name="TextBox 4"/>
+          <p:cNvPr id="6" name="Rectangle 5"/>
+          <p:cNvSpPr/>
+          <p:nvPr/>
+        </p:nvSpPr>
+        <p:spPr>
+          <a:xfrm>
+            <a:off x="365760" y="1325880"/>
+            <a:ext cx="11430000" cy="365760"/>
+          </a:xfrm>
+          <a:prstGeom prst="rect">
+            <a:avLst/>
+          </a:prstGeom>
+          <a:solidFill>
+            <a:srgbClr val="0078D7"/>
+          </a:solidFill>
+          <a:ln>
+            <a:noFill/>
+          </a:ln>
+        </p:spPr>
+        <p:style>
+          <a:lnRef idx="1">
+            <a:schemeClr val="accent1"/>
+          </a:lnRef>
+          <a:fillRef idx="3">
+            <a:schemeClr val="accent1"/>
+          </a:fillRef>
+          <a:effectRef idx="2">
+            <a:schemeClr val="accent1"/>
+          </a:effectRef>
+          <a:fontRef idx="minor">
+            <a:schemeClr val="lt1"/>
+          </a:fontRef>
+        </p:style>
+        <p:txBody>
+          <a:bodyPr rtlCol="0" anchor="ctr"/>
+          <a:lstStyle/>
+          <a:p>
+            <a:pPr algn="ctr"/>
+          </a:p>
+        </p:txBody>
+      </p:sp>
+      <p:sp>
+        <p:nvSpPr>
+          <p:cNvPr id="7" name="TextBox 6"/>
           <p:cNvSpPr txBox="1"/>
           <p:nvPr/>
         </p:nvSpPr>
         <p:spPr>
           <a:xfrm>
-            <a:off x="640080" y="1188720"/>
-            <a:ext cx="10789920" cy="5303520"/>
+            <a:off x="548640" y="1371600"/>
+            <a:ext cx="10972800" cy="274320"/>
           </a:xfrm>
           <a:prstGeom prst="rect">
             <a:avLst/>
@@ -4511,18 +7574,15 @@
           <a:noFill/>
         </p:spPr>
         <p:txBody>
-          <a:bodyPr wrap="square">
+          <a:bodyPr wrap="none">
             <a:spAutoFit/>
           </a:bodyPr>
           <a:lstStyle/>
           <a:p>
             <a:pPr>
-              <a:spcAft>
-                <a:spcPts val="600"/>
-              </a:spcAft>
-              <a:defRPr b="1" sz="2000">
-                <a:solidFill>
-                  <a:srgbClr val="333333"/>
+              <a:defRPr sz="2000" b="1">
+                <a:solidFill>
+                  <a:srgbClr val="FFFFFF"/>
                 </a:solidFill>
               </a:defRPr>
             </a:pPr>
@@ -4530,15 +7590,125 @@
               <a:t>Creating from Lists:</a:t>
             </a:r>
           </a:p>
+        </p:txBody>
+      </p:sp>
+      <p:sp>
+        <p:nvSpPr>
+          <p:cNvPr id="8" name="Rectangle 7"/>
+          <p:cNvSpPr/>
+          <p:nvPr/>
+        </p:nvSpPr>
+        <p:spPr>
+          <a:xfrm>
+            <a:off x="640080" y="1783080"/>
+            <a:ext cx="10789920" cy="868680"/>
+          </a:xfrm>
+          <a:prstGeom prst="rect">
+            <a:avLst/>
+          </a:prstGeom>
+          <a:solidFill>
+            <a:srgbClr val="282C34"/>
+          </a:solidFill>
+          <a:ln>
+            <a:noFill/>
+          </a:ln>
+        </p:spPr>
+        <p:style>
+          <a:lnRef idx="1">
+            <a:schemeClr val="accent1"/>
+          </a:lnRef>
+          <a:fillRef idx="3">
+            <a:schemeClr val="accent1"/>
+          </a:fillRef>
+          <a:effectRef idx="2">
+            <a:schemeClr val="accent1"/>
+          </a:effectRef>
+          <a:fontRef idx="minor">
+            <a:schemeClr val="lt1"/>
+          </a:fontRef>
+        </p:style>
+        <p:txBody>
+          <a:bodyPr rtlCol="0" anchor="ctr"/>
+          <a:lstStyle/>
+          <a:p>
+            <a:pPr algn="ctr"/>
+          </a:p>
+        </p:txBody>
+      </p:sp>
+      <p:sp>
+        <p:nvSpPr>
+          <p:cNvPr id="9" name="Rectangle 8"/>
+          <p:cNvSpPr/>
+          <p:nvPr/>
+        </p:nvSpPr>
+        <p:spPr>
+          <a:xfrm>
+            <a:off x="640080" y="1783080"/>
+            <a:ext cx="73152" cy="868680"/>
+          </a:xfrm>
+          <a:prstGeom prst="rect">
+            <a:avLst/>
+          </a:prstGeom>
+          <a:solidFill>
+            <a:srgbClr val="61AFEF"/>
+          </a:solidFill>
+          <a:ln>
+            <a:noFill/>
+          </a:ln>
+        </p:spPr>
+        <p:style>
+          <a:lnRef idx="1">
+            <a:schemeClr val="accent1"/>
+          </a:lnRef>
+          <a:fillRef idx="3">
+            <a:schemeClr val="accent1"/>
+          </a:fillRef>
+          <a:effectRef idx="2">
+            <a:schemeClr val="accent1"/>
+          </a:effectRef>
+          <a:fontRef idx="minor">
+            <a:schemeClr val="lt1"/>
+          </a:fontRef>
+        </p:style>
+        <p:txBody>
+          <a:bodyPr rtlCol="0" anchor="ctr"/>
+          <a:lstStyle/>
+          <a:p>
+            <a:pPr algn="ctr"/>
+          </a:p>
+        </p:txBody>
+      </p:sp>
+      <p:sp>
+        <p:nvSpPr>
+          <p:cNvPr id="10" name="TextBox 9"/>
+          <p:cNvSpPr txBox="1"/>
+          <p:nvPr/>
+        </p:nvSpPr>
+        <p:spPr>
+          <a:xfrm>
+            <a:off x="914400" y="1828800"/>
+            <a:ext cx="10241280" cy="777240"/>
+          </a:xfrm>
+          <a:prstGeom prst="rect">
+            <a:avLst/>
+          </a:prstGeom>
+          <a:noFill/>
+        </p:spPr>
+        <p:txBody>
+          <a:bodyPr wrap="none">
+            <a:spAutoFit/>
+          </a:bodyPr>
+          <a:lstStyle/>
           <a:p>
             <a:pPr>
               <a:spcAft>
-                <a:spcPts val="600"/>
+                <a:spcPts val="200"/>
               </a:spcAft>
-              <a:defRPr sz="1600">
-                <a:solidFill>
-                  <a:srgbClr val="333333"/>
-                </a:solidFill>
+              <a:defRPr sz="1400">
+                <a:solidFill>
+                  <a:srgbClr val="ABB2BF"/>
+                </a:solidFill>
+                <a:latin typeface="Consolas"/>
               </a:defRPr>
             </a:pPr>
             <a:r>
@@ -4548,12 +7718,13 @@
           <a:p>
             <a:pPr>
               <a:spcAft>
-                <a:spcPts val="600"/>
+                <a:spcPts val="200"/>
               </a:spcAft>
-              <a:defRPr sz="1600">
-                <a:solidFill>
-                  <a:srgbClr val="333333"/>
-                </a:solidFill>
+              <a:defRPr sz="1400">
+                <a:solidFill>
+                  <a:srgbClr val="ABB2BF"/>
+                </a:solidFill>
+                <a:latin typeface="Consolas"/>
               </a:defRPr>
             </a:pPr>
             <a:r>
@@ -4563,136 +7734,614 @@
           <a:p>
             <a:pPr>
               <a:spcAft>
-                <a:spcPts val="600"/>
+                <a:spcPts val="200"/>
               </a:spcAft>
-              <a:defRPr b="1" sz="2000">
-                <a:solidFill>
-                  <a:srgbClr val="333333"/>
-                </a:solidFill>
+              <a:defRPr sz="1400">
+                <a:solidFill>
+                  <a:srgbClr val="ABB2BF"/>
+                </a:solidFill>
+                <a:latin typeface="Consolas"/>
               </a:defRPr>
             </a:pPr>
             <a:r>
               <a:t>d = {k: v for k, v in zip(keys, values)}</a:t>
             </a:r>
           </a:p>
+        </p:txBody>
+      </p:sp>
+      <p:sp>
+        <p:nvSpPr>
+          <p:cNvPr id="11" name="Rectangle 10"/>
+          <p:cNvSpPr/>
+          <p:nvPr/>
+        </p:nvSpPr>
+        <p:spPr>
+          <a:xfrm>
+            <a:off x="365760" y="2788920"/>
+            <a:ext cx="11430000" cy="365760"/>
+          </a:xfrm>
+          <a:prstGeom prst="rect">
+            <a:avLst/>
+          </a:prstGeom>
+          <a:solidFill>
+            <a:srgbClr val="0078D7"/>
+          </a:solidFill>
+          <a:ln>
+            <a:noFill/>
+          </a:ln>
+        </p:spPr>
+        <p:style>
+          <a:lnRef idx="1">
+            <a:schemeClr val="accent1"/>
+          </a:lnRef>
+          <a:fillRef idx="3">
+            <a:schemeClr val="accent1"/>
+          </a:fillRef>
+          <a:effectRef idx="2">
+            <a:schemeClr val="accent1"/>
+          </a:effectRef>
+          <a:fontRef idx="minor">
+            <a:schemeClr val="lt1"/>
+          </a:fontRef>
+        </p:style>
+        <p:txBody>
+          <a:bodyPr rtlCol="0" anchor="ctr"/>
+          <a:lstStyle/>
+          <a:p>
+            <a:pPr algn="ctr"/>
+          </a:p>
+        </p:txBody>
+      </p:sp>
+      <p:sp>
+        <p:nvSpPr>
+          <p:cNvPr id="12" name="TextBox 11"/>
+          <p:cNvSpPr txBox="1"/>
+          <p:nvPr/>
+        </p:nvSpPr>
+        <p:spPr>
+          <a:xfrm>
+            <a:off x="548640" y="2834640"/>
+            <a:ext cx="10972800" cy="274320"/>
+          </a:xfrm>
+          <a:prstGeom prst="rect">
+            <a:avLst/>
+          </a:prstGeom>
+          <a:noFill/>
+        </p:spPr>
+        <p:txBody>
+          <a:bodyPr wrap="none">
+            <a:spAutoFit/>
+          </a:bodyPr>
+          <a:lstStyle/>
+          <a:p>
+            <a:pPr>
+              <a:defRPr sz="2000" b="1">
+                <a:solidFill>
+                  <a:srgbClr val="FFFFFF"/>
+                </a:solidFill>
+              </a:defRPr>
+            </a:pPr>
+            <a:r>
+              <a:t>Transforming:</a:t>
+            </a:r>
+          </a:p>
+        </p:txBody>
+      </p:sp>
+      <p:sp>
+        <p:nvSpPr>
+          <p:cNvPr id="13" name="Rectangle 12"/>
+          <p:cNvSpPr/>
+          <p:nvPr/>
+        </p:nvSpPr>
+        <p:spPr>
+          <a:xfrm>
+            <a:off x="640080" y="3246120"/>
+            <a:ext cx="10789920" cy="411480"/>
+          </a:xfrm>
+          <a:prstGeom prst="rect">
+            <a:avLst/>
+          </a:prstGeom>
+          <a:solidFill>
+            <a:srgbClr val="282C34"/>
+          </a:solidFill>
+          <a:ln>
+            <a:noFill/>
+          </a:ln>
+        </p:spPr>
+        <p:style>
+          <a:lnRef idx="1">
+            <a:schemeClr val="accent1"/>
+          </a:lnRef>
+          <a:fillRef idx="3">
+            <a:schemeClr val="accent1"/>
+          </a:fillRef>
+          <a:effectRef idx="2">
+            <a:schemeClr val="accent1"/>
+          </a:effectRef>
+          <a:fontRef idx="minor">
+            <a:schemeClr val="lt1"/>
+          </a:fontRef>
+        </p:style>
+        <p:txBody>
+          <a:bodyPr rtlCol="0" anchor="ctr"/>
+          <a:lstStyle/>
+          <a:p>
+            <a:pPr algn="ctr"/>
+          </a:p>
+        </p:txBody>
+      </p:sp>
+      <p:sp>
+        <p:nvSpPr>
+          <p:cNvPr id="14" name="Rectangle 13"/>
+          <p:cNvSpPr/>
+          <p:nvPr/>
+        </p:nvSpPr>
+        <p:spPr>
+          <a:xfrm>
+            <a:off x="640080" y="3246120"/>
+            <a:ext cx="73152" cy="411480"/>
+          </a:xfrm>
+          <a:prstGeom prst="rect">
+            <a:avLst/>
+          </a:prstGeom>
+          <a:solidFill>
+            <a:srgbClr val="61AFEF"/>
+          </a:solidFill>
+          <a:ln>
+            <a:noFill/>
+          </a:ln>
+        </p:spPr>
+        <p:style>
+          <a:lnRef idx="1">
+            <a:schemeClr val="accent1"/>
+          </a:lnRef>
+          <a:fillRef idx="3">
+            <a:schemeClr val="accent1"/>
+          </a:fillRef>
+          <a:effectRef idx="2">
+            <a:schemeClr val="accent1"/>
+          </a:effectRef>
+          <a:fontRef idx="minor">
+            <a:schemeClr val="lt1"/>
+          </a:fontRef>
+        </p:style>
+        <p:txBody>
+          <a:bodyPr rtlCol="0" anchor="ctr"/>
+          <a:lstStyle/>
+          <a:p>
+            <a:pPr algn="ctr"/>
+          </a:p>
+        </p:txBody>
+      </p:sp>
+      <p:sp>
+        <p:nvSpPr>
+          <p:cNvPr id="15" name="TextBox 14"/>
+          <p:cNvSpPr txBox="1"/>
+          <p:nvPr/>
+        </p:nvSpPr>
+        <p:spPr>
+          <a:xfrm>
+            <a:off x="914400" y="3291840"/>
+            <a:ext cx="10241280" cy="320040"/>
+          </a:xfrm>
+          <a:prstGeom prst="rect">
+            <a:avLst/>
+          </a:prstGeom>
+          <a:noFill/>
+        </p:spPr>
+        <p:txBody>
+          <a:bodyPr wrap="none">
+            <a:spAutoFit/>
+          </a:bodyPr>
+          <a:lstStyle/>
           <a:p>
             <a:pPr>
               <a:spcAft>
-                <a:spcPts val="600"/>
+                <a:spcPts val="200"/>
               </a:spcAft>
-              <a:defRPr b="1" sz="2000">
+              <a:defRPr sz="1400">
+                <a:solidFill>
+                  <a:srgbClr val="ABB2BF"/>
+                </a:solidFill>
+                <a:latin typeface="Consolas"/>
+              </a:defRPr>
+            </a:pPr>
+            <a:r>
+              <a:t>squares = {x: x**2 for x in range(5)}</a:t>
+            </a:r>
+          </a:p>
+        </p:txBody>
+      </p:sp>
+      <p:sp>
+        <p:nvSpPr>
+          <p:cNvPr id="16" name="Rectangle 15"/>
+          <p:cNvSpPr/>
+          <p:nvPr/>
+        </p:nvSpPr>
+        <p:spPr>
+          <a:xfrm>
+            <a:off x="365760" y="3794760"/>
+            <a:ext cx="11430000" cy="365760"/>
+          </a:xfrm>
+          <a:prstGeom prst="rect">
+            <a:avLst/>
+          </a:prstGeom>
+          <a:solidFill>
+            <a:srgbClr val="0078D7"/>
+          </a:solidFill>
+          <a:ln>
+            <a:noFill/>
+          </a:ln>
+        </p:spPr>
+        <p:style>
+          <a:lnRef idx="1">
+            <a:schemeClr val="accent1"/>
+          </a:lnRef>
+          <a:fillRef idx="3">
+            <a:schemeClr val="accent1"/>
+          </a:fillRef>
+          <a:effectRef idx="2">
+            <a:schemeClr val="accent1"/>
+          </a:effectRef>
+          <a:fontRef idx="minor">
+            <a:schemeClr val="lt1"/>
+          </a:fontRef>
+        </p:style>
+        <p:txBody>
+          <a:bodyPr rtlCol="0" anchor="ctr"/>
+          <a:lstStyle/>
+          <a:p>
+            <a:pPr algn="ctr"/>
+          </a:p>
+        </p:txBody>
+      </p:sp>
+      <p:sp>
+        <p:nvSpPr>
+          <p:cNvPr id="17" name="TextBox 16"/>
+          <p:cNvSpPr txBox="1"/>
+          <p:nvPr/>
+        </p:nvSpPr>
+        <p:spPr>
+          <a:xfrm>
+            <a:off x="548640" y="3840480"/>
+            <a:ext cx="10972800" cy="274320"/>
+          </a:xfrm>
+          <a:prstGeom prst="rect">
+            <a:avLst/>
+          </a:prstGeom>
+          <a:noFill/>
+        </p:spPr>
+        <p:txBody>
+          <a:bodyPr wrap="none">
+            <a:spAutoFit/>
+          </a:bodyPr>
+          <a:lstStyle/>
+          <a:p>
+            <a:pPr>
+              <a:defRPr sz="2000" b="1">
+                <a:solidFill>
+                  <a:srgbClr val="FFFFFF"/>
+                </a:solidFill>
+              </a:defRPr>
+            </a:pPr>
+            <a:r>
+              <a:t># {0: 0, 1: 1, 2: 4, 3: 9, 4: 16}</a:t>
+            </a:r>
+          </a:p>
+        </p:txBody>
+      </p:sp>
+      <p:sp>
+        <p:nvSpPr>
+          <p:cNvPr id="18" name="Rectangle 17"/>
+          <p:cNvSpPr/>
+          <p:nvPr/>
+        </p:nvSpPr>
+        <p:spPr>
+          <a:xfrm>
+            <a:off x="365760" y="4251960"/>
+            <a:ext cx="11430000" cy="365760"/>
+          </a:xfrm>
+          <a:prstGeom prst="rect">
+            <a:avLst/>
+          </a:prstGeom>
+          <a:solidFill>
+            <a:srgbClr val="0078D7"/>
+          </a:solidFill>
+          <a:ln>
+            <a:noFill/>
+          </a:ln>
+        </p:spPr>
+        <p:style>
+          <a:lnRef idx="1">
+            <a:schemeClr val="accent1"/>
+          </a:lnRef>
+          <a:fillRef idx="3">
+            <a:schemeClr val="accent1"/>
+          </a:fillRef>
+          <a:effectRef idx="2">
+            <a:schemeClr val="accent1"/>
+          </a:effectRef>
+          <a:fontRef idx="minor">
+            <a:schemeClr val="lt1"/>
+          </a:fontRef>
+        </p:style>
+        <p:txBody>
+          <a:bodyPr rtlCol="0" anchor="ctr"/>
+          <a:lstStyle/>
+          <a:p>
+            <a:pPr algn="ctr"/>
+          </a:p>
+        </p:txBody>
+      </p:sp>
+      <p:sp>
+        <p:nvSpPr>
+          <p:cNvPr id="19" name="TextBox 18"/>
+          <p:cNvSpPr txBox="1"/>
+          <p:nvPr/>
+        </p:nvSpPr>
+        <p:spPr>
+          <a:xfrm>
+            <a:off x="548640" y="4297680"/>
+            <a:ext cx="10972800" cy="274320"/>
+          </a:xfrm>
+          <a:prstGeom prst="rect">
+            <a:avLst/>
+          </a:prstGeom>
+          <a:noFill/>
+        </p:spPr>
+        <p:txBody>
+          <a:bodyPr wrap="none">
+            <a:spAutoFit/>
+          </a:bodyPr>
+          <a:lstStyle/>
+          <a:p>
+            <a:pPr>
+              <a:defRPr sz="2000" b="1">
+                <a:solidFill>
+                  <a:srgbClr val="FFFFFF"/>
+                </a:solidFill>
+              </a:defRPr>
+            </a:pPr>
+            <a:r>
+              <a:t>Filtering:</a:t>
+            </a:r>
+          </a:p>
+        </p:txBody>
+      </p:sp>
+      <p:sp>
+        <p:nvSpPr>
+          <p:cNvPr id="20" name="TextBox 19"/>
+          <p:cNvSpPr txBox="1"/>
+          <p:nvPr/>
+        </p:nvSpPr>
+        <p:spPr>
+          <a:xfrm>
+            <a:off x="457200" y="4754880"/>
+            <a:ext cx="11247120" cy="320040"/>
+          </a:xfrm>
+          <a:prstGeom prst="rect">
+            <a:avLst/>
+          </a:prstGeom>
+          <a:noFill/>
+        </p:spPr>
+        <p:txBody>
+          <a:bodyPr wrap="none">
+            <a:spAutoFit/>
+          </a:bodyPr>
+          <a:lstStyle/>
+          <a:p>
+            <a:pPr>
+              <a:defRPr sz="1700">
                 <a:solidFill>
                   <a:srgbClr val="333333"/>
                 </a:solidFill>
               </a:defRPr>
             </a:pPr>
             <a:r>
-              <a:t>Transforming:</a:t>
-            </a:r>
-          </a:p>
+              <a:t>scores = {"Alice": 90, "Bob": 75, "Charlie": 85}</a:t>
+            </a:r>
+          </a:p>
+        </p:txBody>
+      </p:sp>
+      <p:sp>
+        <p:nvSpPr>
+          <p:cNvPr id="21" name="Rectangle 20"/>
+          <p:cNvSpPr/>
+          <p:nvPr/>
+        </p:nvSpPr>
+        <p:spPr>
+          <a:xfrm>
+            <a:off x="640080" y="4983480"/>
+            <a:ext cx="10789920" cy="411480"/>
+          </a:xfrm>
+          <a:prstGeom prst="rect">
+            <a:avLst/>
+          </a:prstGeom>
+          <a:solidFill>
+            <a:srgbClr val="282C34"/>
+          </a:solidFill>
+          <a:ln>
+            <a:noFill/>
+          </a:ln>
+        </p:spPr>
+        <p:style>
+          <a:lnRef idx="1">
+            <a:schemeClr val="accent1"/>
+          </a:lnRef>
+          <a:fillRef idx="3">
+            <a:schemeClr val="accent1"/>
+          </a:fillRef>
+          <a:effectRef idx="2">
+            <a:schemeClr val="accent1"/>
+          </a:effectRef>
+          <a:fontRef idx="minor">
+            <a:schemeClr val="lt1"/>
+          </a:fontRef>
+        </p:style>
+        <p:txBody>
+          <a:bodyPr rtlCol="0" anchor="ctr"/>
+          <a:lstStyle/>
+          <a:p>
+            <a:pPr algn="ctr"/>
+          </a:p>
+        </p:txBody>
+      </p:sp>
+      <p:sp>
+        <p:nvSpPr>
+          <p:cNvPr id="22" name="Rectangle 21"/>
+          <p:cNvSpPr/>
+          <p:nvPr/>
+        </p:nvSpPr>
+        <p:spPr>
+          <a:xfrm>
+            <a:off x="640080" y="4983480"/>
+            <a:ext cx="73152" cy="411480"/>
+          </a:xfrm>
+          <a:prstGeom prst="rect">
+            <a:avLst/>
+          </a:prstGeom>
+          <a:solidFill>
+            <a:srgbClr val="61AFEF"/>
+          </a:solidFill>
+          <a:ln>
+            <a:noFill/>
+          </a:ln>
+        </p:spPr>
+        <p:style>
+          <a:lnRef idx="1">
+            <a:schemeClr val="accent1"/>
+          </a:lnRef>
+          <a:fillRef idx="3">
+            <a:schemeClr val="accent1"/>
+          </a:fillRef>
+          <a:effectRef idx="2">
+            <a:schemeClr val="accent1"/>
+          </a:effectRef>
+          <a:fontRef idx="minor">
+            <a:schemeClr val="lt1"/>
+          </a:fontRef>
+        </p:style>
+        <p:txBody>
+          <a:bodyPr rtlCol="0" anchor="ctr"/>
+          <a:lstStyle/>
+          <a:p>
+            <a:pPr algn="ctr"/>
+          </a:p>
+        </p:txBody>
+      </p:sp>
+      <p:sp>
+        <p:nvSpPr>
+          <p:cNvPr id="23" name="TextBox 22"/>
+          <p:cNvSpPr txBox="1"/>
+          <p:nvPr/>
+        </p:nvSpPr>
+        <p:spPr>
+          <a:xfrm>
+            <a:off x="914400" y="5029200"/>
+            <a:ext cx="10241280" cy="320040"/>
+          </a:xfrm>
+          <a:prstGeom prst="rect">
+            <a:avLst/>
+          </a:prstGeom>
+          <a:noFill/>
+        </p:spPr>
+        <p:txBody>
+          <a:bodyPr wrap="none">
+            <a:spAutoFit/>
+          </a:bodyPr>
+          <a:lstStyle/>
           <a:p>
             <a:pPr>
               <a:spcAft>
-                <a:spcPts val="600"/>
+                <a:spcPts val="200"/>
               </a:spcAft>
-              <a:defRPr b="1" sz="2000">
-                <a:solidFill>
-                  <a:srgbClr val="333333"/>
-                </a:solidFill>
-              </a:defRPr>
-            </a:pPr>
-            <a:r>
-              <a:t>squares = {x: x**2 for x in range(5)}</a:t>
-            </a:r>
-          </a:p>
+              <a:defRPr sz="1400">
+                <a:solidFill>
+                  <a:srgbClr val="ABB2BF"/>
+                </a:solidFill>
+                <a:latin typeface="Consolas"/>
+              </a:defRPr>
+            </a:pPr>
+            <a:r>
+              <a:t>high_scores = {k: v for k, v in scores.items() if v &gt;= 80}</a:t>
+            </a:r>
+          </a:p>
+        </p:txBody>
+      </p:sp>
+      <p:sp>
+        <p:nvSpPr>
+          <p:cNvPr id="24" name="Rectangle 23"/>
+          <p:cNvSpPr/>
+          <p:nvPr/>
+        </p:nvSpPr>
+        <p:spPr>
+          <a:xfrm>
+            <a:off x="365760" y="5532120"/>
+            <a:ext cx="11430000" cy="365760"/>
+          </a:xfrm>
+          <a:prstGeom prst="rect">
+            <a:avLst/>
+          </a:prstGeom>
+          <a:solidFill>
+            <a:srgbClr val="0078D7"/>
+          </a:solidFill>
+          <a:ln>
+            <a:noFill/>
+          </a:ln>
+        </p:spPr>
+        <p:style>
+          <a:lnRef idx="1">
+            <a:schemeClr val="accent1"/>
+          </a:lnRef>
+          <a:fillRef idx="3">
+            <a:schemeClr val="accent1"/>
+          </a:fillRef>
+          <a:effectRef idx="2">
+            <a:schemeClr val="accent1"/>
+          </a:effectRef>
+          <a:fontRef idx="minor">
+            <a:schemeClr val="lt1"/>
+          </a:fontRef>
+        </p:style>
+        <p:txBody>
+          <a:bodyPr rtlCol="0" anchor="ctr"/>
+          <a:lstStyle/>
+          <a:p>
+            <a:pPr algn="ctr"/>
+          </a:p>
+        </p:txBody>
+      </p:sp>
+      <p:sp>
+        <p:nvSpPr>
+          <p:cNvPr id="25" name="TextBox 24"/>
+          <p:cNvSpPr txBox="1"/>
+          <p:nvPr/>
+        </p:nvSpPr>
+        <p:spPr>
+          <a:xfrm>
+            <a:off x="548640" y="5577840"/>
+            <a:ext cx="10972800" cy="274320"/>
+          </a:xfrm>
+          <a:prstGeom prst="rect">
+            <a:avLst/>
+          </a:prstGeom>
+          <a:noFill/>
+        </p:spPr>
+        <p:txBody>
+          <a:bodyPr wrap="none">
+            <a:spAutoFit/>
+          </a:bodyPr>
+          <a:lstStyle/>
           <a:p>
             <a:pPr>
-              <a:spcAft>
-                <a:spcPts val="600"/>
-              </a:spcAft>
-              <a:defRPr b="1" sz="2000">
-                <a:solidFill>
-                  <a:srgbClr val="333333"/>
-                </a:solidFill>
-              </a:defRPr>
-            </a:pPr>
-            <a:r>
-              <a:t># {0: 0, 1: 1, 2: 4, 3: 9, 4: 16}</a:t>
-            </a:r>
-          </a:p>
-          <a:p>
-            <a:pPr>
-              <a:spcAft>
-                <a:spcPts val="600"/>
-              </a:spcAft>
-              <a:defRPr b="1" sz="2000">
-                <a:solidFill>
-                  <a:srgbClr val="333333"/>
-                </a:solidFill>
-              </a:defRPr>
-            </a:pPr>
-            <a:r>
-              <a:t>Filtering:</a:t>
-            </a:r>
-          </a:p>
-          <a:p>
-            <a:pPr>
-              <a:spcAft>
-                <a:spcPts val="600"/>
-              </a:spcAft>
-              <a:defRPr b="1" sz="2000">
-                <a:solidFill>
-                  <a:srgbClr val="333333"/>
-                </a:solidFill>
-              </a:defRPr>
-            </a:pPr>
-            <a:r>
-              <a:t>scores = {"Alice": 90, "Bob": 75, "Charlie": 85}</a:t>
-            </a:r>
-          </a:p>
-          <a:p>
-            <a:pPr>
-              <a:spcAft>
-                <a:spcPts val="600"/>
-              </a:spcAft>
-              <a:defRPr b="1" sz="2000">
-                <a:solidFill>
-                  <a:srgbClr val="333333"/>
-                </a:solidFill>
-              </a:defRPr>
-            </a:pPr>
-            <a:r>
-              <a:t>high_scores = {k: v for k, v in scores.items() if v &gt;= 80}</a:t>
-            </a:r>
-          </a:p>
-          <a:p>
-            <a:pPr>
-              <a:spcAft>
-                <a:spcPts val="600"/>
-              </a:spcAft>
-              <a:defRPr b="1" sz="2000">
-                <a:solidFill>
-                  <a:srgbClr val="333333"/>
+              <a:defRPr sz="2000" b="1">
+                <a:solidFill>
+                  <a:srgbClr val="FFFFFF"/>
                 </a:solidFill>
               </a:defRPr>
             </a:pPr>
             <a:r>
               <a:t>Case Transform:</a:t>
-            </a:r>
-          </a:p>
-          <a:p>
-            <a:pPr>
-              <a:spcAft>
-                <a:spcPts val="600"/>
-              </a:spcAft>
-              <a:defRPr b="1" sz="2000">
-                <a:solidFill>
-                  <a:srgbClr val="333333"/>
-                </a:solidFill>
-              </a:defRPr>
-            </a:pPr>
-            <a:r>
-              <a:t>upper = {k.upper(): v for k, v in data.items()}</a:t>
             </a:r>
           </a:p>
         </p:txBody>
@@ -4730,7 +8379,7 @@
             <a:avLst/>
           </a:prstGeom>
           <a:solidFill>
-            <a:srgbClr val="FFFFFF"/>
+            <a:srgbClr val="0066CC"/>
           </a:solidFill>
           <a:ln>
             <a:noFill/>
@@ -4766,14 +8415,14 @@
         </p:nvSpPr>
         <p:spPr>
           <a:xfrm>
-            <a:off x="0" y="0"/>
-            <a:ext cx="12191695" cy="137160"/>
+            <a:off x="0" y="2743200"/>
+            <a:ext cx="3657600" cy="137160"/>
           </a:xfrm>
           <a:prstGeom prst="rect">
             <a:avLst/>
           </a:prstGeom>
           <a:solidFill>
-            <a:srgbClr val="0066CC"/>
+            <a:srgbClr val="FFBB33"/>
           </a:solidFill>
           <a:ln>
             <a:noFill/>
@@ -4803,14 +8452,57 @@
       </p:sp>
       <p:sp>
         <p:nvSpPr>
-          <p:cNvPr id="4" name="TextBox 3"/>
+          <p:cNvPr id="4" name="Rectangle 3"/>
+          <p:cNvSpPr/>
+          <p:nvPr/>
+        </p:nvSpPr>
+        <p:spPr>
+          <a:xfrm>
+            <a:off x="8531352" y="4114800"/>
+            <a:ext cx="3657600" cy="137160"/>
+          </a:xfrm>
+          <a:prstGeom prst="rect">
+            <a:avLst/>
+          </a:prstGeom>
+          <a:solidFill>
+            <a:srgbClr val="FFBB33"/>
+          </a:solidFill>
+          <a:ln>
+            <a:noFill/>
+          </a:ln>
+        </p:spPr>
+        <p:style>
+          <a:lnRef idx="1">
+            <a:schemeClr val="accent1"/>
+          </a:lnRef>
+          <a:fillRef idx="3">
+            <a:schemeClr val="accent1"/>
+          </a:fillRef>
+          <a:effectRef idx="2">
+            <a:schemeClr val="accent1"/>
+          </a:effectRef>
+          <a:fontRef idx="minor">
+            <a:schemeClr val="lt1"/>
+          </a:fontRef>
+        </p:style>
+        <p:txBody>
+          <a:bodyPr rtlCol="0" anchor="ctr"/>
+          <a:lstStyle/>
+          <a:p>
+            <a:pPr algn="ctr"/>
+          </a:p>
+        </p:txBody>
+      </p:sp>
+      <p:sp>
+        <p:nvSpPr>
+          <p:cNvPr id="5" name="TextBox 4"/>
           <p:cNvSpPr txBox="1"/>
           <p:nvPr/>
         </p:nvSpPr>
         <p:spPr>
           <a:xfrm>
-            <a:off x="457200" y="320040"/>
-            <a:ext cx="10972800" cy="640080"/>
+            <a:off x="914400" y="2560320"/>
+            <a:ext cx="10360152" cy="1371600"/>
           </a:xfrm>
           <a:prstGeom prst="rect">
             <a:avLst/>
@@ -4823,293 +8515,15 @@
           </a:bodyPr>
           <a:lstStyle/>
           <a:p>
-            <a:pPr>
-              <a:defRPr sz="3600" b="1">
-                <a:solidFill>
-                  <a:srgbClr val="003366"/>
+            <a:pPr algn="ctr">
+              <a:defRPr sz="4800" b="1">
+                <a:solidFill>
+                  <a:srgbClr val="FFFFFF"/>
                 </a:solidFill>
               </a:defRPr>
             </a:pPr>
             <a:r>
               <a:t>Nested Dictionaries</a:t>
-            </a:r>
-          </a:p>
-        </p:txBody>
-      </p:sp>
-      <p:sp>
-        <p:nvSpPr>
-          <p:cNvPr id="5" name="TextBox 4"/>
-          <p:cNvSpPr txBox="1"/>
-          <p:nvPr/>
-        </p:nvSpPr>
-        <p:spPr>
-          <a:xfrm>
-            <a:off x="640080" y="1188720"/>
-            <a:ext cx="10789920" cy="5303520"/>
-          </a:xfrm>
-          <a:prstGeom prst="rect">
-            <a:avLst/>
-          </a:prstGeom>
-          <a:noFill/>
-        </p:spPr>
-        <p:txBody>
-          <a:bodyPr wrap="square">
-            <a:spAutoFit/>
-          </a:bodyPr>
-          <a:lstStyle/>
-          <a:p>
-            <a:pPr>
-              <a:spcAft>
-                <a:spcPts val="600"/>
-              </a:spcAft>
-              <a:defRPr b="1" sz="2000">
-                <a:solidFill>
-                  <a:srgbClr val="333333"/>
-                </a:solidFill>
-              </a:defRPr>
-            </a:pPr>
-            <a:r>
-              <a:t>Structure:</a:t>
-            </a:r>
-          </a:p>
-          <a:p>
-            <a:pPr>
-              <a:spcAft>
-                <a:spcPts val="600"/>
-              </a:spcAft>
-              <a:defRPr sz="1600">
-                <a:solidFill>
-                  <a:srgbClr val="333333"/>
-                </a:solidFill>
-              </a:defRPr>
-            </a:pPr>
-            <a:r>
-              <a:t>students = {</a:t>
-            </a:r>
-          </a:p>
-          <a:p>
-            <a:pPr>
-              <a:spcAft>
-                <a:spcPts val="600"/>
-              </a:spcAft>
-              <a:defRPr sz="1600">
-                <a:solidFill>
-                  <a:srgbClr val="333333"/>
-                </a:solidFill>
-              </a:defRPr>
-            </a:pPr>
-            <a:r>
-              <a:t>    "student1": {"name": "Alice", "grade": "A"},</a:t>
-            </a:r>
-          </a:p>
-          <a:p>
-            <a:pPr>
-              <a:spcAft>
-                <a:spcPts val="600"/>
-              </a:spcAft>
-              <a:defRPr sz="1600">
-                <a:solidFill>
-                  <a:srgbClr val="333333"/>
-                </a:solidFill>
-              </a:defRPr>
-            </a:pPr>
-            <a:r>
-              <a:t>    "student2": {"name": "Bob", "grade": "B"}</a:t>
-            </a:r>
-          </a:p>
-          <a:p>
-            <a:pPr>
-              <a:spcAft>
-                <a:spcPts val="600"/>
-              </a:spcAft>
-              <a:defRPr sz="1600">
-                <a:solidFill>
-                  <a:srgbClr val="333333"/>
-                </a:solidFill>
-              </a:defRPr>
-            </a:pPr>
-            <a:r>
-              <a:t>}</a:t>
-            </a:r>
-          </a:p>
-          <a:p>
-            <a:pPr>
-              <a:spcAft>
-                <a:spcPts val="600"/>
-              </a:spcAft>
-              <a:defRPr b="1" sz="2000">
-                <a:solidFill>
-                  <a:srgbClr val="333333"/>
-                </a:solidFill>
-              </a:defRPr>
-            </a:pPr>
-            <a:r>
-              <a:t>Accessing:</a:t>
-            </a:r>
-          </a:p>
-          <a:p>
-            <a:pPr>
-              <a:spcAft>
-                <a:spcPts val="600"/>
-              </a:spcAft>
-              <a:defRPr sz="1600">
-                <a:solidFill>
-                  <a:srgbClr val="333333"/>
-                </a:solidFill>
-              </a:defRPr>
-            </a:pPr>
-            <a:r>
-              <a:t>students["student1"]["name"]  # "Alice"</a:t>
-            </a:r>
-          </a:p>
-          <a:p>
-            <a:pPr>
-              <a:spcAft>
-                <a:spcPts val="600"/>
-              </a:spcAft>
-              <a:defRPr b="1" sz="2000">
-                <a:solidFill>
-                  <a:srgbClr val="333333"/>
-                </a:solidFill>
-              </a:defRPr>
-            </a:pPr>
-            <a:r>
-              <a:t>Iterating:</a:t>
-            </a:r>
-          </a:p>
-          <a:p>
-            <a:pPr>
-              <a:spcAft>
-                <a:spcPts val="600"/>
-              </a:spcAft>
-              <a:defRPr b="1" sz="2000">
-                <a:solidFill>
-                  <a:srgbClr val="333333"/>
-                </a:solidFill>
-              </a:defRPr>
-            </a:pPr>
-            <a:r>
-              <a:t>for student_id, info in students.items():</a:t>
-            </a:r>
-          </a:p>
-          <a:p>
-            <a:pPr>
-              <a:spcAft>
-                <a:spcPts val="600"/>
-              </a:spcAft>
-              <a:defRPr sz="1600">
-                <a:solidFill>
-                  <a:srgbClr val="333333"/>
-                </a:solidFill>
-              </a:defRPr>
-            </a:pPr>
-            <a:r>
-              <a:t>    print(f"{student_id}:")</a:t>
-            </a:r>
-          </a:p>
-          <a:p>
-            <a:pPr>
-              <a:spcAft>
-                <a:spcPts val="600"/>
-              </a:spcAft>
-              <a:defRPr sz="1600">
-                <a:solidFill>
-                  <a:srgbClr val="333333"/>
-                </a:solidFill>
-              </a:defRPr>
-            </a:pPr>
-            <a:r>
-              <a:t>    for key, value in info.items():</a:t>
-            </a:r>
-          </a:p>
-          <a:p>
-            <a:pPr>
-              <a:spcAft>
-                <a:spcPts val="600"/>
-              </a:spcAft>
-              <a:defRPr sz="1600">
-                <a:solidFill>
-                  <a:srgbClr val="333333"/>
-                </a:solidFill>
-              </a:defRPr>
-            </a:pPr>
-            <a:r>
-              <a:t>        print(f"  {key}: {value}")</a:t>
-            </a:r>
-          </a:p>
-          <a:p>
-            <a:pPr>
-              <a:spcAft>
-                <a:spcPts val="600"/>
-              </a:spcAft>
-              <a:defRPr b="1" sz="2000">
-                <a:solidFill>
-                  <a:srgbClr val="333333"/>
-                </a:solidFill>
-              </a:defRPr>
-            </a:pPr>
-            <a:r>
-              <a:t>Use Cases:</a:t>
-            </a:r>
-          </a:p>
-          <a:p>
-            <a:pPr lvl="1">
-              <a:spcAft>
-                <a:spcPts val="400"/>
-              </a:spcAft>
-              <a:defRPr sz="1600">
-                <a:solidFill>
-                  <a:srgbClr val="333333"/>
-                </a:solidFill>
-              </a:defRPr>
-            </a:pPr>
-            <a:r>
-              <a:t>• Database-like structures</a:t>
-            </a:r>
-          </a:p>
-          <a:p>
-            <a:pPr lvl="1">
-              <a:spcAft>
-                <a:spcPts val="400"/>
-              </a:spcAft>
-              <a:defRPr sz="1600">
-                <a:solidFill>
-                  <a:srgbClr val="333333"/>
-                </a:solidFill>
-              </a:defRPr>
-            </a:pPr>
-            <a:r>
-              <a:t>• Configuration files</a:t>
-            </a:r>
-          </a:p>
-          <a:p>
-            <a:pPr lvl="1">
-              <a:spcAft>
-                <a:spcPts val="400"/>
-              </a:spcAft>
-              <a:defRPr sz="1600">
-                <a:solidFill>
-                  <a:srgbClr val="333333"/>
-                </a:solidFill>
-              </a:defRPr>
-            </a:pPr>
-            <a:r>
-              <a:t>• API responses</a:t>
-            </a:r>
-          </a:p>
-          <a:p>
-            <a:pPr lvl="1">
-              <a:spcAft>
-                <a:spcPts val="400"/>
-              </a:spcAft>
-              <a:defRPr sz="1600">
-                <a:solidFill>
-                  <a:srgbClr val="333333"/>
-                </a:solidFill>
-              </a:defRPr>
-            </a:pPr>
-            <a:r>
-              <a:t>• Complex data models</a:t>
             </a:r>
           </a:p>
         </p:txBody>
@@ -5147,7 +8561,7 @@
             <a:avLst/>
           </a:prstGeom>
           <a:solidFill>
-            <a:srgbClr val="FFFFFF"/>
+            <a:srgbClr val="FAFAFA"/>
           </a:solidFill>
           <a:ln>
             <a:noFill/>
@@ -5184,7 +8598,7 @@
         <p:spPr>
           <a:xfrm>
             <a:off x="0" y="0"/>
-            <a:ext cx="12191695" cy="137160"/>
+            <a:ext cx="12191695" cy="1097280"/>
           </a:xfrm>
           <a:prstGeom prst="rect">
             <a:avLst/>
@@ -5220,13 +8634,56 @@
       </p:sp>
       <p:sp>
         <p:nvSpPr>
-          <p:cNvPr id="4" name="TextBox 3"/>
+          <p:cNvPr id="4" name="Rectangle 3"/>
+          <p:cNvSpPr/>
+          <p:nvPr/>
+        </p:nvSpPr>
+        <p:spPr>
+          <a:xfrm>
+            <a:off x="0" y="1097280"/>
+            <a:ext cx="137160" cy="5760720"/>
+          </a:xfrm>
+          <a:prstGeom prst="rect">
+            <a:avLst/>
+          </a:prstGeom>
+          <a:solidFill>
+            <a:srgbClr val="FFBB33"/>
+          </a:solidFill>
+          <a:ln>
+            <a:noFill/>
+          </a:ln>
+        </p:spPr>
+        <p:style>
+          <a:lnRef idx="1">
+            <a:schemeClr val="accent1"/>
+          </a:lnRef>
+          <a:fillRef idx="3">
+            <a:schemeClr val="accent1"/>
+          </a:fillRef>
+          <a:effectRef idx="2">
+            <a:schemeClr val="accent1"/>
+          </a:effectRef>
+          <a:fontRef idx="minor">
+            <a:schemeClr val="lt1"/>
+          </a:fontRef>
+        </p:style>
+        <p:txBody>
+          <a:bodyPr rtlCol="0" anchor="ctr"/>
+          <a:lstStyle/>
+          <a:p>
+            <a:pPr algn="ctr"/>
+          </a:p>
+        </p:txBody>
+      </p:sp>
+      <p:sp>
+        <p:nvSpPr>
+          <p:cNvPr id="5" name="TextBox 4"/>
           <p:cNvSpPr txBox="1"/>
           <p:nvPr/>
         </p:nvSpPr>
         <p:spPr>
           <a:xfrm>
-            <a:off x="457200" y="320040"/>
+            <a:off x="365760" y="274320"/>
             <a:ext cx="10972800" cy="640080"/>
           </a:xfrm>
           <a:prstGeom prst="rect">
@@ -5243,26 +8700,69 @@
             <a:pPr>
               <a:defRPr sz="3600" b="1">
                 <a:solidFill>
-                  <a:srgbClr val="003366"/>
-                </a:solidFill>
-              </a:defRPr>
-            </a:pPr>
-            <a:r>
-              <a:t>Common Patterns</a:t>
-            </a:r>
-          </a:p>
-        </p:txBody>
-      </p:sp>
-      <p:sp>
-        <p:nvSpPr>
-          <p:cNvPr id="5" name="TextBox 4"/>
+                  <a:srgbClr val="FFFFFF"/>
+                </a:solidFill>
+              </a:defRPr>
+            </a:pPr>
+            <a:r>
+              <a:t>Nested Dictionaries</a:t>
+            </a:r>
+          </a:p>
+        </p:txBody>
+      </p:sp>
+      <p:sp>
+        <p:nvSpPr>
+          <p:cNvPr id="6" name="Rectangle 5"/>
+          <p:cNvSpPr/>
+          <p:nvPr/>
+        </p:nvSpPr>
+        <p:spPr>
+          <a:xfrm>
+            <a:off x="365760" y="1325880"/>
+            <a:ext cx="11430000" cy="365760"/>
+          </a:xfrm>
+          <a:prstGeom prst="rect">
+            <a:avLst/>
+          </a:prstGeom>
+          <a:solidFill>
+            <a:srgbClr val="0078D7"/>
+          </a:solidFill>
+          <a:ln>
+            <a:noFill/>
+          </a:ln>
+        </p:spPr>
+        <p:style>
+          <a:lnRef idx="1">
+            <a:schemeClr val="accent1"/>
+          </a:lnRef>
+          <a:fillRef idx="3">
+            <a:schemeClr val="accent1"/>
+          </a:fillRef>
+          <a:effectRef idx="2">
+            <a:schemeClr val="accent1"/>
+          </a:effectRef>
+          <a:fontRef idx="minor">
+            <a:schemeClr val="lt1"/>
+          </a:fontRef>
+        </p:style>
+        <p:txBody>
+          <a:bodyPr rtlCol="0" anchor="ctr"/>
+          <a:lstStyle/>
+          <a:p>
+            <a:pPr algn="ctr"/>
+          </a:p>
+        </p:txBody>
+      </p:sp>
+      <p:sp>
+        <p:nvSpPr>
+          <p:cNvPr id="7" name="TextBox 6"/>
           <p:cNvSpPr txBox="1"/>
           <p:nvPr/>
         </p:nvSpPr>
         <p:spPr>
           <a:xfrm>
-            <a:off x="640080" y="1188720"/>
-            <a:ext cx="10789920" cy="5303520"/>
+            <a:off x="548640" y="1371600"/>
+            <a:ext cx="10972800" cy="274320"/>
           </a:xfrm>
           <a:prstGeom prst="rect">
             <a:avLst/>
@@ -5270,120 +8770,681 @@
           <a:noFill/>
         </p:spPr>
         <p:txBody>
-          <a:bodyPr wrap="square">
+          <a:bodyPr wrap="none">
             <a:spAutoFit/>
           </a:bodyPr>
           <a:lstStyle/>
           <a:p>
             <a:pPr>
-              <a:spcAft>
-                <a:spcPts val="600"/>
-              </a:spcAft>
-              <a:defRPr b="1" sz="2000">
-                <a:solidFill>
-                  <a:srgbClr val="333333"/>
-                </a:solidFill>
-              </a:defRPr>
-            </a:pPr>
-            <a:r>
-              <a:t>Counting:</a:t>
-            </a:r>
-          </a:p>
+              <a:defRPr sz="2000" b="1">
+                <a:solidFill>
+                  <a:srgbClr val="FFFFFF"/>
+                </a:solidFill>
+              </a:defRPr>
+            </a:pPr>
+            <a:r>
+              <a:t>Structure:</a:t>
+            </a:r>
+          </a:p>
+        </p:txBody>
+      </p:sp>
+      <p:sp>
+        <p:nvSpPr>
+          <p:cNvPr id="8" name="Rectangle 7"/>
+          <p:cNvSpPr/>
+          <p:nvPr/>
+        </p:nvSpPr>
+        <p:spPr>
+          <a:xfrm>
+            <a:off x="640080" y="1783080"/>
+            <a:ext cx="10789920" cy="868680"/>
+          </a:xfrm>
+          <a:prstGeom prst="rect">
+            <a:avLst/>
+          </a:prstGeom>
+          <a:solidFill>
+            <a:srgbClr val="282C34"/>
+          </a:solidFill>
+          <a:ln>
+            <a:noFill/>
+          </a:ln>
+        </p:spPr>
+        <p:style>
+          <a:lnRef idx="1">
+            <a:schemeClr val="accent1"/>
+          </a:lnRef>
+          <a:fillRef idx="3">
+            <a:schemeClr val="accent1"/>
+          </a:fillRef>
+          <a:effectRef idx="2">
+            <a:schemeClr val="accent1"/>
+          </a:effectRef>
+          <a:fontRef idx="minor">
+            <a:schemeClr val="lt1"/>
+          </a:fontRef>
+        </p:style>
+        <p:txBody>
+          <a:bodyPr rtlCol="0" anchor="ctr"/>
+          <a:lstStyle/>
+          <a:p>
+            <a:pPr algn="ctr"/>
+          </a:p>
+        </p:txBody>
+      </p:sp>
+      <p:sp>
+        <p:nvSpPr>
+          <p:cNvPr id="9" name="Rectangle 8"/>
+          <p:cNvSpPr/>
+          <p:nvPr/>
+        </p:nvSpPr>
+        <p:spPr>
+          <a:xfrm>
+            <a:off x="640080" y="1783080"/>
+            <a:ext cx="73152" cy="868680"/>
+          </a:xfrm>
+          <a:prstGeom prst="rect">
+            <a:avLst/>
+          </a:prstGeom>
+          <a:solidFill>
+            <a:srgbClr val="61AFEF"/>
+          </a:solidFill>
+          <a:ln>
+            <a:noFill/>
+          </a:ln>
+        </p:spPr>
+        <p:style>
+          <a:lnRef idx="1">
+            <a:schemeClr val="accent1"/>
+          </a:lnRef>
+          <a:fillRef idx="3">
+            <a:schemeClr val="accent1"/>
+          </a:fillRef>
+          <a:effectRef idx="2">
+            <a:schemeClr val="accent1"/>
+          </a:effectRef>
+          <a:fontRef idx="minor">
+            <a:schemeClr val="lt1"/>
+          </a:fontRef>
+        </p:style>
+        <p:txBody>
+          <a:bodyPr rtlCol="0" anchor="ctr"/>
+          <a:lstStyle/>
+          <a:p>
+            <a:pPr algn="ctr"/>
+          </a:p>
+        </p:txBody>
+      </p:sp>
+      <p:sp>
+        <p:nvSpPr>
+          <p:cNvPr id="10" name="TextBox 9"/>
+          <p:cNvSpPr txBox="1"/>
+          <p:nvPr/>
+        </p:nvSpPr>
+        <p:spPr>
+          <a:xfrm>
+            <a:off x="914400" y="1828800"/>
+            <a:ext cx="10241280" cy="777240"/>
+          </a:xfrm>
+          <a:prstGeom prst="rect">
+            <a:avLst/>
+          </a:prstGeom>
+          <a:noFill/>
+        </p:spPr>
+        <p:txBody>
+          <a:bodyPr wrap="none">
+            <a:spAutoFit/>
+          </a:bodyPr>
+          <a:lstStyle/>
           <a:p>
             <a:pPr>
               <a:spcAft>
-                <a:spcPts val="600"/>
+                <a:spcPts val="200"/>
               </a:spcAft>
-              <a:defRPr sz="1600">
-                <a:solidFill>
-                  <a:srgbClr val="333333"/>
-                </a:solidFill>
-              </a:defRPr>
-            </a:pPr>
-            <a:r>
-              <a:t>word_count = {}</a:t>
+              <a:defRPr sz="1400">
+                <a:solidFill>
+                  <a:srgbClr val="ABB2BF"/>
+                </a:solidFill>
+                <a:latin typeface="Consolas"/>
+              </a:defRPr>
+            </a:pPr>
+            <a:r>
+              <a:t>students = {</a:t>
             </a:r>
           </a:p>
           <a:p>
             <a:pPr>
               <a:spcAft>
-                <a:spcPts val="600"/>
+                <a:spcPts val="200"/>
               </a:spcAft>
-              <a:defRPr b="1" sz="2000">
-                <a:solidFill>
-                  <a:srgbClr val="333333"/>
-                </a:solidFill>
-              </a:defRPr>
-            </a:pPr>
-            <a:r>
-              <a:t>for word in words:</a:t>
+              <a:defRPr sz="1400">
+                <a:solidFill>
+                  <a:srgbClr val="ABB2BF"/>
+                </a:solidFill>
+                <a:latin typeface="Consolas"/>
+              </a:defRPr>
+            </a:pPr>
+            <a:r>
+              <a:t>    "student1": {"name": "Alice", "grade": "A"},</a:t>
             </a:r>
           </a:p>
           <a:p>
             <a:pPr>
               <a:spcAft>
-                <a:spcPts val="600"/>
+                <a:spcPts val="200"/>
               </a:spcAft>
-              <a:defRPr sz="1600">
+              <a:defRPr sz="1400">
+                <a:solidFill>
+                  <a:srgbClr val="ABB2BF"/>
+                </a:solidFill>
+                <a:latin typeface="Consolas"/>
+              </a:defRPr>
+            </a:pPr>
+            <a:r>
+              <a:t>    "student2": {"name": "Bob", "grade": "B"}</a:t>
+            </a:r>
+          </a:p>
+        </p:txBody>
+      </p:sp>
+      <p:sp>
+        <p:nvSpPr>
+          <p:cNvPr id="11" name="TextBox 10"/>
+          <p:cNvSpPr txBox="1"/>
+          <p:nvPr/>
+        </p:nvSpPr>
+        <p:spPr>
+          <a:xfrm>
+            <a:off x="457200" y="2834640"/>
+            <a:ext cx="11247120" cy="320040"/>
+          </a:xfrm>
+          <a:prstGeom prst="rect">
+            <a:avLst/>
+          </a:prstGeom>
+          <a:noFill/>
+        </p:spPr>
+        <p:txBody>
+          <a:bodyPr wrap="none">
+            <a:spAutoFit/>
+          </a:bodyPr>
+          <a:lstStyle/>
+          <a:p>
+            <a:pPr>
+              <a:defRPr sz="1700">
                 <a:solidFill>
                   <a:srgbClr val="333333"/>
                 </a:solidFill>
               </a:defRPr>
             </a:pPr>
             <a:r>
-              <a:t>    word_count[word] = word_count.get(word, 0) + 1</a:t>
-            </a:r>
-          </a:p>
+              <a:t>}</a:t>
+            </a:r>
+          </a:p>
+        </p:txBody>
+      </p:sp>
+      <p:sp>
+        <p:nvSpPr>
+          <p:cNvPr id="12" name="Rectangle 11"/>
+          <p:cNvSpPr/>
+          <p:nvPr/>
+        </p:nvSpPr>
+        <p:spPr>
+          <a:xfrm>
+            <a:off x="365760" y="3063240"/>
+            <a:ext cx="11430000" cy="365760"/>
+          </a:xfrm>
+          <a:prstGeom prst="rect">
+            <a:avLst/>
+          </a:prstGeom>
+          <a:solidFill>
+            <a:srgbClr val="0078D7"/>
+          </a:solidFill>
+          <a:ln>
+            <a:noFill/>
+          </a:ln>
+        </p:spPr>
+        <p:style>
+          <a:lnRef idx="1">
+            <a:schemeClr val="accent1"/>
+          </a:lnRef>
+          <a:fillRef idx="3">
+            <a:schemeClr val="accent1"/>
+          </a:fillRef>
+          <a:effectRef idx="2">
+            <a:schemeClr val="accent1"/>
+          </a:effectRef>
+          <a:fontRef idx="minor">
+            <a:schemeClr val="lt1"/>
+          </a:fontRef>
+        </p:style>
+        <p:txBody>
+          <a:bodyPr rtlCol="0" anchor="ctr"/>
+          <a:lstStyle/>
+          <a:p>
+            <a:pPr algn="ctr"/>
+          </a:p>
+        </p:txBody>
+      </p:sp>
+      <p:sp>
+        <p:nvSpPr>
+          <p:cNvPr id="13" name="TextBox 12"/>
+          <p:cNvSpPr txBox="1"/>
+          <p:nvPr/>
+        </p:nvSpPr>
+        <p:spPr>
+          <a:xfrm>
+            <a:off x="548640" y="3108960"/>
+            <a:ext cx="10972800" cy="274320"/>
+          </a:xfrm>
+          <a:prstGeom prst="rect">
+            <a:avLst/>
+          </a:prstGeom>
+          <a:noFill/>
+        </p:spPr>
+        <p:txBody>
+          <a:bodyPr wrap="none">
+            <a:spAutoFit/>
+          </a:bodyPr>
+          <a:lstStyle/>
+          <a:p>
+            <a:pPr>
+              <a:defRPr sz="2000" b="1">
+                <a:solidFill>
+                  <a:srgbClr val="FFFFFF"/>
+                </a:solidFill>
+              </a:defRPr>
+            </a:pPr>
+            <a:r>
+              <a:t>Accessing:</a:t>
+            </a:r>
+          </a:p>
+        </p:txBody>
+      </p:sp>
+      <p:sp>
+        <p:nvSpPr>
+          <p:cNvPr id="14" name="TextBox 13"/>
+          <p:cNvSpPr txBox="1"/>
+          <p:nvPr/>
+        </p:nvSpPr>
+        <p:spPr>
+          <a:xfrm>
+            <a:off x="457200" y="3566160"/>
+            <a:ext cx="11247120" cy="320040"/>
+          </a:xfrm>
+          <a:prstGeom prst="rect">
+            <a:avLst/>
+          </a:prstGeom>
+          <a:noFill/>
+        </p:spPr>
+        <p:txBody>
+          <a:bodyPr wrap="none">
+            <a:spAutoFit/>
+          </a:bodyPr>
+          <a:lstStyle/>
+          <a:p>
+            <a:pPr>
+              <a:defRPr sz="1700">
+                <a:solidFill>
+                  <a:srgbClr val="333333"/>
+                </a:solidFill>
+              </a:defRPr>
+            </a:pPr>
+            <a:r>
+              <a:t>students["student1"]["name"]  # "Alice"</a:t>
+            </a:r>
+          </a:p>
+        </p:txBody>
+      </p:sp>
+      <p:sp>
+        <p:nvSpPr>
+          <p:cNvPr id="15" name="Rectangle 14"/>
+          <p:cNvSpPr/>
+          <p:nvPr/>
+        </p:nvSpPr>
+        <p:spPr>
+          <a:xfrm>
+            <a:off x="365760" y="3794760"/>
+            <a:ext cx="11430000" cy="365760"/>
+          </a:xfrm>
+          <a:prstGeom prst="rect">
+            <a:avLst/>
+          </a:prstGeom>
+          <a:solidFill>
+            <a:srgbClr val="0078D7"/>
+          </a:solidFill>
+          <a:ln>
+            <a:noFill/>
+          </a:ln>
+        </p:spPr>
+        <p:style>
+          <a:lnRef idx="1">
+            <a:schemeClr val="accent1"/>
+          </a:lnRef>
+          <a:fillRef idx="3">
+            <a:schemeClr val="accent1"/>
+          </a:fillRef>
+          <a:effectRef idx="2">
+            <a:schemeClr val="accent1"/>
+          </a:effectRef>
+          <a:fontRef idx="minor">
+            <a:schemeClr val="lt1"/>
+          </a:fontRef>
+        </p:style>
+        <p:txBody>
+          <a:bodyPr rtlCol="0" anchor="ctr"/>
+          <a:lstStyle/>
+          <a:p>
+            <a:pPr algn="ctr"/>
+          </a:p>
+        </p:txBody>
+      </p:sp>
+      <p:sp>
+        <p:nvSpPr>
+          <p:cNvPr id="16" name="TextBox 15"/>
+          <p:cNvSpPr txBox="1"/>
+          <p:nvPr/>
+        </p:nvSpPr>
+        <p:spPr>
+          <a:xfrm>
+            <a:off x="548640" y="3840480"/>
+            <a:ext cx="10972800" cy="274320"/>
+          </a:xfrm>
+          <a:prstGeom prst="rect">
+            <a:avLst/>
+          </a:prstGeom>
+          <a:noFill/>
+        </p:spPr>
+        <p:txBody>
+          <a:bodyPr wrap="none">
+            <a:spAutoFit/>
+          </a:bodyPr>
+          <a:lstStyle/>
+          <a:p>
+            <a:pPr>
+              <a:defRPr sz="2000" b="1">
+                <a:solidFill>
+                  <a:srgbClr val="FFFFFF"/>
+                </a:solidFill>
+              </a:defRPr>
+            </a:pPr>
+            <a:r>
+              <a:t>Iterating:</a:t>
+            </a:r>
+          </a:p>
+        </p:txBody>
+      </p:sp>
+      <p:sp>
+        <p:nvSpPr>
+          <p:cNvPr id="17" name="Rectangle 16"/>
+          <p:cNvSpPr/>
+          <p:nvPr/>
+        </p:nvSpPr>
+        <p:spPr>
+          <a:xfrm>
+            <a:off x="640080" y="4251960"/>
+            <a:ext cx="10789920" cy="1097280"/>
+          </a:xfrm>
+          <a:prstGeom prst="rect">
+            <a:avLst/>
+          </a:prstGeom>
+          <a:solidFill>
+            <a:srgbClr val="282C34"/>
+          </a:solidFill>
+          <a:ln>
+            <a:noFill/>
+          </a:ln>
+        </p:spPr>
+        <p:style>
+          <a:lnRef idx="1">
+            <a:schemeClr val="accent1"/>
+          </a:lnRef>
+          <a:fillRef idx="3">
+            <a:schemeClr val="accent1"/>
+          </a:fillRef>
+          <a:effectRef idx="2">
+            <a:schemeClr val="accent1"/>
+          </a:effectRef>
+          <a:fontRef idx="minor">
+            <a:schemeClr val="lt1"/>
+          </a:fontRef>
+        </p:style>
+        <p:txBody>
+          <a:bodyPr rtlCol="0" anchor="ctr"/>
+          <a:lstStyle/>
+          <a:p>
+            <a:pPr algn="ctr"/>
+          </a:p>
+        </p:txBody>
+      </p:sp>
+      <p:sp>
+        <p:nvSpPr>
+          <p:cNvPr id="18" name="Rectangle 17"/>
+          <p:cNvSpPr/>
+          <p:nvPr/>
+        </p:nvSpPr>
+        <p:spPr>
+          <a:xfrm>
+            <a:off x="640080" y="4251960"/>
+            <a:ext cx="73152" cy="1097280"/>
+          </a:xfrm>
+          <a:prstGeom prst="rect">
+            <a:avLst/>
+          </a:prstGeom>
+          <a:solidFill>
+            <a:srgbClr val="61AFEF"/>
+          </a:solidFill>
+          <a:ln>
+            <a:noFill/>
+          </a:ln>
+        </p:spPr>
+        <p:style>
+          <a:lnRef idx="1">
+            <a:schemeClr val="accent1"/>
+          </a:lnRef>
+          <a:fillRef idx="3">
+            <a:schemeClr val="accent1"/>
+          </a:fillRef>
+          <a:effectRef idx="2">
+            <a:schemeClr val="accent1"/>
+          </a:effectRef>
+          <a:fontRef idx="minor">
+            <a:schemeClr val="lt1"/>
+          </a:fontRef>
+        </p:style>
+        <p:txBody>
+          <a:bodyPr rtlCol="0" anchor="ctr"/>
+          <a:lstStyle/>
+          <a:p>
+            <a:pPr algn="ctr"/>
+          </a:p>
+        </p:txBody>
+      </p:sp>
+      <p:sp>
+        <p:nvSpPr>
+          <p:cNvPr id="19" name="TextBox 18"/>
+          <p:cNvSpPr txBox="1"/>
+          <p:nvPr/>
+        </p:nvSpPr>
+        <p:spPr>
+          <a:xfrm>
+            <a:off x="914400" y="4297680"/>
+            <a:ext cx="10241280" cy="1005839"/>
+          </a:xfrm>
+          <a:prstGeom prst="rect">
+            <a:avLst/>
+          </a:prstGeom>
+          <a:noFill/>
+        </p:spPr>
+        <p:txBody>
+          <a:bodyPr wrap="none">
+            <a:spAutoFit/>
+          </a:bodyPr>
+          <a:lstStyle/>
           <a:p>
             <a:pPr>
               <a:spcAft>
-                <a:spcPts val="600"/>
+                <a:spcPts val="200"/>
               </a:spcAft>
-              <a:defRPr b="1" sz="2000">
-                <a:solidFill>
-                  <a:srgbClr val="333333"/>
-                </a:solidFill>
-              </a:defRPr>
-            </a:pPr>
-            <a:r>
-              <a:t>Grouping:</a:t>
+              <a:defRPr sz="1400">
+                <a:solidFill>
+                  <a:srgbClr val="ABB2BF"/>
+                </a:solidFill>
+                <a:latin typeface="Consolas"/>
+              </a:defRPr>
+            </a:pPr>
+            <a:r>
+              <a:t>for student_id, info in students.items():</a:t>
             </a:r>
           </a:p>
           <a:p>
             <a:pPr>
               <a:spcAft>
-                <a:spcPts val="600"/>
+                <a:spcPts val="200"/>
               </a:spcAft>
-              <a:defRPr sz="1600">
-                <a:solidFill>
-                  <a:srgbClr val="333333"/>
-                </a:solidFill>
-              </a:defRPr>
-            </a:pPr>
-            <a:r>
-              <a:t>by_grade = {}</a:t>
+              <a:defRPr sz="1400">
+                <a:solidFill>
+                  <a:srgbClr val="ABB2BF"/>
+                </a:solidFill>
+                <a:latin typeface="Consolas"/>
+              </a:defRPr>
+            </a:pPr>
+            <a:r>
+              <a:t>    print(f"{student_id}:")</a:t>
             </a:r>
           </a:p>
           <a:p>
             <a:pPr>
               <a:spcAft>
-                <a:spcPts val="600"/>
+                <a:spcPts val="200"/>
               </a:spcAft>
-              <a:defRPr b="1" sz="2000">
-                <a:solidFill>
-                  <a:srgbClr val="333333"/>
-                </a:solidFill>
-              </a:defRPr>
-            </a:pPr>
-            <a:r>
-              <a:t>for student in students:</a:t>
+              <a:defRPr sz="1400">
+                <a:solidFill>
+                  <a:srgbClr val="ABB2BF"/>
+                </a:solidFill>
+                <a:latin typeface="Consolas"/>
+              </a:defRPr>
+            </a:pPr>
+            <a:r>
+              <a:t>    for key, value in info.items():</a:t>
             </a:r>
           </a:p>
           <a:p>
             <a:pPr>
               <a:spcAft>
-                <a:spcPts val="600"/>
+                <a:spcPts val="200"/>
               </a:spcAft>
+              <a:defRPr sz="1400">
+                <a:solidFill>
+                  <a:srgbClr val="ABB2BF"/>
+                </a:solidFill>
+                <a:latin typeface="Consolas"/>
+              </a:defRPr>
+            </a:pPr>
+            <a:r>
+              <a:t>        print(f"  {key}: {value}")</a:t>
+            </a:r>
+          </a:p>
+        </p:txBody>
+      </p:sp>
+      <p:sp>
+        <p:nvSpPr>
+          <p:cNvPr id="20" name="Rectangle 19"/>
+          <p:cNvSpPr/>
+          <p:nvPr/>
+        </p:nvSpPr>
+        <p:spPr>
+          <a:xfrm>
+            <a:off x="365760" y="5486400"/>
+            <a:ext cx="11430000" cy="365760"/>
+          </a:xfrm>
+          <a:prstGeom prst="rect">
+            <a:avLst/>
+          </a:prstGeom>
+          <a:solidFill>
+            <a:srgbClr val="0078D7"/>
+          </a:solidFill>
+          <a:ln>
+            <a:noFill/>
+          </a:ln>
+        </p:spPr>
+        <p:style>
+          <a:lnRef idx="1">
+            <a:schemeClr val="accent1"/>
+          </a:lnRef>
+          <a:fillRef idx="3">
+            <a:schemeClr val="accent1"/>
+          </a:fillRef>
+          <a:effectRef idx="2">
+            <a:schemeClr val="accent1"/>
+          </a:effectRef>
+          <a:fontRef idx="minor">
+            <a:schemeClr val="lt1"/>
+          </a:fontRef>
+        </p:style>
+        <p:txBody>
+          <a:bodyPr rtlCol="0" anchor="ctr"/>
+          <a:lstStyle/>
+          <a:p>
+            <a:pPr algn="ctr"/>
+          </a:p>
+        </p:txBody>
+      </p:sp>
+      <p:sp>
+        <p:nvSpPr>
+          <p:cNvPr id="21" name="TextBox 20"/>
+          <p:cNvSpPr txBox="1"/>
+          <p:nvPr/>
+        </p:nvSpPr>
+        <p:spPr>
+          <a:xfrm>
+            <a:off x="548640" y="5532120"/>
+            <a:ext cx="10972800" cy="274320"/>
+          </a:xfrm>
+          <a:prstGeom prst="rect">
+            <a:avLst/>
+          </a:prstGeom>
+          <a:noFill/>
+        </p:spPr>
+        <p:txBody>
+          <a:bodyPr wrap="none">
+            <a:spAutoFit/>
+          </a:bodyPr>
+          <a:lstStyle/>
+          <a:p>
+            <a:pPr>
+              <a:defRPr sz="2000" b="1">
+                <a:solidFill>
+                  <a:srgbClr val="FFFFFF"/>
+                </a:solidFill>
+              </a:defRPr>
+            </a:pPr>
+            <a:r>
+              <a:t>Use Cases:</a:t>
+            </a:r>
+          </a:p>
+        </p:txBody>
+      </p:sp>
+      <p:sp>
+        <p:nvSpPr>
+          <p:cNvPr id="22" name="TextBox 21"/>
+          <p:cNvSpPr txBox="1"/>
+          <p:nvPr/>
+        </p:nvSpPr>
+        <p:spPr>
+          <a:xfrm>
+            <a:off x="457200" y="5989320"/>
+            <a:ext cx="11247120" cy="320040"/>
+          </a:xfrm>
+          <a:prstGeom prst="rect">
+            <a:avLst/>
+          </a:prstGeom>
+          <a:noFill/>
+        </p:spPr>
+        <p:txBody>
+          <a:bodyPr wrap="none">
+            <a:spAutoFit/>
+          </a:bodyPr>
+          <a:lstStyle/>
+          <a:p>
+            <a:pPr lvl="1">
               <a:defRPr sz="1600">
                 <a:solidFill>
                   <a:srgbClr val="333333"/>
@@ -5391,112 +9452,7 @@
               </a:defRPr>
             </a:pPr>
             <a:r>
-              <a:t>    grade = student["grade"]</a:t>
-            </a:r>
-          </a:p>
-          <a:p>
-            <a:pPr>
-              <a:spcAft>
-                <a:spcPts val="600"/>
-              </a:spcAft>
-              <a:defRPr sz="1600">
-                <a:solidFill>
-                  <a:srgbClr val="333333"/>
-                </a:solidFill>
-              </a:defRPr>
-            </a:pPr>
-            <a:r>
-              <a:t>    if grade not in by_grade:</a:t>
-            </a:r>
-          </a:p>
-          <a:p>
-            <a:pPr>
-              <a:spcAft>
-                <a:spcPts val="600"/>
-              </a:spcAft>
-              <a:defRPr sz="1600">
-                <a:solidFill>
-                  <a:srgbClr val="333333"/>
-                </a:solidFill>
-              </a:defRPr>
-            </a:pPr>
-            <a:r>
-              <a:t>        by_grade[grade] = []</a:t>
-            </a:r>
-          </a:p>
-          <a:p>
-            <a:pPr>
-              <a:spcAft>
-                <a:spcPts val="600"/>
-              </a:spcAft>
-              <a:defRPr sz="1600">
-                <a:solidFill>
-                  <a:srgbClr val="333333"/>
-                </a:solidFill>
-              </a:defRPr>
-            </a:pPr>
-            <a:r>
-              <a:t>    by_grade[grade].append(student)</a:t>
-            </a:r>
-          </a:p>
-          <a:p>
-            <a:pPr>
-              <a:spcAft>
-                <a:spcPts val="600"/>
-              </a:spcAft>
-              <a:defRPr b="1" sz="2000">
-                <a:solidFill>
-                  <a:srgbClr val="333333"/>
-                </a:solidFill>
-              </a:defRPr>
-            </a:pPr>
-            <a:r>
-              <a:t>Merging:</a:t>
-            </a:r>
-          </a:p>
-          <a:p>
-            <a:pPr>
-              <a:spcAft>
-                <a:spcPts val="600"/>
-              </a:spcAft>
-              <a:defRPr sz="1600">
-                <a:solidFill>
-                  <a:srgbClr val="333333"/>
-                </a:solidFill>
-              </a:defRPr>
-            </a:pPr>
-            <a:r>
-              <a:t>dict1.update(dict2)</a:t>
-            </a:r>
-          </a:p>
-          <a:p>
-            <a:pPr>
-              <a:spcAft>
-                <a:spcPts val="600"/>
-              </a:spcAft>
-              <a:defRPr sz="1600">
-                <a:solidFill>
-                  <a:srgbClr val="333333"/>
-                </a:solidFill>
-              </a:defRPr>
-            </a:pPr>
-            <a:r>
-              <a:t>merged = {**dict1, **dict2}  # Python 3.5+</a:t>
-            </a:r>
-          </a:p>
-          <a:p>
-            <a:pPr>
-              <a:spcAft>
-                <a:spcPts val="600"/>
-              </a:spcAft>
-              <a:defRPr sz="1600">
-                <a:solidFill>
-                  <a:srgbClr val="333333"/>
-                </a:solidFill>
-              </a:defRPr>
-            </a:pPr>
-            <a:r>
-              <a:t>merged = dict1 | dict2  # Python 3.9+</a:t>
+              <a:t>• Database-like structures</a:t>
             </a:r>
           </a:p>
         </p:txBody>
@@ -5534,7 +9490,7 @@
             <a:avLst/>
           </a:prstGeom>
           <a:solidFill>
-            <a:srgbClr val="FFFFFF"/>
+            <a:srgbClr val="FAFAFA"/>
           </a:solidFill>
           <a:ln>
             <a:noFill/>
@@ -5571,7 +9527,7 @@
         <p:spPr>
           <a:xfrm>
             <a:off x="0" y="0"/>
-            <a:ext cx="12191695" cy="137160"/>
+            <a:ext cx="12191695" cy="1097280"/>
           </a:xfrm>
           <a:prstGeom prst="rect">
             <a:avLst/>
@@ -5607,13 +9563,56 @@
       </p:sp>
       <p:sp>
         <p:nvSpPr>
-          <p:cNvPr id="4" name="TextBox 3"/>
+          <p:cNvPr id="4" name="Rectangle 3"/>
+          <p:cNvSpPr/>
+          <p:nvPr/>
+        </p:nvSpPr>
+        <p:spPr>
+          <a:xfrm>
+            <a:off x="0" y="1097280"/>
+            <a:ext cx="137160" cy="5760720"/>
+          </a:xfrm>
+          <a:prstGeom prst="rect">
+            <a:avLst/>
+          </a:prstGeom>
+          <a:solidFill>
+            <a:srgbClr val="FFBB33"/>
+          </a:solidFill>
+          <a:ln>
+            <a:noFill/>
+          </a:ln>
+        </p:spPr>
+        <p:style>
+          <a:lnRef idx="1">
+            <a:schemeClr val="accent1"/>
+          </a:lnRef>
+          <a:fillRef idx="3">
+            <a:schemeClr val="accent1"/>
+          </a:fillRef>
+          <a:effectRef idx="2">
+            <a:schemeClr val="accent1"/>
+          </a:effectRef>
+          <a:fontRef idx="minor">
+            <a:schemeClr val="lt1"/>
+          </a:fontRef>
+        </p:style>
+        <p:txBody>
+          <a:bodyPr rtlCol="0" anchor="ctr"/>
+          <a:lstStyle/>
+          <a:p>
+            <a:pPr algn="ctr"/>
+          </a:p>
+        </p:txBody>
+      </p:sp>
+      <p:sp>
+        <p:nvSpPr>
+          <p:cNvPr id="5" name="TextBox 4"/>
           <p:cNvSpPr txBox="1"/>
           <p:nvPr/>
         </p:nvSpPr>
         <p:spPr>
           <a:xfrm>
-            <a:off x="457200" y="320040"/>
+            <a:off x="365760" y="274320"/>
             <a:ext cx="10972800" cy="640080"/>
           </a:xfrm>
           <a:prstGeom prst="rect">
@@ -5630,26 +9629,69 @@
             <a:pPr>
               <a:defRPr sz="3600" b="1">
                 <a:solidFill>
-                  <a:srgbClr val="003366"/>
-                </a:solidFill>
-              </a:defRPr>
-            </a:pPr>
-            <a:r>
-              <a:t>Dictionary vs List</a:t>
-            </a:r>
-          </a:p>
-        </p:txBody>
-      </p:sp>
-      <p:sp>
-        <p:nvSpPr>
-          <p:cNvPr id="5" name="TextBox 4"/>
+                  <a:srgbClr val="FFFFFF"/>
+                </a:solidFill>
+              </a:defRPr>
+            </a:pPr>
+            <a:r>
+              <a:t>Common Patterns</a:t>
+            </a:r>
+          </a:p>
+        </p:txBody>
+      </p:sp>
+      <p:sp>
+        <p:nvSpPr>
+          <p:cNvPr id="6" name="Rectangle 5"/>
+          <p:cNvSpPr/>
+          <p:nvPr/>
+        </p:nvSpPr>
+        <p:spPr>
+          <a:xfrm>
+            <a:off x="365760" y="1325880"/>
+            <a:ext cx="11430000" cy="365760"/>
+          </a:xfrm>
+          <a:prstGeom prst="rect">
+            <a:avLst/>
+          </a:prstGeom>
+          <a:solidFill>
+            <a:srgbClr val="0078D7"/>
+          </a:solidFill>
+          <a:ln>
+            <a:noFill/>
+          </a:ln>
+        </p:spPr>
+        <p:style>
+          <a:lnRef idx="1">
+            <a:schemeClr val="accent1"/>
+          </a:lnRef>
+          <a:fillRef idx="3">
+            <a:schemeClr val="accent1"/>
+          </a:fillRef>
+          <a:effectRef idx="2">
+            <a:schemeClr val="accent1"/>
+          </a:effectRef>
+          <a:fontRef idx="minor">
+            <a:schemeClr val="lt1"/>
+          </a:fontRef>
+        </p:style>
+        <p:txBody>
+          <a:bodyPr rtlCol="0" anchor="ctr"/>
+          <a:lstStyle/>
+          <a:p>
+            <a:pPr algn="ctr"/>
+          </a:p>
+        </p:txBody>
+      </p:sp>
+      <p:sp>
+        <p:nvSpPr>
+          <p:cNvPr id="7" name="TextBox 6"/>
           <p:cNvSpPr txBox="1"/>
           <p:nvPr/>
         </p:nvSpPr>
         <p:spPr>
           <a:xfrm>
-            <a:off x="640080" y="1188720"/>
-            <a:ext cx="10789920" cy="5303520"/>
+            <a:off x="548640" y="1371600"/>
+            <a:ext cx="10972800" cy="274320"/>
           </a:xfrm>
           <a:prstGeom prst="rect">
             <a:avLst/>
@@ -5657,263 +9699,714 @@
           <a:noFill/>
         </p:spPr>
         <p:txBody>
-          <a:bodyPr wrap="square">
+          <a:bodyPr wrap="none">
             <a:spAutoFit/>
           </a:bodyPr>
           <a:lstStyle/>
           <a:p>
             <a:pPr>
-              <a:spcAft>
-                <a:spcPts val="600"/>
-              </a:spcAft>
-              <a:defRPr b="1" sz="2000">
-                <a:solidFill>
-                  <a:srgbClr val="333333"/>
-                </a:solidFill>
-              </a:defRPr>
-            </a:pPr>
-            <a:r>
-              <a:t>Use Dictionary When:</a:t>
-            </a:r>
-          </a:p>
-          <a:p>
-            <a:pPr lvl="1">
-              <a:spcAft>
-                <a:spcPts val="400"/>
-              </a:spcAft>
-              <a:defRPr sz="1600">
-                <a:solidFill>
-                  <a:srgbClr val="333333"/>
-                </a:solidFill>
-              </a:defRPr>
-            </a:pPr>
-            <a:r>
-              <a:t>• Need key-value associations</a:t>
-            </a:r>
-          </a:p>
-          <a:p>
-            <a:pPr lvl="1">
-              <a:spcAft>
-                <a:spcPts val="400"/>
-              </a:spcAft>
-              <a:defRPr sz="1600">
-                <a:solidFill>
-                  <a:srgbClr val="333333"/>
-                </a:solidFill>
-              </a:defRPr>
-            </a:pPr>
-            <a:r>
-              <a:t>• Fast lookup is important</a:t>
-            </a:r>
-          </a:p>
-          <a:p>
-            <a:pPr lvl="1">
-              <a:spcAft>
-                <a:spcPts val="400"/>
-              </a:spcAft>
-              <a:defRPr sz="1600">
-                <a:solidFill>
-                  <a:srgbClr val="333333"/>
-                </a:solidFill>
-              </a:defRPr>
-            </a:pPr>
-            <a:r>
-              <a:t>• Keys are meaningful</a:t>
-            </a:r>
-          </a:p>
-          <a:p>
-            <a:pPr lvl="1">
-              <a:spcAft>
-                <a:spcPts val="400"/>
-              </a:spcAft>
-              <a:defRPr sz="1600">
-                <a:solidFill>
-                  <a:srgbClr val="333333"/>
-                </a:solidFill>
-              </a:defRPr>
-            </a:pPr>
-            <a:r>
-              <a:t>• Order doesn't matter much</a:t>
-            </a:r>
-          </a:p>
+              <a:defRPr sz="2000" b="1">
+                <a:solidFill>
+                  <a:srgbClr val="FFFFFF"/>
+                </a:solidFill>
+              </a:defRPr>
+            </a:pPr>
+            <a:r>
+              <a:t>Counting:</a:t>
+            </a:r>
+          </a:p>
+        </p:txBody>
+      </p:sp>
+      <p:sp>
+        <p:nvSpPr>
+          <p:cNvPr id="8" name="Rectangle 7"/>
+          <p:cNvSpPr/>
+          <p:nvPr/>
+        </p:nvSpPr>
+        <p:spPr>
+          <a:xfrm>
+            <a:off x="640080" y="1783080"/>
+            <a:ext cx="10789920" cy="868680"/>
+          </a:xfrm>
+          <a:prstGeom prst="rect">
+            <a:avLst/>
+          </a:prstGeom>
+          <a:solidFill>
+            <a:srgbClr val="282C34"/>
+          </a:solidFill>
+          <a:ln>
+            <a:noFill/>
+          </a:ln>
+        </p:spPr>
+        <p:style>
+          <a:lnRef idx="1">
+            <a:schemeClr val="accent1"/>
+          </a:lnRef>
+          <a:fillRef idx="3">
+            <a:schemeClr val="accent1"/>
+          </a:fillRef>
+          <a:effectRef idx="2">
+            <a:schemeClr val="accent1"/>
+          </a:effectRef>
+          <a:fontRef idx="minor">
+            <a:schemeClr val="lt1"/>
+          </a:fontRef>
+        </p:style>
+        <p:txBody>
+          <a:bodyPr rtlCol="0" anchor="ctr"/>
+          <a:lstStyle/>
+          <a:p>
+            <a:pPr algn="ctr"/>
+          </a:p>
+        </p:txBody>
+      </p:sp>
+      <p:sp>
+        <p:nvSpPr>
+          <p:cNvPr id="9" name="Rectangle 8"/>
+          <p:cNvSpPr/>
+          <p:nvPr/>
+        </p:nvSpPr>
+        <p:spPr>
+          <a:xfrm>
+            <a:off x="640080" y="1783080"/>
+            <a:ext cx="73152" cy="868680"/>
+          </a:xfrm>
+          <a:prstGeom prst="rect">
+            <a:avLst/>
+          </a:prstGeom>
+          <a:solidFill>
+            <a:srgbClr val="61AFEF"/>
+          </a:solidFill>
+          <a:ln>
+            <a:noFill/>
+          </a:ln>
+        </p:spPr>
+        <p:style>
+          <a:lnRef idx="1">
+            <a:schemeClr val="accent1"/>
+          </a:lnRef>
+          <a:fillRef idx="3">
+            <a:schemeClr val="accent1"/>
+          </a:fillRef>
+          <a:effectRef idx="2">
+            <a:schemeClr val="accent1"/>
+          </a:effectRef>
+          <a:fontRef idx="minor">
+            <a:schemeClr val="lt1"/>
+          </a:fontRef>
+        </p:style>
+        <p:txBody>
+          <a:bodyPr rtlCol="0" anchor="ctr"/>
+          <a:lstStyle/>
+          <a:p>
+            <a:pPr algn="ctr"/>
+          </a:p>
+        </p:txBody>
+      </p:sp>
+      <p:sp>
+        <p:nvSpPr>
+          <p:cNvPr id="10" name="TextBox 9"/>
+          <p:cNvSpPr txBox="1"/>
+          <p:nvPr/>
+        </p:nvSpPr>
+        <p:spPr>
+          <a:xfrm>
+            <a:off x="914400" y="1828800"/>
+            <a:ext cx="10241280" cy="777240"/>
+          </a:xfrm>
+          <a:prstGeom prst="rect">
+            <a:avLst/>
+          </a:prstGeom>
+          <a:noFill/>
+        </p:spPr>
+        <p:txBody>
+          <a:bodyPr wrap="none">
+            <a:spAutoFit/>
+          </a:bodyPr>
+          <a:lstStyle/>
           <a:p>
             <a:pPr>
               <a:spcAft>
-                <a:spcPts val="600"/>
+                <a:spcPts val="200"/>
               </a:spcAft>
-              <a:defRPr b="1" sz="2000">
-                <a:solidFill>
-                  <a:srgbClr val="333333"/>
-                </a:solidFill>
-              </a:defRPr>
-            </a:pPr>
-            <a:r>
-              <a:t>Use List When:</a:t>
-            </a:r>
-          </a:p>
-          <a:p>
-            <a:pPr lvl="1">
-              <a:spcAft>
-                <a:spcPts val="400"/>
-              </a:spcAft>
-              <a:defRPr sz="1600">
-                <a:solidFill>
-                  <a:srgbClr val="333333"/>
-                </a:solidFill>
-              </a:defRPr>
-            </a:pPr>
-            <a:r>
-              <a:t>• Order is important</a:t>
-            </a:r>
-          </a:p>
-          <a:p>
-            <a:pPr lvl="1">
-              <a:spcAft>
-                <a:spcPts val="400"/>
-              </a:spcAft>
-              <a:defRPr sz="1600">
-                <a:solidFill>
-                  <a:srgbClr val="333333"/>
-                </a:solidFill>
-              </a:defRPr>
-            </a:pPr>
-            <a:r>
-              <a:t>• Need indexing by position</a:t>
-            </a:r>
-          </a:p>
-          <a:p>
-            <a:pPr lvl="1">
-              <a:spcAft>
-                <a:spcPts val="400"/>
-              </a:spcAft>
-              <a:defRPr sz="1600">
-                <a:solidFill>
-                  <a:srgbClr val="333333"/>
-                </a:solidFill>
-              </a:defRPr>
-            </a:pPr>
-            <a:r>
-              <a:t>• All items same type</a:t>
-            </a:r>
-          </a:p>
-          <a:p>
-            <a:pPr lvl="1">
-              <a:spcAft>
-                <a:spcPts val="400"/>
-              </a:spcAft>
-              <a:defRPr sz="1600">
-                <a:solidFill>
-                  <a:srgbClr val="333333"/>
-                </a:solidFill>
-              </a:defRPr>
-            </a:pPr>
-            <a:r>
-              <a:t>• Frequent iteration</a:t>
+              <a:defRPr sz="1400">
+                <a:solidFill>
+                  <a:srgbClr val="ABB2BF"/>
+                </a:solidFill>
+                <a:latin typeface="Consolas"/>
+              </a:defRPr>
+            </a:pPr>
+            <a:r>
+              <a:t>word_count = {}</a:t>
             </a:r>
           </a:p>
           <a:p>
             <a:pPr>
               <a:spcAft>
-                <a:spcPts val="600"/>
+                <a:spcPts val="200"/>
               </a:spcAft>
-              <a:defRPr b="1" sz="2000">
-                <a:solidFill>
-                  <a:srgbClr val="333333"/>
-                </a:solidFill>
-              </a:defRPr>
-            </a:pPr>
-            <a:r>
-              <a:t>Performance:</a:t>
-            </a:r>
-          </a:p>
-          <a:p>
-            <a:pPr lvl="1">
-              <a:spcAft>
-                <a:spcPts val="400"/>
-              </a:spcAft>
-              <a:defRPr sz="1600">
-                <a:solidFill>
-                  <a:srgbClr val="333333"/>
-                </a:solidFill>
-              </a:defRPr>
-            </a:pPr>
-            <a:r>
-              <a:t>• Dictionary lookup: O(1)</a:t>
-            </a:r>
-          </a:p>
-          <a:p>
-            <a:pPr lvl="1">
-              <a:spcAft>
-                <a:spcPts val="400"/>
-              </a:spcAft>
-              <a:defRPr sz="1600">
-                <a:solidFill>
-                  <a:srgbClr val="333333"/>
-                </a:solidFill>
-              </a:defRPr>
-            </a:pPr>
-            <a:r>
-              <a:t>• List search: O(n)</a:t>
-            </a:r>
-          </a:p>
-          <a:p>
-            <a:pPr lvl="1">
-              <a:spcAft>
-                <a:spcPts val="400"/>
-              </a:spcAft>
-              <a:defRPr sz="1600">
-                <a:solidFill>
-                  <a:srgbClr val="333333"/>
-                </a:solidFill>
-              </a:defRPr>
-            </a:pPr>
-            <a:r>
-              <a:t>• Dictionary more memory</a:t>
+              <a:defRPr sz="1400">
+                <a:solidFill>
+                  <a:srgbClr val="ABB2BF"/>
+                </a:solidFill>
+                <a:latin typeface="Consolas"/>
+              </a:defRPr>
+            </a:pPr>
+            <a:r>
+              <a:t>for word in words:</a:t>
             </a:r>
           </a:p>
           <a:p>
             <a:pPr>
               <a:spcAft>
-                <a:spcPts val="600"/>
+                <a:spcPts val="200"/>
               </a:spcAft>
-              <a:defRPr b="1" sz="2000">
-                <a:solidFill>
-                  <a:srgbClr val="333333"/>
-                </a:solidFill>
-              </a:defRPr>
-            </a:pPr>
-            <a:r>
-              <a:t>Example:</a:t>
-            </a:r>
-          </a:p>
+              <a:defRPr sz="1400">
+                <a:solidFill>
+                  <a:srgbClr val="ABB2BF"/>
+                </a:solidFill>
+                <a:latin typeface="Consolas"/>
+              </a:defRPr>
+            </a:pPr>
+            <a:r>
+              <a:t>    word_count[word] = word_count.get(word, 0) + 1</a:t>
+            </a:r>
+          </a:p>
+        </p:txBody>
+      </p:sp>
+      <p:sp>
+        <p:nvSpPr>
+          <p:cNvPr id="11" name="Rectangle 10"/>
+          <p:cNvSpPr/>
+          <p:nvPr/>
+        </p:nvSpPr>
+        <p:spPr>
+          <a:xfrm>
+            <a:off x="365760" y="2788920"/>
+            <a:ext cx="11430000" cy="365760"/>
+          </a:xfrm>
+          <a:prstGeom prst="rect">
+            <a:avLst/>
+          </a:prstGeom>
+          <a:solidFill>
+            <a:srgbClr val="0078D7"/>
+          </a:solidFill>
+          <a:ln>
+            <a:noFill/>
+          </a:ln>
+        </p:spPr>
+        <p:style>
+          <a:lnRef idx="1">
+            <a:schemeClr val="accent1"/>
+          </a:lnRef>
+          <a:fillRef idx="3">
+            <a:schemeClr val="accent1"/>
+          </a:fillRef>
+          <a:effectRef idx="2">
+            <a:schemeClr val="accent1"/>
+          </a:effectRef>
+          <a:fontRef idx="minor">
+            <a:schemeClr val="lt1"/>
+          </a:fontRef>
+        </p:style>
+        <p:txBody>
+          <a:bodyPr rtlCol="0" anchor="ctr"/>
+          <a:lstStyle/>
+          <a:p>
+            <a:pPr algn="ctr"/>
+          </a:p>
+        </p:txBody>
+      </p:sp>
+      <p:sp>
+        <p:nvSpPr>
+          <p:cNvPr id="12" name="TextBox 11"/>
+          <p:cNvSpPr txBox="1"/>
+          <p:nvPr/>
+        </p:nvSpPr>
+        <p:spPr>
+          <a:xfrm>
+            <a:off x="548640" y="2834640"/>
+            <a:ext cx="10972800" cy="274320"/>
+          </a:xfrm>
+          <a:prstGeom prst="rect">
+            <a:avLst/>
+          </a:prstGeom>
+          <a:noFill/>
+        </p:spPr>
+        <p:txBody>
+          <a:bodyPr wrap="none">
+            <a:spAutoFit/>
+          </a:bodyPr>
+          <a:lstStyle/>
+          <a:p>
+            <a:pPr>
+              <a:defRPr sz="2000" b="1">
+                <a:solidFill>
+                  <a:srgbClr val="FFFFFF"/>
+                </a:solidFill>
+              </a:defRPr>
+            </a:pPr>
+            <a:r>
+              <a:t>Grouping:</a:t>
+            </a:r>
+          </a:p>
+        </p:txBody>
+      </p:sp>
+      <p:sp>
+        <p:nvSpPr>
+          <p:cNvPr id="13" name="Rectangle 12"/>
+          <p:cNvSpPr/>
+          <p:nvPr/>
+        </p:nvSpPr>
+        <p:spPr>
+          <a:xfrm>
+            <a:off x="640080" y="3246120"/>
+            <a:ext cx="10789920" cy="1554480"/>
+          </a:xfrm>
+          <a:prstGeom prst="rect">
+            <a:avLst/>
+          </a:prstGeom>
+          <a:solidFill>
+            <a:srgbClr val="282C34"/>
+          </a:solidFill>
+          <a:ln>
+            <a:noFill/>
+          </a:ln>
+        </p:spPr>
+        <p:style>
+          <a:lnRef idx="1">
+            <a:schemeClr val="accent1"/>
+          </a:lnRef>
+          <a:fillRef idx="3">
+            <a:schemeClr val="accent1"/>
+          </a:fillRef>
+          <a:effectRef idx="2">
+            <a:schemeClr val="accent1"/>
+          </a:effectRef>
+          <a:fontRef idx="minor">
+            <a:schemeClr val="lt1"/>
+          </a:fontRef>
+        </p:style>
+        <p:txBody>
+          <a:bodyPr rtlCol="0" anchor="ctr"/>
+          <a:lstStyle/>
+          <a:p>
+            <a:pPr algn="ctr"/>
+          </a:p>
+        </p:txBody>
+      </p:sp>
+      <p:sp>
+        <p:nvSpPr>
+          <p:cNvPr id="14" name="Rectangle 13"/>
+          <p:cNvSpPr/>
+          <p:nvPr/>
+        </p:nvSpPr>
+        <p:spPr>
+          <a:xfrm>
+            <a:off x="640080" y="3246120"/>
+            <a:ext cx="73152" cy="1554480"/>
+          </a:xfrm>
+          <a:prstGeom prst="rect">
+            <a:avLst/>
+          </a:prstGeom>
+          <a:solidFill>
+            <a:srgbClr val="61AFEF"/>
+          </a:solidFill>
+          <a:ln>
+            <a:noFill/>
+          </a:ln>
+        </p:spPr>
+        <p:style>
+          <a:lnRef idx="1">
+            <a:schemeClr val="accent1"/>
+          </a:lnRef>
+          <a:fillRef idx="3">
+            <a:schemeClr val="accent1"/>
+          </a:fillRef>
+          <a:effectRef idx="2">
+            <a:schemeClr val="accent1"/>
+          </a:effectRef>
+          <a:fontRef idx="minor">
+            <a:schemeClr val="lt1"/>
+          </a:fontRef>
+        </p:style>
+        <p:txBody>
+          <a:bodyPr rtlCol="0" anchor="ctr"/>
+          <a:lstStyle/>
+          <a:p>
+            <a:pPr algn="ctr"/>
+          </a:p>
+        </p:txBody>
+      </p:sp>
+      <p:sp>
+        <p:nvSpPr>
+          <p:cNvPr id="15" name="TextBox 14"/>
+          <p:cNvSpPr txBox="1"/>
+          <p:nvPr/>
+        </p:nvSpPr>
+        <p:spPr>
+          <a:xfrm>
+            <a:off x="914400" y="3291840"/>
+            <a:ext cx="10241280" cy="1463039"/>
+          </a:xfrm>
+          <a:prstGeom prst="rect">
+            <a:avLst/>
+          </a:prstGeom>
+          <a:noFill/>
+        </p:spPr>
+        <p:txBody>
+          <a:bodyPr wrap="none">
+            <a:spAutoFit/>
+          </a:bodyPr>
+          <a:lstStyle/>
           <a:p>
             <a:pPr>
               <a:spcAft>
-                <a:spcPts val="600"/>
+                <a:spcPts val="200"/>
               </a:spcAft>
-              <a:defRPr b="1" sz="2000">
-                <a:solidFill>
-                  <a:srgbClr val="333333"/>
-                </a:solidFill>
-              </a:defRPr>
-            </a:pPr>
-            <a:r>
-              <a:t>phone_book = {"Alice": "555-1234"}  # Dict</a:t>
+              <a:defRPr sz="1400">
+                <a:solidFill>
+                  <a:srgbClr val="ABB2BF"/>
+                </a:solidFill>
+                <a:latin typeface="Consolas"/>
+              </a:defRPr>
+            </a:pPr>
+            <a:r>
+              <a:t>by_grade = {}</a:t>
             </a:r>
           </a:p>
           <a:p>
             <a:pPr>
               <a:spcAft>
-                <a:spcPts val="600"/>
+                <a:spcPts val="200"/>
               </a:spcAft>
-              <a:defRPr sz="1600">
+              <a:defRPr sz="1400">
+                <a:solidFill>
+                  <a:srgbClr val="ABB2BF"/>
+                </a:solidFill>
+                <a:latin typeface="Consolas"/>
+              </a:defRPr>
+            </a:pPr>
+            <a:r>
+              <a:t>for student in students:</a:t>
+            </a:r>
+          </a:p>
+          <a:p>
+            <a:pPr>
+              <a:spcAft>
+                <a:spcPts val="200"/>
+              </a:spcAft>
+              <a:defRPr sz="1400">
+                <a:solidFill>
+                  <a:srgbClr val="ABB2BF"/>
+                </a:solidFill>
+                <a:latin typeface="Consolas"/>
+              </a:defRPr>
+            </a:pPr>
+            <a:r>
+              <a:t>    grade = student["grade"]</a:t>
+            </a:r>
+          </a:p>
+          <a:p>
+            <a:pPr>
+              <a:spcAft>
+                <a:spcPts val="200"/>
+              </a:spcAft>
+              <a:defRPr sz="1400">
+                <a:solidFill>
+                  <a:srgbClr val="ABB2BF"/>
+                </a:solidFill>
+                <a:latin typeface="Consolas"/>
+              </a:defRPr>
+            </a:pPr>
+            <a:r>
+              <a:t>    if grade not in by_grade:</a:t>
+            </a:r>
+          </a:p>
+          <a:p>
+            <a:pPr>
+              <a:spcAft>
+                <a:spcPts val="200"/>
+              </a:spcAft>
+              <a:defRPr sz="1400">
+                <a:solidFill>
+                  <a:srgbClr val="ABB2BF"/>
+                </a:solidFill>
+                <a:latin typeface="Consolas"/>
+              </a:defRPr>
+            </a:pPr>
+            <a:r>
+              <a:t>        by_grade[grade] = []</a:t>
+            </a:r>
+          </a:p>
+          <a:p>
+            <a:pPr>
+              <a:spcAft>
+                <a:spcPts val="200"/>
+              </a:spcAft>
+              <a:defRPr sz="1400">
+                <a:solidFill>
+                  <a:srgbClr val="ABB2BF"/>
+                </a:solidFill>
+                <a:latin typeface="Consolas"/>
+              </a:defRPr>
+            </a:pPr>
+            <a:r>
+              <a:t>    by_grade[grade].append(student)</a:t>
+            </a:r>
+          </a:p>
+        </p:txBody>
+      </p:sp>
+      <p:sp>
+        <p:nvSpPr>
+          <p:cNvPr id="16" name="Rectangle 15"/>
+          <p:cNvSpPr/>
+          <p:nvPr/>
+        </p:nvSpPr>
+        <p:spPr>
+          <a:xfrm>
+            <a:off x="365760" y="4937760"/>
+            <a:ext cx="11430000" cy="365760"/>
+          </a:xfrm>
+          <a:prstGeom prst="rect">
+            <a:avLst/>
+          </a:prstGeom>
+          <a:solidFill>
+            <a:srgbClr val="0078D7"/>
+          </a:solidFill>
+          <a:ln>
+            <a:noFill/>
+          </a:ln>
+        </p:spPr>
+        <p:style>
+          <a:lnRef idx="1">
+            <a:schemeClr val="accent1"/>
+          </a:lnRef>
+          <a:fillRef idx="3">
+            <a:schemeClr val="accent1"/>
+          </a:fillRef>
+          <a:effectRef idx="2">
+            <a:schemeClr val="accent1"/>
+          </a:effectRef>
+          <a:fontRef idx="minor">
+            <a:schemeClr val="lt1"/>
+          </a:fontRef>
+        </p:style>
+        <p:txBody>
+          <a:bodyPr rtlCol="0" anchor="ctr"/>
+          <a:lstStyle/>
+          <a:p>
+            <a:pPr algn="ctr"/>
+          </a:p>
+        </p:txBody>
+      </p:sp>
+      <p:sp>
+        <p:nvSpPr>
+          <p:cNvPr id="17" name="TextBox 16"/>
+          <p:cNvSpPr txBox="1"/>
+          <p:nvPr/>
+        </p:nvSpPr>
+        <p:spPr>
+          <a:xfrm>
+            <a:off x="548640" y="4983480"/>
+            <a:ext cx="10972800" cy="274320"/>
+          </a:xfrm>
+          <a:prstGeom prst="rect">
+            <a:avLst/>
+          </a:prstGeom>
+          <a:noFill/>
+        </p:spPr>
+        <p:txBody>
+          <a:bodyPr wrap="none">
+            <a:spAutoFit/>
+          </a:bodyPr>
+          <a:lstStyle/>
+          <a:p>
+            <a:pPr>
+              <a:defRPr sz="2000" b="1">
+                <a:solidFill>
+                  <a:srgbClr val="FFFFFF"/>
+                </a:solidFill>
+              </a:defRPr>
+            </a:pPr>
+            <a:r>
+              <a:t>Merging:</a:t>
+            </a:r>
+          </a:p>
+        </p:txBody>
+      </p:sp>
+      <p:sp>
+        <p:nvSpPr>
+          <p:cNvPr id="18" name="TextBox 17"/>
+          <p:cNvSpPr txBox="1"/>
+          <p:nvPr/>
+        </p:nvSpPr>
+        <p:spPr>
+          <a:xfrm>
+            <a:off x="457200" y="5440680"/>
+            <a:ext cx="11247120" cy="320040"/>
+          </a:xfrm>
+          <a:prstGeom prst="rect">
+            <a:avLst/>
+          </a:prstGeom>
+          <a:noFill/>
+        </p:spPr>
+        <p:txBody>
+          <a:bodyPr wrap="none">
+            <a:spAutoFit/>
+          </a:bodyPr>
+          <a:lstStyle/>
+          <a:p>
+            <a:pPr>
+              <a:defRPr sz="1700">
                 <a:solidFill>
                   <a:srgbClr val="333333"/>
                 </a:solidFill>
               </a:defRPr>
             </a:pPr>
             <a:r>
-              <a:t>names = ["Alice", "Bob"]  # List</a:t>
+              <a:t>dict1.update(dict2)</a:t>
+            </a:r>
+          </a:p>
+        </p:txBody>
+      </p:sp>
+      <p:sp>
+        <p:nvSpPr>
+          <p:cNvPr id="19" name="Rectangle 18"/>
+          <p:cNvSpPr/>
+          <p:nvPr/>
+        </p:nvSpPr>
+        <p:spPr>
+          <a:xfrm>
+            <a:off x="640080" y="5669280"/>
+            <a:ext cx="10789920" cy="640080"/>
+          </a:xfrm>
+          <a:prstGeom prst="rect">
+            <a:avLst/>
+          </a:prstGeom>
+          <a:solidFill>
+            <a:srgbClr val="282C34"/>
+          </a:solidFill>
+          <a:ln>
+            <a:noFill/>
+          </a:ln>
+        </p:spPr>
+        <p:style>
+          <a:lnRef idx="1">
+            <a:schemeClr val="accent1"/>
+          </a:lnRef>
+          <a:fillRef idx="3">
+            <a:schemeClr val="accent1"/>
+          </a:fillRef>
+          <a:effectRef idx="2">
+            <a:schemeClr val="accent1"/>
+          </a:effectRef>
+          <a:fontRef idx="minor">
+            <a:schemeClr val="lt1"/>
+          </a:fontRef>
+        </p:style>
+        <p:txBody>
+          <a:bodyPr rtlCol="0" anchor="ctr"/>
+          <a:lstStyle/>
+          <a:p>
+            <a:pPr algn="ctr"/>
+          </a:p>
+        </p:txBody>
+      </p:sp>
+      <p:sp>
+        <p:nvSpPr>
+          <p:cNvPr id="20" name="Rectangle 19"/>
+          <p:cNvSpPr/>
+          <p:nvPr/>
+        </p:nvSpPr>
+        <p:spPr>
+          <a:xfrm>
+            <a:off x="640080" y="5669280"/>
+            <a:ext cx="73152" cy="640080"/>
+          </a:xfrm>
+          <a:prstGeom prst="rect">
+            <a:avLst/>
+          </a:prstGeom>
+          <a:solidFill>
+            <a:srgbClr val="61AFEF"/>
+          </a:solidFill>
+          <a:ln>
+            <a:noFill/>
+          </a:ln>
+        </p:spPr>
+        <p:style>
+          <a:lnRef idx="1">
+            <a:schemeClr val="accent1"/>
+          </a:lnRef>
+          <a:fillRef idx="3">
+            <a:schemeClr val="accent1"/>
+          </a:fillRef>
+          <a:effectRef idx="2">
+            <a:schemeClr val="accent1"/>
+          </a:effectRef>
+          <a:fontRef idx="minor">
+            <a:schemeClr val="lt1"/>
+          </a:fontRef>
+        </p:style>
+        <p:txBody>
+          <a:bodyPr rtlCol="0" anchor="ctr"/>
+          <a:lstStyle/>
+          <a:p>
+            <a:pPr algn="ctr"/>
+          </a:p>
+        </p:txBody>
+      </p:sp>
+      <p:sp>
+        <p:nvSpPr>
+          <p:cNvPr id="21" name="TextBox 20"/>
+          <p:cNvSpPr txBox="1"/>
+          <p:nvPr/>
+        </p:nvSpPr>
+        <p:spPr>
+          <a:xfrm>
+            <a:off x="914400" y="5715000"/>
+            <a:ext cx="10241280" cy="548640"/>
+          </a:xfrm>
+          <a:prstGeom prst="rect">
+            <a:avLst/>
+          </a:prstGeom>
+          <a:noFill/>
+        </p:spPr>
+        <p:txBody>
+          <a:bodyPr wrap="none">
+            <a:spAutoFit/>
+          </a:bodyPr>
+          <a:lstStyle/>
+          <a:p>
+            <a:pPr>
+              <a:spcAft>
+                <a:spcPts val="200"/>
+              </a:spcAft>
+              <a:defRPr sz="1400">
+                <a:solidFill>
+                  <a:srgbClr val="ABB2BF"/>
+                </a:solidFill>
+                <a:latin typeface="Consolas"/>
+              </a:defRPr>
+            </a:pPr>
+            <a:r>
+              <a:t>merged = {**dict1, **dict2}  # Python 3.5+</a:t>
+            </a:r>
+          </a:p>
+          <a:p>
+            <a:pPr>
+              <a:spcAft>
+                <a:spcPts val="200"/>
+              </a:spcAft>
+              <a:defRPr sz="1400">
+                <a:solidFill>
+                  <a:srgbClr val="ABB2BF"/>
+                </a:solidFill>
+                <a:latin typeface="Consolas"/>
+              </a:defRPr>
+            </a:pPr>
+            <a:r>
+              <a:t>merged = dict1 | dict2  # Python 3.9+</a:t>
             </a:r>
           </a:p>
         </p:txBody>
@@ -5951,7 +10444,7 @@
             <a:avLst/>
           </a:prstGeom>
           <a:solidFill>
-            <a:srgbClr val="FFFFFF"/>
+            <a:srgbClr val="FAFAFA"/>
           </a:solidFill>
           <a:ln>
             <a:noFill/>
@@ -5988,7 +10481,7 @@
         <p:spPr>
           <a:xfrm>
             <a:off x="0" y="0"/>
-            <a:ext cx="12191695" cy="137160"/>
+            <a:ext cx="12191695" cy="1097280"/>
           </a:xfrm>
           <a:prstGeom prst="rect">
             <a:avLst/>
@@ -6024,13 +10517,56 @@
       </p:sp>
       <p:sp>
         <p:nvSpPr>
-          <p:cNvPr id="4" name="TextBox 3"/>
+          <p:cNvPr id="4" name="Rectangle 3"/>
+          <p:cNvSpPr/>
+          <p:nvPr/>
+        </p:nvSpPr>
+        <p:spPr>
+          <a:xfrm>
+            <a:off x="0" y="1097280"/>
+            <a:ext cx="137160" cy="5760720"/>
+          </a:xfrm>
+          <a:prstGeom prst="rect">
+            <a:avLst/>
+          </a:prstGeom>
+          <a:solidFill>
+            <a:srgbClr val="FFBB33"/>
+          </a:solidFill>
+          <a:ln>
+            <a:noFill/>
+          </a:ln>
+        </p:spPr>
+        <p:style>
+          <a:lnRef idx="1">
+            <a:schemeClr val="accent1"/>
+          </a:lnRef>
+          <a:fillRef idx="3">
+            <a:schemeClr val="accent1"/>
+          </a:fillRef>
+          <a:effectRef idx="2">
+            <a:schemeClr val="accent1"/>
+          </a:effectRef>
+          <a:fontRef idx="minor">
+            <a:schemeClr val="lt1"/>
+          </a:fontRef>
+        </p:style>
+        <p:txBody>
+          <a:bodyPr rtlCol="0" anchor="ctr"/>
+          <a:lstStyle/>
+          <a:p>
+            <a:pPr algn="ctr"/>
+          </a:p>
+        </p:txBody>
+      </p:sp>
+      <p:sp>
+        <p:nvSpPr>
+          <p:cNvPr id="5" name="TextBox 4"/>
           <p:cNvSpPr txBox="1"/>
           <p:nvPr/>
         </p:nvSpPr>
         <p:spPr>
           <a:xfrm>
-            <a:off x="457200" y="320040"/>
+            <a:off x="365760" y="274320"/>
             <a:ext cx="10972800" cy="640080"/>
           </a:xfrm>
           <a:prstGeom prst="rect">
@@ -6047,26 +10583,69 @@
             <a:pPr>
               <a:defRPr sz="3600" b="1">
                 <a:solidFill>
-                  <a:srgbClr val="003366"/>
-                </a:solidFill>
-              </a:defRPr>
-            </a:pPr>
-            <a:r>
-              <a:t>Best Practices</a:t>
-            </a:r>
-          </a:p>
-        </p:txBody>
-      </p:sp>
-      <p:sp>
-        <p:nvSpPr>
-          <p:cNvPr id="5" name="TextBox 4"/>
+                  <a:srgbClr val="FFFFFF"/>
+                </a:solidFill>
+              </a:defRPr>
+            </a:pPr>
+            <a:r>
+              <a:t>Dictionary vs List</a:t>
+            </a:r>
+          </a:p>
+        </p:txBody>
+      </p:sp>
+      <p:sp>
+        <p:nvSpPr>
+          <p:cNvPr id="6" name="Rectangle 5"/>
+          <p:cNvSpPr/>
+          <p:nvPr/>
+        </p:nvSpPr>
+        <p:spPr>
+          <a:xfrm>
+            <a:off x="365760" y="1325880"/>
+            <a:ext cx="11430000" cy="365760"/>
+          </a:xfrm>
+          <a:prstGeom prst="rect">
+            <a:avLst/>
+          </a:prstGeom>
+          <a:solidFill>
+            <a:srgbClr val="0078D7"/>
+          </a:solidFill>
+          <a:ln>
+            <a:noFill/>
+          </a:ln>
+        </p:spPr>
+        <p:style>
+          <a:lnRef idx="1">
+            <a:schemeClr val="accent1"/>
+          </a:lnRef>
+          <a:fillRef idx="3">
+            <a:schemeClr val="accent1"/>
+          </a:fillRef>
+          <a:effectRef idx="2">
+            <a:schemeClr val="accent1"/>
+          </a:effectRef>
+          <a:fontRef idx="minor">
+            <a:schemeClr val="lt1"/>
+          </a:fontRef>
+        </p:style>
+        <p:txBody>
+          <a:bodyPr rtlCol="0" anchor="ctr"/>
+          <a:lstStyle/>
+          <a:p>
+            <a:pPr algn="ctr"/>
+          </a:p>
+        </p:txBody>
+      </p:sp>
+      <p:sp>
+        <p:nvSpPr>
+          <p:cNvPr id="7" name="TextBox 6"/>
           <p:cNvSpPr txBox="1"/>
           <p:nvPr/>
         </p:nvSpPr>
         <p:spPr>
           <a:xfrm>
-            <a:off x="640080" y="1188720"/>
-            <a:ext cx="10789920" cy="5303520"/>
+            <a:off x="548640" y="1371600"/>
+            <a:ext cx="10972800" cy="274320"/>
           </a:xfrm>
           <a:prstGeom prst="rect">
             <a:avLst/>
@@ -6074,30 +10653,82 @@
           <a:noFill/>
         </p:spPr>
         <p:txBody>
-          <a:bodyPr wrap="square">
+          <a:bodyPr wrap="none">
             <a:spAutoFit/>
           </a:bodyPr>
           <a:lstStyle/>
           <a:p>
             <a:pPr>
-              <a:spcAft>
-                <a:spcPts val="600"/>
-              </a:spcAft>
-              <a:defRPr b="1" sz="2000">
+              <a:defRPr sz="2000" b="1">
+                <a:solidFill>
+                  <a:srgbClr val="FFFFFF"/>
+                </a:solidFill>
+              </a:defRPr>
+            </a:pPr>
+            <a:r>
+              <a:t>Use Dictionary When:</a:t>
+            </a:r>
+          </a:p>
+        </p:txBody>
+      </p:sp>
+      <p:sp>
+        <p:nvSpPr>
+          <p:cNvPr id="8" name="TextBox 7"/>
+          <p:cNvSpPr txBox="1"/>
+          <p:nvPr/>
+        </p:nvSpPr>
+        <p:spPr>
+          <a:xfrm>
+            <a:off x="457200" y="1828800"/>
+            <a:ext cx="11247120" cy="320040"/>
+          </a:xfrm>
+          <a:prstGeom prst="rect">
+            <a:avLst/>
+          </a:prstGeom>
+          <a:noFill/>
+        </p:spPr>
+        <p:txBody>
+          <a:bodyPr wrap="none">
+            <a:spAutoFit/>
+          </a:bodyPr>
+          <a:lstStyle/>
+          <a:p>
+            <a:pPr lvl="1">
+              <a:defRPr sz="1600">
                 <a:solidFill>
                   <a:srgbClr val="333333"/>
                 </a:solidFill>
               </a:defRPr>
             </a:pPr>
             <a:r>
-              <a:t>Good Practices:</a:t>
-            </a:r>
-          </a:p>
+              <a:t>• Need key-value associations</a:t>
+            </a:r>
+          </a:p>
+        </p:txBody>
+      </p:sp>
+      <p:sp>
+        <p:nvSpPr>
+          <p:cNvPr id="9" name="TextBox 8"/>
+          <p:cNvSpPr txBox="1"/>
+          <p:nvPr/>
+        </p:nvSpPr>
+        <p:spPr>
+          <a:xfrm>
+            <a:off x="457200" y="2103120"/>
+            <a:ext cx="11247120" cy="320040"/>
+          </a:xfrm>
+          <a:prstGeom prst="rect">
+            <a:avLst/>
+          </a:prstGeom>
+          <a:noFill/>
+        </p:spPr>
+        <p:txBody>
+          <a:bodyPr wrap="none">
+            <a:spAutoFit/>
+          </a:bodyPr>
+          <a:lstStyle/>
           <a:p>
             <a:pPr lvl="1">
-              <a:spcAft>
-                <a:spcPts val="400"/>
-              </a:spcAft>
               <a:defRPr sz="1600">
                 <a:solidFill>
                   <a:srgbClr val="333333"/>
@@ -6105,14 +10736,34 @@
               </a:defRPr>
             </a:pPr>
             <a:r>
-              <a:t>• Use .get() for safe access</a:t>
-            </a:r>
-          </a:p>
+              <a:t>• Fast lookup is important</a:t>
+            </a:r>
+          </a:p>
+        </p:txBody>
+      </p:sp>
+      <p:sp>
+        <p:nvSpPr>
+          <p:cNvPr id="10" name="TextBox 9"/>
+          <p:cNvSpPr txBox="1"/>
+          <p:nvPr/>
+        </p:nvSpPr>
+        <p:spPr>
+          <a:xfrm>
+            <a:off x="457200" y="2377439"/>
+            <a:ext cx="11247120" cy="320040"/>
+          </a:xfrm>
+          <a:prstGeom prst="rect">
+            <a:avLst/>
+          </a:prstGeom>
+          <a:noFill/>
+        </p:spPr>
+        <p:txBody>
+          <a:bodyPr wrap="none">
+            <a:spAutoFit/>
+          </a:bodyPr>
+          <a:lstStyle/>
           <a:p>
             <a:pPr lvl="1">
-              <a:spcAft>
-                <a:spcPts val="400"/>
-              </a:spcAft>
               <a:defRPr sz="1600">
                 <a:solidFill>
                   <a:srgbClr val="333333"/>
@@ -6120,14 +10771,34 @@
               </a:defRPr>
             </a:pPr>
             <a:r>
-              <a:t>• Check keys before accessing</a:t>
-            </a:r>
-          </a:p>
+              <a:t>• Keys are meaningful</a:t>
+            </a:r>
+          </a:p>
+        </p:txBody>
+      </p:sp>
+      <p:sp>
+        <p:nvSpPr>
+          <p:cNvPr id="11" name="TextBox 10"/>
+          <p:cNvSpPr txBox="1"/>
+          <p:nvPr/>
+        </p:nvSpPr>
+        <p:spPr>
+          <a:xfrm>
+            <a:off x="457200" y="2651759"/>
+            <a:ext cx="11247120" cy="320040"/>
+          </a:xfrm>
+          <a:prstGeom prst="rect">
+            <a:avLst/>
+          </a:prstGeom>
+          <a:noFill/>
+        </p:spPr>
+        <p:txBody>
+          <a:bodyPr wrap="none">
+            <a:spAutoFit/>
+          </a:bodyPr>
+          <a:lstStyle/>
           <a:p>
             <a:pPr lvl="1">
-              <a:spcAft>
-                <a:spcPts val="400"/>
-              </a:spcAft>
               <a:defRPr sz="1600">
                 <a:solidFill>
                   <a:srgbClr val="333333"/>
@@ -6135,14 +10806,112 @@
               </a:defRPr>
             </a:pPr>
             <a:r>
-              <a:t>• Use descriptive keys</a:t>
-            </a:r>
-          </a:p>
+              <a:t>• Order doesn't matter much</a:t>
+            </a:r>
+          </a:p>
+        </p:txBody>
+      </p:sp>
+      <p:sp>
+        <p:nvSpPr>
+          <p:cNvPr id="12" name="Rectangle 11"/>
+          <p:cNvSpPr/>
+          <p:nvPr/>
+        </p:nvSpPr>
+        <p:spPr>
+          <a:xfrm>
+            <a:off x="365760" y="2880359"/>
+            <a:ext cx="11430000" cy="365760"/>
+          </a:xfrm>
+          <a:prstGeom prst="rect">
+            <a:avLst/>
+          </a:prstGeom>
+          <a:solidFill>
+            <a:srgbClr val="0078D7"/>
+          </a:solidFill>
+          <a:ln>
+            <a:noFill/>
+          </a:ln>
+        </p:spPr>
+        <p:style>
+          <a:lnRef idx="1">
+            <a:schemeClr val="accent1"/>
+          </a:lnRef>
+          <a:fillRef idx="3">
+            <a:schemeClr val="accent1"/>
+          </a:fillRef>
+          <a:effectRef idx="2">
+            <a:schemeClr val="accent1"/>
+          </a:effectRef>
+          <a:fontRef idx="minor">
+            <a:schemeClr val="lt1"/>
+          </a:fontRef>
+        </p:style>
+        <p:txBody>
+          <a:bodyPr rtlCol="0" anchor="ctr"/>
+          <a:lstStyle/>
+          <a:p>
+            <a:pPr algn="ctr"/>
+          </a:p>
+        </p:txBody>
+      </p:sp>
+      <p:sp>
+        <p:nvSpPr>
+          <p:cNvPr id="13" name="TextBox 12"/>
+          <p:cNvSpPr txBox="1"/>
+          <p:nvPr/>
+        </p:nvSpPr>
+        <p:spPr>
+          <a:xfrm>
+            <a:off x="548640" y="2926079"/>
+            <a:ext cx="10972800" cy="274320"/>
+          </a:xfrm>
+          <a:prstGeom prst="rect">
+            <a:avLst/>
+          </a:prstGeom>
+          <a:noFill/>
+        </p:spPr>
+        <p:txBody>
+          <a:bodyPr wrap="none">
+            <a:spAutoFit/>
+          </a:bodyPr>
+          <a:lstStyle/>
+          <a:p>
+            <a:pPr>
+              <a:defRPr sz="2000" b="1">
+                <a:solidFill>
+                  <a:srgbClr val="FFFFFF"/>
+                </a:solidFill>
+              </a:defRPr>
+            </a:pPr>
+            <a:r>
+              <a:t>Use List When:</a:t>
+            </a:r>
+          </a:p>
+        </p:txBody>
+      </p:sp>
+      <p:sp>
+        <p:nvSpPr>
+          <p:cNvPr id="14" name="TextBox 13"/>
+          <p:cNvSpPr txBox="1"/>
+          <p:nvPr/>
+        </p:nvSpPr>
+        <p:spPr>
+          <a:xfrm>
+            <a:off x="457200" y="3383279"/>
+            <a:ext cx="11247120" cy="320040"/>
+          </a:xfrm>
+          <a:prstGeom prst="rect">
+            <a:avLst/>
+          </a:prstGeom>
+          <a:noFill/>
+        </p:spPr>
+        <p:txBody>
+          <a:bodyPr wrap="none">
+            <a:spAutoFit/>
+          </a:bodyPr>
+          <a:lstStyle/>
           <a:p>
             <a:pPr lvl="1">
-              <a:spcAft>
-                <a:spcPts val="400"/>
-              </a:spcAft>
               <a:defRPr sz="1600">
                 <a:solidFill>
                   <a:srgbClr val="333333"/>
@@ -6150,29 +10919,252 @@
               </a:defRPr>
             </a:pPr>
             <a:r>
-              <a:t>• Keep structure simple</a:t>
-            </a:r>
-          </a:p>
+              <a:t>• Order is important</a:t>
+            </a:r>
+          </a:p>
+        </p:txBody>
+      </p:sp>
+      <p:sp>
+        <p:nvSpPr>
+          <p:cNvPr id="15" name="TextBox 14"/>
+          <p:cNvSpPr txBox="1"/>
+          <p:nvPr/>
+        </p:nvSpPr>
+        <p:spPr>
+          <a:xfrm>
+            <a:off x="457200" y="3657599"/>
+            <a:ext cx="11247120" cy="320040"/>
+          </a:xfrm>
+          <a:prstGeom prst="rect">
+            <a:avLst/>
+          </a:prstGeom>
+          <a:noFill/>
+        </p:spPr>
+        <p:txBody>
+          <a:bodyPr wrap="none">
+            <a:spAutoFit/>
+          </a:bodyPr>
+          <a:lstStyle/>
+          <a:p>
+            <a:pPr lvl="1">
+              <a:defRPr sz="1600">
+                <a:solidFill>
+                  <a:srgbClr val="333333"/>
+                </a:solidFill>
+              </a:defRPr>
+            </a:pPr>
+            <a:r>
+              <a:t>• Need indexing by position</a:t>
+            </a:r>
+          </a:p>
+        </p:txBody>
+      </p:sp>
+      <p:sp>
+        <p:nvSpPr>
+          <p:cNvPr id="16" name="TextBox 15"/>
+          <p:cNvSpPr txBox="1"/>
+          <p:nvPr/>
+        </p:nvSpPr>
+        <p:spPr>
+          <a:xfrm>
+            <a:off x="457200" y="3931919"/>
+            <a:ext cx="11247120" cy="320040"/>
+          </a:xfrm>
+          <a:prstGeom prst="rect">
+            <a:avLst/>
+          </a:prstGeom>
+          <a:noFill/>
+        </p:spPr>
+        <p:txBody>
+          <a:bodyPr wrap="none">
+            <a:spAutoFit/>
+          </a:bodyPr>
+          <a:lstStyle/>
+          <a:p>
+            <a:pPr lvl="1">
+              <a:defRPr sz="1600">
+                <a:solidFill>
+                  <a:srgbClr val="333333"/>
+                </a:solidFill>
+              </a:defRPr>
+            </a:pPr>
+            <a:r>
+              <a:t>• All items same type</a:t>
+            </a:r>
+          </a:p>
+        </p:txBody>
+      </p:sp>
+      <p:sp>
+        <p:nvSpPr>
+          <p:cNvPr id="17" name="TextBox 16"/>
+          <p:cNvSpPr txBox="1"/>
+          <p:nvPr/>
+        </p:nvSpPr>
+        <p:spPr>
+          <a:xfrm>
+            <a:off x="457200" y="4206239"/>
+            <a:ext cx="11247120" cy="320040"/>
+          </a:xfrm>
+          <a:prstGeom prst="rect">
+            <a:avLst/>
+          </a:prstGeom>
+          <a:noFill/>
+        </p:spPr>
+        <p:txBody>
+          <a:bodyPr wrap="none">
+            <a:spAutoFit/>
+          </a:bodyPr>
+          <a:lstStyle/>
+          <a:p>
+            <a:pPr lvl="1">
+              <a:defRPr sz="1600">
+                <a:solidFill>
+                  <a:srgbClr val="333333"/>
+                </a:solidFill>
+              </a:defRPr>
+            </a:pPr>
+            <a:r>
+              <a:t>• Frequent iteration</a:t>
+            </a:r>
+          </a:p>
+        </p:txBody>
+      </p:sp>
+      <p:sp>
+        <p:nvSpPr>
+          <p:cNvPr id="18" name="Rectangle 17"/>
+          <p:cNvSpPr/>
+          <p:nvPr/>
+        </p:nvSpPr>
+        <p:spPr>
+          <a:xfrm>
+            <a:off x="365760" y="4434839"/>
+            <a:ext cx="11430000" cy="365760"/>
+          </a:xfrm>
+          <a:prstGeom prst="rect">
+            <a:avLst/>
+          </a:prstGeom>
+          <a:solidFill>
+            <a:srgbClr val="0078D7"/>
+          </a:solidFill>
+          <a:ln>
+            <a:noFill/>
+          </a:ln>
+        </p:spPr>
+        <p:style>
+          <a:lnRef idx="1">
+            <a:schemeClr val="accent1"/>
+          </a:lnRef>
+          <a:fillRef idx="3">
+            <a:schemeClr val="accent1"/>
+          </a:fillRef>
+          <a:effectRef idx="2">
+            <a:schemeClr val="accent1"/>
+          </a:effectRef>
+          <a:fontRef idx="minor">
+            <a:schemeClr val="lt1"/>
+          </a:fontRef>
+        </p:style>
+        <p:txBody>
+          <a:bodyPr rtlCol="0" anchor="ctr"/>
+          <a:lstStyle/>
+          <a:p>
+            <a:pPr algn="ctr"/>
+          </a:p>
+        </p:txBody>
+      </p:sp>
+      <p:sp>
+        <p:nvSpPr>
+          <p:cNvPr id="19" name="TextBox 18"/>
+          <p:cNvSpPr txBox="1"/>
+          <p:nvPr/>
+        </p:nvSpPr>
+        <p:spPr>
+          <a:xfrm>
+            <a:off x="548640" y="4480559"/>
+            <a:ext cx="10972800" cy="274320"/>
+          </a:xfrm>
+          <a:prstGeom prst="rect">
+            <a:avLst/>
+          </a:prstGeom>
+          <a:noFill/>
+        </p:spPr>
+        <p:txBody>
+          <a:bodyPr wrap="none">
+            <a:spAutoFit/>
+          </a:bodyPr>
+          <a:lstStyle/>
           <a:p>
             <a:pPr>
-              <a:spcAft>
-                <a:spcPts val="600"/>
-              </a:spcAft>
-              <a:defRPr b="1" sz="2000">
+              <a:defRPr sz="2000" b="1">
+                <a:solidFill>
+                  <a:srgbClr val="FFFFFF"/>
+                </a:solidFill>
+              </a:defRPr>
+            </a:pPr>
+            <a:r>
+              <a:t>Performance:</a:t>
+            </a:r>
+          </a:p>
+        </p:txBody>
+      </p:sp>
+      <p:sp>
+        <p:nvSpPr>
+          <p:cNvPr id="20" name="TextBox 19"/>
+          <p:cNvSpPr txBox="1"/>
+          <p:nvPr/>
+        </p:nvSpPr>
+        <p:spPr>
+          <a:xfrm>
+            <a:off x="457200" y="4937759"/>
+            <a:ext cx="11247120" cy="320040"/>
+          </a:xfrm>
+          <a:prstGeom prst="rect">
+            <a:avLst/>
+          </a:prstGeom>
+          <a:noFill/>
+        </p:spPr>
+        <p:txBody>
+          <a:bodyPr wrap="none">
+            <a:spAutoFit/>
+          </a:bodyPr>
+          <a:lstStyle/>
+          <a:p>
+            <a:pPr lvl="1">
+              <a:defRPr sz="1600">
                 <a:solidFill>
                   <a:srgbClr val="333333"/>
                 </a:solidFill>
               </a:defRPr>
             </a:pPr>
             <a:r>
-              <a:t>Common Mistakes:</a:t>
-            </a:r>
-          </a:p>
+              <a:t>• Dictionary lookup: O(1)</a:t>
+            </a:r>
+          </a:p>
+        </p:txBody>
+      </p:sp>
+      <p:sp>
+        <p:nvSpPr>
+          <p:cNvPr id="21" name="TextBox 20"/>
+          <p:cNvSpPr txBox="1"/>
+          <p:nvPr/>
+        </p:nvSpPr>
+        <p:spPr>
+          <a:xfrm>
+            <a:off x="457200" y="5212079"/>
+            <a:ext cx="11247120" cy="320040"/>
+          </a:xfrm>
+          <a:prstGeom prst="rect">
+            <a:avLst/>
+          </a:prstGeom>
+          <a:noFill/>
+        </p:spPr>
+        <p:txBody>
+          <a:bodyPr wrap="none">
+            <a:spAutoFit/>
+          </a:bodyPr>
+          <a:lstStyle/>
           <a:p>
             <a:pPr lvl="1">
-              <a:spcAft>
-                <a:spcPts val="400"/>
-              </a:spcAft>
               <a:defRPr sz="1600">
                 <a:solidFill>
                   <a:srgbClr val="333333"/>
@@ -6180,14 +11172,34 @@
               </a:defRPr>
             </a:pPr>
             <a:r>
-              <a:t>• KeyError from missing key</a:t>
-            </a:r>
-          </a:p>
+              <a:t>• List search: O(n)</a:t>
+            </a:r>
+          </a:p>
+        </p:txBody>
+      </p:sp>
+      <p:sp>
+        <p:nvSpPr>
+          <p:cNvPr id="22" name="TextBox 21"/>
+          <p:cNvSpPr txBox="1"/>
+          <p:nvPr/>
+        </p:nvSpPr>
+        <p:spPr>
+          <a:xfrm>
+            <a:off x="457200" y="5486399"/>
+            <a:ext cx="11247120" cy="320040"/>
+          </a:xfrm>
+          <a:prstGeom prst="rect">
+            <a:avLst/>
+          </a:prstGeom>
+          <a:noFill/>
+        </p:spPr>
+        <p:txBody>
+          <a:bodyPr wrap="none">
+            <a:spAutoFit/>
+          </a:bodyPr>
+          <a:lstStyle/>
           <a:p>
             <a:pPr lvl="1">
-              <a:spcAft>
-                <a:spcPts val="400"/>
-              </a:spcAft>
               <a:defRPr sz="1600">
                 <a:solidFill>
                   <a:srgbClr val="333333"/>
@@ -6195,142 +11207,85 @@
               </a:defRPr>
             </a:pPr>
             <a:r>
-              <a:t>• Using mutable objects as keys</a:t>
-            </a:r>
-          </a:p>
-          <a:p>
-            <a:pPr lvl="1">
-              <a:spcAft>
-                <a:spcPts val="400"/>
-              </a:spcAft>
-              <a:defRPr sz="1600">
-                <a:solidFill>
-                  <a:srgbClr val="333333"/>
-                </a:solidFill>
-              </a:defRPr>
-            </a:pPr>
-            <a:r>
-              <a:t>• Not initializing nested structures</a:t>
-            </a:r>
-          </a:p>
-          <a:p>
-            <a:pPr lvl="1">
-              <a:spcAft>
-                <a:spcPts val="400"/>
-              </a:spcAft>
-              <a:defRPr sz="1600">
-                <a:solidFill>
-                  <a:srgbClr val="333333"/>
-                </a:solidFill>
-              </a:defRPr>
-            </a:pPr>
-            <a:r>
-              <a:t>• Comparing with == when need "is"</a:t>
-            </a:r>
-          </a:p>
+              <a:t>• Dictionary more memory</a:t>
+            </a:r>
+          </a:p>
+        </p:txBody>
+      </p:sp>
+      <p:sp>
+        <p:nvSpPr>
+          <p:cNvPr id="23" name="Rectangle 22"/>
+          <p:cNvSpPr/>
+          <p:nvPr/>
+        </p:nvSpPr>
+        <p:spPr>
+          <a:xfrm>
+            <a:off x="365760" y="5714999"/>
+            <a:ext cx="11430000" cy="365760"/>
+          </a:xfrm>
+          <a:prstGeom prst="rect">
+            <a:avLst/>
+          </a:prstGeom>
+          <a:solidFill>
+            <a:srgbClr val="0078D7"/>
+          </a:solidFill>
+          <a:ln>
+            <a:noFill/>
+          </a:ln>
+        </p:spPr>
+        <p:style>
+          <a:lnRef idx="1">
+            <a:schemeClr val="accent1"/>
+          </a:lnRef>
+          <a:fillRef idx="3">
+            <a:schemeClr val="accent1"/>
+          </a:fillRef>
+          <a:effectRef idx="2">
+            <a:schemeClr val="accent1"/>
+          </a:effectRef>
+          <a:fontRef idx="minor">
+            <a:schemeClr val="lt1"/>
+          </a:fontRef>
+        </p:style>
+        <p:txBody>
+          <a:bodyPr rtlCol="0" anchor="ctr"/>
+          <a:lstStyle/>
+          <a:p>
+            <a:pPr algn="ctr"/>
+          </a:p>
+        </p:txBody>
+      </p:sp>
+      <p:sp>
+        <p:nvSpPr>
+          <p:cNvPr id="24" name="TextBox 23"/>
+          <p:cNvSpPr txBox="1"/>
+          <p:nvPr/>
+        </p:nvSpPr>
+        <p:spPr>
+          <a:xfrm>
+            <a:off x="548640" y="5760719"/>
+            <a:ext cx="10972800" cy="274320"/>
+          </a:xfrm>
+          <a:prstGeom prst="rect">
+            <a:avLst/>
+          </a:prstGeom>
+          <a:noFill/>
+        </p:spPr>
+        <p:txBody>
+          <a:bodyPr wrap="none">
+            <a:spAutoFit/>
+          </a:bodyPr>
+          <a:lstStyle/>
           <a:p>
             <a:pPr>
-              <a:spcAft>
-                <a:spcPts val="600"/>
-              </a:spcAft>
-              <a:defRPr b="1" sz="2000">
-                <a:solidFill>
-                  <a:srgbClr val="333333"/>
-                </a:solidFill>
-              </a:defRPr>
-            </a:pPr>
-            <a:r>
-              <a:t>Performance Tips:</a:t>
-            </a:r>
-          </a:p>
-          <a:p>
-            <a:pPr lvl="1">
-              <a:spcAft>
-                <a:spcPts val="400"/>
-              </a:spcAft>
-              <a:defRPr sz="1600">
-                <a:solidFill>
-                  <a:srgbClr val="333333"/>
-                </a:solidFill>
-              </a:defRPr>
-            </a:pPr>
-            <a:r>
-              <a:t>• in operator is fast for keys</a:t>
-            </a:r>
-          </a:p>
-          <a:p>
-            <a:pPr lvl="1">
-              <a:spcAft>
-                <a:spcPts val="400"/>
-              </a:spcAft>
-              <a:defRPr sz="1600">
-                <a:solidFill>
-                  <a:srgbClr val="333333"/>
-                </a:solidFill>
-              </a:defRPr>
-            </a:pPr>
-            <a:r>
-              <a:t>• Use defaultdict for counting</a:t>
-            </a:r>
-          </a:p>
-          <a:p>
-            <a:pPr lvl="1">
-              <a:spcAft>
-                <a:spcPts val="400"/>
-              </a:spcAft>
-              <a:defRPr sz="1600">
-                <a:solidFill>
-                  <a:srgbClr val="333333"/>
-                </a:solidFill>
-              </a:defRPr>
-            </a:pPr>
-            <a:r>
-              <a:t>• Consider frozenset for immutable keys</a:t>
-            </a:r>
-          </a:p>
-          <a:p>
-            <a:pPr>
-              <a:spcAft>
-                <a:spcPts val="600"/>
-              </a:spcAft>
-              <a:defRPr b="1" sz="2000">
-                <a:solidFill>
-                  <a:srgbClr val="333333"/>
-                </a:solidFill>
-              </a:defRPr>
-            </a:pPr>
-            <a:r>
-              <a:t>Code Style:</a:t>
-            </a:r>
-          </a:p>
-          <a:p>
-            <a:pPr lvl="1">
-              <a:spcAft>
-                <a:spcPts val="400"/>
-              </a:spcAft>
-              <a:defRPr sz="1600">
-                <a:solidFill>
-                  <a:srgbClr val="333333"/>
-                </a:solidFill>
-              </a:defRPr>
-            </a:pPr>
-            <a:r>
-              <a:t>• One key-value per line for readability</a:t>
-            </a:r>
-          </a:p>
-          <a:p>
-            <a:pPr lvl="1">
-              <a:spcAft>
-                <a:spcPts val="400"/>
-              </a:spcAft>
-              <a:defRPr sz="1600">
-                <a:solidFill>
-                  <a:srgbClr val="333333"/>
-                </a:solidFill>
-              </a:defRPr>
-            </a:pPr>
-            <a:r>
-              <a:t>• Use trailing comma in multi-line</a:t>
+              <a:defRPr sz="2000" b="1">
+                <a:solidFill>
+                  <a:srgbClr val="FFFFFF"/>
+                </a:solidFill>
+              </a:defRPr>
+            </a:pPr>
+            <a:r>
+              <a:t>Example:</a:t>
             </a:r>
           </a:p>
         </p:txBody>

--- a/python_course/chapter_06_dictionaries/dictionaries.pptx
+++ b/python_course/chapter_06_dictionaries/dictionaries.pptx
@@ -16,6 +16,10 @@
     <p:sldId id="264" r:id="rId15"/>
     <p:sldId id="265" r:id="rId16"/>
     <p:sldId id="266" r:id="rId17"/>
+    <p:sldId id="267" r:id="rId18"/>
+    <p:sldId id="268" r:id="rId19"/>
+    <p:sldId id="269" r:id="rId20"/>
+    <p:sldId id="270" r:id="rId21"/>
   </p:sldIdLst>
   <p:sldSz cx="12191695" cy="6858000" type="screen4x3"/>
   <p:notesSz cx="6858000" cy="9144000"/>
@@ -3373,7 +3377,7 @@
             <a:avLst/>
           </a:prstGeom>
           <a:solidFill>
-            <a:srgbClr val="FAFAFA"/>
+            <a:srgbClr val="0066CC"/>
           </a:solidFill>
           <a:ln>
             <a:noFill/>
@@ -3409,14 +3413,14 @@
         </p:nvSpPr>
         <p:spPr>
           <a:xfrm>
-            <a:off x="0" y="0"/>
-            <a:ext cx="12191695" cy="1097280"/>
-          </a:xfrm>
-          <a:prstGeom prst="rect">
-            <a:avLst/>
-          </a:prstGeom>
-          <a:solidFill>
-            <a:srgbClr val="0066CC"/>
+            <a:off x="0" y="2743200"/>
+            <a:ext cx="3657600" cy="137160"/>
+          </a:xfrm>
+          <a:prstGeom prst="rect">
+            <a:avLst/>
+          </a:prstGeom>
+          <a:solidFill>
+            <a:srgbClr val="FFBB33"/>
           </a:solidFill>
           <a:ln>
             <a:noFill/>
@@ -3452,8 +3456,8 @@
         </p:nvSpPr>
         <p:spPr>
           <a:xfrm>
-            <a:off x="0" y="1097280"/>
-            <a:ext cx="137160" cy="5760720"/>
+            <a:off x="8531352" y="4114800"/>
+            <a:ext cx="3657600" cy="137160"/>
           </a:xfrm>
           <a:prstGeom prst="rect">
             <a:avLst/>
@@ -3495,8 +3499,8 @@
         </p:nvSpPr>
         <p:spPr>
           <a:xfrm>
-            <a:off x="365760" y="274320"/>
-            <a:ext cx="10972800" cy="640080"/>
+            <a:off x="914400" y="2560320"/>
+            <a:ext cx="10360152" cy="1371600"/>
           </a:xfrm>
           <a:prstGeom prst="rect">
             <a:avLst/>
@@ -3509,854 +3513,15 @@
           </a:bodyPr>
           <a:lstStyle/>
           <a:p>
-            <a:pPr>
-              <a:defRPr sz="3600" b="1">
+            <a:pPr algn="ctr">
+              <a:defRPr sz="4800" b="1">
                 <a:solidFill>
                   <a:srgbClr val="FFFFFF"/>
                 </a:solidFill>
               </a:defRPr>
             </a:pPr>
             <a:r>
-              <a:t>Best Practices</a:t>
-            </a:r>
-          </a:p>
-        </p:txBody>
-      </p:sp>
-      <p:sp>
-        <p:nvSpPr>
-          <p:cNvPr id="6" name="Rectangle 5"/>
-          <p:cNvSpPr/>
-          <p:nvPr/>
-        </p:nvSpPr>
-        <p:spPr>
-          <a:xfrm>
-            <a:off x="365760" y="1325880"/>
-            <a:ext cx="11430000" cy="365760"/>
-          </a:xfrm>
-          <a:prstGeom prst="rect">
-            <a:avLst/>
-          </a:prstGeom>
-          <a:solidFill>
-            <a:srgbClr val="0078D7"/>
-          </a:solidFill>
-          <a:ln>
-            <a:noFill/>
-          </a:ln>
-        </p:spPr>
-        <p:style>
-          <a:lnRef idx="1">
-            <a:schemeClr val="accent1"/>
-          </a:lnRef>
-          <a:fillRef idx="3">
-            <a:schemeClr val="accent1"/>
-          </a:fillRef>
-          <a:effectRef idx="2">
-            <a:schemeClr val="accent1"/>
-          </a:effectRef>
-          <a:fontRef idx="minor">
-            <a:schemeClr val="lt1"/>
-          </a:fontRef>
-        </p:style>
-        <p:txBody>
-          <a:bodyPr rtlCol="0" anchor="ctr"/>
-          <a:lstStyle/>
-          <a:p>
-            <a:pPr algn="ctr"/>
-          </a:p>
-        </p:txBody>
-      </p:sp>
-      <p:sp>
-        <p:nvSpPr>
-          <p:cNvPr id="7" name="TextBox 6"/>
-          <p:cNvSpPr txBox="1"/>
-          <p:nvPr/>
-        </p:nvSpPr>
-        <p:spPr>
-          <a:xfrm>
-            <a:off x="548640" y="1371600"/>
-            <a:ext cx="10972800" cy="274320"/>
-          </a:xfrm>
-          <a:prstGeom prst="rect">
-            <a:avLst/>
-          </a:prstGeom>
-          <a:noFill/>
-        </p:spPr>
-        <p:txBody>
-          <a:bodyPr wrap="none">
-            <a:spAutoFit/>
-          </a:bodyPr>
-          <a:lstStyle/>
-          <a:p>
-            <a:pPr>
-              <a:defRPr sz="2000" b="1">
-                <a:solidFill>
-                  <a:srgbClr val="FFFFFF"/>
-                </a:solidFill>
-              </a:defRPr>
-            </a:pPr>
-            <a:r>
-              <a:t>Good Practices:</a:t>
-            </a:r>
-          </a:p>
-        </p:txBody>
-      </p:sp>
-      <p:sp>
-        <p:nvSpPr>
-          <p:cNvPr id="8" name="Rectangle 7"/>
-          <p:cNvSpPr/>
-          <p:nvPr/>
-        </p:nvSpPr>
-        <p:spPr>
-          <a:xfrm>
-            <a:off x="640080" y="1783080"/>
-            <a:ext cx="10789920" cy="411480"/>
-          </a:xfrm>
-          <a:prstGeom prst="rect">
-            <a:avLst/>
-          </a:prstGeom>
-          <a:solidFill>
-            <a:srgbClr val="282C34"/>
-          </a:solidFill>
-          <a:ln>
-            <a:noFill/>
-          </a:ln>
-        </p:spPr>
-        <p:style>
-          <a:lnRef idx="1">
-            <a:schemeClr val="accent1"/>
-          </a:lnRef>
-          <a:fillRef idx="3">
-            <a:schemeClr val="accent1"/>
-          </a:fillRef>
-          <a:effectRef idx="2">
-            <a:schemeClr val="accent1"/>
-          </a:effectRef>
-          <a:fontRef idx="minor">
-            <a:schemeClr val="lt1"/>
-          </a:fontRef>
-        </p:style>
-        <p:txBody>
-          <a:bodyPr rtlCol="0" anchor="ctr"/>
-          <a:lstStyle/>
-          <a:p>
-            <a:pPr algn="ctr"/>
-          </a:p>
-        </p:txBody>
-      </p:sp>
-      <p:sp>
-        <p:nvSpPr>
-          <p:cNvPr id="9" name="Rectangle 8"/>
-          <p:cNvSpPr/>
-          <p:nvPr/>
-        </p:nvSpPr>
-        <p:spPr>
-          <a:xfrm>
-            <a:off x="640080" y="1783080"/>
-            <a:ext cx="73152" cy="411480"/>
-          </a:xfrm>
-          <a:prstGeom prst="rect">
-            <a:avLst/>
-          </a:prstGeom>
-          <a:solidFill>
-            <a:srgbClr val="61AFEF"/>
-          </a:solidFill>
-          <a:ln>
-            <a:noFill/>
-          </a:ln>
-        </p:spPr>
-        <p:style>
-          <a:lnRef idx="1">
-            <a:schemeClr val="accent1"/>
-          </a:lnRef>
-          <a:fillRef idx="3">
-            <a:schemeClr val="accent1"/>
-          </a:fillRef>
-          <a:effectRef idx="2">
-            <a:schemeClr val="accent1"/>
-          </a:effectRef>
-          <a:fontRef idx="minor">
-            <a:schemeClr val="lt1"/>
-          </a:fontRef>
-        </p:style>
-        <p:txBody>
-          <a:bodyPr rtlCol="0" anchor="ctr"/>
-          <a:lstStyle/>
-          <a:p>
-            <a:pPr algn="ctr"/>
-          </a:p>
-        </p:txBody>
-      </p:sp>
-      <p:sp>
-        <p:nvSpPr>
-          <p:cNvPr id="10" name="TextBox 9"/>
-          <p:cNvSpPr txBox="1"/>
-          <p:nvPr/>
-        </p:nvSpPr>
-        <p:spPr>
-          <a:xfrm>
-            <a:off x="914400" y="1828800"/>
-            <a:ext cx="10241280" cy="320040"/>
-          </a:xfrm>
-          <a:prstGeom prst="rect">
-            <a:avLst/>
-          </a:prstGeom>
-          <a:noFill/>
-        </p:spPr>
-        <p:txBody>
-          <a:bodyPr wrap="none">
-            <a:spAutoFit/>
-          </a:bodyPr>
-          <a:lstStyle/>
-          <a:p>
-            <a:pPr>
-              <a:spcAft>
-                <a:spcPts val="200"/>
-              </a:spcAft>
-              <a:defRPr sz="1400">
-                <a:solidFill>
-                  <a:srgbClr val="ABB2BF"/>
-                </a:solidFill>
-                <a:latin typeface="Consolas"/>
-              </a:defRPr>
-            </a:pPr>
-            <a:r>
-              <a:t>• Use .get() for safe access</a:t>
-            </a:r>
-          </a:p>
-        </p:txBody>
-      </p:sp>
-      <p:sp>
-        <p:nvSpPr>
-          <p:cNvPr id="11" name="TextBox 10"/>
-          <p:cNvSpPr txBox="1"/>
-          <p:nvPr/>
-        </p:nvSpPr>
-        <p:spPr>
-          <a:xfrm>
-            <a:off x="457200" y="2377440"/>
-            <a:ext cx="11247120" cy="320040"/>
-          </a:xfrm>
-          <a:prstGeom prst="rect">
-            <a:avLst/>
-          </a:prstGeom>
-          <a:noFill/>
-        </p:spPr>
-        <p:txBody>
-          <a:bodyPr wrap="none">
-            <a:spAutoFit/>
-          </a:bodyPr>
-          <a:lstStyle/>
-          <a:p>
-            <a:pPr lvl="1">
-              <a:defRPr sz="1600">
-                <a:solidFill>
-                  <a:srgbClr val="333333"/>
-                </a:solidFill>
-              </a:defRPr>
-            </a:pPr>
-            <a:r>
-              <a:t>• Check keys before accessing</a:t>
-            </a:r>
-          </a:p>
-        </p:txBody>
-      </p:sp>
-      <p:sp>
-        <p:nvSpPr>
-          <p:cNvPr id="12" name="TextBox 11"/>
-          <p:cNvSpPr txBox="1"/>
-          <p:nvPr/>
-        </p:nvSpPr>
-        <p:spPr>
-          <a:xfrm>
-            <a:off x="457200" y="2651760"/>
-            <a:ext cx="11247120" cy="320040"/>
-          </a:xfrm>
-          <a:prstGeom prst="rect">
-            <a:avLst/>
-          </a:prstGeom>
-          <a:noFill/>
-        </p:spPr>
-        <p:txBody>
-          <a:bodyPr wrap="none">
-            <a:spAutoFit/>
-          </a:bodyPr>
-          <a:lstStyle/>
-          <a:p>
-            <a:pPr lvl="1">
-              <a:defRPr sz="1600">
-                <a:solidFill>
-                  <a:srgbClr val="333333"/>
-                </a:solidFill>
-              </a:defRPr>
-            </a:pPr>
-            <a:r>
-              <a:t>• Use descriptive keys</a:t>
-            </a:r>
-          </a:p>
-        </p:txBody>
-      </p:sp>
-      <p:sp>
-        <p:nvSpPr>
-          <p:cNvPr id="13" name="TextBox 12"/>
-          <p:cNvSpPr txBox="1"/>
-          <p:nvPr/>
-        </p:nvSpPr>
-        <p:spPr>
-          <a:xfrm>
-            <a:off x="457200" y="2926079"/>
-            <a:ext cx="11247120" cy="320040"/>
-          </a:xfrm>
-          <a:prstGeom prst="rect">
-            <a:avLst/>
-          </a:prstGeom>
-          <a:noFill/>
-        </p:spPr>
-        <p:txBody>
-          <a:bodyPr wrap="none">
-            <a:spAutoFit/>
-          </a:bodyPr>
-          <a:lstStyle/>
-          <a:p>
-            <a:pPr lvl="1">
-              <a:defRPr sz="1600">
-                <a:solidFill>
-                  <a:srgbClr val="333333"/>
-                </a:solidFill>
-              </a:defRPr>
-            </a:pPr>
-            <a:r>
-              <a:t>• Keep structure simple</a:t>
-            </a:r>
-          </a:p>
-        </p:txBody>
-      </p:sp>
-      <p:sp>
-        <p:nvSpPr>
-          <p:cNvPr id="14" name="Rectangle 13"/>
-          <p:cNvSpPr/>
-          <p:nvPr/>
-        </p:nvSpPr>
-        <p:spPr>
-          <a:xfrm>
-            <a:off x="365760" y="3154679"/>
-            <a:ext cx="11430000" cy="365760"/>
-          </a:xfrm>
-          <a:prstGeom prst="rect">
-            <a:avLst/>
-          </a:prstGeom>
-          <a:solidFill>
-            <a:srgbClr val="0078D7"/>
-          </a:solidFill>
-          <a:ln>
-            <a:noFill/>
-          </a:ln>
-        </p:spPr>
-        <p:style>
-          <a:lnRef idx="1">
-            <a:schemeClr val="accent1"/>
-          </a:lnRef>
-          <a:fillRef idx="3">
-            <a:schemeClr val="accent1"/>
-          </a:fillRef>
-          <a:effectRef idx="2">
-            <a:schemeClr val="accent1"/>
-          </a:effectRef>
-          <a:fontRef idx="minor">
-            <a:schemeClr val="lt1"/>
-          </a:fontRef>
-        </p:style>
-        <p:txBody>
-          <a:bodyPr rtlCol="0" anchor="ctr"/>
-          <a:lstStyle/>
-          <a:p>
-            <a:pPr algn="ctr"/>
-          </a:p>
-        </p:txBody>
-      </p:sp>
-      <p:sp>
-        <p:nvSpPr>
-          <p:cNvPr id="15" name="TextBox 14"/>
-          <p:cNvSpPr txBox="1"/>
-          <p:nvPr/>
-        </p:nvSpPr>
-        <p:spPr>
-          <a:xfrm>
-            <a:off x="548640" y="3200399"/>
-            <a:ext cx="10972800" cy="274320"/>
-          </a:xfrm>
-          <a:prstGeom prst="rect">
-            <a:avLst/>
-          </a:prstGeom>
-          <a:noFill/>
-        </p:spPr>
-        <p:txBody>
-          <a:bodyPr wrap="none">
-            <a:spAutoFit/>
-          </a:bodyPr>
-          <a:lstStyle/>
-          <a:p>
-            <a:pPr>
-              <a:defRPr sz="2000" b="1">
-                <a:solidFill>
-                  <a:srgbClr val="FFFFFF"/>
-                </a:solidFill>
-              </a:defRPr>
-            </a:pPr>
-            <a:r>
-              <a:t>Common Mistakes:</a:t>
-            </a:r>
-          </a:p>
-        </p:txBody>
-      </p:sp>
-      <p:sp>
-        <p:nvSpPr>
-          <p:cNvPr id="16" name="TextBox 15"/>
-          <p:cNvSpPr txBox="1"/>
-          <p:nvPr/>
-        </p:nvSpPr>
-        <p:spPr>
-          <a:xfrm>
-            <a:off x="457200" y="3657599"/>
-            <a:ext cx="11247120" cy="320040"/>
-          </a:xfrm>
-          <a:prstGeom prst="rect">
-            <a:avLst/>
-          </a:prstGeom>
-          <a:noFill/>
-        </p:spPr>
-        <p:txBody>
-          <a:bodyPr wrap="none">
-            <a:spAutoFit/>
-          </a:bodyPr>
-          <a:lstStyle/>
-          <a:p>
-            <a:pPr lvl="1">
-              <a:defRPr sz="1600">
-                <a:solidFill>
-                  <a:srgbClr val="333333"/>
-                </a:solidFill>
-              </a:defRPr>
-            </a:pPr>
-            <a:r>
-              <a:t>• KeyError from missing key</a:t>
-            </a:r>
-          </a:p>
-        </p:txBody>
-      </p:sp>
-      <p:sp>
-        <p:nvSpPr>
-          <p:cNvPr id="17" name="TextBox 16"/>
-          <p:cNvSpPr txBox="1"/>
-          <p:nvPr/>
-        </p:nvSpPr>
-        <p:spPr>
-          <a:xfrm>
-            <a:off x="457200" y="3931920"/>
-            <a:ext cx="11247120" cy="320040"/>
-          </a:xfrm>
-          <a:prstGeom prst="rect">
-            <a:avLst/>
-          </a:prstGeom>
-          <a:noFill/>
-        </p:spPr>
-        <p:txBody>
-          <a:bodyPr wrap="none">
-            <a:spAutoFit/>
-          </a:bodyPr>
-          <a:lstStyle/>
-          <a:p>
-            <a:pPr lvl="1">
-              <a:defRPr sz="1600">
-                <a:solidFill>
-                  <a:srgbClr val="333333"/>
-                </a:solidFill>
-              </a:defRPr>
-            </a:pPr>
-            <a:r>
-              <a:t>• Using mutable objects as keys</a:t>
-            </a:r>
-          </a:p>
-        </p:txBody>
-      </p:sp>
-      <p:sp>
-        <p:nvSpPr>
-          <p:cNvPr id="18" name="TextBox 17"/>
-          <p:cNvSpPr txBox="1"/>
-          <p:nvPr/>
-        </p:nvSpPr>
-        <p:spPr>
-          <a:xfrm>
-            <a:off x="457200" y="4206240"/>
-            <a:ext cx="11247120" cy="320040"/>
-          </a:xfrm>
-          <a:prstGeom prst="rect">
-            <a:avLst/>
-          </a:prstGeom>
-          <a:noFill/>
-        </p:spPr>
-        <p:txBody>
-          <a:bodyPr wrap="none">
-            <a:spAutoFit/>
-          </a:bodyPr>
-          <a:lstStyle/>
-          <a:p>
-            <a:pPr lvl="1">
-              <a:defRPr sz="1600">
-                <a:solidFill>
-                  <a:srgbClr val="333333"/>
-                </a:solidFill>
-              </a:defRPr>
-            </a:pPr>
-            <a:r>
-              <a:t>• Not initializing nested structures</a:t>
-            </a:r>
-          </a:p>
-        </p:txBody>
-      </p:sp>
-      <p:sp>
-        <p:nvSpPr>
-          <p:cNvPr id="19" name="TextBox 18"/>
-          <p:cNvSpPr txBox="1"/>
-          <p:nvPr/>
-        </p:nvSpPr>
-        <p:spPr>
-          <a:xfrm>
-            <a:off x="457200" y="4480559"/>
-            <a:ext cx="11247120" cy="320040"/>
-          </a:xfrm>
-          <a:prstGeom prst="rect">
-            <a:avLst/>
-          </a:prstGeom>
-          <a:noFill/>
-        </p:spPr>
-        <p:txBody>
-          <a:bodyPr wrap="none">
-            <a:spAutoFit/>
-          </a:bodyPr>
-          <a:lstStyle/>
-          <a:p>
-            <a:pPr lvl="1">
-              <a:defRPr sz="1600">
-                <a:solidFill>
-                  <a:srgbClr val="333333"/>
-                </a:solidFill>
-              </a:defRPr>
-            </a:pPr>
-            <a:r>
-              <a:t>• Comparing with == when need "is"</a:t>
-            </a:r>
-          </a:p>
-        </p:txBody>
-      </p:sp>
-      <p:sp>
-        <p:nvSpPr>
-          <p:cNvPr id="20" name="Rectangle 19"/>
-          <p:cNvSpPr/>
-          <p:nvPr/>
-        </p:nvSpPr>
-        <p:spPr>
-          <a:xfrm>
-            <a:off x="365760" y="4709159"/>
-            <a:ext cx="11430000" cy="365760"/>
-          </a:xfrm>
-          <a:prstGeom prst="rect">
-            <a:avLst/>
-          </a:prstGeom>
-          <a:solidFill>
-            <a:srgbClr val="0078D7"/>
-          </a:solidFill>
-          <a:ln>
-            <a:noFill/>
-          </a:ln>
-        </p:spPr>
-        <p:style>
-          <a:lnRef idx="1">
-            <a:schemeClr val="accent1"/>
-          </a:lnRef>
-          <a:fillRef idx="3">
-            <a:schemeClr val="accent1"/>
-          </a:fillRef>
-          <a:effectRef idx="2">
-            <a:schemeClr val="accent1"/>
-          </a:effectRef>
-          <a:fontRef idx="minor">
-            <a:schemeClr val="lt1"/>
-          </a:fontRef>
-        </p:style>
-        <p:txBody>
-          <a:bodyPr rtlCol="0" anchor="ctr"/>
-          <a:lstStyle/>
-          <a:p>
-            <a:pPr algn="ctr"/>
-          </a:p>
-        </p:txBody>
-      </p:sp>
-      <p:sp>
-        <p:nvSpPr>
-          <p:cNvPr id="21" name="TextBox 20"/>
-          <p:cNvSpPr txBox="1"/>
-          <p:nvPr/>
-        </p:nvSpPr>
-        <p:spPr>
-          <a:xfrm>
-            <a:off x="548640" y="4754879"/>
-            <a:ext cx="10972800" cy="274320"/>
-          </a:xfrm>
-          <a:prstGeom prst="rect">
-            <a:avLst/>
-          </a:prstGeom>
-          <a:noFill/>
-        </p:spPr>
-        <p:txBody>
-          <a:bodyPr wrap="none">
-            <a:spAutoFit/>
-          </a:bodyPr>
-          <a:lstStyle/>
-          <a:p>
-            <a:pPr>
-              <a:defRPr sz="2000" b="1">
-                <a:solidFill>
-                  <a:srgbClr val="FFFFFF"/>
-                </a:solidFill>
-              </a:defRPr>
-            </a:pPr>
-            <a:r>
-              <a:t>Performance Tips:</a:t>
-            </a:r>
-          </a:p>
-        </p:txBody>
-      </p:sp>
-      <p:sp>
-        <p:nvSpPr>
-          <p:cNvPr id="22" name="Rectangle 21"/>
-          <p:cNvSpPr/>
-          <p:nvPr/>
-        </p:nvSpPr>
-        <p:spPr>
-          <a:xfrm>
-            <a:off x="640080" y="5166359"/>
-            <a:ext cx="10789920" cy="868680"/>
-          </a:xfrm>
-          <a:prstGeom prst="rect">
-            <a:avLst/>
-          </a:prstGeom>
-          <a:solidFill>
-            <a:srgbClr val="282C34"/>
-          </a:solidFill>
-          <a:ln>
-            <a:noFill/>
-          </a:ln>
-        </p:spPr>
-        <p:style>
-          <a:lnRef idx="1">
-            <a:schemeClr val="accent1"/>
-          </a:lnRef>
-          <a:fillRef idx="3">
-            <a:schemeClr val="accent1"/>
-          </a:fillRef>
-          <a:effectRef idx="2">
-            <a:schemeClr val="accent1"/>
-          </a:effectRef>
-          <a:fontRef idx="minor">
-            <a:schemeClr val="lt1"/>
-          </a:fontRef>
-        </p:style>
-        <p:txBody>
-          <a:bodyPr rtlCol="0" anchor="ctr"/>
-          <a:lstStyle/>
-          <a:p>
-            <a:pPr algn="ctr"/>
-          </a:p>
-        </p:txBody>
-      </p:sp>
-      <p:sp>
-        <p:nvSpPr>
-          <p:cNvPr id="23" name="Rectangle 22"/>
-          <p:cNvSpPr/>
-          <p:nvPr/>
-        </p:nvSpPr>
-        <p:spPr>
-          <a:xfrm>
-            <a:off x="640080" y="5166359"/>
-            <a:ext cx="73152" cy="868680"/>
-          </a:xfrm>
-          <a:prstGeom prst="rect">
-            <a:avLst/>
-          </a:prstGeom>
-          <a:solidFill>
-            <a:srgbClr val="61AFEF"/>
-          </a:solidFill>
-          <a:ln>
-            <a:noFill/>
-          </a:ln>
-        </p:spPr>
-        <p:style>
-          <a:lnRef idx="1">
-            <a:schemeClr val="accent1"/>
-          </a:lnRef>
-          <a:fillRef idx="3">
-            <a:schemeClr val="accent1"/>
-          </a:fillRef>
-          <a:effectRef idx="2">
-            <a:schemeClr val="accent1"/>
-          </a:effectRef>
-          <a:fontRef idx="minor">
-            <a:schemeClr val="lt1"/>
-          </a:fontRef>
-        </p:style>
-        <p:txBody>
-          <a:bodyPr rtlCol="0" anchor="ctr"/>
-          <a:lstStyle/>
-          <a:p>
-            <a:pPr algn="ctr"/>
-          </a:p>
-        </p:txBody>
-      </p:sp>
-      <p:sp>
-        <p:nvSpPr>
-          <p:cNvPr id="24" name="TextBox 23"/>
-          <p:cNvSpPr txBox="1"/>
-          <p:nvPr/>
-        </p:nvSpPr>
-        <p:spPr>
-          <a:xfrm>
-            <a:off x="914400" y="5212079"/>
-            <a:ext cx="10241280" cy="777240"/>
-          </a:xfrm>
-          <a:prstGeom prst="rect">
-            <a:avLst/>
-          </a:prstGeom>
-          <a:noFill/>
-        </p:spPr>
-        <p:txBody>
-          <a:bodyPr wrap="none">
-            <a:spAutoFit/>
-          </a:bodyPr>
-          <a:lstStyle/>
-          <a:p>
-            <a:pPr>
-              <a:spcAft>
-                <a:spcPts val="200"/>
-              </a:spcAft>
-              <a:defRPr sz="1400">
-                <a:solidFill>
-                  <a:srgbClr val="ABB2BF"/>
-                </a:solidFill>
-                <a:latin typeface="Consolas"/>
-              </a:defRPr>
-            </a:pPr>
-            <a:r>
-              <a:t>• in operator is fast for keys</a:t>
-            </a:r>
-          </a:p>
-          <a:p>
-            <a:pPr>
-              <a:spcAft>
-                <a:spcPts val="200"/>
-              </a:spcAft>
-              <a:defRPr sz="1400">
-                <a:solidFill>
-                  <a:srgbClr val="ABB2BF"/>
-                </a:solidFill>
-                <a:latin typeface="Consolas"/>
-              </a:defRPr>
-            </a:pPr>
-            <a:r>
-              <a:t>• Use defaultdict for counting</a:t>
-            </a:r>
-          </a:p>
-          <a:p>
-            <a:pPr>
-              <a:spcAft>
-                <a:spcPts val="200"/>
-              </a:spcAft>
-              <a:defRPr sz="1400">
-                <a:solidFill>
-                  <a:srgbClr val="ABB2BF"/>
-                </a:solidFill>
-                <a:latin typeface="Consolas"/>
-              </a:defRPr>
-            </a:pPr>
-            <a:r>
-              <a:t>• Consider frozenset for immutable keys</a:t>
-            </a:r>
-          </a:p>
-        </p:txBody>
-      </p:sp>
-      <p:sp>
-        <p:nvSpPr>
-          <p:cNvPr id="25" name="Rectangle 24"/>
-          <p:cNvSpPr/>
-          <p:nvPr/>
-        </p:nvSpPr>
-        <p:spPr>
-          <a:xfrm>
-            <a:off x="365760" y="6172200"/>
-            <a:ext cx="11430000" cy="365760"/>
-          </a:xfrm>
-          <a:prstGeom prst="rect">
-            <a:avLst/>
-          </a:prstGeom>
-          <a:solidFill>
-            <a:srgbClr val="0078D7"/>
-          </a:solidFill>
-          <a:ln>
-            <a:noFill/>
-          </a:ln>
-        </p:spPr>
-        <p:style>
-          <a:lnRef idx="1">
-            <a:schemeClr val="accent1"/>
-          </a:lnRef>
-          <a:fillRef idx="3">
-            <a:schemeClr val="accent1"/>
-          </a:fillRef>
-          <a:effectRef idx="2">
-            <a:schemeClr val="accent1"/>
-          </a:effectRef>
-          <a:fontRef idx="minor">
-            <a:schemeClr val="lt1"/>
-          </a:fontRef>
-        </p:style>
-        <p:txBody>
-          <a:bodyPr rtlCol="0" anchor="ctr"/>
-          <a:lstStyle/>
-          <a:p>
-            <a:pPr algn="ctr"/>
-          </a:p>
-        </p:txBody>
-      </p:sp>
-      <p:sp>
-        <p:nvSpPr>
-          <p:cNvPr id="26" name="TextBox 25"/>
-          <p:cNvSpPr txBox="1"/>
-          <p:nvPr/>
-        </p:nvSpPr>
-        <p:spPr>
-          <a:xfrm>
-            <a:off x="548640" y="6217920"/>
-            <a:ext cx="10972800" cy="274320"/>
-          </a:xfrm>
-          <a:prstGeom prst="rect">
-            <a:avLst/>
-          </a:prstGeom>
-          <a:noFill/>
-        </p:spPr>
-        <p:txBody>
-          <a:bodyPr wrap="none">
-            <a:spAutoFit/>
-          </a:bodyPr>
-          <a:lstStyle/>
-          <a:p>
-            <a:pPr>
-              <a:defRPr sz="2000" b="1">
-                <a:solidFill>
-                  <a:srgbClr val="FFFFFF"/>
-                </a:solidFill>
-              </a:defRPr>
-            </a:pPr>
-            <a:r>
-              <a:t>Code Style:</a:t>
+              <a:t>Common Patterns</a:t>
             </a:r>
           </a:p>
         </p:txBody>
@@ -4394,6 +3559,3343 @@
             <a:avLst/>
           </a:prstGeom>
           <a:solidFill>
+            <a:srgbClr val="FAFAFA"/>
+          </a:solidFill>
+          <a:ln>
+            <a:noFill/>
+          </a:ln>
+        </p:spPr>
+        <p:style>
+          <a:lnRef idx="1">
+            <a:schemeClr val="accent1"/>
+          </a:lnRef>
+          <a:fillRef idx="3">
+            <a:schemeClr val="accent1"/>
+          </a:fillRef>
+          <a:effectRef idx="2">
+            <a:schemeClr val="accent1"/>
+          </a:effectRef>
+          <a:fontRef idx="minor">
+            <a:schemeClr val="lt1"/>
+          </a:fontRef>
+        </p:style>
+        <p:txBody>
+          <a:bodyPr rtlCol="0" anchor="ctr"/>
+          <a:lstStyle/>
+          <a:p>
+            <a:pPr algn="ctr"/>
+          </a:p>
+        </p:txBody>
+      </p:sp>
+      <p:sp>
+        <p:nvSpPr>
+          <p:cNvPr id="3" name="Rectangle 2"/>
+          <p:cNvSpPr/>
+          <p:nvPr/>
+        </p:nvSpPr>
+        <p:spPr>
+          <a:xfrm>
+            <a:off x="0" y="0"/>
+            <a:ext cx="12191695" cy="1097280"/>
+          </a:xfrm>
+          <a:prstGeom prst="rect">
+            <a:avLst/>
+          </a:prstGeom>
+          <a:solidFill>
+            <a:srgbClr val="0066CC"/>
+          </a:solidFill>
+          <a:ln>
+            <a:noFill/>
+          </a:ln>
+        </p:spPr>
+        <p:style>
+          <a:lnRef idx="1">
+            <a:schemeClr val="accent1"/>
+          </a:lnRef>
+          <a:fillRef idx="3">
+            <a:schemeClr val="accent1"/>
+          </a:fillRef>
+          <a:effectRef idx="2">
+            <a:schemeClr val="accent1"/>
+          </a:effectRef>
+          <a:fontRef idx="minor">
+            <a:schemeClr val="lt1"/>
+          </a:fontRef>
+        </p:style>
+        <p:txBody>
+          <a:bodyPr rtlCol="0" anchor="ctr"/>
+          <a:lstStyle/>
+          <a:p>
+            <a:pPr algn="ctr"/>
+          </a:p>
+        </p:txBody>
+      </p:sp>
+      <p:sp>
+        <p:nvSpPr>
+          <p:cNvPr id="4" name="Rectangle 3"/>
+          <p:cNvSpPr/>
+          <p:nvPr/>
+        </p:nvSpPr>
+        <p:spPr>
+          <a:xfrm>
+            <a:off x="0" y="1097280"/>
+            <a:ext cx="137160" cy="5760720"/>
+          </a:xfrm>
+          <a:prstGeom prst="rect">
+            <a:avLst/>
+          </a:prstGeom>
+          <a:solidFill>
+            <a:srgbClr val="FFBB33"/>
+          </a:solidFill>
+          <a:ln>
+            <a:noFill/>
+          </a:ln>
+        </p:spPr>
+        <p:style>
+          <a:lnRef idx="1">
+            <a:schemeClr val="accent1"/>
+          </a:lnRef>
+          <a:fillRef idx="3">
+            <a:schemeClr val="accent1"/>
+          </a:fillRef>
+          <a:effectRef idx="2">
+            <a:schemeClr val="accent1"/>
+          </a:effectRef>
+          <a:fontRef idx="minor">
+            <a:schemeClr val="lt1"/>
+          </a:fontRef>
+        </p:style>
+        <p:txBody>
+          <a:bodyPr rtlCol="0" anchor="ctr"/>
+          <a:lstStyle/>
+          <a:p>
+            <a:pPr algn="ctr"/>
+          </a:p>
+        </p:txBody>
+      </p:sp>
+      <p:sp>
+        <p:nvSpPr>
+          <p:cNvPr id="5" name="TextBox 4"/>
+          <p:cNvSpPr txBox="1"/>
+          <p:nvPr/>
+        </p:nvSpPr>
+        <p:spPr>
+          <a:xfrm>
+            <a:off x="365760" y="274320"/>
+            <a:ext cx="10972800" cy="640080"/>
+          </a:xfrm>
+          <a:prstGeom prst="rect">
+            <a:avLst/>
+          </a:prstGeom>
+          <a:noFill/>
+        </p:spPr>
+        <p:txBody>
+          <a:bodyPr wrap="none">
+            <a:spAutoFit/>
+          </a:bodyPr>
+          <a:lstStyle/>
+          <a:p>
+            <a:pPr>
+              <a:defRPr sz="3600" b="1">
+                <a:solidFill>
+                  <a:srgbClr val="FFFFFF"/>
+                </a:solidFill>
+              </a:defRPr>
+            </a:pPr>
+            <a:r>
+              <a:t>Common Patterns</a:t>
+            </a:r>
+          </a:p>
+        </p:txBody>
+      </p:sp>
+      <p:sp>
+        <p:nvSpPr>
+          <p:cNvPr id="6" name="Rectangle 5"/>
+          <p:cNvSpPr/>
+          <p:nvPr/>
+        </p:nvSpPr>
+        <p:spPr>
+          <a:xfrm>
+            <a:off x="365760" y="1325880"/>
+            <a:ext cx="11430000" cy="365760"/>
+          </a:xfrm>
+          <a:prstGeom prst="rect">
+            <a:avLst/>
+          </a:prstGeom>
+          <a:solidFill>
+            <a:srgbClr val="0078D7"/>
+          </a:solidFill>
+          <a:ln>
+            <a:noFill/>
+          </a:ln>
+        </p:spPr>
+        <p:style>
+          <a:lnRef idx="1">
+            <a:schemeClr val="accent1"/>
+          </a:lnRef>
+          <a:fillRef idx="3">
+            <a:schemeClr val="accent1"/>
+          </a:fillRef>
+          <a:effectRef idx="2">
+            <a:schemeClr val="accent1"/>
+          </a:effectRef>
+          <a:fontRef idx="minor">
+            <a:schemeClr val="lt1"/>
+          </a:fontRef>
+        </p:style>
+        <p:txBody>
+          <a:bodyPr rtlCol="0" anchor="ctr"/>
+          <a:lstStyle/>
+          <a:p>
+            <a:pPr algn="ctr"/>
+          </a:p>
+        </p:txBody>
+      </p:sp>
+      <p:sp>
+        <p:nvSpPr>
+          <p:cNvPr id="7" name="TextBox 6"/>
+          <p:cNvSpPr txBox="1"/>
+          <p:nvPr/>
+        </p:nvSpPr>
+        <p:spPr>
+          <a:xfrm>
+            <a:off x="548640" y="1371600"/>
+            <a:ext cx="10972800" cy="274320"/>
+          </a:xfrm>
+          <a:prstGeom prst="rect">
+            <a:avLst/>
+          </a:prstGeom>
+          <a:noFill/>
+        </p:spPr>
+        <p:txBody>
+          <a:bodyPr wrap="none">
+            <a:spAutoFit/>
+          </a:bodyPr>
+          <a:lstStyle/>
+          <a:p>
+            <a:pPr>
+              <a:defRPr sz="2000" b="1">
+                <a:solidFill>
+                  <a:srgbClr val="FFFFFF"/>
+                </a:solidFill>
+              </a:defRPr>
+            </a:pPr>
+            <a:r>
+              <a:t>Counting:</a:t>
+            </a:r>
+          </a:p>
+        </p:txBody>
+      </p:sp>
+      <p:sp>
+        <p:nvSpPr>
+          <p:cNvPr id="8" name="Rectangle 7"/>
+          <p:cNvSpPr/>
+          <p:nvPr/>
+        </p:nvSpPr>
+        <p:spPr>
+          <a:xfrm>
+            <a:off x="640080" y="1783080"/>
+            <a:ext cx="10789920" cy="868680"/>
+          </a:xfrm>
+          <a:prstGeom prst="rect">
+            <a:avLst/>
+          </a:prstGeom>
+          <a:solidFill>
+            <a:srgbClr val="282C34"/>
+          </a:solidFill>
+          <a:ln>
+            <a:noFill/>
+          </a:ln>
+        </p:spPr>
+        <p:style>
+          <a:lnRef idx="1">
+            <a:schemeClr val="accent1"/>
+          </a:lnRef>
+          <a:fillRef idx="3">
+            <a:schemeClr val="accent1"/>
+          </a:fillRef>
+          <a:effectRef idx="2">
+            <a:schemeClr val="accent1"/>
+          </a:effectRef>
+          <a:fontRef idx="minor">
+            <a:schemeClr val="lt1"/>
+          </a:fontRef>
+        </p:style>
+        <p:txBody>
+          <a:bodyPr rtlCol="0" anchor="ctr"/>
+          <a:lstStyle/>
+          <a:p>
+            <a:pPr algn="ctr"/>
+          </a:p>
+        </p:txBody>
+      </p:sp>
+      <p:sp>
+        <p:nvSpPr>
+          <p:cNvPr id="9" name="Rectangle 8"/>
+          <p:cNvSpPr/>
+          <p:nvPr/>
+        </p:nvSpPr>
+        <p:spPr>
+          <a:xfrm>
+            <a:off x="640080" y="1783080"/>
+            <a:ext cx="73152" cy="868680"/>
+          </a:xfrm>
+          <a:prstGeom prst="rect">
+            <a:avLst/>
+          </a:prstGeom>
+          <a:solidFill>
+            <a:srgbClr val="61AFEF"/>
+          </a:solidFill>
+          <a:ln>
+            <a:noFill/>
+          </a:ln>
+        </p:spPr>
+        <p:style>
+          <a:lnRef idx="1">
+            <a:schemeClr val="accent1"/>
+          </a:lnRef>
+          <a:fillRef idx="3">
+            <a:schemeClr val="accent1"/>
+          </a:fillRef>
+          <a:effectRef idx="2">
+            <a:schemeClr val="accent1"/>
+          </a:effectRef>
+          <a:fontRef idx="minor">
+            <a:schemeClr val="lt1"/>
+          </a:fontRef>
+        </p:style>
+        <p:txBody>
+          <a:bodyPr rtlCol="0" anchor="ctr"/>
+          <a:lstStyle/>
+          <a:p>
+            <a:pPr algn="ctr"/>
+          </a:p>
+        </p:txBody>
+      </p:sp>
+      <p:sp>
+        <p:nvSpPr>
+          <p:cNvPr id="10" name="TextBox 9"/>
+          <p:cNvSpPr txBox="1"/>
+          <p:nvPr/>
+        </p:nvSpPr>
+        <p:spPr>
+          <a:xfrm>
+            <a:off x="914400" y="1828800"/>
+            <a:ext cx="10241280" cy="777240"/>
+          </a:xfrm>
+          <a:prstGeom prst="rect">
+            <a:avLst/>
+          </a:prstGeom>
+          <a:noFill/>
+        </p:spPr>
+        <p:txBody>
+          <a:bodyPr wrap="none">
+            <a:spAutoFit/>
+          </a:bodyPr>
+          <a:lstStyle/>
+          <a:p>
+            <a:pPr>
+              <a:spcAft>
+                <a:spcPts val="200"/>
+              </a:spcAft>
+              <a:defRPr sz="1400">
+                <a:solidFill>
+                  <a:srgbClr val="ABB2BF"/>
+                </a:solidFill>
+                <a:latin typeface="Consolas"/>
+              </a:defRPr>
+            </a:pPr>
+            <a:r>
+              <a:t>word_count = {}</a:t>
+            </a:r>
+          </a:p>
+          <a:p>
+            <a:pPr>
+              <a:spcAft>
+                <a:spcPts val="200"/>
+              </a:spcAft>
+              <a:defRPr sz="1400">
+                <a:solidFill>
+                  <a:srgbClr val="ABB2BF"/>
+                </a:solidFill>
+                <a:latin typeface="Consolas"/>
+              </a:defRPr>
+            </a:pPr>
+            <a:r>
+              <a:t>for word in words:</a:t>
+            </a:r>
+          </a:p>
+          <a:p>
+            <a:pPr>
+              <a:spcAft>
+                <a:spcPts val="200"/>
+              </a:spcAft>
+              <a:defRPr sz="1400">
+                <a:solidFill>
+                  <a:srgbClr val="ABB2BF"/>
+                </a:solidFill>
+                <a:latin typeface="Consolas"/>
+              </a:defRPr>
+            </a:pPr>
+            <a:r>
+              <a:t>    word_count[word] = word_count.get(word, 0) + 1</a:t>
+            </a:r>
+          </a:p>
+        </p:txBody>
+      </p:sp>
+      <p:sp>
+        <p:nvSpPr>
+          <p:cNvPr id="11" name="Rectangle 10"/>
+          <p:cNvSpPr/>
+          <p:nvPr/>
+        </p:nvSpPr>
+        <p:spPr>
+          <a:xfrm>
+            <a:off x="365760" y="2788920"/>
+            <a:ext cx="11430000" cy="365760"/>
+          </a:xfrm>
+          <a:prstGeom prst="rect">
+            <a:avLst/>
+          </a:prstGeom>
+          <a:solidFill>
+            <a:srgbClr val="0078D7"/>
+          </a:solidFill>
+          <a:ln>
+            <a:noFill/>
+          </a:ln>
+        </p:spPr>
+        <p:style>
+          <a:lnRef idx="1">
+            <a:schemeClr val="accent1"/>
+          </a:lnRef>
+          <a:fillRef idx="3">
+            <a:schemeClr val="accent1"/>
+          </a:fillRef>
+          <a:effectRef idx="2">
+            <a:schemeClr val="accent1"/>
+          </a:effectRef>
+          <a:fontRef idx="minor">
+            <a:schemeClr val="lt1"/>
+          </a:fontRef>
+        </p:style>
+        <p:txBody>
+          <a:bodyPr rtlCol="0" anchor="ctr"/>
+          <a:lstStyle/>
+          <a:p>
+            <a:pPr algn="ctr"/>
+          </a:p>
+        </p:txBody>
+      </p:sp>
+      <p:sp>
+        <p:nvSpPr>
+          <p:cNvPr id="12" name="TextBox 11"/>
+          <p:cNvSpPr txBox="1"/>
+          <p:nvPr/>
+        </p:nvSpPr>
+        <p:spPr>
+          <a:xfrm>
+            <a:off x="548640" y="2834640"/>
+            <a:ext cx="10972800" cy="274320"/>
+          </a:xfrm>
+          <a:prstGeom prst="rect">
+            <a:avLst/>
+          </a:prstGeom>
+          <a:noFill/>
+        </p:spPr>
+        <p:txBody>
+          <a:bodyPr wrap="none">
+            <a:spAutoFit/>
+          </a:bodyPr>
+          <a:lstStyle/>
+          <a:p>
+            <a:pPr>
+              <a:defRPr sz="2000" b="1">
+                <a:solidFill>
+                  <a:srgbClr val="FFFFFF"/>
+                </a:solidFill>
+              </a:defRPr>
+            </a:pPr>
+            <a:r>
+              <a:t>Grouping:</a:t>
+            </a:r>
+          </a:p>
+        </p:txBody>
+      </p:sp>
+      <p:sp>
+        <p:nvSpPr>
+          <p:cNvPr id="13" name="Rectangle 12"/>
+          <p:cNvSpPr/>
+          <p:nvPr/>
+        </p:nvSpPr>
+        <p:spPr>
+          <a:xfrm>
+            <a:off x="640080" y="3246120"/>
+            <a:ext cx="10789920" cy="1554480"/>
+          </a:xfrm>
+          <a:prstGeom prst="rect">
+            <a:avLst/>
+          </a:prstGeom>
+          <a:solidFill>
+            <a:srgbClr val="282C34"/>
+          </a:solidFill>
+          <a:ln>
+            <a:noFill/>
+          </a:ln>
+        </p:spPr>
+        <p:style>
+          <a:lnRef idx="1">
+            <a:schemeClr val="accent1"/>
+          </a:lnRef>
+          <a:fillRef idx="3">
+            <a:schemeClr val="accent1"/>
+          </a:fillRef>
+          <a:effectRef idx="2">
+            <a:schemeClr val="accent1"/>
+          </a:effectRef>
+          <a:fontRef idx="minor">
+            <a:schemeClr val="lt1"/>
+          </a:fontRef>
+        </p:style>
+        <p:txBody>
+          <a:bodyPr rtlCol="0" anchor="ctr"/>
+          <a:lstStyle/>
+          <a:p>
+            <a:pPr algn="ctr"/>
+          </a:p>
+        </p:txBody>
+      </p:sp>
+      <p:sp>
+        <p:nvSpPr>
+          <p:cNvPr id="14" name="Rectangle 13"/>
+          <p:cNvSpPr/>
+          <p:nvPr/>
+        </p:nvSpPr>
+        <p:spPr>
+          <a:xfrm>
+            <a:off x="640080" y="3246120"/>
+            <a:ext cx="73152" cy="1554480"/>
+          </a:xfrm>
+          <a:prstGeom prst="rect">
+            <a:avLst/>
+          </a:prstGeom>
+          <a:solidFill>
+            <a:srgbClr val="61AFEF"/>
+          </a:solidFill>
+          <a:ln>
+            <a:noFill/>
+          </a:ln>
+        </p:spPr>
+        <p:style>
+          <a:lnRef idx="1">
+            <a:schemeClr val="accent1"/>
+          </a:lnRef>
+          <a:fillRef idx="3">
+            <a:schemeClr val="accent1"/>
+          </a:fillRef>
+          <a:effectRef idx="2">
+            <a:schemeClr val="accent1"/>
+          </a:effectRef>
+          <a:fontRef idx="minor">
+            <a:schemeClr val="lt1"/>
+          </a:fontRef>
+        </p:style>
+        <p:txBody>
+          <a:bodyPr rtlCol="0" anchor="ctr"/>
+          <a:lstStyle/>
+          <a:p>
+            <a:pPr algn="ctr"/>
+          </a:p>
+        </p:txBody>
+      </p:sp>
+      <p:sp>
+        <p:nvSpPr>
+          <p:cNvPr id="15" name="TextBox 14"/>
+          <p:cNvSpPr txBox="1"/>
+          <p:nvPr/>
+        </p:nvSpPr>
+        <p:spPr>
+          <a:xfrm>
+            <a:off x="914400" y="3291840"/>
+            <a:ext cx="10241280" cy="1463039"/>
+          </a:xfrm>
+          <a:prstGeom prst="rect">
+            <a:avLst/>
+          </a:prstGeom>
+          <a:noFill/>
+        </p:spPr>
+        <p:txBody>
+          <a:bodyPr wrap="none">
+            <a:spAutoFit/>
+          </a:bodyPr>
+          <a:lstStyle/>
+          <a:p>
+            <a:pPr>
+              <a:spcAft>
+                <a:spcPts val="200"/>
+              </a:spcAft>
+              <a:defRPr sz="1400">
+                <a:solidFill>
+                  <a:srgbClr val="ABB2BF"/>
+                </a:solidFill>
+                <a:latin typeface="Consolas"/>
+              </a:defRPr>
+            </a:pPr>
+            <a:r>
+              <a:t>by_grade = {}</a:t>
+            </a:r>
+          </a:p>
+          <a:p>
+            <a:pPr>
+              <a:spcAft>
+                <a:spcPts val="200"/>
+              </a:spcAft>
+              <a:defRPr sz="1400">
+                <a:solidFill>
+                  <a:srgbClr val="ABB2BF"/>
+                </a:solidFill>
+                <a:latin typeface="Consolas"/>
+              </a:defRPr>
+            </a:pPr>
+            <a:r>
+              <a:t>for student in students:</a:t>
+            </a:r>
+          </a:p>
+          <a:p>
+            <a:pPr>
+              <a:spcAft>
+                <a:spcPts val="200"/>
+              </a:spcAft>
+              <a:defRPr sz="1400">
+                <a:solidFill>
+                  <a:srgbClr val="ABB2BF"/>
+                </a:solidFill>
+                <a:latin typeface="Consolas"/>
+              </a:defRPr>
+            </a:pPr>
+            <a:r>
+              <a:t>    grade = student["grade"]</a:t>
+            </a:r>
+          </a:p>
+          <a:p>
+            <a:pPr>
+              <a:spcAft>
+                <a:spcPts val="200"/>
+              </a:spcAft>
+              <a:defRPr sz="1400">
+                <a:solidFill>
+                  <a:srgbClr val="ABB2BF"/>
+                </a:solidFill>
+                <a:latin typeface="Consolas"/>
+              </a:defRPr>
+            </a:pPr>
+            <a:r>
+              <a:t>    if grade not in by_grade:</a:t>
+            </a:r>
+          </a:p>
+          <a:p>
+            <a:pPr>
+              <a:spcAft>
+                <a:spcPts val="200"/>
+              </a:spcAft>
+              <a:defRPr sz="1400">
+                <a:solidFill>
+                  <a:srgbClr val="ABB2BF"/>
+                </a:solidFill>
+                <a:latin typeface="Consolas"/>
+              </a:defRPr>
+            </a:pPr>
+            <a:r>
+              <a:t>        by_grade[grade] = []</a:t>
+            </a:r>
+          </a:p>
+          <a:p>
+            <a:pPr>
+              <a:spcAft>
+                <a:spcPts val="200"/>
+              </a:spcAft>
+              <a:defRPr sz="1400">
+                <a:solidFill>
+                  <a:srgbClr val="ABB2BF"/>
+                </a:solidFill>
+                <a:latin typeface="Consolas"/>
+              </a:defRPr>
+            </a:pPr>
+            <a:r>
+              <a:t>    by_grade[grade].append(student)</a:t>
+            </a:r>
+          </a:p>
+        </p:txBody>
+      </p:sp>
+      <p:sp>
+        <p:nvSpPr>
+          <p:cNvPr id="16" name="Rectangle 15"/>
+          <p:cNvSpPr/>
+          <p:nvPr/>
+        </p:nvSpPr>
+        <p:spPr>
+          <a:xfrm>
+            <a:off x="365760" y="4937760"/>
+            <a:ext cx="11430000" cy="365760"/>
+          </a:xfrm>
+          <a:prstGeom prst="rect">
+            <a:avLst/>
+          </a:prstGeom>
+          <a:solidFill>
+            <a:srgbClr val="0078D7"/>
+          </a:solidFill>
+          <a:ln>
+            <a:noFill/>
+          </a:ln>
+        </p:spPr>
+        <p:style>
+          <a:lnRef idx="1">
+            <a:schemeClr val="accent1"/>
+          </a:lnRef>
+          <a:fillRef idx="3">
+            <a:schemeClr val="accent1"/>
+          </a:fillRef>
+          <a:effectRef idx="2">
+            <a:schemeClr val="accent1"/>
+          </a:effectRef>
+          <a:fontRef idx="minor">
+            <a:schemeClr val="lt1"/>
+          </a:fontRef>
+        </p:style>
+        <p:txBody>
+          <a:bodyPr rtlCol="0" anchor="ctr"/>
+          <a:lstStyle/>
+          <a:p>
+            <a:pPr algn="ctr"/>
+          </a:p>
+        </p:txBody>
+      </p:sp>
+      <p:sp>
+        <p:nvSpPr>
+          <p:cNvPr id="17" name="TextBox 16"/>
+          <p:cNvSpPr txBox="1"/>
+          <p:nvPr/>
+        </p:nvSpPr>
+        <p:spPr>
+          <a:xfrm>
+            <a:off x="548640" y="4983480"/>
+            <a:ext cx="10972800" cy="274320"/>
+          </a:xfrm>
+          <a:prstGeom prst="rect">
+            <a:avLst/>
+          </a:prstGeom>
+          <a:noFill/>
+        </p:spPr>
+        <p:txBody>
+          <a:bodyPr wrap="none">
+            <a:spAutoFit/>
+          </a:bodyPr>
+          <a:lstStyle/>
+          <a:p>
+            <a:pPr>
+              <a:defRPr sz="2000" b="1">
+                <a:solidFill>
+                  <a:srgbClr val="FFFFFF"/>
+                </a:solidFill>
+              </a:defRPr>
+            </a:pPr>
+            <a:r>
+              <a:t>Merging:</a:t>
+            </a:r>
+          </a:p>
+        </p:txBody>
+      </p:sp>
+      <p:sp>
+        <p:nvSpPr>
+          <p:cNvPr id="18" name="TextBox 17"/>
+          <p:cNvSpPr txBox="1"/>
+          <p:nvPr/>
+        </p:nvSpPr>
+        <p:spPr>
+          <a:xfrm>
+            <a:off x="457200" y="5440680"/>
+            <a:ext cx="11247120" cy="320040"/>
+          </a:xfrm>
+          <a:prstGeom prst="rect">
+            <a:avLst/>
+          </a:prstGeom>
+          <a:noFill/>
+        </p:spPr>
+        <p:txBody>
+          <a:bodyPr wrap="none">
+            <a:spAutoFit/>
+          </a:bodyPr>
+          <a:lstStyle/>
+          <a:p>
+            <a:pPr>
+              <a:defRPr sz="1700">
+                <a:solidFill>
+                  <a:srgbClr val="333333"/>
+                </a:solidFill>
+              </a:defRPr>
+            </a:pPr>
+            <a:r>
+              <a:t>dict1.update(dict2)</a:t>
+            </a:r>
+          </a:p>
+        </p:txBody>
+      </p:sp>
+      <p:sp>
+        <p:nvSpPr>
+          <p:cNvPr id="19" name="Rectangle 18"/>
+          <p:cNvSpPr/>
+          <p:nvPr/>
+        </p:nvSpPr>
+        <p:spPr>
+          <a:xfrm>
+            <a:off x="640080" y="5669280"/>
+            <a:ext cx="10789920" cy="640080"/>
+          </a:xfrm>
+          <a:prstGeom prst="rect">
+            <a:avLst/>
+          </a:prstGeom>
+          <a:solidFill>
+            <a:srgbClr val="282C34"/>
+          </a:solidFill>
+          <a:ln>
+            <a:noFill/>
+          </a:ln>
+        </p:spPr>
+        <p:style>
+          <a:lnRef idx="1">
+            <a:schemeClr val="accent1"/>
+          </a:lnRef>
+          <a:fillRef idx="3">
+            <a:schemeClr val="accent1"/>
+          </a:fillRef>
+          <a:effectRef idx="2">
+            <a:schemeClr val="accent1"/>
+          </a:effectRef>
+          <a:fontRef idx="minor">
+            <a:schemeClr val="lt1"/>
+          </a:fontRef>
+        </p:style>
+        <p:txBody>
+          <a:bodyPr rtlCol="0" anchor="ctr"/>
+          <a:lstStyle/>
+          <a:p>
+            <a:pPr algn="ctr"/>
+          </a:p>
+        </p:txBody>
+      </p:sp>
+      <p:sp>
+        <p:nvSpPr>
+          <p:cNvPr id="20" name="Rectangle 19"/>
+          <p:cNvSpPr/>
+          <p:nvPr/>
+        </p:nvSpPr>
+        <p:spPr>
+          <a:xfrm>
+            <a:off x="640080" y="5669280"/>
+            <a:ext cx="73152" cy="640080"/>
+          </a:xfrm>
+          <a:prstGeom prst="rect">
+            <a:avLst/>
+          </a:prstGeom>
+          <a:solidFill>
+            <a:srgbClr val="61AFEF"/>
+          </a:solidFill>
+          <a:ln>
+            <a:noFill/>
+          </a:ln>
+        </p:spPr>
+        <p:style>
+          <a:lnRef idx="1">
+            <a:schemeClr val="accent1"/>
+          </a:lnRef>
+          <a:fillRef idx="3">
+            <a:schemeClr val="accent1"/>
+          </a:fillRef>
+          <a:effectRef idx="2">
+            <a:schemeClr val="accent1"/>
+          </a:effectRef>
+          <a:fontRef idx="minor">
+            <a:schemeClr val="lt1"/>
+          </a:fontRef>
+        </p:style>
+        <p:txBody>
+          <a:bodyPr rtlCol="0" anchor="ctr"/>
+          <a:lstStyle/>
+          <a:p>
+            <a:pPr algn="ctr"/>
+          </a:p>
+        </p:txBody>
+      </p:sp>
+      <p:sp>
+        <p:nvSpPr>
+          <p:cNvPr id="21" name="TextBox 20"/>
+          <p:cNvSpPr txBox="1"/>
+          <p:nvPr/>
+        </p:nvSpPr>
+        <p:spPr>
+          <a:xfrm>
+            <a:off x="914400" y="5715000"/>
+            <a:ext cx="10241280" cy="548640"/>
+          </a:xfrm>
+          <a:prstGeom prst="rect">
+            <a:avLst/>
+          </a:prstGeom>
+          <a:noFill/>
+        </p:spPr>
+        <p:txBody>
+          <a:bodyPr wrap="none">
+            <a:spAutoFit/>
+          </a:bodyPr>
+          <a:lstStyle/>
+          <a:p>
+            <a:pPr>
+              <a:spcAft>
+                <a:spcPts val="200"/>
+              </a:spcAft>
+              <a:defRPr sz="1400">
+                <a:solidFill>
+                  <a:srgbClr val="ABB2BF"/>
+                </a:solidFill>
+                <a:latin typeface="Consolas"/>
+              </a:defRPr>
+            </a:pPr>
+            <a:r>
+              <a:t>merged = {**dict1, **dict2}  # Python 3.5+</a:t>
+            </a:r>
+          </a:p>
+          <a:p>
+            <a:pPr>
+              <a:spcAft>
+                <a:spcPts val="200"/>
+              </a:spcAft>
+              <a:defRPr sz="1400">
+                <a:solidFill>
+                  <a:srgbClr val="ABB2BF"/>
+                </a:solidFill>
+                <a:latin typeface="Consolas"/>
+              </a:defRPr>
+            </a:pPr>
+            <a:r>
+              <a:t>merged = dict1 | dict2  # Python 3.9+</a:t>
+            </a:r>
+          </a:p>
+        </p:txBody>
+      </p:sp>
+    </p:spTree>
+  </p:cSld>
+  <p:clrMapOvr>
+    <a:masterClrMapping/>
+  </p:clrMapOvr>
+</p:sld>
+</file>
+
+<file path=ppt/slides/slide12.xml><?xml version="1.0" encoding="utf-8"?>
+<p:sld xmlns:a="http://schemas.openxmlformats.org/drawingml/2006/main" xmlns:p="http://schemas.openxmlformats.org/presentationml/2006/main" xmlns:r="http://schemas.openxmlformats.org/officeDocument/2006/relationships">
+  <p:cSld>
+    <p:spTree>
+      <p:nvGrpSpPr>
+        <p:cNvPr id="1" name=""/>
+        <p:cNvGrpSpPr/>
+        <p:nvPr/>
+      </p:nvGrpSpPr>
+      <p:grpSpPr/>
+      <p:sp>
+        <p:nvSpPr>
+          <p:cNvPr id="2" name="Rectangle 1"/>
+          <p:cNvSpPr/>
+          <p:nvPr/>
+        </p:nvSpPr>
+        <p:spPr>
+          <a:xfrm>
+            <a:off x="0" y="0"/>
+            <a:ext cx="12191695" cy="6858000"/>
+          </a:xfrm>
+          <a:prstGeom prst="rect">
+            <a:avLst/>
+          </a:prstGeom>
+          <a:solidFill>
+            <a:srgbClr val="FAFAFA"/>
+          </a:solidFill>
+          <a:ln>
+            <a:noFill/>
+          </a:ln>
+        </p:spPr>
+        <p:style>
+          <a:lnRef idx="1">
+            <a:schemeClr val="accent1"/>
+          </a:lnRef>
+          <a:fillRef idx="3">
+            <a:schemeClr val="accent1"/>
+          </a:fillRef>
+          <a:effectRef idx="2">
+            <a:schemeClr val="accent1"/>
+          </a:effectRef>
+          <a:fontRef idx="minor">
+            <a:schemeClr val="lt1"/>
+          </a:fontRef>
+        </p:style>
+        <p:txBody>
+          <a:bodyPr rtlCol="0" anchor="ctr"/>
+          <a:lstStyle/>
+          <a:p>
+            <a:pPr algn="ctr"/>
+          </a:p>
+        </p:txBody>
+      </p:sp>
+      <p:sp>
+        <p:nvSpPr>
+          <p:cNvPr id="3" name="Rectangle 2"/>
+          <p:cNvSpPr/>
+          <p:nvPr/>
+        </p:nvSpPr>
+        <p:spPr>
+          <a:xfrm>
+            <a:off x="0" y="0"/>
+            <a:ext cx="12191695" cy="1097280"/>
+          </a:xfrm>
+          <a:prstGeom prst="rect">
+            <a:avLst/>
+          </a:prstGeom>
+          <a:solidFill>
+            <a:srgbClr val="0066CC"/>
+          </a:solidFill>
+          <a:ln>
+            <a:noFill/>
+          </a:ln>
+        </p:spPr>
+        <p:style>
+          <a:lnRef idx="1">
+            <a:schemeClr val="accent1"/>
+          </a:lnRef>
+          <a:fillRef idx="3">
+            <a:schemeClr val="accent1"/>
+          </a:fillRef>
+          <a:effectRef idx="2">
+            <a:schemeClr val="accent1"/>
+          </a:effectRef>
+          <a:fontRef idx="minor">
+            <a:schemeClr val="lt1"/>
+          </a:fontRef>
+        </p:style>
+        <p:txBody>
+          <a:bodyPr rtlCol="0" anchor="ctr"/>
+          <a:lstStyle/>
+          <a:p>
+            <a:pPr algn="ctr"/>
+          </a:p>
+        </p:txBody>
+      </p:sp>
+      <p:sp>
+        <p:nvSpPr>
+          <p:cNvPr id="4" name="Rectangle 3"/>
+          <p:cNvSpPr/>
+          <p:nvPr/>
+        </p:nvSpPr>
+        <p:spPr>
+          <a:xfrm>
+            <a:off x="0" y="1097280"/>
+            <a:ext cx="137160" cy="5760720"/>
+          </a:xfrm>
+          <a:prstGeom prst="rect">
+            <a:avLst/>
+          </a:prstGeom>
+          <a:solidFill>
+            <a:srgbClr val="FFBB33"/>
+          </a:solidFill>
+          <a:ln>
+            <a:noFill/>
+          </a:ln>
+        </p:spPr>
+        <p:style>
+          <a:lnRef idx="1">
+            <a:schemeClr val="accent1"/>
+          </a:lnRef>
+          <a:fillRef idx="3">
+            <a:schemeClr val="accent1"/>
+          </a:fillRef>
+          <a:effectRef idx="2">
+            <a:schemeClr val="accent1"/>
+          </a:effectRef>
+          <a:fontRef idx="minor">
+            <a:schemeClr val="lt1"/>
+          </a:fontRef>
+        </p:style>
+        <p:txBody>
+          <a:bodyPr rtlCol="0" anchor="ctr"/>
+          <a:lstStyle/>
+          <a:p>
+            <a:pPr algn="ctr"/>
+          </a:p>
+        </p:txBody>
+      </p:sp>
+      <p:sp>
+        <p:nvSpPr>
+          <p:cNvPr id="5" name="TextBox 4"/>
+          <p:cNvSpPr txBox="1"/>
+          <p:nvPr/>
+        </p:nvSpPr>
+        <p:spPr>
+          <a:xfrm>
+            <a:off x="365760" y="274320"/>
+            <a:ext cx="10972800" cy="640080"/>
+          </a:xfrm>
+          <a:prstGeom prst="rect">
+            <a:avLst/>
+          </a:prstGeom>
+          <a:noFill/>
+        </p:spPr>
+        <p:txBody>
+          <a:bodyPr wrap="none">
+            <a:spAutoFit/>
+          </a:bodyPr>
+          <a:lstStyle/>
+          <a:p>
+            <a:pPr>
+              <a:defRPr sz="3600" b="1">
+                <a:solidFill>
+                  <a:srgbClr val="FFFFFF"/>
+                </a:solidFill>
+              </a:defRPr>
+            </a:pPr>
+            <a:r>
+              <a:t>Dictionary vs List</a:t>
+            </a:r>
+          </a:p>
+        </p:txBody>
+      </p:sp>
+      <p:sp>
+        <p:nvSpPr>
+          <p:cNvPr id="6" name="Rectangle 5"/>
+          <p:cNvSpPr/>
+          <p:nvPr/>
+        </p:nvSpPr>
+        <p:spPr>
+          <a:xfrm>
+            <a:off x="365760" y="1325880"/>
+            <a:ext cx="11430000" cy="365760"/>
+          </a:xfrm>
+          <a:prstGeom prst="rect">
+            <a:avLst/>
+          </a:prstGeom>
+          <a:solidFill>
+            <a:srgbClr val="0078D7"/>
+          </a:solidFill>
+          <a:ln>
+            <a:noFill/>
+          </a:ln>
+        </p:spPr>
+        <p:style>
+          <a:lnRef idx="1">
+            <a:schemeClr val="accent1"/>
+          </a:lnRef>
+          <a:fillRef idx="3">
+            <a:schemeClr val="accent1"/>
+          </a:fillRef>
+          <a:effectRef idx="2">
+            <a:schemeClr val="accent1"/>
+          </a:effectRef>
+          <a:fontRef idx="minor">
+            <a:schemeClr val="lt1"/>
+          </a:fontRef>
+        </p:style>
+        <p:txBody>
+          <a:bodyPr rtlCol="0" anchor="ctr"/>
+          <a:lstStyle/>
+          <a:p>
+            <a:pPr algn="ctr"/>
+          </a:p>
+        </p:txBody>
+      </p:sp>
+      <p:sp>
+        <p:nvSpPr>
+          <p:cNvPr id="7" name="TextBox 6"/>
+          <p:cNvSpPr txBox="1"/>
+          <p:nvPr/>
+        </p:nvSpPr>
+        <p:spPr>
+          <a:xfrm>
+            <a:off x="548640" y="1371600"/>
+            <a:ext cx="10972800" cy="274320"/>
+          </a:xfrm>
+          <a:prstGeom prst="rect">
+            <a:avLst/>
+          </a:prstGeom>
+          <a:noFill/>
+        </p:spPr>
+        <p:txBody>
+          <a:bodyPr wrap="none">
+            <a:spAutoFit/>
+          </a:bodyPr>
+          <a:lstStyle/>
+          <a:p>
+            <a:pPr>
+              <a:defRPr sz="2000" b="1">
+                <a:solidFill>
+                  <a:srgbClr val="FFFFFF"/>
+                </a:solidFill>
+              </a:defRPr>
+            </a:pPr>
+            <a:r>
+              <a:t>Use Dictionary When:</a:t>
+            </a:r>
+          </a:p>
+        </p:txBody>
+      </p:sp>
+      <p:sp>
+        <p:nvSpPr>
+          <p:cNvPr id="8" name="TextBox 7"/>
+          <p:cNvSpPr txBox="1"/>
+          <p:nvPr/>
+        </p:nvSpPr>
+        <p:spPr>
+          <a:xfrm>
+            <a:off x="457200" y="1828800"/>
+            <a:ext cx="11247120" cy="320040"/>
+          </a:xfrm>
+          <a:prstGeom prst="rect">
+            <a:avLst/>
+          </a:prstGeom>
+          <a:noFill/>
+        </p:spPr>
+        <p:txBody>
+          <a:bodyPr wrap="none">
+            <a:spAutoFit/>
+          </a:bodyPr>
+          <a:lstStyle/>
+          <a:p>
+            <a:pPr lvl="1">
+              <a:defRPr sz="1600">
+                <a:solidFill>
+                  <a:srgbClr val="333333"/>
+                </a:solidFill>
+              </a:defRPr>
+            </a:pPr>
+            <a:r>
+              <a:t>• Need key-value associations</a:t>
+            </a:r>
+          </a:p>
+        </p:txBody>
+      </p:sp>
+      <p:sp>
+        <p:nvSpPr>
+          <p:cNvPr id="9" name="TextBox 8"/>
+          <p:cNvSpPr txBox="1"/>
+          <p:nvPr/>
+        </p:nvSpPr>
+        <p:spPr>
+          <a:xfrm>
+            <a:off x="457200" y="2103120"/>
+            <a:ext cx="11247120" cy="320040"/>
+          </a:xfrm>
+          <a:prstGeom prst="rect">
+            <a:avLst/>
+          </a:prstGeom>
+          <a:noFill/>
+        </p:spPr>
+        <p:txBody>
+          <a:bodyPr wrap="none">
+            <a:spAutoFit/>
+          </a:bodyPr>
+          <a:lstStyle/>
+          <a:p>
+            <a:pPr lvl="1">
+              <a:defRPr sz="1600">
+                <a:solidFill>
+                  <a:srgbClr val="333333"/>
+                </a:solidFill>
+              </a:defRPr>
+            </a:pPr>
+            <a:r>
+              <a:t>• Fast lookup is important</a:t>
+            </a:r>
+          </a:p>
+        </p:txBody>
+      </p:sp>
+      <p:sp>
+        <p:nvSpPr>
+          <p:cNvPr id="10" name="TextBox 9"/>
+          <p:cNvSpPr txBox="1"/>
+          <p:nvPr/>
+        </p:nvSpPr>
+        <p:spPr>
+          <a:xfrm>
+            <a:off x="457200" y="2377439"/>
+            <a:ext cx="11247120" cy="320040"/>
+          </a:xfrm>
+          <a:prstGeom prst="rect">
+            <a:avLst/>
+          </a:prstGeom>
+          <a:noFill/>
+        </p:spPr>
+        <p:txBody>
+          <a:bodyPr wrap="none">
+            <a:spAutoFit/>
+          </a:bodyPr>
+          <a:lstStyle/>
+          <a:p>
+            <a:pPr lvl="1">
+              <a:defRPr sz="1600">
+                <a:solidFill>
+                  <a:srgbClr val="333333"/>
+                </a:solidFill>
+              </a:defRPr>
+            </a:pPr>
+            <a:r>
+              <a:t>• Keys are meaningful</a:t>
+            </a:r>
+          </a:p>
+        </p:txBody>
+      </p:sp>
+      <p:sp>
+        <p:nvSpPr>
+          <p:cNvPr id="11" name="TextBox 10"/>
+          <p:cNvSpPr txBox="1"/>
+          <p:nvPr/>
+        </p:nvSpPr>
+        <p:spPr>
+          <a:xfrm>
+            <a:off x="457200" y="2651759"/>
+            <a:ext cx="11247120" cy="320040"/>
+          </a:xfrm>
+          <a:prstGeom prst="rect">
+            <a:avLst/>
+          </a:prstGeom>
+          <a:noFill/>
+        </p:spPr>
+        <p:txBody>
+          <a:bodyPr wrap="none">
+            <a:spAutoFit/>
+          </a:bodyPr>
+          <a:lstStyle/>
+          <a:p>
+            <a:pPr lvl="1">
+              <a:defRPr sz="1600">
+                <a:solidFill>
+                  <a:srgbClr val="333333"/>
+                </a:solidFill>
+              </a:defRPr>
+            </a:pPr>
+            <a:r>
+              <a:t>• Order doesn't matter much</a:t>
+            </a:r>
+          </a:p>
+        </p:txBody>
+      </p:sp>
+      <p:sp>
+        <p:nvSpPr>
+          <p:cNvPr id="12" name="Rectangle 11"/>
+          <p:cNvSpPr/>
+          <p:nvPr/>
+        </p:nvSpPr>
+        <p:spPr>
+          <a:xfrm>
+            <a:off x="365760" y="2880359"/>
+            <a:ext cx="11430000" cy="365760"/>
+          </a:xfrm>
+          <a:prstGeom prst="rect">
+            <a:avLst/>
+          </a:prstGeom>
+          <a:solidFill>
+            <a:srgbClr val="0078D7"/>
+          </a:solidFill>
+          <a:ln>
+            <a:noFill/>
+          </a:ln>
+        </p:spPr>
+        <p:style>
+          <a:lnRef idx="1">
+            <a:schemeClr val="accent1"/>
+          </a:lnRef>
+          <a:fillRef idx="3">
+            <a:schemeClr val="accent1"/>
+          </a:fillRef>
+          <a:effectRef idx="2">
+            <a:schemeClr val="accent1"/>
+          </a:effectRef>
+          <a:fontRef idx="minor">
+            <a:schemeClr val="lt1"/>
+          </a:fontRef>
+        </p:style>
+        <p:txBody>
+          <a:bodyPr rtlCol="0" anchor="ctr"/>
+          <a:lstStyle/>
+          <a:p>
+            <a:pPr algn="ctr"/>
+          </a:p>
+        </p:txBody>
+      </p:sp>
+      <p:sp>
+        <p:nvSpPr>
+          <p:cNvPr id="13" name="TextBox 12"/>
+          <p:cNvSpPr txBox="1"/>
+          <p:nvPr/>
+        </p:nvSpPr>
+        <p:spPr>
+          <a:xfrm>
+            <a:off x="548640" y="2926079"/>
+            <a:ext cx="10972800" cy="274320"/>
+          </a:xfrm>
+          <a:prstGeom prst="rect">
+            <a:avLst/>
+          </a:prstGeom>
+          <a:noFill/>
+        </p:spPr>
+        <p:txBody>
+          <a:bodyPr wrap="none">
+            <a:spAutoFit/>
+          </a:bodyPr>
+          <a:lstStyle/>
+          <a:p>
+            <a:pPr>
+              <a:defRPr sz="2000" b="1">
+                <a:solidFill>
+                  <a:srgbClr val="FFFFFF"/>
+                </a:solidFill>
+              </a:defRPr>
+            </a:pPr>
+            <a:r>
+              <a:t>Use List When:</a:t>
+            </a:r>
+          </a:p>
+        </p:txBody>
+      </p:sp>
+      <p:sp>
+        <p:nvSpPr>
+          <p:cNvPr id="14" name="TextBox 13"/>
+          <p:cNvSpPr txBox="1"/>
+          <p:nvPr/>
+        </p:nvSpPr>
+        <p:spPr>
+          <a:xfrm>
+            <a:off x="457200" y="3383279"/>
+            <a:ext cx="11247120" cy="320040"/>
+          </a:xfrm>
+          <a:prstGeom prst="rect">
+            <a:avLst/>
+          </a:prstGeom>
+          <a:noFill/>
+        </p:spPr>
+        <p:txBody>
+          <a:bodyPr wrap="none">
+            <a:spAutoFit/>
+          </a:bodyPr>
+          <a:lstStyle/>
+          <a:p>
+            <a:pPr lvl="1">
+              <a:defRPr sz="1600">
+                <a:solidFill>
+                  <a:srgbClr val="333333"/>
+                </a:solidFill>
+              </a:defRPr>
+            </a:pPr>
+            <a:r>
+              <a:t>• Order is important</a:t>
+            </a:r>
+          </a:p>
+        </p:txBody>
+      </p:sp>
+      <p:sp>
+        <p:nvSpPr>
+          <p:cNvPr id="15" name="TextBox 14"/>
+          <p:cNvSpPr txBox="1"/>
+          <p:nvPr/>
+        </p:nvSpPr>
+        <p:spPr>
+          <a:xfrm>
+            <a:off x="457200" y="3657599"/>
+            <a:ext cx="11247120" cy="320040"/>
+          </a:xfrm>
+          <a:prstGeom prst="rect">
+            <a:avLst/>
+          </a:prstGeom>
+          <a:noFill/>
+        </p:spPr>
+        <p:txBody>
+          <a:bodyPr wrap="none">
+            <a:spAutoFit/>
+          </a:bodyPr>
+          <a:lstStyle/>
+          <a:p>
+            <a:pPr lvl="1">
+              <a:defRPr sz="1600">
+                <a:solidFill>
+                  <a:srgbClr val="333333"/>
+                </a:solidFill>
+              </a:defRPr>
+            </a:pPr>
+            <a:r>
+              <a:t>• Need indexing by position</a:t>
+            </a:r>
+          </a:p>
+        </p:txBody>
+      </p:sp>
+      <p:sp>
+        <p:nvSpPr>
+          <p:cNvPr id="16" name="TextBox 15"/>
+          <p:cNvSpPr txBox="1"/>
+          <p:nvPr/>
+        </p:nvSpPr>
+        <p:spPr>
+          <a:xfrm>
+            <a:off x="457200" y="3931919"/>
+            <a:ext cx="11247120" cy="320040"/>
+          </a:xfrm>
+          <a:prstGeom prst="rect">
+            <a:avLst/>
+          </a:prstGeom>
+          <a:noFill/>
+        </p:spPr>
+        <p:txBody>
+          <a:bodyPr wrap="none">
+            <a:spAutoFit/>
+          </a:bodyPr>
+          <a:lstStyle/>
+          <a:p>
+            <a:pPr lvl="1">
+              <a:defRPr sz="1600">
+                <a:solidFill>
+                  <a:srgbClr val="333333"/>
+                </a:solidFill>
+              </a:defRPr>
+            </a:pPr>
+            <a:r>
+              <a:t>• All items same type</a:t>
+            </a:r>
+          </a:p>
+        </p:txBody>
+      </p:sp>
+      <p:sp>
+        <p:nvSpPr>
+          <p:cNvPr id="17" name="TextBox 16"/>
+          <p:cNvSpPr txBox="1"/>
+          <p:nvPr/>
+        </p:nvSpPr>
+        <p:spPr>
+          <a:xfrm>
+            <a:off x="457200" y="4206239"/>
+            <a:ext cx="11247120" cy="320040"/>
+          </a:xfrm>
+          <a:prstGeom prst="rect">
+            <a:avLst/>
+          </a:prstGeom>
+          <a:noFill/>
+        </p:spPr>
+        <p:txBody>
+          <a:bodyPr wrap="none">
+            <a:spAutoFit/>
+          </a:bodyPr>
+          <a:lstStyle/>
+          <a:p>
+            <a:pPr lvl="1">
+              <a:defRPr sz="1600">
+                <a:solidFill>
+                  <a:srgbClr val="333333"/>
+                </a:solidFill>
+              </a:defRPr>
+            </a:pPr>
+            <a:r>
+              <a:t>• Frequent iteration</a:t>
+            </a:r>
+          </a:p>
+        </p:txBody>
+      </p:sp>
+      <p:sp>
+        <p:nvSpPr>
+          <p:cNvPr id="18" name="Rectangle 17"/>
+          <p:cNvSpPr/>
+          <p:nvPr/>
+        </p:nvSpPr>
+        <p:spPr>
+          <a:xfrm>
+            <a:off x="365760" y="4434839"/>
+            <a:ext cx="11430000" cy="365760"/>
+          </a:xfrm>
+          <a:prstGeom prst="rect">
+            <a:avLst/>
+          </a:prstGeom>
+          <a:solidFill>
+            <a:srgbClr val="0078D7"/>
+          </a:solidFill>
+          <a:ln>
+            <a:noFill/>
+          </a:ln>
+        </p:spPr>
+        <p:style>
+          <a:lnRef idx="1">
+            <a:schemeClr val="accent1"/>
+          </a:lnRef>
+          <a:fillRef idx="3">
+            <a:schemeClr val="accent1"/>
+          </a:fillRef>
+          <a:effectRef idx="2">
+            <a:schemeClr val="accent1"/>
+          </a:effectRef>
+          <a:fontRef idx="minor">
+            <a:schemeClr val="lt1"/>
+          </a:fontRef>
+        </p:style>
+        <p:txBody>
+          <a:bodyPr rtlCol="0" anchor="ctr"/>
+          <a:lstStyle/>
+          <a:p>
+            <a:pPr algn="ctr"/>
+          </a:p>
+        </p:txBody>
+      </p:sp>
+      <p:sp>
+        <p:nvSpPr>
+          <p:cNvPr id="19" name="TextBox 18"/>
+          <p:cNvSpPr txBox="1"/>
+          <p:nvPr/>
+        </p:nvSpPr>
+        <p:spPr>
+          <a:xfrm>
+            <a:off x="548640" y="4480559"/>
+            <a:ext cx="10972800" cy="274320"/>
+          </a:xfrm>
+          <a:prstGeom prst="rect">
+            <a:avLst/>
+          </a:prstGeom>
+          <a:noFill/>
+        </p:spPr>
+        <p:txBody>
+          <a:bodyPr wrap="none">
+            <a:spAutoFit/>
+          </a:bodyPr>
+          <a:lstStyle/>
+          <a:p>
+            <a:pPr>
+              <a:defRPr sz="2000" b="1">
+                <a:solidFill>
+                  <a:srgbClr val="FFFFFF"/>
+                </a:solidFill>
+              </a:defRPr>
+            </a:pPr>
+            <a:r>
+              <a:t>Performance:</a:t>
+            </a:r>
+          </a:p>
+        </p:txBody>
+      </p:sp>
+      <p:sp>
+        <p:nvSpPr>
+          <p:cNvPr id="20" name="TextBox 19"/>
+          <p:cNvSpPr txBox="1"/>
+          <p:nvPr/>
+        </p:nvSpPr>
+        <p:spPr>
+          <a:xfrm>
+            <a:off x="457200" y="4937759"/>
+            <a:ext cx="11247120" cy="320040"/>
+          </a:xfrm>
+          <a:prstGeom prst="rect">
+            <a:avLst/>
+          </a:prstGeom>
+          <a:noFill/>
+        </p:spPr>
+        <p:txBody>
+          <a:bodyPr wrap="none">
+            <a:spAutoFit/>
+          </a:bodyPr>
+          <a:lstStyle/>
+          <a:p>
+            <a:pPr lvl="1">
+              <a:defRPr sz="1600">
+                <a:solidFill>
+                  <a:srgbClr val="333333"/>
+                </a:solidFill>
+              </a:defRPr>
+            </a:pPr>
+            <a:r>
+              <a:t>• Dictionary lookup: O(1)</a:t>
+            </a:r>
+          </a:p>
+        </p:txBody>
+      </p:sp>
+      <p:sp>
+        <p:nvSpPr>
+          <p:cNvPr id="21" name="TextBox 20"/>
+          <p:cNvSpPr txBox="1"/>
+          <p:nvPr/>
+        </p:nvSpPr>
+        <p:spPr>
+          <a:xfrm>
+            <a:off x="457200" y="5212079"/>
+            <a:ext cx="11247120" cy="320040"/>
+          </a:xfrm>
+          <a:prstGeom prst="rect">
+            <a:avLst/>
+          </a:prstGeom>
+          <a:noFill/>
+        </p:spPr>
+        <p:txBody>
+          <a:bodyPr wrap="none">
+            <a:spAutoFit/>
+          </a:bodyPr>
+          <a:lstStyle/>
+          <a:p>
+            <a:pPr lvl="1">
+              <a:defRPr sz="1600">
+                <a:solidFill>
+                  <a:srgbClr val="333333"/>
+                </a:solidFill>
+              </a:defRPr>
+            </a:pPr>
+            <a:r>
+              <a:t>• List search: O(n)</a:t>
+            </a:r>
+          </a:p>
+        </p:txBody>
+      </p:sp>
+      <p:sp>
+        <p:nvSpPr>
+          <p:cNvPr id="22" name="TextBox 21"/>
+          <p:cNvSpPr txBox="1"/>
+          <p:nvPr/>
+        </p:nvSpPr>
+        <p:spPr>
+          <a:xfrm>
+            <a:off x="457200" y="5486399"/>
+            <a:ext cx="11247120" cy="320040"/>
+          </a:xfrm>
+          <a:prstGeom prst="rect">
+            <a:avLst/>
+          </a:prstGeom>
+          <a:noFill/>
+        </p:spPr>
+        <p:txBody>
+          <a:bodyPr wrap="none">
+            <a:spAutoFit/>
+          </a:bodyPr>
+          <a:lstStyle/>
+          <a:p>
+            <a:pPr lvl="1">
+              <a:defRPr sz="1600">
+                <a:solidFill>
+                  <a:srgbClr val="333333"/>
+                </a:solidFill>
+              </a:defRPr>
+            </a:pPr>
+            <a:r>
+              <a:t>• Dictionary more memory</a:t>
+            </a:r>
+          </a:p>
+        </p:txBody>
+      </p:sp>
+      <p:sp>
+        <p:nvSpPr>
+          <p:cNvPr id="23" name="Rectangle 22"/>
+          <p:cNvSpPr/>
+          <p:nvPr/>
+        </p:nvSpPr>
+        <p:spPr>
+          <a:xfrm>
+            <a:off x="365760" y="5714999"/>
+            <a:ext cx="11430000" cy="365760"/>
+          </a:xfrm>
+          <a:prstGeom prst="rect">
+            <a:avLst/>
+          </a:prstGeom>
+          <a:solidFill>
+            <a:srgbClr val="0078D7"/>
+          </a:solidFill>
+          <a:ln>
+            <a:noFill/>
+          </a:ln>
+        </p:spPr>
+        <p:style>
+          <a:lnRef idx="1">
+            <a:schemeClr val="accent1"/>
+          </a:lnRef>
+          <a:fillRef idx="3">
+            <a:schemeClr val="accent1"/>
+          </a:fillRef>
+          <a:effectRef idx="2">
+            <a:schemeClr val="accent1"/>
+          </a:effectRef>
+          <a:fontRef idx="minor">
+            <a:schemeClr val="lt1"/>
+          </a:fontRef>
+        </p:style>
+        <p:txBody>
+          <a:bodyPr rtlCol="0" anchor="ctr"/>
+          <a:lstStyle/>
+          <a:p>
+            <a:pPr algn="ctr"/>
+          </a:p>
+        </p:txBody>
+      </p:sp>
+      <p:sp>
+        <p:nvSpPr>
+          <p:cNvPr id="24" name="TextBox 23"/>
+          <p:cNvSpPr txBox="1"/>
+          <p:nvPr/>
+        </p:nvSpPr>
+        <p:spPr>
+          <a:xfrm>
+            <a:off x="548640" y="5760719"/>
+            <a:ext cx="10972800" cy="274320"/>
+          </a:xfrm>
+          <a:prstGeom prst="rect">
+            <a:avLst/>
+          </a:prstGeom>
+          <a:noFill/>
+        </p:spPr>
+        <p:txBody>
+          <a:bodyPr wrap="none">
+            <a:spAutoFit/>
+          </a:bodyPr>
+          <a:lstStyle/>
+          <a:p>
+            <a:pPr>
+              <a:defRPr sz="2000" b="1">
+                <a:solidFill>
+                  <a:srgbClr val="FFFFFF"/>
+                </a:solidFill>
+              </a:defRPr>
+            </a:pPr>
+            <a:r>
+              <a:t>Example:</a:t>
+            </a:r>
+          </a:p>
+        </p:txBody>
+      </p:sp>
+      <p:sp>
+        <p:nvSpPr>
+          <p:cNvPr id="25" name="Rectangle 24"/>
+          <p:cNvSpPr/>
+          <p:nvPr/>
+        </p:nvSpPr>
+        <p:spPr>
+          <a:xfrm>
+            <a:off x="640080" y="6172199"/>
+            <a:ext cx="10789920" cy="640080"/>
+          </a:xfrm>
+          <a:prstGeom prst="rect">
+            <a:avLst/>
+          </a:prstGeom>
+          <a:solidFill>
+            <a:srgbClr val="282C34"/>
+          </a:solidFill>
+          <a:ln>
+            <a:noFill/>
+          </a:ln>
+        </p:spPr>
+        <p:style>
+          <a:lnRef idx="1">
+            <a:schemeClr val="accent1"/>
+          </a:lnRef>
+          <a:fillRef idx="3">
+            <a:schemeClr val="accent1"/>
+          </a:fillRef>
+          <a:effectRef idx="2">
+            <a:schemeClr val="accent1"/>
+          </a:effectRef>
+          <a:fontRef idx="minor">
+            <a:schemeClr val="lt1"/>
+          </a:fontRef>
+        </p:style>
+        <p:txBody>
+          <a:bodyPr rtlCol="0" anchor="ctr"/>
+          <a:lstStyle/>
+          <a:p>
+            <a:pPr algn="ctr"/>
+          </a:p>
+        </p:txBody>
+      </p:sp>
+      <p:sp>
+        <p:nvSpPr>
+          <p:cNvPr id="26" name="Rectangle 25"/>
+          <p:cNvSpPr/>
+          <p:nvPr/>
+        </p:nvSpPr>
+        <p:spPr>
+          <a:xfrm>
+            <a:off x="640080" y="6172199"/>
+            <a:ext cx="73152" cy="640080"/>
+          </a:xfrm>
+          <a:prstGeom prst="rect">
+            <a:avLst/>
+          </a:prstGeom>
+          <a:solidFill>
+            <a:srgbClr val="61AFEF"/>
+          </a:solidFill>
+          <a:ln>
+            <a:noFill/>
+          </a:ln>
+        </p:spPr>
+        <p:style>
+          <a:lnRef idx="1">
+            <a:schemeClr val="accent1"/>
+          </a:lnRef>
+          <a:fillRef idx="3">
+            <a:schemeClr val="accent1"/>
+          </a:fillRef>
+          <a:effectRef idx="2">
+            <a:schemeClr val="accent1"/>
+          </a:effectRef>
+          <a:fontRef idx="minor">
+            <a:schemeClr val="lt1"/>
+          </a:fontRef>
+        </p:style>
+        <p:txBody>
+          <a:bodyPr rtlCol="0" anchor="ctr"/>
+          <a:lstStyle/>
+          <a:p>
+            <a:pPr algn="ctr"/>
+          </a:p>
+        </p:txBody>
+      </p:sp>
+      <p:sp>
+        <p:nvSpPr>
+          <p:cNvPr id="27" name="TextBox 26"/>
+          <p:cNvSpPr txBox="1"/>
+          <p:nvPr/>
+        </p:nvSpPr>
+        <p:spPr>
+          <a:xfrm>
+            <a:off x="914400" y="6217919"/>
+            <a:ext cx="10241280" cy="548640"/>
+          </a:xfrm>
+          <a:prstGeom prst="rect">
+            <a:avLst/>
+          </a:prstGeom>
+          <a:noFill/>
+        </p:spPr>
+        <p:txBody>
+          <a:bodyPr wrap="none">
+            <a:spAutoFit/>
+          </a:bodyPr>
+          <a:lstStyle/>
+          <a:p>
+            <a:pPr>
+              <a:spcAft>
+                <a:spcPts val="200"/>
+              </a:spcAft>
+              <a:defRPr sz="1400">
+                <a:solidFill>
+                  <a:srgbClr val="ABB2BF"/>
+                </a:solidFill>
+                <a:latin typeface="Consolas"/>
+              </a:defRPr>
+            </a:pPr>
+            <a:r>
+              <a:t>phone_book = {"Alice": "555-1234"}  # Dict</a:t>
+            </a:r>
+          </a:p>
+          <a:p>
+            <a:pPr>
+              <a:spcAft>
+                <a:spcPts val="200"/>
+              </a:spcAft>
+              <a:defRPr sz="1400">
+                <a:solidFill>
+                  <a:srgbClr val="ABB2BF"/>
+                </a:solidFill>
+                <a:latin typeface="Consolas"/>
+              </a:defRPr>
+            </a:pPr>
+            <a:r>
+              <a:t>names = ["Alice", "Bob"]  # List</a:t>
+            </a:r>
+          </a:p>
+        </p:txBody>
+      </p:sp>
+    </p:spTree>
+  </p:cSld>
+  <p:clrMapOvr>
+    <a:masterClrMapping/>
+  </p:clrMapOvr>
+</p:sld>
+</file>
+
+<file path=ppt/slides/slide13.xml><?xml version="1.0" encoding="utf-8"?>
+<p:sld xmlns:a="http://schemas.openxmlformats.org/drawingml/2006/main" xmlns:p="http://schemas.openxmlformats.org/presentationml/2006/main" xmlns:r="http://schemas.openxmlformats.org/officeDocument/2006/relationships">
+  <p:cSld>
+    <p:spTree>
+      <p:nvGrpSpPr>
+        <p:cNvPr id="1" name=""/>
+        <p:cNvGrpSpPr/>
+        <p:nvPr/>
+      </p:nvGrpSpPr>
+      <p:grpSpPr/>
+      <p:sp>
+        <p:nvSpPr>
+          <p:cNvPr id="2" name="Rectangle 1"/>
+          <p:cNvSpPr/>
+          <p:nvPr/>
+        </p:nvSpPr>
+        <p:spPr>
+          <a:xfrm>
+            <a:off x="0" y="0"/>
+            <a:ext cx="12191695" cy="6858000"/>
+          </a:xfrm>
+          <a:prstGeom prst="rect">
+            <a:avLst/>
+          </a:prstGeom>
+          <a:solidFill>
+            <a:srgbClr val="FAFAFA"/>
+          </a:solidFill>
+          <a:ln>
+            <a:noFill/>
+          </a:ln>
+        </p:spPr>
+        <p:style>
+          <a:lnRef idx="1">
+            <a:schemeClr val="accent1"/>
+          </a:lnRef>
+          <a:fillRef idx="3">
+            <a:schemeClr val="accent1"/>
+          </a:fillRef>
+          <a:effectRef idx="2">
+            <a:schemeClr val="accent1"/>
+          </a:effectRef>
+          <a:fontRef idx="minor">
+            <a:schemeClr val="lt1"/>
+          </a:fontRef>
+        </p:style>
+        <p:txBody>
+          <a:bodyPr rtlCol="0" anchor="ctr"/>
+          <a:lstStyle/>
+          <a:p>
+            <a:pPr algn="ctr"/>
+          </a:p>
+        </p:txBody>
+      </p:sp>
+      <p:sp>
+        <p:nvSpPr>
+          <p:cNvPr id="3" name="Rectangle 2"/>
+          <p:cNvSpPr/>
+          <p:nvPr/>
+        </p:nvSpPr>
+        <p:spPr>
+          <a:xfrm>
+            <a:off x="0" y="0"/>
+            <a:ext cx="12191695" cy="1097280"/>
+          </a:xfrm>
+          <a:prstGeom prst="rect">
+            <a:avLst/>
+          </a:prstGeom>
+          <a:solidFill>
+            <a:srgbClr val="0066CC"/>
+          </a:solidFill>
+          <a:ln>
+            <a:noFill/>
+          </a:ln>
+        </p:spPr>
+        <p:style>
+          <a:lnRef idx="1">
+            <a:schemeClr val="accent1"/>
+          </a:lnRef>
+          <a:fillRef idx="3">
+            <a:schemeClr val="accent1"/>
+          </a:fillRef>
+          <a:effectRef idx="2">
+            <a:schemeClr val="accent1"/>
+          </a:effectRef>
+          <a:fontRef idx="minor">
+            <a:schemeClr val="lt1"/>
+          </a:fontRef>
+        </p:style>
+        <p:txBody>
+          <a:bodyPr rtlCol="0" anchor="ctr"/>
+          <a:lstStyle/>
+          <a:p>
+            <a:pPr algn="ctr"/>
+          </a:p>
+        </p:txBody>
+      </p:sp>
+      <p:sp>
+        <p:nvSpPr>
+          <p:cNvPr id="4" name="Rectangle 3"/>
+          <p:cNvSpPr/>
+          <p:nvPr/>
+        </p:nvSpPr>
+        <p:spPr>
+          <a:xfrm>
+            <a:off x="0" y="1097280"/>
+            <a:ext cx="137160" cy="5760720"/>
+          </a:xfrm>
+          <a:prstGeom prst="rect">
+            <a:avLst/>
+          </a:prstGeom>
+          <a:solidFill>
+            <a:srgbClr val="FFBB33"/>
+          </a:solidFill>
+          <a:ln>
+            <a:noFill/>
+          </a:ln>
+        </p:spPr>
+        <p:style>
+          <a:lnRef idx="1">
+            <a:schemeClr val="accent1"/>
+          </a:lnRef>
+          <a:fillRef idx="3">
+            <a:schemeClr val="accent1"/>
+          </a:fillRef>
+          <a:effectRef idx="2">
+            <a:schemeClr val="accent1"/>
+          </a:effectRef>
+          <a:fontRef idx="minor">
+            <a:schemeClr val="lt1"/>
+          </a:fontRef>
+        </p:style>
+        <p:txBody>
+          <a:bodyPr rtlCol="0" anchor="ctr"/>
+          <a:lstStyle/>
+          <a:p>
+            <a:pPr algn="ctr"/>
+          </a:p>
+        </p:txBody>
+      </p:sp>
+      <p:sp>
+        <p:nvSpPr>
+          <p:cNvPr id="5" name="TextBox 4"/>
+          <p:cNvSpPr txBox="1"/>
+          <p:nvPr/>
+        </p:nvSpPr>
+        <p:spPr>
+          <a:xfrm>
+            <a:off x="365760" y="274320"/>
+            <a:ext cx="10972800" cy="640080"/>
+          </a:xfrm>
+          <a:prstGeom prst="rect">
+            <a:avLst/>
+          </a:prstGeom>
+          <a:noFill/>
+        </p:spPr>
+        <p:txBody>
+          <a:bodyPr wrap="none">
+            <a:spAutoFit/>
+          </a:bodyPr>
+          <a:lstStyle/>
+          <a:p>
+            <a:pPr>
+              <a:defRPr sz="3600" b="1">
+                <a:solidFill>
+                  <a:srgbClr val="FFFFFF"/>
+                </a:solidFill>
+              </a:defRPr>
+            </a:pPr>
+            <a:r>
+              <a:t>Best Practices</a:t>
+            </a:r>
+          </a:p>
+        </p:txBody>
+      </p:sp>
+      <p:sp>
+        <p:nvSpPr>
+          <p:cNvPr id="6" name="Rectangle 5"/>
+          <p:cNvSpPr/>
+          <p:nvPr/>
+        </p:nvSpPr>
+        <p:spPr>
+          <a:xfrm>
+            <a:off x="365760" y="1325880"/>
+            <a:ext cx="11430000" cy="365760"/>
+          </a:xfrm>
+          <a:prstGeom prst="rect">
+            <a:avLst/>
+          </a:prstGeom>
+          <a:solidFill>
+            <a:srgbClr val="0078D7"/>
+          </a:solidFill>
+          <a:ln>
+            <a:noFill/>
+          </a:ln>
+        </p:spPr>
+        <p:style>
+          <a:lnRef idx="1">
+            <a:schemeClr val="accent1"/>
+          </a:lnRef>
+          <a:fillRef idx="3">
+            <a:schemeClr val="accent1"/>
+          </a:fillRef>
+          <a:effectRef idx="2">
+            <a:schemeClr val="accent1"/>
+          </a:effectRef>
+          <a:fontRef idx="minor">
+            <a:schemeClr val="lt1"/>
+          </a:fontRef>
+        </p:style>
+        <p:txBody>
+          <a:bodyPr rtlCol="0" anchor="ctr"/>
+          <a:lstStyle/>
+          <a:p>
+            <a:pPr algn="ctr"/>
+          </a:p>
+        </p:txBody>
+      </p:sp>
+      <p:sp>
+        <p:nvSpPr>
+          <p:cNvPr id="7" name="TextBox 6"/>
+          <p:cNvSpPr txBox="1"/>
+          <p:nvPr/>
+        </p:nvSpPr>
+        <p:spPr>
+          <a:xfrm>
+            <a:off x="548640" y="1371600"/>
+            <a:ext cx="10972800" cy="274320"/>
+          </a:xfrm>
+          <a:prstGeom prst="rect">
+            <a:avLst/>
+          </a:prstGeom>
+          <a:noFill/>
+        </p:spPr>
+        <p:txBody>
+          <a:bodyPr wrap="none">
+            <a:spAutoFit/>
+          </a:bodyPr>
+          <a:lstStyle/>
+          <a:p>
+            <a:pPr>
+              <a:defRPr sz="2000" b="1">
+                <a:solidFill>
+                  <a:srgbClr val="FFFFFF"/>
+                </a:solidFill>
+              </a:defRPr>
+            </a:pPr>
+            <a:r>
+              <a:t>Good Practices:</a:t>
+            </a:r>
+          </a:p>
+        </p:txBody>
+      </p:sp>
+      <p:sp>
+        <p:nvSpPr>
+          <p:cNvPr id="8" name="Rectangle 7"/>
+          <p:cNvSpPr/>
+          <p:nvPr/>
+        </p:nvSpPr>
+        <p:spPr>
+          <a:xfrm>
+            <a:off x="640080" y="1783080"/>
+            <a:ext cx="10789920" cy="411480"/>
+          </a:xfrm>
+          <a:prstGeom prst="rect">
+            <a:avLst/>
+          </a:prstGeom>
+          <a:solidFill>
+            <a:srgbClr val="282C34"/>
+          </a:solidFill>
+          <a:ln>
+            <a:noFill/>
+          </a:ln>
+        </p:spPr>
+        <p:style>
+          <a:lnRef idx="1">
+            <a:schemeClr val="accent1"/>
+          </a:lnRef>
+          <a:fillRef idx="3">
+            <a:schemeClr val="accent1"/>
+          </a:fillRef>
+          <a:effectRef idx="2">
+            <a:schemeClr val="accent1"/>
+          </a:effectRef>
+          <a:fontRef idx="minor">
+            <a:schemeClr val="lt1"/>
+          </a:fontRef>
+        </p:style>
+        <p:txBody>
+          <a:bodyPr rtlCol="0" anchor="ctr"/>
+          <a:lstStyle/>
+          <a:p>
+            <a:pPr algn="ctr"/>
+          </a:p>
+        </p:txBody>
+      </p:sp>
+      <p:sp>
+        <p:nvSpPr>
+          <p:cNvPr id="9" name="Rectangle 8"/>
+          <p:cNvSpPr/>
+          <p:nvPr/>
+        </p:nvSpPr>
+        <p:spPr>
+          <a:xfrm>
+            <a:off x="640080" y="1783080"/>
+            <a:ext cx="73152" cy="411480"/>
+          </a:xfrm>
+          <a:prstGeom prst="rect">
+            <a:avLst/>
+          </a:prstGeom>
+          <a:solidFill>
+            <a:srgbClr val="61AFEF"/>
+          </a:solidFill>
+          <a:ln>
+            <a:noFill/>
+          </a:ln>
+        </p:spPr>
+        <p:style>
+          <a:lnRef idx="1">
+            <a:schemeClr val="accent1"/>
+          </a:lnRef>
+          <a:fillRef idx="3">
+            <a:schemeClr val="accent1"/>
+          </a:fillRef>
+          <a:effectRef idx="2">
+            <a:schemeClr val="accent1"/>
+          </a:effectRef>
+          <a:fontRef idx="minor">
+            <a:schemeClr val="lt1"/>
+          </a:fontRef>
+        </p:style>
+        <p:txBody>
+          <a:bodyPr rtlCol="0" anchor="ctr"/>
+          <a:lstStyle/>
+          <a:p>
+            <a:pPr algn="ctr"/>
+          </a:p>
+        </p:txBody>
+      </p:sp>
+      <p:sp>
+        <p:nvSpPr>
+          <p:cNvPr id="10" name="TextBox 9"/>
+          <p:cNvSpPr txBox="1"/>
+          <p:nvPr/>
+        </p:nvSpPr>
+        <p:spPr>
+          <a:xfrm>
+            <a:off x="914400" y="1828800"/>
+            <a:ext cx="10241280" cy="320040"/>
+          </a:xfrm>
+          <a:prstGeom prst="rect">
+            <a:avLst/>
+          </a:prstGeom>
+          <a:noFill/>
+        </p:spPr>
+        <p:txBody>
+          <a:bodyPr wrap="none">
+            <a:spAutoFit/>
+          </a:bodyPr>
+          <a:lstStyle/>
+          <a:p>
+            <a:pPr>
+              <a:spcAft>
+                <a:spcPts val="200"/>
+              </a:spcAft>
+              <a:defRPr sz="1400">
+                <a:solidFill>
+                  <a:srgbClr val="ABB2BF"/>
+                </a:solidFill>
+                <a:latin typeface="Consolas"/>
+              </a:defRPr>
+            </a:pPr>
+            <a:r>
+              <a:t>• Use .get() for safe access</a:t>
+            </a:r>
+          </a:p>
+        </p:txBody>
+      </p:sp>
+      <p:sp>
+        <p:nvSpPr>
+          <p:cNvPr id="11" name="TextBox 10"/>
+          <p:cNvSpPr txBox="1"/>
+          <p:nvPr/>
+        </p:nvSpPr>
+        <p:spPr>
+          <a:xfrm>
+            <a:off x="457200" y="2377440"/>
+            <a:ext cx="11247120" cy="320040"/>
+          </a:xfrm>
+          <a:prstGeom prst="rect">
+            <a:avLst/>
+          </a:prstGeom>
+          <a:noFill/>
+        </p:spPr>
+        <p:txBody>
+          <a:bodyPr wrap="none">
+            <a:spAutoFit/>
+          </a:bodyPr>
+          <a:lstStyle/>
+          <a:p>
+            <a:pPr lvl="1">
+              <a:defRPr sz="1600">
+                <a:solidFill>
+                  <a:srgbClr val="333333"/>
+                </a:solidFill>
+              </a:defRPr>
+            </a:pPr>
+            <a:r>
+              <a:t>• Check keys before accessing</a:t>
+            </a:r>
+          </a:p>
+        </p:txBody>
+      </p:sp>
+      <p:sp>
+        <p:nvSpPr>
+          <p:cNvPr id="12" name="TextBox 11"/>
+          <p:cNvSpPr txBox="1"/>
+          <p:nvPr/>
+        </p:nvSpPr>
+        <p:spPr>
+          <a:xfrm>
+            <a:off x="457200" y="2651760"/>
+            <a:ext cx="11247120" cy="320040"/>
+          </a:xfrm>
+          <a:prstGeom prst="rect">
+            <a:avLst/>
+          </a:prstGeom>
+          <a:noFill/>
+        </p:spPr>
+        <p:txBody>
+          <a:bodyPr wrap="none">
+            <a:spAutoFit/>
+          </a:bodyPr>
+          <a:lstStyle/>
+          <a:p>
+            <a:pPr lvl="1">
+              <a:defRPr sz="1600">
+                <a:solidFill>
+                  <a:srgbClr val="333333"/>
+                </a:solidFill>
+              </a:defRPr>
+            </a:pPr>
+            <a:r>
+              <a:t>• Use descriptive keys</a:t>
+            </a:r>
+          </a:p>
+        </p:txBody>
+      </p:sp>
+      <p:sp>
+        <p:nvSpPr>
+          <p:cNvPr id="13" name="TextBox 12"/>
+          <p:cNvSpPr txBox="1"/>
+          <p:nvPr/>
+        </p:nvSpPr>
+        <p:spPr>
+          <a:xfrm>
+            <a:off x="457200" y="2926079"/>
+            <a:ext cx="11247120" cy="320040"/>
+          </a:xfrm>
+          <a:prstGeom prst="rect">
+            <a:avLst/>
+          </a:prstGeom>
+          <a:noFill/>
+        </p:spPr>
+        <p:txBody>
+          <a:bodyPr wrap="none">
+            <a:spAutoFit/>
+          </a:bodyPr>
+          <a:lstStyle/>
+          <a:p>
+            <a:pPr lvl="1">
+              <a:defRPr sz="1600">
+                <a:solidFill>
+                  <a:srgbClr val="333333"/>
+                </a:solidFill>
+              </a:defRPr>
+            </a:pPr>
+            <a:r>
+              <a:t>• Keep structure simple</a:t>
+            </a:r>
+          </a:p>
+        </p:txBody>
+      </p:sp>
+      <p:sp>
+        <p:nvSpPr>
+          <p:cNvPr id="14" name="Rectangle 13"/>
+          <p:cNvSpPr/>
+          <p:nvPr/>
+        </p:nvSpPr>
+        <p:spPr>
+          <a:xfrm>
+            <a:off x="365760" y="3154679"/>
+            <a:ext cx="11430000" cy="365760"/>
+          </a:xfrm>
+          <a:prstGeom prst="rect">
+            <a:avLst/>
+          </a:prstGeom>
+          <a:solidFill>
+            <a:srgbClr val="0078D7"/>
+          </a:solidFill>
+          <a:ln>
+            <a:noFill/>
+          </a:ln>
+        </p:spPr>
+        <p:style>
+          <a:lnRef idx="1">
+            <a:schemeClr val="accent1"/>
+          </a:lnRef>
+          <a:fillRef idx="3">
+            <a:schemeClr val="accent1"/>
+          </a:fillRef>
+          <a:effectRef idx="2">
+            <a:schemeClr val="accent1"/>
+          </a:effectRef>
+          <a:fontRef idx="minor">
+            <a:schemeClr val="lt1"/>
+          </a:fontRef>
+        </p:style>
+        <p:txBody>
+          <a:bodyPr rtlCol="0" anchor="ctr"/>
+          <a:lstStyle/>
+          <a:p>
+            <a:pPr algn="ctr"/>
+          </a:p>
+        </p:txBody>
+      </p:sp>
+      <p:sp>
+        <p:nvSpPr>
+          <p:cNvPr id="15" name="TextBox 14"/>
+          <p:cNvSpPr txBox="1"/>
+          <p:nvPr/>
+        </p:nvSpPr>
+        <p:spPr>
+          <a:xfrm>
+            <a:off x="548640" y="3200399"/>
+            <a:ext cx="10972800" cy="274320"/>
+          </a:xfrm>
+          <a:prstGeom prst="rect">
+            <a:avLst/>
+          </a:prstGeom>
+          <a:noFill/>
+        </p:spPr>
+        <p:txBody>
+          <a:bodyPr wrap="none">
+            <a:spAutoFit/>
+          </a:bodyPr>
+          <a:lstStyle/>
+          <a:p>
+            <a:pPr>
+              <a:defRPr sz="2000" b="1">
+                <a:solidFill>
+                  <a:srgbClr val="FFFFFF"/>
+                </a:solidFill>
+              </a:defRPr>
+            </a:pPr>
+            <a:r>
+              <a:t>Common Mistakes:</a:t>
+            </a:r>
+          </a:p>
+        </p:txBody>
+      </p:sp>
+      <p:sp>
+        <p:nvSpPr>
+          <p:cNvPr id="16" name="TextBox 15"/>
+          <p:cNvSpPr txBox="1"/>
+          <p:nvPr/>
+        </p:nvSpPr>
+        <p:spPr>
+          <a:xfrm>
+            <a:off x="457200" y="3657599"/>
+            <a:ext cx="11247120" cy="320040"/>
+          </a:xfrm>
+          <a:prstGeom prst="rect">
+            <a:avLst/>
+          </a:prstGeom>
+          <a:noFill/>
+        </p:spPr>
+        <p:txBody>
+          <a:bodyPr wrap="none">
+            <a:spAutoFit/>
+          </a:bodyPr>
+          <a:lstStyle/>
+          <a:p>
+            <a:pPr lvl="1">
+              <a:defRPr sz="1600">
+                <a:solidFill>
+                  <a:srgbClr val="333333"/>
+                </a:solidFill>
+              </a:defRPr>
+            </a:pPr>
+            <a:r>
+              <a:t>• KeyError from missing key</a:t>
+            </a:r>
+          </a:p>
+        </p:txBody>
+      </p:sp>
+      <p:sp>
+        <p:nvSpPr>
+          <p:cNvPr id="17" name="TextBox 16"/>
+          <p:cNvSpPr txBox="1"/>
+          <p:nvPr/>
+        </p:nvSpPr>
+        <p:spPr>
+          <a:xfrm>
+            <a:off x="457200" y="3931920"/>
+            <a:ext cx="11247120" cy="320040"/>
+          </a:xfrm>
+          <a:prstGeom prst="rect">
+            <a:avLst/>
+          </a:prstGeom>
+          <a:noFill/>
+        </p:spPr>
+        <p:txBody>
+          <a:bodyPr wrap="none">
+            <a:spAutoFit/>
+          </a:bodyPr>
+          <a:lstStyle/>
+          <a:p>
+            <a:pPr lvl="1">
+              <a:defRPr sz="1600">
+                <a:solidFill>
+                  <a:srgbClr val="333333"/>
+                </a:solidFill>
+              </a:defRPr>
+            </a:pPr>
+            <a:r>
+              <a:t>• Using mutable objects as keys</a:t>
+            </a:r>
+          </a:p>
+        </p:txBody>
+      </p:sp>
+      <p:sp>
+        <p:nvSpPr>
+          <p:cNvPr id="18" name="TextBox 17"/>
+          <p:cNvSpPr txBox="1"/>
+          <p:nvPr/>
+        </p:nvSpPr>
+        <p:spPr>
+          <a:xfrm>
+            <a:off x="457200" y="4206240"/>
+            <a:ext cx="11247120" cy="320040"/>
+          </a:xfrm>
+          <a:prstGeom prst="rect">
+            <a:avLst/>
+          </a:prstGeom>
+          <a:noFill/>
+        </p:spPr>
+        <p:txBody>
+          <a:bodyPr wrap="none">
+            <a:spAutoFit/>
+          </a:bodyPr>
+          <a:lstStyle/>
+          <a:p>
+            <a:pPr lvl="1">
+              <a:defRPr sz="1600">
+                <a:solidFill>
+                  <a:srgbClr val="333333"/>
+                </a:solidFill>
+              </a:defRPr>
+            </a:pPr>
+            <a:r>
+              <a:t>• Not initializing nested structures</a:t>
+            </a:r>
+          </a:p>
+        </p:txBody>
+      </p:sp>
+      <p:sp>
+        <p:nvSpPr>
+          <p:cNvPr id="19" name="TextBox 18"/>
+          <p:cNvSpPr txBox="1"/>
+          <p:nvPr/>
+        </p:nvSpPr>
+        <p:spPr>
+          <a:xfrm>
+            <a:off x="457200" y="4480559"/>
+            <a:ext cx="11247120" cy="320040"/>
+          </a:xfrm>
+          <a:prstGeom prst="rect">
+            <a:avLst/>
+          </a:prstGeom>
+          <a:noFill/>
+        </p:spPr>
+        <p:txBody>
+          <a:bodyPr wrap="none">
+            <a:spAutoFit/>
+          </a:bodyPr>
+          <a:lstStyle/>
+          <a:p>
+            <a:pPr lvl="1">
+              <a:defRPr sz="1600">
+                <a:solidFill>
+                  <a:srgbClr val="333333"/>
+                </a:solidFill>
+              </a:defRPr>
+            </a:pPr>
+            <a:r>
+              <a:t>• Comparing with == when need "is"</a:t>
+            </a:r>
+          </a:p>
+        </p:txBody>
+      </p:sp>
+      <p:sp>
+        <p:nvSpPr>
+          <p:cNvPr id="20" name="Rectangle 19"/>
+          <p:cNvSpPr/>
+          <p:nvPr/>
+        </p:nvSpPr>
+        <p:spPr>
+          <a:xfrm>
+            <a:off x="365760" y="4709159"/>
+            <a:ext cx="11430000" cy="365760"/>
+          </a:xfrm>
+          <a:prstGeom prst="rect">
+            <a:avLst/>
+          </a:prstGeom>
+          <a:solidFill>
+            <a:srgbClr val="0078D7"/>
+          </a:solidFill>
+          <a:ln>
+            <a:noFill/>
+          </a:ln>
+        </p:spPr>
+        <p:style>
+          <a:lnRef idx="1">
+            <a:schemeClr val="accent1"/>
+          </a:lnRef>
+          <a:fillRef idx="3">
+            <a:schemeClr val="accent1"/>
+          </a:fillRef>
+          <a:effectRef idx="2">
+            <a:schemeClr val="accent1"/>
+          </a:effectRef>
+          <a:fontRef idx="minor">
+            <a:schemeClr val="lt1"/>
+          </a:fontRef>
+        </p:style>
+        <p:txBody>
+          <a:bodyPr rtlCol="0" anchor="ctr"/>
+          <a:lstStyle/>
+          <a:p>
+            <a:pPr algn="ctr"/>
+          </a:p>
+        </p:txBody>
+      </p:sp>
+      <p:sp>
+        <p:nvSpPr>
+          <p:cNvPr id="21" name="TextBox 20"/>
+          <p:cNvSpPr txBox="1"/>
+          <p:nvPr/>
+        </p:nvSpPr>
+        <p:spPr>
+          <a:xfrm>
+            <a:off x="548640" y="4754879"/>
+            <a:ext cx="10972800" cy="274320"/>
+          </a:xfrm>
+          <a:prstGeom prst="rect">
+            <a:avLst/>
+          </a:prstGeom>
+          <a:noFill/>
+        </p:spPr>
+        <p:txBody>
+          <a:bodyPr wrap="none">
+            <a:spAutoFit/>
+          </a:bodyPr>
+          <a:lstStyle/>
+          <a:p>
+            <a:pPr>
+              <a:defRPr sz="2000" b="1">
+                <a:solidFill>
+                  <a:srgbClr val="FFFFFF"/>
+                </a:solidFill>
+              </a:defRPr>
+            </a:pPr>
+            <a:r>
+              <a:t>Performance Tips:</a:t>
+            </a:r>
+          </a:p>
+        </p:txBody>
+      </p:sp>
+      <p:sp>
+        <p:nvSpPr>
+          <p:cNvPr id="22" name="Rectangle 21"/>
+          <p:cNvSpPr/>
+          <p:nvPr/>
+        </p:nvSpPr>
+        <p:spPr>
+          <a:xfrm>
+            <a:off x="640080" y="5166359"/>
+            <a:ext cx="10789920" cy="868680"/>
+          </a:xfrm>
+          <a:prstGeom prst="rect">
+            <a:avLst/>
+          </a:prstGeom>
+          <a:solidFill>
+            <a:srgbClr val="282C34"/>
+          </a:solidFill>
+          <a:ln>
+            <a:noFill/>
+          </a:ln>
+        </p:spPr>
+        <p:style>
+          <a:lnRef idx="1">
+            <a:schemeClr val="accent1"/>
+          </a:lnRef>
+          <a:fillRef idx="3">
+            <a:schemeClr val="accent1"/>
+          </a:fillRef>
+          <a:effectRef idx="2">
+            <a:schemeClr val="accent1"/>
+          </a:effectRef>
+          <a:fontRef idx="minor">
+            <a:schemeClr val="lt1"/>
+          </a:fontRef>
+        </p:style>
+        <p:txBody>
+          <a:bodyPr rtlCol="0" anchor="ctr"/>
+          <a:lstStyle/>
+          <a:p>
+            <a:pPr algn="ctr"/>
+          </a:p>
+        </p:txBody>
+      </p:sp>
+      <p:sp>
+        <p:nvSpPr>
+          <p:cNvPr id="23" name="Rectangle 22"/>
+          <p:cNvSpPr/>
+          <p:nvPr/>
+        </p:nvSpPr>
+        <p:spPr>
+          <a:xfrm>
+            <a:off x="640080" y="5166359"/>
+            <a:ext cx="73152" cy="868680"/>
+          </a:xfrm>
+          <a:prstGeom prst="rect">
+            <a:avLst/>
+          </a:prstGeom>
+          <a:solidFill>
+            <a:srgbClr val="61AFEF"/>
+          </a:solidFill>
+          <a:ln>
+            <a:noFill/>
+          </a:ln>
+        </p:spPr>
+        <p:style>
+          <a:lnRef idx="1">
+            <a:schemeClr val="accent1"/>
+          </a:lnRef>
+          <a:fillRef idx="3">
+            <a:schemeClr val="accent1"/>
+          </a:fillRef>
+          <a:effectRef idx="2">
+            <a:schemeClr val="accent1"/>
+          </a:effectRef>
+          <a:fontRef idx="minor">
+            <a:schemeClr val="lt1"/>
+          </a:fontRef>
+        </p:style>
+        <p:txBody>
+          <a:bodyPr rtlCol="0" anchor="ctr"/>
+          <a:lstStyle/>
+          <a:p>
+            <a:pPr algn="ctr"/>
+          </a:p>
+        </p:txBody>
+      </p:sp>
+      <p:sp>
+        <p:nvSpPr>
+          <p:cNvPr id="24" name="TextBox 23"/>
+          <p:cNvSpPr txBox="1"/>
+          <p:nvPr/>
+        </p:nvSpPr>
+        <p:spPr>
+          <a:xfrm>
+            <a:off x="914400" y="5212079"/>
+            <a:ext cx="10241280" cy="777240"/>
+          </a:xfrm>
+          <a:prstGeom prst="rect">
+            <a:avLst/>
+          </a:prstGeom>
+          <a:noFill/>
+        </p:spPr>
+        <p:txBody>
+          <a:bodyPr wrap="none">
+            <a:spAutoFit/>
+          </a:bodyPr>
+          <a:lstStyle/>
+          <a:p>
+            <a:pPr>
+              <a:spcAft>
+                <a:spcPts val="200"/>
+              </a:spcAft>
+              <a:defRPr sz="1400">
+                <a:solidFill>
+                  <a:srgbClr val="ABB2BF"/>
+                </a:solidFill>
+                <a:latin typeface="Consolas"/>
+              </a:defRPr>
+            </a:pPr>
+            <a:r>
+              <a:t>• in operator is fast for keys</a:t>
+            </a:r>
+          </a:p>
+          <a:p>
+            <a:pPr>
+              <a:spcAft>
+                <a:spcPts val="200"/>
+              </a:spcAft>
+              <a:defRPr sz="1400">
+                <a:solidFill>
+                  <a:srgbClr val="ABB2BF"/>
+                </a:solidFill>
+                <a:latin typeface="Consolas"/>
+              </a:defRPr>
+            </a:pPr>
+            <a:r>
+              <a:t>• Use defaultdict for counting</a:t>
+            </a:r>
+          </a:p>
+          <a:p>
+            <a:pPr>
+              <a:spcAft>
+                <a:spcPts val="200"/>
+              </a:spcAft>
+              <a:defRPr sz="1400">
+                <a:solidFill>
+                  <a:srgbClr val="ABB2BF"/>
+                </a:solidFill>
+                <a:latin typeface="Consolas"/>
+              </a:defRPr>
+            </a:pPr>
+            <a:r>
+              <a:t>• Consider frozenset for immutable keys</a:t>
+            </a:r>
+          </a:p>
+        </p:txBody>
+      </p:sp>
+    </p:spTree>
+  </p:cSld>
+  <p:clrMapOvr>
+    <a:masterClrMapping/>
+  </p:clrMapOvr>
+</p:sld>
+</file>
+
+<file path=ppt/slides/slide14.xml><?xml version="1.0" encoding="utf-8"?>
+<p:sld xmlns:a="http://schemas.openxmlformats.org/drawingml/2006/main" xmlns:p="http://schemas.openxmlformats.org/presentationml/2006/main" xmlns:r="http://schemas.openxmlformats.org/officeDocument/2006/relationships">
+  <p:cSld>
+    <p:spTree>
+      <p:nvGrpSpPr>
+        <p:cNvPr id="1" name=""/>
+        <p:cNvGrpSpPr/>
+        <p:nvPr/>
+      </p:nvGrpSpPr>
+      <p:grpSpPr/>
+      <p:sp>
+        <p:nvSpPr>
+          <p:cNvPr id="2" name="Rectangle 1"/>
+          <p:cNvSpPr/>
+          <p:nvPr/>
+        </p:nvSpPr>
+        <p:spPr>
+          <a:xfrm>
+            <a:off x="0" y="0"/>
+            <a:ext cx="12191695" cy="6858000"/>
+          </a:xfrm>
+          <a:prstGeom prst="rect">
+            <a:avLst/>
+          </a:prstGeom>
+          <a:solidFill>
+            <a:srgbClr val="FAFAFA"/>
+          </a:solidFill>
+          <a:ln>
+            <a:noFill/>
+          </a:ln>
+        </p:spPr>
+        <p:style>
+          <a:lnRef idx="1">
+            <a:schemeClr val="accent1"/>
+          </a:lnRef>
+          <a:fillRef idx="3">
+            <a:schemeClr val="accent1"/>
+          </a:fillRef>
+          <a:effectRef idx="2">
+            <a:schemeClr val="accent1"/>
+          </a:effectRef>
+          <a:fontRef idx="minor">
+            <a:schemeClr val="lt1"/>
+          </a:fontRef>
+        </p:style>
+        <p:txBody>
+          <a:bodyPr rtlCol="0" anchor="ctr"/>
+          <a:lstStyle/>
+          <a:p>
+            <a:pPr algn="ctr"/>
+          </a:p>
+        </p:txBody>
+      </p:sp>
+      <p:sp>
+        <p:nvSpPr>
+          <p:cNvPr id="3" name="Rectangle 2"/>
+          <p:cNvSpPr/>
+          <p:nvPr/>
+        </p:nvSpPr>
+        <p:spPr>
+          <a:xfrm>
+            <a:off x="0" y="0"/>
+            <a:ext cx="12191695" cy="1097280"/>
+          </a:xfrm>
+          <a:prstGeom prst="rect">
+            <a:avLst/>
+          </a:prstGeom>
+          <a:solidFill>
+            <a:srgbClr val="0066CC"/>
+          </a:solidFill>
+          <a:ln>
+            <a:noFill/>
+          </a:ln>
+        </p:spPr>
+        <p:style>
+          <a:lnRef idx="1">
+            <a:schemeClr val="accent1"/>
+          </a:lnRef>
+          <a:fillRef idx="3">
+            <a:schemeClr val="accent1"/>
+          </a:fillRef>
+          <a:effectRef idx="2">
+            <a:schemeClr val="accent1"/>
+          </a:effectRef>
+          <a:fontRef idx="minor">
+            <a:schemeClr val="lt1"/>
+          </a:fontRef>
+        </p:style>
+        <p:txBody>
+          <a:bodyPr rtlCol="0" anchor="ctr"/>
+          <a:lstStyle/>
+          <a:p>
+            <a:pPr algn="ctr"/>
+          </a:p>
+        </p:txBody>
+      </p:sp>
+      <p:sp>
+        <p:nvSpPr>
+          <p:cNvPr id="4" name="Rectangle 3"/>
+          <p:cNvSpPr/>
+          <p:nvPr/>
+        </p:nvSpPr>
+        <p:spPr>
+          <a:xfrm>
+            <a:off x="0" y="1097280"/>
+            <a:ext cx="137160" cy="5760720"/>
+          </a:xfrm>
+          <a:prstGeom prst="rect">
+            <a:avLst/>
+          </a:prstGeom>
+          <a:solidFill>
+            <a:srgbClr val="FFBB33"/>
+          </a:solidFill>
+          <a:ln>
+            <a:noFill/>
+          </a:ln>
+        </p:spPr>
+        <p:style>
+          <a:lnRef idx="1">
+            <a:schemeClr val="accent1"/>
+          </a:lnRef>
+          <a:fillRef idx="3">
+            <a:schemeClr val="accent1"/>
+          </a:fillRef>
+          <a:effectRef idx="2">
+            <a:schemeClr val="accent1"/>
+          </a:effectRef>
+          <a:fontRef idx="minor">
+            <a:schemeClr val="lt1"/>
+          </a:fontRef>
+        </p:style>
+        <p:txBody>
+          <a:bodyPr rtlCol="0" anchor="ctr"/>
+          <a:lstStyle/>
+          <a:p>
+            <a:pPr algn="ctr"/>
+          </a:p>
+        </p:txBody>
+      </p:sp>
+      <p:sp>
+        <p:nvSpPr>
+          <p:cNvPr id="5" name="TextBox 4"/>
+          <p:cNvSpPr txBox="1"/>
+          <p:nvPr/>
+        </p:nvSpPr>
+        <p:spPr>
+          <a:xfrm>
+            <a:off x="365760" y="274320"/>
+            <a:ext cx="10972800" cy="640080"/>
+          </a:xfrm>
+          <a:prstGeom prst="rect">
+            <a:avLst/>
+          </a:prstGeom>
+          <a:noFill/>
+        </p:spPr>
+        <p:txBody>
+          <a:bodyPr wrap="none">
+            <a:spAutoFit/>
+          </a:bodyPr>
+          <a:lstStyle/>
+          <a:p>
+            <a:pPr>
+              <a:defRPr sz="3600" b="1">
+                <a:solidFill>
+                  <a:srgbClr val="FFFFFF"/>
+                </a:solidFill>
+              </a:defRPr>
+            </a:pPr>
+            <a:r>
+              <a:t>Best Practices (continued)</a:t>
+            </a:r>
+          </a:p>
+        </p:txBody>
+      </p:sp>
+      <p:sp>
+        <p:nvSpPr>
+          <p:cNvPr id="6" name="Rectangle 5"/>
+          <p:cNvSpPr/>
+          <p:nvPr/>
+        </p:nvSpPr>
+        <p:spPr>
+          <a:xfrm>
+            <a:off x="365760" y="1325880"/>
+            <a:ext cx="11430000" cy="365760"/>
+          </a:xfrm>
+          <a:prstGeom prst="rect">
+            <a:avLst/>
+          </a:prstGeom>
+          <a:solidFill>
+            <a:srgbClr val="0078D7"/>
+          </a:solidFill>
+          <a:ln>
+            <a:noFill/>
+          </a:ln>
+        </p:spPr>
+        <p:style>
+          <a:lnRef idx="1">
+            <a:schemeClr val="accent1"/>
+          </a:lnRef>
+          <a:fillRef idx="3">
+            <a:schemeClr val="accent1"/>
+          </a:fillRef>
+          <a:effectRef idx="2">
+            <a:schemeClr val="accent1"/>
+          </a:effectRef>
+          <a:fontRef idx="minor">
+            <a:schemeClr val="lt1"/>
+          </a:fontRef>
+        </p:style>
+        <p:txBody>
+          <a:bodyPr rtlCol="0" anchor="ctr"/>
+          <a:lstStyle/>
+          <a:p>
+            <a:pPr algn="ctr"/>
+          </a:p>
+        </p:txBody>
+      </p:sp>
+      <p:sp>
+        <p:nvSpPr>
+          <p:cNvPr id="7" name="TextBox 6"/>
+          <p:cNvSpPr txBox="1"/>
+          <p:nvPr/>
+        </p:nvSpPr>
+        <p:spPr>
+          <a:xfrm>
+            <a:off x="548640" y="1371600"/>
+            <a:ext cx="10972800" cy="274320"/>
+          </a:xfrm>
+          <a:prstGeom prst="rect">
+            <a:avLst/>
+          </a:prstGeom>
+          <a:noFill/>
+        </p:spPr>
+        <p:txBody>
+          <a:bodyPr wrap="none">
+            <a:spAutoFit/>
+          </a:bodyPr>
+          <a:lstStyle/>
+          <a:p>
+            <a:pPr>
+              <a:defRPr sz="2000" b="1">
+                <a:solidFill>
+                  <a:srgbClr val="FFFFFF"/>
+                </a:solidFill>
+              </a:defRPr>
+            </a:pPr>
+            <a:r>
+              <a:t>Code Style:</a:t>
+            </a:r>
+          </a:p>
+        </p:txBody>
+      </p:sp>
+      <p:sp>
+        <p:nvSpPr>
+          <p:cNvPr id="8" name="Rectangle 7"/>
+          <p:cNvSpPr/>
+          <p:nvPr/>
+        </p:nvSpPr>
+        <p:spPr>
+          <a:xfrm>
+            <a:off x="640080" y="1783080"/>
+            <a:ext cx="10789920" cy="411480"/>
+          </a:xfrm>
+          <a:prstGeom prst="rect">
+            <a:avLst/>
+          </a:prstGeom>
+          <a:solidFill>
+            <a:srgbClr val="282C34"/>
+          </a:solidFill>
+          <a:ln>
+            <a:noFill/>
+          </a:ln>
+        </p:spPr>
+        <p:style>
+          <a:lnRef idx="1">
+            <a:schemeClr val="accent1"/>
+          </a:lnRef>
+          <a:fillRef idx="3">
+            <a:schemeClr val="accent1"/>
+          </a:fillRef>
+          <a:effectRef idx="2">
+            <a:schemeClr val="accent1"/>
+          </a:effectRef>
+          <a:fontRef idx="minor">
+            <a:schemeClr val="lt1"/>
+          </a:fontRef>
+        </p:style>
+        <p:txBody>
+          <a:bodyPr rtlCol="0" anchor="ctr"/>
+          <a:lstStyle/>
+          <a:p>
+            <a:pPr algn="ctr"/>
+          </a:p>
+        </p:txBody>
+      </p:sp>
+      <p:sp>
+        <p:nvSpPr>
+          <p:cNvPr id="9" name="Rectangle 8"/>
+          <p:cNvSpPr/>
+          <p:nvPr/>
+        </p:nvSpPr>
+        <p:spPr>
+          <a:xfrm>
+            <a:off x="640080" y="1783080"/>
+            <a:ext cx="73152" cy="411480"/>
+          </a:xfrm>
+          <a:prstGeom prst="rect">
+            <a:avLst/>
+          </a:prstGeom>
+          <a:solidFill>
+            <a:srgbClr val="61AFEF"/>
+          </a:solidFill>
+          <a:ln>
+            <a:noFill/>
+          </a:ln>
+        </p:spPr>
+        <p:style>
+          <a:lnRef idx="1">
+            <a:schemeClr val="accent1"/>
+          </a:lnRef>
+          <a:fillRef idx="3">
+            <a:schemeClr val="accent1"/>
+          </a:fillRef>
+          <a:effectRef idx="2">
+            <a:schemeClr val="accent1"/>
+          </a:effectRef>
+          <a:fontRef idx="minor">
+            <a:schemeClr val="lt1"/>
+          </a:fontRef>
+        </p:style>
+        <p:txBody>
+          <a:bodyPr rtlCol="0" anchor="ctr"/>
+          <a:lstStyle/>
+          <a:p>
+            <a:pPr algn="ctr"/>
+          </a:p>
+        </p:txBody>
+      </p:sp>
+      <p:sp>
+        <p:nvSpPr>
+          <p:cNvPr id="10" name="TextBox 9"/>
+          <p:cNvSpPr txBox="1"/>
+          <p:nvPr/>
+        </p:nvSpPr>
+        <p:spPr>
+          <a:xfrm>
+            <a:off x="914400" y="1828800"/>
+            <a:ext cx="10241280" cy="320040"/>
+          </a:xfrm>
+          <a:prstGeom prst="rect">
+            <a:avLst/>
+          </a:prstGeom>
+          <a:noFill/>
+        </p:spPr>
+        <p:txBody>
+          <a:bodyPr wrap="none">
+            <a:spAutoFit/>
+          </a:bodyPr>
+          <a:lstStyle/>
+          <a:p>
+            <a:pPr>
+              <a:spcAft>
+                <a:spcPts val="200"/>
+              </a:spcAft>
+              <a:defRPr sz="1400">
+                <a:solidFill>
+                  <a:srgbClr val="ABB2BF"/>
+                </a:solidFill>
+                <a:latin typeface="Consolas"/>
+              </a:defRPr>
+            </a:pPr>
+            <a:r>
+              <a:t>• One key-value per line for readability</a:t>
+            </a:r>
+          </a:p>
+        </p:txBody>
+      </p:sp>
+      <p:sp>
+        <p:nvSpPr>
+          <p:cNvPr id="11" name="TextBox 10"/>
+          <p:cNvSpPr txBox="1"/>
+          <p:nvPr/>
+        </p:nvSpPr>
+        <p:spPr>
+          <a:xfrm>
+            <a:off x="457200" y="2377440"/>
+            <a:ext cx="11247120" cy="320040"/>
+          </a:xfrm>
+          <a:prstGeom prst="rect">
+            <a:avLst/>
+          </a:prstGeom>
+          <a:noFill/>
+        </p:spPr>
+        <p:txBody>
+          <a:bodyPr wrap="none">
+            <a:spAutoFit/>
+          </a:bodyPr>
+          <a:lstStyle/>
+          <a:p>
+            <a:pPr lvl="1">
+              <a:defRPr sz="1600">
+                <a:solidFill>
+                  <a:srgbClr val="333333"/>
+                </a:solidFill>
+              </a:defRPr>
+            </a:pPr>
+            <a:r>
+              <a:t>• Use trailing comma in multi-line</a:t>
+            </a:r>
+          </a:p>
+        </p:txBody>
+      </p:sp>
+    </p:spTree>
+  </p:cSld>
+  <p:clrMapOvr>
+    <a:masterClrMapping/>
+  </p:clrMapOvr>
+</p:sld>
+</file>
+
+<file path=ppt/slides/slide15.xml><?xml version="1.0" encoding="utf-8"?>
+<p:sld xmlns:a="http://schemas.openxmlformats.org/drawingml/2006/main" xmlns:p="http://schemas.openxmlformats.org/presentationml/2006/main" xmlns:r="http://schemas.openxmlformats.org/officeDocument/2006/relationships">
+  <p:cSld>
+    <p:spTree>
+      <p:nvGrpSpPr>
+        <p:cNvPr id="1" name=""/>
+        <p:cNvGrpSpPr/>
+        <p:nvPr/>
+      </p:nvGrpSpPr>
+      <p:grpSpPr/>
+      <p:sp>
+        <p:nvSpPr>
+          <p:cNvPr id="2" name="Rectangle 1"/>
+          <p:cNvSpPr/>
+          <p:nvPr/>
+        </p:nvSpPr>
+        <p:spPr>
+          <a:xfrm>
+            <a:off x="0" y="0"/>
+            <a:ext cx="12191695" cy="6858000"/>
+          </a:xfrm>
+          <a:prstGeom prst="rect">
+            <a:avLst/>
+          </a:prstGeom>
+          <a:solidFill>
             <a:srgbClr val="0066CC"/>
           </a:solidFill>
           <a:ln>
@@ -5450,41 +7952,6 @@
           </a:p>
         </p:txBody>
       </p:sp>
-      <p:sp>
-        <p:nvSpPr>
-          <p:cNvPr id="24" name="TextBox 23"/>
-          <p:cNvSpPr txBox="1"/>
-          <p:nvPr/>
-        </p:nvSpPr>
-        <p:spPr>
-          <a:xfrm>
-            <a:off x="457200" y="5989319"/>
-            <a:ext cx="11247120" cy="320040"/>
-          </a:xfrm>
-          <a:prstGeom prst="rect">
-            <a:avLst/>
-          </a:prstGeom>
-          <a:noFill/>
-        </p:spPr>
-        <p:txBody>
-          <a:bodyPr wrap="none">
-            <a:spAutoFit/>
-          </a:bodyPr>
-          <a:lstStyle/>
-          <a:p>
-            <a:pPr lvl="1">
-              <a:defRPr sz="1600">
-                <a:solidFill>
-                  <a:srgbClr val="333333"/>
-                </a:solidFill>
-              </a:defRPr>
-            </a:pPr>
-            <a:r>
-              <a:t>• Counting and grouping</a:t>
-            </a:r>
-          </a:p>
-        </p:txBody>
-      </p:sp>
     </p:spTree>
   </p:cSld>
   <p:clrMapOvr>
@@ -5662,64 +8129,21 @@
               </a:defRPr>
             </a:pPr>
             <a:r>
-              <a:t>Accessing and Modifying</a:t>
-            </a:r>
-          </a:p>
-        </p:txBody>
-      </p:sp>
-      <p:sp>
-        <p:nvSpPr>
-          <p:cNvPr id="6" name="Rectangle 5"/>
-          <p:cNvSpPr/>
-          <p:nvPr/>
-        </p:nvSpPr>
-        <p:spPr>
-          <a:xfrm>
-            <a:off x="365760" y="1325880"/>
-            <a:ext cx="11430000" cy="365760"/>
-          </a:xfrm>
-          <a:prstGeom prst="rect">
-            <a:avLst/>
-          </a:prstGeom>
-          <a:solidFill>
-            <a:srgbClr val="0078D7"/>
-          </a:solidFill>
-          <a:ln>
-            <a:noFill/>
-          </a:ln>
-        </p:spPr>
-        <p:style>
-          <a:lnRef idx="1">
-            <a:schemeClr val="accent1"/>
-          </a:lnRef>
-          <a:fillRef idx="3">
-            <a:schemeClr val="accent1"/>
-          </a:fillRef>
-          <a:effectRef idx="2">
-            <a:schemeClr val="accent1"/>
-          </a:effectRef>
-          <a:fontRef idx="minor">
-            <a:schemeClr val="lt1"/>
-          </a:fontRef>
-        </p:style>
-        <p:txBody>
-          <a:bodyPr rtlCol="0" anchor="ctr"/>
-          <a:lstStyle/>
-          <a:p>
-            <a:pPr algn="ctr"/>
-          </a:p>
-        </p:txBody>
-      </p:sp>
-      <p:sp>
-        <p:nvSpPr>
-          <p:cNvPr id="7" name="TextBox 6"/>
+              <a:t>What Are Dictionaries? (continued)</a:t>
+            </a:r>
+          </a:p>
+        </p:txBody>
+      </p:sp>
+      <p:sp>
+        <p:nvSpPr>
+          <p:cNvPr id="6" name="TextBox 5"/>
           <p:cNvSpPr txBox="1"/>
           <p:nvPr/>
         </p:nvSpPr>
         <p:spPr>
           <a:xfrm>
-            <a:off x="548640" y="1371600"/>
-            <a:ext cx="10972800" cy="274320"/>
+            <a:off x="457200" y="1371600"/>
+            <a:ext cx="11247120" cy="320040"/>
           </a:xfrm>
           <a:prstGeom prst="rect">
             <a:avLst/>
@@ -5732,768 +8156,15 @@
           </a:bodyPr>
           <a:lstStyle/>
           <a:p>
-            <a:pPr>
-              <a:defRPr sz="2000" b="1">
-                <a:solidFill>
-                  <a:srgbClr val="FFFFFF"/>
-                </a:solidFill>
-              </a:defRPr>
-            </a:pPr>
-            <a:r>
-              <a:t>Access by Key:</a:t>
-            </a:r>
-          </a:p>
-        </p:txBody>
-      </p:sp>
-      <p:sp>
-        <p:nvSpPr>
-          <p:cNvPr id="8" name="TextBox 7"/>
-          <p:cNvSpPr txBox="1"/>
-          <p:nvPr/>
-        </p:nvSpPr>
-        <p:spPr>
-          <a:xfrm>
-            <a:off x="457200" y="1828800"/>
-            <a:ext cx="11247120" cy="320040"/>
-          </a:xfrm>
-          <a:prstGeom prst="rect">
-            <a:avLst/>
-          </a:prstGeom>
-          <a:noFill/>
-        </p:spPr>
-        <p:txBody>
-          <a:bodyPr wrap="none">
-            <a:spAutoFit/>
-          </a:bodyPr>
-          <a:lstStyle/>
-          <a:p>
-            <a:pPr>
-              <a:defRPr sz="1700">
+            <a:pPr lvl="1">
+              <a:defRPr sz="1600">
                 <a:solidFill>
                   <a:srgbClr val="333333"/>
                 </a:solidFill>
               </a:defRPr>
             </a:pPr>
             <a:r>
-              <a:t>student["name"]  # "Alice"</a:t>
-            </a:r>
-          </a:p>
-        </p:txBody>
-      </p:sp>
-      <p:sp>
-        <p:nvSpPr>
-          <p:cNvPr id="9" name="TextBox 8"/>
-          <p:cNvSpPr txBox="1"/>
-          <p:nvPr/>
-        </p:nvSpPr>
-        <p:spPr>
-          <a:xfrm>
-            <a:off x="457200" y="2103120"/>
-            <a:ext cx="11247120" cy="320040"/>
-          </a:xfrm>
-          <a:prstGeom prst="rect">
-            <a:avLst/>
-          </a:prstGeom>
-          <a:noFill/>
-        </p:spPr>
-        <p:txBody>
-          <a:bodyPr wrap="none">
-            <a:spAutoFit/>
-          </a:bodyPr>
-          <a:lstStyle/>
-          <a:p>
-            <a:pPr>
-              <a:defRPr sz="1700">
-                <a:solidFill>
-                  <a:srgbClr val="333333"/>
-                </a:solidFill>
-              </a:defRPr>
-            </a:pPr>
-            <a:r>
-              <a:t>student.get("age")  # 20</a:t>
-            </a:r>
-          </a:p>
-        </p:txBody>
-      </p:sp>
-      <p:sp>
-        <p:nvSpPr>
-          <p:cNvPr id="10" name="TextBox 9"/>
-          <p:cNvSpPr txBox="1"/>
-          <p:nvPr/>
-        </p:nvSpPr>
-        <p:spPr>
-          <a:xfrm>
-            <a:off x="457200" y="2377439"/>
-            <a:ext cx="11247120" cy="320040"/>
-          </a:xfrm>
-          <a:prstGeom prst="rect">
-            <a:avLst/>
-          </a:prstGeom>
-          <a:noFill/>
-        </p:spPr>
-        <p:txBody>
-          <a:bodyPr wrap="none">
-            <a:spAutoFit/>
-          </a:bodyPr>
-          <a:lstStyle/>
-          <a:p>
-            <a:pPr>
-              <a:defRPr sz="1700">
-                <a:solidFill>
-                  <a:srgbClr val="333333"/>
-                </a:solidFill>
-              </a:defRPr>
-            </a:pPr>
-            <a:r>
-              <a:t>student.get("grade", "N/A")  # Default</a:t>
-            </a:r>
-          </a:p>
-        </p:txBody>
-      </p:sp>
-      <p:sp>
-        <p:nvSpPr>
-          <p:cNvPr id="11" name="Rectangle 10"/>
-          <p:cNvSpPr/>
-          <p:nvPr/>
-        </p:nvSpPr>
-        <p:spPr>
-          <a:xfrm>
-            <a:off x="365760" y="2606039"/>
-            <a:ext cx="11430000" cy="365760"/>
-          </a:xfrm>
-          <a:prstGeom prst="rect">
-            <a:avLst/>
-          </a:prstGeom>
-          <a:solidFill>
-            <a:srgbClr val="0078D7"/>
-          </a:solidFill>
-          <a:ln>
-            <a:noFill/>
-          </a:ln>
-        </p:spPr>
-        <p:style>
-          <a:lnRef idx="1">
-            <a:schemeClr val="accent1"/>
-          </a:lnRef>
-          <a:fillRef idx="3">
-            <a:schemeClr val="accent1"/>
-          </a:fillRef>
-          <a:effectRef idx="2">
-            <a:schemeClr val="accent1"/>
-          </a:effectRef>
-          <a:fontRef idx="minor">
-            <a:schemeClr val="lt1"/>
-          </a:fontRef>
-        </p:style>
-        <p:txBody>
-          <a:bodyPr rtlCol="0" anchor="ctr"/>
-          <a:lstStyle/>
-          <a:p>
-            <a:pPr algn="ctr"/>
-          </a:p>
-        </p:txBody>
-      </p:sp>
-      <p:sp>
-        <p:nvSpPr>
-          <p:cNvPr id="12" name="TextBox 11"/>
-          <p:cNvSpPr txBox="1"/>
-          <p:nvPr/>
-        </p:nvSpPr>
-        <p:spPr>
-          <a:xfrm>
-            <a:off x="548640" y="2651759"/>
-            <a:ext cx="10972800" cy="274320"/>
-          </a:xfrm>
-          <a:prstGeom prst="rect">
-            <a:avLst/>
-          </a:prstGeom>
-          <a:noFill/>
-        </p:spPr>
-        <p:txBody>
-          <a:bodyPr wrap="none">
-            <a:spAutoFit/>
-          </a:bodyPr>
-          <a:lstStyle/>
-          <a:p>
-            <a:pPr>
-              <a:defRPr sz="2000" b="1">
-                <a:solidFill>
-                  <a:srgbClr val="FFFFFF"/>
-                </a:solidFill>
-              </a:defRPr>
-            </a:pPr>
-            <a:r>
-              <a:t>Adding/Updating:</a:t>
-            </a:r>
-          </a:p>
-        </p:txBody>
-      </p:sp>
-      <p:sp>
-        <p:nvSpPr>
-          <p:cNvPr id="13" name="Rectangle 12"/>
-          <p:cNvSpPr/>
-          <p:nvPr/>
-        </p:nvSpPr>
-        <p:spPr>
-          <a:xfrm>
-            <a:off x="640080" y="3063239"/>
-            <a:ext cx="10789920" cy="640080"/>
-          </a:xfrm>
-          <a:prstGeom prst="rect">
-            <a:avLst/>
-          </a:prstGeom>
-          <a:solidFill>
-            <a:srgbClr val="282C34"/>
-          </a:solidFill>
-          <a:ln>
-            <a:noFill/>
-          </a:ln>
-        </p:spPr>
-        <p:style>
-          <a:lnRef idx="1">
-            <a:schemeClr val="accent1"/>
-          </a:lnRef>
-          <a:fillRef idx="3">
-            <a:schemeClr val="accent1"/>
-          </a:fillRef>
-          <a:effectRef idx="2">
-            <a:schemeClr val="accent1"/>
-          </a:effectRef>
-          <a:fontRef idx="minor">
-            <a:schemeClr val="lt1"/>
-          </a:fontRef>
-        </p:style>
-        <p:txBody>
-          <a:bodyPr rtlCol="0" anchor="ctr"/>
-          <a:lstStyle/>
-          <a:p>
-            <a:pPr algn="ctr"/>
-          </a:p>
-        </p:txBody>
-      </p:sp>
-      <p:sp>
-        <p:nvSpPr>
-          <p:cNvPr id="14" name="Rectangle 13"/>
-          <p:cNvSpPr/>
-          <p:nvPr/>
-        </p:nvSpPr>
-        <p:spPr>
-          <a:xfrm>
-            <a:off x="640080" y="3063239"/>
-            <a:ext cx="73152" cy="640080"/>
-          </a:xfrm>
-          <a:prstGeom prst="rect">
-            <a:avLst/>
-          </a:prstGeom>
-          <a:solidFill>
-            <a:srgbClr val="61AFEF"/>
-          </a:solidFill>
-          <a:ln>
-            <a:noFill/>
-          </a:ln>
-        </p:spPr>
-        <p:style>
-          <a:lnRef idx="1">
-            <a:schemeClr val="accent1"/>
-          </a:lnRef>
-          <a:fillRef idx="3">
-            <a:schemeClr val="accent1"/>
-          </a:fillRef>
-          <a:effectRef idx="2">
-            <a:schemeClr val="accent1"/>
-          </a:effectRef>
-          <a:fontRef idx="minor">
-            <a:schemeClr val="lt1"/>
-          </a:fontRef>
-        </p:style>
-        <p:txBody>
-          <a:bodyPr rtlCol="0" anchor="ctr"/>
-          <a:lstStyle/>
-          <a:p>
-            <a:pPr algn="ctr"/>
-          </a:p>
-        </p:txBody>
-      </p:sp>
-      <p:sp>
-        <p:nvSpPr>
-          <p:cNvPr id="15" name="TextBox 14"/>
-          <p:cNvSpPr txBox="1"/>
-          <p:nvPr/>
-        </p:nvSpPr>
-        <p:spPr>
-          <a:xfrm>
-            <a:off x="914400" y="3108959"/>
-            <a:ext cx="10241280" cy="548640"/>
-          </a:xfrm>
-          <a:prstGeom prst="rect">
-            <a:avLst/>
-          </a:prstGeom>
-          <a:noFill/>
-        </p:spPr>
-        <p:txBody>
-          <a:bodyPr wrap="none">
-            <a:spAutoFit/>
-          </a:bodyPr>
-          <a:lstStyle/>
-          <a:p>
-            <a:pPr>
-              <a:spcAft>
-                <a:spcPts val="200"/>
-              </a:spcAft>
-              <a:defRPr sz="1400">
-                <a:solidFill>
-                  <a:srgbClr val="ABB2BF"/>
-                </a:solidFill>
-                <a:latin typeface="Consolas"/>
-              </a:defRPr>
-            </a:pPr>
-            <a:r>
-              <a:t>student["grade"] = "A"  # Add new</a:t>
-            </a:r>
-          </a:p>
-          <a:p>
-            <a:pPr>
-              <a:spcAft>
-                <a:spcPts val="200"/>
-              </a:spcAft>
-              <a:defRPr sz="1400">
-                <a:solidFill>
-                  <a:srgbClr val="ABB2BF"/>
-                </a:solidFill>
-                <a:latin typeface="Consolas"/>
-              </a:defRPr>
-            </a:pPr>
-            <a:r>
-              <a:t>student["age"] = 21  # Update</a:t>
-            </a:r>
-          </a:p>
-        </p:txBody>
-      </p:sp>
-      <p:sp>
-        <p:nvSpPr>
-          <p:cNvPr id="16" name="Rectangle 15"/>
-          <p:cNvSpPr/>
-          <p:nvPr/>
-        </p:nvSpPr>
-        <p:spPr>
-          <a:xfrm>
-            <a:off x="365760" y="3840480"/>
-            <a:ext cx="11430000" cy="365760"/>
-          </a:xfrm>
-          <a:prstGeom prst="rect">
-            <a:avLst/>
-          </a:prstGeom>
-          <a:solidFill>
-            <a:srgbClr val="0078D7"/>
-          </a:solidFill>
-          <a:ln>
-            <a:noFill/>
-          </a:ln>
-        </p:spPr>
-        <p:style>
-          <a:lnRef idx="1">
-            <a:schemeClr val="accent1"/>
-          </a:lnRef>
-          <a:fillRef idx="3">
-            <a:schemeClr val="accent1"/>
-          </a:fillRef>
-          <a:effectRef idx="2">
-            <a:schemeClr val="accent1"/>
-          </a:effectRef>
-          <a:fontRef idx="minor">
-            <a:schemeClr val="lt1"/>
-          </a:fontRef>
-        </p:style>
-        <p:txBody>
-          <a:bodyPr rtlCol="0" anchor="ctr"/>
-          <a:lstStyle/>
-          <a:p>
-            <a:pPr algn="ctr"/>
-          </a:p>
-        </p:txBody>
-      </p:sp>
-      <p:sp>
-        <p:nvSpPr>
-          <p:cNvPr id="17" name="TextBox 16"/>
-          <p:cNvSpPr txBox="1"/>
-          <p:nvPr/>
-        </p:nvSpPr>
-        <p:spPr>
-          <a:xfrm>
-            <a:off x="548640" y="3886200"/>
-            <a:ext cx="10972800" cy="274320"/>
-          </a:xfrm>
-          <a:prstGeom prst="rect">
-            <a:avLst/>
-          </a:prstGeom>
-          <a:noFill/>
-        </p:spPr>
-        <p:txBody>
-          <a:bodyPr wrap="none">
-            <a:spAutoFit/>
-          </a:bodyPr>
-          <a:lstStyle/>
-          <a:p>
-            <a:pPr>
-              <a:defRPr sz="2000" b="1">
-                <a:solidFill>
-                  <a:srgbClr val="FFFFFF"/>
-                </a:solidFill>
-              </a:defRPr>
-            </a:pPr>
-            <a:r>
-              <a:t>student.update({"gpa": 4.0})</a:t>
-            </a:r>
-          </a:p>
-        </p:txBody>
-      </p:sp>
-      <p:sp>
-        <p:nvSpPr>
-          <p:cNvPr id="18" name="Rectangle 17"/>
-          <p:cNvSpPr/>
-          <p:nvPr/>
-        </p:nvSpPr>
-        <p:spPr>
-          <a:xfrm>
-            <a:off x="365760" y="4297680"/>
-            <a:ext cx="11430000" cy="365760"/>
-          </a:xfrm>
-          <a:prstGeom prst="rect">
-            <a:avLst/>
-          </a:prstGeom>
-          <a:solidFill>
-            <a:srgbClr val="0078D7"/>
-          </a:solidFill>
-          <a:ln>
-            <a:noFill/>
-          </a:ln>
-        </p:spPr>
-        <p:style>
-          <a:lnRef idx="1">
-            <a:schemeClr val="accent1"/>
-          </a:lnRef>
-          <a:fillRef idx="3">
-            <a:schemeClr val="accent1"/>
-          </a:fillRef>
-          <a:effectRef idx="2">
-            <a:schemeClr val="accent1"/>
-          </a:effectRef>
-          <a:fontRef idx="minor">
-            <a:schemeClr val="lt1"/>
-          </a:fontRef>
-        </p:style>
-        <p:txBody>
-          <a:bodyPr rtlCol="0" anchor="ctr"/>
-          <a:lstStyle/>
-          <a:p>
-            <a:pPr algn="ctr"/>
-          </a:p>
-        </p:txBody>
-      </p:sp>
-      <p:sp>
-        <p:nvSpPr>
-          <p:cNvPr id="19" name="TextBox 18"/>
-          <p:cNvSpPr txBox="1"/>
-          <p:nvPr/>
-        </p:nvSpPr>
-        <p:spPr>
-          <a:xfrm>
-            <a:off x="548640" y="4343400"/>
-            <a:ext cx="10972800" cy="274320"/>
-          </a:xfrm>
-          <a:prstGeom prst="rect">
-            <a:avLst/>
-          </a:prstGeom>
-          <a:noFill/>
-        </p:spPr>
-        <p:txBody>
-          <a:bodyPr wrap="none">
-            <a:spAutoFit/>
-          </a:bodyPr>
-          <a:lstStyle/>
-          <a:p>
-            <a:pPr>
-              <a:defRPr sz="2000" b="1">
-                <a:solidFill>
-                  <a:srgbClr val="FFFFFF"/>
-                </a:solidFill>
-              </a:defRPr>
-            </a:pPr>
-            <a:r>
-              <a:t>Removing:</a:t>
-            </a:r>
-          </a:p>
-        </p:txBody>
-      </p:sp>
-      <p:sp>
-        <p:nvSpPr>
-          <p:cNvPr id="20" name="TextBox 19"/>
-          <p:cNvSpPr txBox="1"/>
-          <p:nvPr/>
-        </p:nvSpPr>
-        <p:spPr>
-          <a:xfrm>
-            <a:off x="457200" y="4800600"/>
-            <a:ext cx="11247120" cy="320040"/>
-          </a:xfrm>
-          <a:prstGeom prst="rect">
-            <a:avLst/>
-          </a:prstGeom>
-          <a:noFill/>
-        </p:spPr>
-        <p:txBody>
-          <a:bodyPr wrap="none">
-            <a:spAutoFit/>
-          </a:bodyPr>
-          <a:lstStyle/>
-          <a:p>
-            <a:pPr>
-              <a:defRPr sz="1700">
-                <a:solidFill>
-                  <a:srgbClr val="333333"/>
-                </a:solidFill>
-              </a:defRPr>
-            </a:pPr>
-            <a:r>
-              <a:t>del student["age"]</a:t>
-            </a:r>
-          </a:p>
-        </p:txBody>
-      </p:sp>
-      <p:sp>
-        <p:nvSpPr>
-          <p:cNvPr id="21" name="Rectangle 20"/>
-          <p:cNvSpPr/>
-          <p:nvPr/>
-        </p:nvSpPr>
-        <p:spPr>
-          <a:xfrm>
-            <a:off x="640080" y="5029200"/>
-            <a:ext cx="10789920" cy="411480"/>
-          </a:xfrm>
-          <a:prstGeom prst="rect">
-            <a:avLst/>
-          </a:prstGeom>
-          <a:solidFill>
-            <a:srgbClr val="282C34"/>
-          </a:solidFill>
-          <a:ln>
-            <a:noFill/>
-          </a:ln>
-        </p:spPr>
-        <p:style>
-          <a:lnRef idx="1">
-            <a:schemeClr val="accent1"/>
-          </a:lnRef>
-          <a:fillRef idx="3">
-            <a:schemeClr val="accent1"/>
-          </a:fillRef>
-          <a:effectRef idx="2">
-            <a:schemeClr val="accent1"/>
-          </a:effectRef>
-          <a:fontRef idx="minor">
-            <a:schemeClr val="lt1"/>
-          </a:fontRef>
-        </p:style>
-        <p:txBody>
-          <a:bodyPr rtlCol="0" anchor="ctr"/>
-          <a:lstStyle/>
-          <a:p>
-            <a:pPr algn="ctr"/>
-          </a:p>
-        </p:txBody>
-      </p:sp>
-      <p:sp>
-        <p:nvSpPr>
-          <p:cNvPr id="22" name="Rectangle 21"/>
-          <p:cNvSpPr/>
-          <p:nvPr/>
-        </p:nvSpPr>
-        <p:spPr>
-          <a:xfrm>
-            <a:off x="640080" y="5029200"/>
-            <a:ext cx="73152" cy="411480"/>
-          </a:xfrm>
-          <a:prstGeom prst="rect">
-            <a:avLst/>
-          </a:prstGeom>
-          <a:solidFill>
-            <a:srgbClr val="61AFEF"/>
-          </a:solidFill>
-          <a:ln>
-            <a:noFill/>
-          </a:ln>
-        </p:spPr>
-        <p:style>
-          <a:lnRef idx="1">
-            <a:schemeClr val="accent1"/>
-          </a:lnRef>
-          <a:fillRef idx="3">
-            <a:schemeClr val="accent1"/>
-          </a:fillRef>
-          <a:effectRef idx="2">
-            <a:schemeClr val="accent1"/>
-          </a:effectRef>
-          <a:fontRef idx="minor">
-            <a:schemeClr val="lt1"/>
-          </a:fontRef>
-        </p:style>
-        <p:txBody>
-          <a:bodyPr rtlCol="0" anchor="ctr"/>
-          <a:lstStyle/>
-          <a:p>
-            <a:pPr algn="ctr"/>
-          </a:p>
-        </p:txBody>
-      </p:sp>
-      <p:sp>
-        <p:nvSpPr>
-          <p:cNvPr id="23" name="TextBox 22"/>
-          <p:cNvSpPr txBox="1"/>
-          <p:nvPr/>
-        </p:nvSpPr>
-        <p:spPr>
-          <a:xfrm>
-            <a:off x="914400" y="5074920"/>
-            <a:ext cx="10241280" cy="320040"/>
-          </a:xfrm>
-          <a:prstGeom prst="rect">
-            <a:avLst/>
-          </a:prstGeom>
-          <a:noFill/>
-        </p:spPr>
-        <p:txBody>
-          <a:bodyPr wrap="none">
-            <a:spAutoFit/>
-          </a:bodyPr>
-          <a:lstStyle/>
-          <a:p>
-            <a:pPr>
-              <a:spcAft>
-                <a:spcPts val="200"/>
-              </a:spcAft>
-              <a:defRPr sz="1400">
-                <a:solidFill>
-                  <a:srgbClr val="ABB2BF"/>
-                </a:solidFill>
-                <a:latin typeface="Consolas"/>
-              </a:defRPr>
-            </a:pPr>
-            <a:r>
-              <a:t>grade = student.pop("grade")</a:t>
-            </a:r>
-          </a:p>
-        </p:txBody>
-      </p:sp>
-      <p:sp>
-        <p:nvSpPr>
-          <p:cNvPr id="24" name="TextBox 23"/>
-          <p:cNvSpPr txBox="1"/>
-          <p:nvPr/>
-        </p:nvSpPr>
-        <p:spPr>
-          <a:xfrm>
-            <a:off x="457200" y="5623560"/>
-            <a:ext cx="11247120" cy="320040"/>
-          </a:xfrm>
-          <a:prstGeom prst="rect">
-            <a:avLst/>
-          </a:prstGeom>
-          <a:noFill/>
-        </p:spPr>
-        <p:txBody>
-          <a:bodyPr wrap="none">
-            <a:spAutoFit/>
-          </a:bodyPr>
-          <a:lstStyle/>
-          <a:p>
-            <a:pPr>
-              <a:defRPr sz="1700">
-                <a:solidFill>
-                  <a:srgbClr val="333333"/>
-                </a:solidFill>
-              </a:defRPr>
-            </a:pPr>
-            <a:r>
-              <a:t>student.clear()  # Remove all</a:t>
-            </a:r>
-          </a:p>
-        </p:txBody>
-      </p:sp>
-      <p:sp>
-        <p:nvSpPr>
-          <p:cNvPr id="25" name="Rectangle 24"/>
-          <p:cNvSpPr/>
-          <p:nvPr/>
-        </p:nvSpPr>
-        <p:spPr>
-          <a:xfrm>
-            <a:off x="365760" y="5852160"/>
-            <a:ext cx="11430000" cy="365760"/>
-          </a:xfrm>
-          <a:prstGeom prst="rect">
-            <a:avLst/>
-          </a:prstGeom>
-          <a:solidFill>
-            <a:srgbClr val="0078D7"/>
-          </a:solidFill>
-          <a:ln>
-            <a:noFill/>
-          </a:ln>
-        </p:spPr>
-        <p:style>
-          <a:lnRef idx="1">
-            <a:schemeClr val="accent1"/>
-          </a:lnRef>
-          <a:fillRef idx="3">
-            <a:schemeClr val="accent1"/>
-          </a:fillRef>
-          <a:effectRef idx="2">
-            <a:schemeClr val="accent1"/>
-          </a:effectRef>
-          <a:fontRef idx="minor">
-            <a:schemeClr val="lt1"/>
-          </a:fontRef>
-        </p:style>
-        <p:txBody>
-          <a:bodyPr rtlCol="0" anchor="ctr"/>
-          <a:lstStyle/>
-          <a:p>
-            <a:pPr algn="ctr"/>
-          </a:p>
-        </p:txBody>
-      </p:sp>
-      <p:sp>
-        <p:nvSpPr>
-          <p:cNvPr id="26" name="TextBox 25"/>
-          <p:cNvSpPr txBox="1"/>
-          <p:nvPr/>
-        </p:nvSpPr>
-        <p:spPr>
-          <a:xfrm>
-            <a:off x="548640" y="5897880"/>
-            <a:ext cx="10972800" cy="274320"/>
-          </a:xfrm>
-          <a:prstGeom prst="rect">
-            <a:avLst/>
-          </a:prstGeom>
-          <a:noFill/>
-        </p:spPr>
-        <p:txBody>
-          <a:bodyPr wrap="none">
-            <a:spAutoFit/>
-          </a:bodyPr>
-          <a:lstStyle/>
-          <a:p>
-            <a:pPr>
-              <a:defRPr sz="2000" b="1">
-                <a:solidFill>
-                  <a:srgbClr val="FFFFFF"/>
-                </a:solidFill>
-              </a:defRPr>
-            </a:pPr>
-            <a:r>
-              <a:t>Checking Keys:</a:t>
+              <a:t>• Counting and grouping</a:t>
             </a:r>
           </a:p>
         </p:txBody>
@@ -6675,7 +8346,7 @@
               </a:defRPr>
             </a:pPr>
             <a:r>
-              <a:t>Dictionary Methods</a:t>
+              <a:t>Accessing and Modifying</a:t>
             </a:r>
           </a:p>
         </p:txBody>
@@ -6753,7 +8424,7 @@
               </a:defRPr>
             </a:pPr>
             <a:r>
-              <a:t>Keys, Values, Items:</a:t>
+              <a:t>Access by Key:</a:t>
             </a:r>
           </a:p>
         </p:txBody>
@@ -6788,7 +8459,7 @@
               </a:defRPr>
             </a:pPr>
             <a:r>
-              <a:t>student.keys()  # dict_keys([...])</a:t>
+              <a:t>student["name"]  # "Alice"</a:t>
             </a:r>
           </a:p>
         </p:txBody>
@@ -6823,7 +8494,7 @@
               </a:defRPr>
             </a:pPr>
             <a:r>
-              <a:t>student.values()  # dict_values([...])</a:t>
+              <a:t>student.get("age")  # 20</a:t>
             </a:r>
           </a:p>
         </p:txBody>
@@ -6858,7 +8529,7 @@
               </a:defRPr>
             </a:pPr>
             <a:r>
-              <a:t>student.items()  # dict_items([...])</a:t>
+              <a:t>student.get("grade", "N/A")  # Default</a:t>
             </a:r>
           </a:p>
         </p:txBody>
@@ -6936,7 +8607,7 @@
               </a:defRPr>
             </a:pPr>
             <a:r>
-              <a:t>Iterating:</a:t>
+              <a:t>Adding/Updating:</a:t>
             </a:r>
           </a:p>
         </p:txBody>
@@ -6950,7 +8621,7 @@
         <p:spPr>
           <a:xfrm>
             <a:off x="640080" y="3063239"/>
-            <a:ext cx="10789920" cy="1097280"/>
+            <a:ext cx="10789920" cy="640080"/>
           </a:xfrm>
           <a:prstGeom prst="rect">
             <a:avLst/>
@@ -6993,7 +8664,7 @@
         <p:spPr>
           <a:xfrm>
             <a:off x="640080" y="3063239"/>
-            <a:ext cx="73152" cy="1097280"/>
+            <a:ext cx="73152" cy="640080"/>
           </a:xfrm>
           <a:prstGeom prst="rect">
             <a:avLst/>
@@ -7036,7 +8707,7 @@
         <p:spPr>
           <a:xfrm>
             <a:off x="914400" y="3108959"/>
-            <a:ext cx="10241280" cy="1005839"/>
+            <a:ext cx="10241280" cy="548640"/>
           </a:xfrm>
           <a:prstGeom prst="rect">
             <a:avLst/>
@@ -7061,7 +8732,7 @@
               </a:defRPr>
             </a:pPr>
             <a:r>
-              <a:t>for key in student:</a:t>
+              <a:t>student["grade"] = "A"  # Add new</a:t>
             </a:r>
           </a:p>
           <a:p>
@@ -7077,9 +8748,309 @@
               </a:defRPr>
             </a:pPr>
             <a:r>
-              <a:t>    print(key, student[key])</a:t>
-            </a:r>
-          </a:p>
+              <a:t>student["age"] = 21  # Update</a:t>
+            </a:r>
+          </a:p>
+        </p:txBody>
+      </p:sp>
+      <p:sp>
+        <p:nvSpPr>
+          <p:cNvPr id="16" name="Rectangle 15"/>
+          <p:cNvSpPr/>
+          <p:nvPr/>
+        </p:nvSpPr>
+        <p:spPr>
+          <a:xfrm>
+            <a:off x="365760" y="3840480"/>
+            <a:ext cx="11430000" cy="365760"/>
+          </a:xfrm>
+          <a:prstGeom prst="rect">
+            <a:avLst/>
+          </a:prstGeom>
+          <a:solidFill>
+            <a:srgbClr val="0078D7"/>
+          </a:solidFill>
+          <a:ln>
+            <a:noFill/>
+          </a:ln>
+        </p:spPr>
+        <p:style>
+          <a:lnRef idx="1">
+            <a:schemeClr val="accent1"/>
+          </a:lnRef>
+          <a:fillRef idx="3">
+            <a:schemeClr val="accent1"/>
+          </a:fillRef>
+          <a:effectRef idx="2">
+            <a:schemeClr val="accent1"/>
+          </a:effectRef>
+          <a:fontRef idx="minor">
+            <a:schemeClr val="lt1"/>
+          </a:fontRef>
+        </p:style>
+        <p:txBody>
+          <a:bodyPr rtlCol="0" anchor="ctr"/>
+          <a:lstStyle/>
+          <a:p>
+            <a:pPr algn="ctr"/>
+          </a:p>
+        </p:txBody>
+      </p:sp>
+      <p:sp>
+        <p:nvSpPr>
+          <p:cNvPr id="17" name="TextBox 16"/>
+          <p:cNvSpPr txBox="1"/>
+          <p:nvPr/>
+        </p:nvSpPr>
+        <p:spPr>
+          <a:xfrm>
+            <a:off x="548640" y="3886200"/>
+            <a:ext cx="10972800" cy="274320"/>
+          </a:xfrm>
+          <a:prstGeom prst="rect">
+            <a:avLst/>
+          </a:prstGeom>
+          <a:noFill/>
+        </p:spPr>
+        <p:txBody>
+          <a:bodyPr wrap="none">
+            <a:spAutoFit/>
+          </a:bodyPr>
+          <a:lstStyle/>
+          <a:p>
+            <a:pPr>
+              <a:defRPr sz="2000" b="1">
+                <a:solidFill>
+                  <a:srgbClr val="FFFFFF"/>
+                </a:solidFill>
+              </a:defRPr>
+            </a:pPr>
+            <a:r>
+              <a:t>student.update({"gpa": 4.0})</a:t>
+            </a:r>
+          </a:p>
+        </p:txBody>
+      </p:sp>
+      <p:sp>
+        <p:nvSpPr>
+          <p:cNvPr id="18" name="Rectangle 17"/>
+          <p:cNvSpPr/>
+          <p:nvPr/>
+        </p:nvSpPr>
+        <p:spPr>
+          <a:xfrm>
+            <a:off x="365760" y="4297680"/>
+            <a:ext cx="11430000" cy="365760"/>
+          </a:xfrm>
+          <a:prstGeom prst="rect">
+            <a:avLst/>
+          </a:prstGeom>
+          <a:solidFill>
+            <a:srgbClr val="0078D7"/>
+          </a:solidFill>
+          <a:ln>
+            <a:noFill/>
+          </a:ln>
+        </p:spPr>
+        <p:style>
+          <a:lnRef idx="1">
+            <a:schemeClr val="accent1"/>
+          </a:lnRef>
+          <a:fillRef idx="3">
+            <a:schemeClr val="accent1"/>
+          </a:fillRef>
+          <a:effectRef idx="2">
+            <a:schemeClr val="accent1"/>
+          </a:effectRef>
+          <a:fontRef idx="minor">
+            <a:schemeClr val="lt1"/>
+          </a:fontRef>
+        </p:style>
+        <p:txBody>
+          <a:bodyPr rtlCol="0" anchor="ctr"/>
+          <a:lstStyle/>
+          <a:p>
+            <a:pPr algn="ctr"/>
+          </a:p>
+        </p:txBody>
+      </p:sp>
+      <p:sp>
+        <p:nvSpPr>
+          <p:cNvPr id="19" name="TextBox 18"/>
+          <p:cNvSpPr txBox="1"/>
+          <p:nvPr/>
+        </p:nvSpPr>
+        <p:spPr>
+          <a:xfrm>
+            <a:off x="548640" y="4343400"/>
+            <a:ext cx="10972800" cy="274320"/>
+          </a:xfrm>
+          <a:prstGeom prst="rect">
+            <a:avLst/>
+          </a:prstGeom>
+          <a:noFill/>
+        </p:spPr>
+        <p:txBody>
+          <a:bodyPr wrap="none">
+            <a:spAutoFit/>
+          </a:bodyPr>
+          <a:lstStyle/>
+          <a:p>
+            <a:pPr>
+              <a:defRPr sz="2000" b="1">
+                <a:solidFill>
+                  <a:srgbClr val="FFFFFF"/>
+                </a:solidFill>
+              </a:defRPr>
+            </a:pPr>
+            <a:r>
+              <a:t>Removing:</a:t>
+            </a:r>
+          </a:p>
+        </p:txBody>
+      </p:sp>
+      <p:sp>
+        <p:nvSpPr>
+          <p:cNvPr id="20" name="TextBox 19"/>
+          <p:cNvSpPr txBox="1"/>
+          <p:nvPr/>
+        </p:nvSpPr>
+        <p:spPr>
+          <a:xfrm>
+            <a:off x="457200" y="4800600"/>
+            <a:ext cx="11247120" cy="320040"/>
+          </a:xfrm>
+          <a:prstGeom prst="rect">
+            <a:avLst/>
+          </a:prstGeom>
+          <a:noFill/>
+        </p:spPr>
+        <p:txBody>
+          <a:bodyPr wrap="none">
+            <a:spAutoFit/>
+          </a:bodyPr>
+          <a:lstStyle/>
+          <a:p>
+            <a:pPr>
+              <a:defRPr sz="1700">
+                <a:solidFill>
+                  <a:srgbClr val="333333"/>
+                </a:solidFill>
+              </a:defRPr>
+            </a:pPr>
+            <a:r>
+              <a:t>del student["age"]</a:t>
+            </a:r>
+          </a:p>
+        </p:txBody>
+      </p:sp>
+      <p:sp>
+        <p:nvSpPr>
+          <p:cNvPr id="21" name="Rectangle 20"/>
+          <p:cNvSpPr/>
+          <p:nvPr/>
+        </p:nvSpPr>
+        <p:spPr>
+          <a:xfrm>
+            <a:off x="640080" y="5029200"/>
+            <a:ext cx="10789920" cy="411480"/>
+          </a:xfrm>
+          <a:prstGeom prst="rect">
+            <a:avLst/>
+          </a:prstGeom>
+          <a:solidFill>
+            <a:srgbClr val="282C34"/>
+          </a:solidFill>
+          <a:ln>
+            <a:noFill/>
+          </a:ln>
+        </p:spPr>
+        <p:style>
+          <a:lnRef idx="1">
+            <a:schemeClr val="accent1"/>
+          </a:lnRef>
+          <a:fillRef idx="3">
+            <a:schemeClr val="accent1"/>
+          </a:fillRef>
+          <a:effectRef idx="2">
+            <a:schemeClr val="accent1"/>
+          </a:effectRef>
+          <a:fontRef idx="minor">
+            <a:schemeClr val="lt1"/>
+          </a:fontRef>
+        </p:style>
+        <p:txBody>
+          <a:bodyPr rtlCol="0" anchor="ctr"/>
+          <a:lstStyle/>
+          <a:p>
+            <a:pPr algn="ctr"/>
+          </a:p>
+        </p:txBody>
+      </p:sp>
+      <p:sp>
+        <p:nvSpPr>
+          <p:cNvPr id="22" name="Rectangle 21"/>
+          <p:cNvSpPr/>
+          <p:nvPr/>
+        </p:nvSpPr>
+        <p:spPr>
+          <a:xfrm>
+            <a:off x="640080" y="5029200"/>
+            <a:ext cx="73152" cy="411480"/>
+          </a:xfrm>
+          <a:prstGeom prst="rect">
+            <a:avLst/>
+          </a:prstGeom>
+          <a:solidFill>
+            <a:srgbClr val="61AFEF"/>
+          </a:solidFill>
+          <a:ln>
+            <a:noFill/>
+          </a:ln>
+        </p:spPr>
+        <p:style>
+          <a:lnRef idx="1">
+            <a:schemeClr val="accent1"/>
+          </a:lnRef>
+          <a:fillRef idx="3">
+            <a:schemeClr val="accent1"/>
+          </a:fillRef>
+          <a:effectRef idx="2">
+            <a:schemeClr val="accent1"/>
+          </a:effectRef>
+          <a:fontRef idx="minor">
+            <a:schemeClr val="lt1"/>
+          </a:fontRef>
+        </p:style>
+        <p:txBody>
+          <a:bodyPr rtlCol="0" anchor="ctr"/>
+          <a:lstStyle/>
+          <a:p>
+            <a:pPr algn="ctr"/>
+          </a:p>
+        </p:txBody>
+      </p:sp>
+      <p:sp>
+        <p:nvSpPr>
+          <p:cNvPr id="23" name="TextBox 22"/>
+          <p:cNvSpPr txBox="1"/>
+          <p:nvPr/>
+        </p:nvSpPr>
+        <p:spPr>
+          <a:xfrm>
+            <a:off x="914400" y="5074920"/>
+            <a:ext cx="10241280" cy="320040"/>
+          </a:xfrm>
+          <a:prstGeom prst="rect">
+            <a:avLst/>
+          </a:prstGeom>
+          <a:noFill/>
+        </p:spPr>
+        <p:txBody>
+          <a:bodyPr wrap="none">
+            <a:spAutoFit/>
+          </a:bodyPr>
+          <a:lstStyle/>
           <a:p>
             <a:pPr>
               <a:spcAft>
@@ -7093,80 +9064,21 @@
               </a:defRPr>
             </a:pPr>
             <a:r>
-              <a:t>for key, value in student.items():</a:t>
-            </a:r>
-          </a:p>
-          <a:p>
-            <a:pPr>
-              <a:spcAft>
-                <a:spcPts val="200"/>
-              </a:spcAft>
-              <a:defRPr sz="1400">
-                <a:solidFill>
-                  <a:srgbClr val="ABB2BF"/>
-                </a:solidFill>
-                <a:latin typeface="Consolas"/>
-              </a:defRPr>
-            </a:pPr>
-            <a:r>
-              <a:t>    print(f"{key}: {value}")</a:t>
-            </a:r>
-          </a:p>
-        </p:txBody>
-      </p:sp>
-      <p:sp>
-        <p:nvSpPr>
-          <p:cNvPr id="16" name="Rectangle 15"/>
-          <p:cNvSpPr/>
-          <p:nvPr/>
-        </p:nvSpPr>
-        <p:spPr>
-          <a:xfrm>
-            <a:off x="365760" y="4297680"/>
-            <a:ext cx="11430000" cy="365760"/>
-          </a:xfrm>
-          <a:prstGeom prst="rect">
-            <a:avLst/>
-          </a:prstGeom>
-          <a:solidFill>
-            <a:srgbClr val="0078D7"/>
-          </a:solidFill>
-          <a:ln>
-            <a:noFill/>
-          </a:ln>
-        </p:spPr>
-        <p:style>
-          <a:lnRef idx="1">
-            <a:schemeClr val="accent1"/>
-          </a:lnRef>
-          <a:fillRef idx="3">
-            <a:schemeClr val="accent1"/>
-          </a:fillRef>
-          <a:effectRef idx="2">
-            <a:schemeClr val="accent1"/>
-          </a:effectRef>
-          <a:fontRef idx="minor">
-            <a:schemeClr val="lt1"/>
-          </a:fontRef>
-        </p:style>
-        <p:txBody>
-          <a:bodyPr rtlCol="0" anchor="ctr"/>
-          <a:lstStyle/>
-          <a:p>
-            <a:pPr algn="ctr"/>
-          </a:p>
-        </p:txBody>
-      </p:sp>
-      <p:sp>
-        <p:nvSpPr>
-          <p:cNvPr id="17" name="TextBox 16"/>
+              <a:t>grade = student.pop("grade")</a:t>
+            </a:r>
+          </a:p>
+        </p:txBody>
+      </p:sp>
+      <p:sp>
+        <p:nvSpPr>
+          <p:cNvPr id="24" name="TextBox 23"/>
           <p:cNvSpPr txBox="1"/>
           <p:nvPr/>
         </p:nvSpPr>
         <p:spPr>
           <a:xfrm>
-            <a:off x="548640" y="4343400"/>
-            <a:ext cx="10972800" cy="274320"/>
+            <a:off x="457200" y="5623560"/>
+            <a:ext cx="11247120" cy="320040"/>
           </a:xfrm>
           <a:prstGeom prst="rect">
             <a:avLst/>
@@ -7180,41 +9092,6 @@
           <a:lstStyle/>
           <a:p>
             <a:pPr>
-              <a:defRPr sz="2000" b="1">
-                <a:solidFill>
-                  <a:srgbClr val="FFFFFF"/>
-                </a:solidFill>
-              </a:defRPr>
-            </a:pPr>
-            <a:r>
-              <a:t>Other Methods:</a:t>
-            </a:r>
-          </a:p>
-        </p:txBody>
-      </p:sp>
-      <p:sp>
-        <p:nvSpPr>
-          <p:cNvPr id="18" name="TextBox 17"/>
-          <p:cNvSpPr txBox="1"/>
-          <p:nvPr/>
-        </p:nvSpPr>
-        <p:spPr>
-          <a:xfrm>
-            <a:off x="457200" y="4800600"/>
-            <a:ext cx="11247120" cy="320040"/>
-          </a:xfrm>
-          <a:prstGeom prst="rect">
-            <a:avLst/>
-          </a:prstGeom>
-          <a:noFill/>
-        </p:spPr>
-        <p:txBody>
-          <a:bodyPr wrap="none">
-            <a:spAutoFit/>
-          </a:bodyPr>
-          <a:lstStyle/>
-          <a:p>
-            <a:pPr>
               <a:defRPr sz="1700">
                 <a:solidFill>
                   <a:srgbClr val="333333"/>
@@ -7222,112 +9099,7 @@
               </a:defRPr>
             </a:pPr>
             <a:r>
-              <a:t>student.get(key, default)</a:t>
-            </a:r>
-          </a:p>
-        </p:txBody>
-      </p:sp>
-      <p:sp>
-        <p:nvSpPr>
-          <p:cNvPr id="19" name="TextBox 18"/>
-          <p:cNvSpPr txBox="1"/>
-          <p:nvPr/>
-        </p:nvSpPr>
-        <p:spPr>
-          <a:xfrm>
-            <a:off x="457200" y="5074920"/>
-            <a:ext cx="11247120" cy="320040"/>
-          </a:xfrm>
-          <a:prstGeom prst="rect">
-            <a:avLst/>
-          </a:prstGeom>
-          <a:noFill/>
-        </p:spPr>
-        <p:txBody>
-          <a:bodyPr wrap="none">
-            <a:spAutoFit/>
-          </a:bodyPr>
-          <a:lstStyle/>
-          <a:p>
-            <a:pPr>
-              <a:defRPr sz="1700">
-                <a:solidFill>
-                  <a:srgbClr val="333333"/>
-                </a:solidFill>
-              </a:defRPr>
-            </a:pPr>
-            <a:r>
-              <a:t>student.setdefault(key, default)</a:t>
-            </a:r>
-          </a:p>
-        </p:txBody>
-      </p:sp>
-      <p:sp>
-        <p:nvSpPr>
-          <p:cNvPr id="20" name="TextBox 19"/>
-          <p:cNvSpPr txBox="1"/>
-          <p:nvPr/>
-        </p:nvSpPr>
-        <p:spPr>
-          <a:xfrm>
-            <a:off x="457200" y="5349240"/>
-            <a:ext cx="11247120" cy="320040"/>
-          </a:xfrm>
-          <a:prstGeom prst="rect">
-            <a:avLst/>
-          </a:prstGeom>
-          <a:noFill/>
-        </p:spPr>
-        <p:txBody>
-          <a:bodyPr wrap="none">
-            <a:spAutoFit/>
-          </a:bodyPr>
-          <a:lstStyle/>
-          <a:p>
-            <a:pPr>
-              <a:defRPr sz="1700">
-                <a:solidFill>
-                  <a:srgbClr val="333333"/>
-                </a:solidFill>
-              </a:defRPr>
-            </a:pPr>
-            <a:r>
-              <a:t>student.update(other_dict)</a:t>
-            </a:r>
-          </a:p>
-        </p:txBody>
-      </p:sp>
-      <p:sp>
-        <p:nvSpPr>
-          <p:cNvPr id="21" name="TextBox 20"/>
-          <p:cNvSpPr txBox="1"/>
-          <p:nvPr/>
-        </p:nvSpPr>
-        <p:spPr>
-          <a:xfrm>
-            <a:off x="457200" y="5623559"/>
-            <a:ext cx="11247120" cy="320040"/>
-          </a:xfrm>
-          <a:prstGeom prst="rect">
-            <a:avLst/>
-          </a:prstGeom>
-          <a:noFill/>
-        </p:spPr>
-        <p:txBody>
-          <a:bodyPr wrap="none">
-            <a:spAutoFit/>
-          </a:bodyPr>
-          <a:lstStyle/>
-          <a:p>
-            <a:pPr>
-              <a:defRPr sz="1700">
-                <a:solidFill>
-                  <a:srgbClr val="333333"/>
-                </a:solidFill>
-              </a:defRPr>
-            </a:pPr>
-            <a:r>
-              <a:t>student.copy()  # Shallow copy</a:t>
+              <a:t>student.clear()  # Remove all</a:t>
             </a:r>
           </a:p>
         </p:txBody>
@@ -7509,7 +9281,7 @@
               </a:defRPr>
             </a:pPr>
             <a:r>
-              <a:t>Dictionary Comprehensions</a:t>
+              <a:t>Accessing and Modifying (continued)</a:t>
             </a:r>
           </a:p>
         </p:txBody>
@@ -7587,107 +9359,21 @@
               </a:defRPr>
             </a:pPr>
             <a:r>
-              <a:t>Creating from Lists:</a:t>
-            </a:r>
-          </a:p>
-        </p:txBody>
-      </p:sp>
-      <p:sp>
-        <p:nvSpPr>
-          <p:cNvPr id="8" name="Rectangle 7"/>
-          <p:cNvSpPr/>
-          <p:nvPr/>
-        </p:nvSpPr>
-        <p:spPr>
-          <a:xfrm>
-            <a:off x="640080" y="1783080"/>
-            <a:ext cx="10789920" cy="868680"/>
-          </a:xfrm>
-          <a:prstGeom prst="rect">
-            <a:avLst/>
-          </a:prstGeom>
-          <a:solidFill>
-            <a:srgbClr val="282C34"/>
-          </a:solidFill>
-          <a:ln>
-            <a:noFill/>
-          </a:ln>
-        </p:spPr>
-        <p:style>
-          <a:lnRef idx="1">
-            <a:schemeClr val="accent1"/>
-          </a:lnRef>
-          <a:fillRef idx="3">
-            <a:schemeClr val="accent1"/>
-          </a:fillRef>
-          <a:effectRef idx="2">
-            <a:schemeClr val="accent1"/>
-          </a:effectRef>
-          <a:fontRef idx="minor">
-            <a:schemeClr val="lt1"/>
-          </a:fontRef>
-        </p:style>
-        <p:txBody>
-          <a:bodyPr rtlCol="0" anchor="ctr"/>
-          <a:lstStyle/>
-          <a:p>
-            <a:pPr algn="ctr"/>
-          </a:p>
-        </p:txBody>
-      </p:sp>
-      <p:sp>
-        <p:nvSpPr>
-          <p:cNvPr id="9" name="Rectangle 8"/>
-          <p:cNvSpPr/>
-          <p:nvPr/>
-        </p:nvSpPr>
-        <p:spPr>
-          <a:xfrm>
-            <a:off x="640080" y="1783080"/>
-            <a:ext cx="73152" cy="868680"/>
-          </a:xfrm>
-          <a:prstGeom prst="rect">
-            <a:avLst/>
-          </a:prstGeom>
-          <a:solidFill>
-            <a:srgbClr val="61AFEF"/>
-          </a:solidFill>
-          <a:ln>
-            <a:noFill/>
-          </a:ln>
-        </p:spPr>
-        <p:style>
-          <a:lnRef idx="1">
-            <a:schemeClr val="accent1"/>
-          </a:lnRef>
-          <a:fillRef idx="3">
-            <a:schemeClr val="accent1"/>
-          </a:fillRef>
-          <a:effectRef idx="2">
-            <a:schemeClr val="accent1"/>
-          </a:effectRef>
-          <a:fontRef idx="minor">
-            <a:schemeClr val="lt1"/>
-          </a:fontRef>
-        </p:style>
-        <p:txBody>
-          <a:bodyPr rtlCol="0" anchor="ctr"/>
-          <a:lstStyle/>
-          <a:p>
-            <a:pPr algn="ctr"/>
-          </a:p>
-        </p:txBody>
-      </p:sp>
-      <p:sp>
-        <p:nvSpPr>
-          <p:cNvPr id="10" name="TextBox 9"/>
+              <a:t>Checking Keys:</a:t>
+            </a:r>
+          </a:p>
+        </p:txBody>
+      </p:sp>
+      <p:sp>
+        <p:nvSpPr>
+          <p:cNvPr id="8" name="TextBox 7"/>
           <p:cNvSpPr txBox="1"/>
           <p:nvPr/>
         </p:nvSpPr>
         <p:spPr>
           <a:xfrm>
-            <a:off x="914400" y="1828800"/>
-            <a:ext cx="10241280" cy="777240"/>
+            <a:off x="457200" y="1828800"/>
+            <a:ext cx="11247120" cy="320040"/>
           </a:xfrm>
           <a:prstGeom prst="rect">
             <a:avLst/>
@@ -7701,107 +9387,28 @@
           <a:lstStyle/>
           <a:p>
             <a:pPr>
-              <a:spcAft>
-                <a:spcPts val="200"/>
-              </a:spcAft>
-              <a:defRPr sz="1400">
-                <a:solidFill>
-                  <a:srgbClr val="ABB2BF"/>
-                </a:solidFill>
-                <a:latin typeface="Consolas"/>
-              </a:defRPr>
-            </a:pPr>
-            <a:r>
-              <a:t>keys = ["a", "b", "c"]</a:t>
-            </a:r>
-          </a:p>
-          <a:p>
-            <a:pPr>
-              <a:spcAft>
-                <a:spcPts val="200"/>
-              </a:spcAft>
-              <a:defRPr sz="1400">
-                <a:solidFill>
-                  <a:srgbClr val="ABB2BF"/>
-                </a:solidFill>
-                <a:latin typeface="Consolas"/>
-              </a:defRPr>
-            </a:pPr>
-            <a:r>
-              <a:t>values = [1, 2, 3]</a:t>
-            </a:r>
-          </a:p>
-          <a:p>
-            <a:pPr>
-              <a:spcAft>
-                <a:spcPts val="200"/>
-              </a:spcAft>
-              <a:defRPr sz="1400">
-                <a:solidFill>
-                  <a:srgbClr val="ABB2BF"/>
-                </a:solidFill>
-                <a:latin typeface="Consolas"/>
-              </a:defRPr>
-            </a:pPr>
-            <a:r>
-              <a:t>d = {k: v for k, v in zip(keys, values)}</a:t>
-            </a:r>
-          </a:p>
-        </p:txBody>
-      </p:sp>
-      <p:sp>
-        <p:nvSpPr>
-          <p:cNvPr id="11" name="Rectangle 10"/>
-          <p:cNvSpPr/>
-          <p:nvPr/>
-        </p:nvSpPr>
-        <p:spPr>
-          <a:xfrm>
-            <a:off x="365760" y="2788920"/>
-            <a:ext cx="11430000" cy="365760"/>
-          </a:xfrm>
-          <a:prstGeom prst="rect">
-            <a:avLst/>
-          </a:prstGeom>
-          <a:solidFill>
-            <a:srgbClr val="0078D7"/>
-          </a:solidFill>
-          <a:ln>
-            <a:noFill/>
-          </a:ln>
-        </p:spPr>
-        <p:style>
-          <a:lnRef idx="1">
-            <a:schemeClr val="accent1"/>
-          </a:lnRef>
-          <a:fillRef idx="3">
-            <a:schemeClr val="accent1"/>
-          </a:fillRef>
-          <a:effectRef idx="2">
-            <a:schemeClr val="accent1"/>
-          </a:effectRef>
-          <a:fontRef idx="minor">
-            <a:schemeClr val="lt1"/>
-          </a:fontRef>
-        </p:style>
-        <p:txBody>
-          <a:bodyPr rtlCol="0" anchor="ctr"/>
-          <a:lstStyle/>
-          <a:p>
-            <a:pPr algn="ctr"/>
-          </a:p>
-        </p:txBody>
-      </p:sp>
-      <p:sp>
-        <p:nvSpPr>
-          <p:cNvPr id="12" name="TextBox 11"/>
+              <a:defRPr sz="1700">
+                <a:solidFill>
+                  <a:srgbClr val="333333"/>
+                </a:solidFill>
+              </a:defRPr>
+            </a:pPr>
+            <a:r>
+              <a:t>"name" in student  # True</a:t>
+            </a:r>
+          </a:p>
+        </p:txBody>
+      </p:sp>
+      <p:sp>
+        <p:nvSpPr>
+          <p:cNvPr id="9" name="TextBox 8"/>
           <p:cNvSpPr txBox="1"/>
           <p:nvPr/>
         </p:nvSpPr>
         <p:spPr>
           <a:xfrm>
-            <a:off x="548640" y="2834640"/>
-            <a:ext cx="10972800" cy="274320"/>
+            <a:off x="457200" y="2103120"/>
+            <a:ext cx="11247120" cy="320040"/>
           </a:xfrm>
           <a:prstGeom prst="rect">
             <a:avLst/>
@@ -7815,322 +9422,6 @@
           <a:lstStyle/>
           <a:p>
             <a:pPr>
-              <a:defRPr sz="2000" b="1">
-                <a:solidFill>
-                  <a:srgbClr val="FFFFFF"/>
-                </a:solidFill>
-              </a:defRPr>
-            </a:pPr>
-            <a:r>
-              <a:t>Transforming:</a:t>
-            </a:r>
-          </a:p>
-        </p:txBody>
-      </p:sp>
-      <p:sp>
-        <p:nvSpPr>
-          <p:cNvPr id="13" name="Rectangle 12"/>
-          <p:cNvSpPr/>
-          <p:nvPr/>
-        </p:nvSpPr>
-        <p:spPr>
-          <a:xfrm>
-            <a:off x="640080" y="3246120"/>
-            <a:ext cx="10789920" cy="411480"/>
-          </a:xfrm>
-          <a:prstGeom prst="rect">
-            <a:avLst/>
-          </a:prstGeom>
-          <a:solidFill>
-            <a:srgbClr val="282C34"/>
-          </a:solidFill>
-          <a:ln>
-            <a:noFill/>
-          </a:ln>
-        </p:spPr>
-        <p:style>
-          <a:lnRef idx="1">
-            <a:schemeClr val="accent1"/>
-          </a:lnRef>
-          <a:fillRef idx="3">
-            <a:schemeClr val="accent1"/>
-          </a:fillRef>
-          <a:effectRef idx="2">
-            <a:schemeClr val="accent1"/>
-          </a:effectRef>
-          <a:fontRef idx="minor">
-            <a:schemeClr val="lt1"/>
-          </a:fontRef>
-        </p:style>
-        <p:txBody>
-          <a:bodyPr rtlCol="0" anchor="ctr"/>
-          <a:lstStyle/>
-          <a:p>
-            <a:pPr algn="ctr"/>
-          </a:p>
-        </p:txBody>
-      </p:sp>
-      <p:sp>
-        <p:nvSpPr>
-          <p:cNvPr id="14" name="Rectangle 13"/>
-          <p:cNvSpPr/>
-          <p:nvPr/>
-        </p:nvSpPr>
-        <p:spPr>
-          <a:xfrm>
-            <a:off x="640080" y="3246120"/>
-            <a:ext cx="73152" cy="411480"/>
-          </a:xfrm>
-          <a:prstGeom prst="rect">
-            <a:avLst/>
-          </a:prstGeom>
-          <a:solidFill>
-            <a:srgbClr val="61AFEF"/>
-          </a:solidFill>
-          <a:ln>
-            <a:noFill/>
-          </a:ln>
-        </p:spPr>
-        <p:style>
-          <a:lnRef idx="1">
-            <a:schemeClr val="accent1"/>
-          </a:lnRef>
-          <a:fillRef idx="3">
-            <a:schemeClr val="accent1"/>
-          </a:fillRef>
-          <a:effectRef idx="2">
-            <a:schemeClr val="accent1"/>
-          </a:effectRef>
-          <a:fontRef idx="minor">
-            <a:schemeClr val="lt1"/>
-          </a:fontRef>
-        </p:style>
-        <p:txBody>
-          <a:bodyPr rtlCol="0" anchor="ctr"/>
-          <a:lstStyle/>
-          <a:p>
-            <a:pPr algn="ctr"/>
-          </a:p>
-        </p:txBody>
-      </p:sp>
-      <p:sp>
-        <p:nvSpPr>
-          <p:cNvPr id="15" name="TextBox 14"/>
-          <p:cNvSpPr txBox="1"/>
-          <p:nvPr/>
-        </p:nvSpPr>
-        <p:spPr>
-          <a:xfrm>
-            <a:off x="914400" y="3291840"/>
-            <a:ext cx="10241280" cy="320040"/>
-          </a:xfrm>
-          <a:prstGeom prst="rect">
-            <a:avLst/>
-          </a:prstGeom>
-          <a:noFill/>
-        </p:spPr>
-        <p:txBody>
-          <a:bodyPr wrap="none">
-            <a:spAutoFit/>
-          </a:bodyPr>
-          <a:lstStyle/>
-          <a:p>
-            <a:pPr>
-              <a:spcAft>
-                <a:spcPts val="200"/>
-              </a:spcAft>
-              <a:defRPr sz="1400">
-                <a:solidFill>
-                  <a:srgbClr val="ABB2BF"/>
-                </a:solidFill>
-                <a:latin typeface="Consolas"/>
-              </a:defRPr>
-            </a:pPr>
-            <a:r>
-              <a:t>squares = {x: x**2 for x in range(5)}</a:t>
-            </a:r>
-          </a:p>
-        </p:txBody>
-      </p:sp>
-      <p:sp>
-        <p:nvSpPr>
-          <p:cNvPr id="16" name="Rectangle 15"/>
-          <p:cNvSpPr/>
-          <p:nvPr/>
-        </p:nvSpPr>
-        <p:spPr>
-          <a:xfrm>
-            <a:off x="365760" y="3794760"/>
-            <a:ext cx="11430000" cy="365760"/>
-          </a:xfrm>
-          <a:prstGeom prst="rect">
-            <a:avLst/>
-          </a:prstGeom>
-          <a:solidFill>
-            <a:srgbClr val="0078D7"/>
-          </a:solidFill>
-          <a:ln>
-            <a:noFill/>
-          </a:ln>
-        </p:spPr>
-        <p:style>
-          <a:lnRef idx="1">
-            <a:schemeClr val="accent1"/>
-          </a:lnRef>
-          <a:fillRef idx="3">
-            <a:schemeClr val="accent1"/>
-          </a:fillRef>
-          <a:effectRef idx="2">
-            <a:schemeClr val="accent1"/>
-          </a:effectRef>
-          <a:fontRef idx="minor">
-            <a:schemeClr val="lt1"/>
-          </a:fontRef>
-        </p:style>
-        <p:txBody>
-          <a:bodyPr rtlCol="0" anchor="ctr"/>
-          <a:lstStyle/>
-          <a:p>
-            <a:pPr algn="ctr"/>
-          </a:p>
-        </p:txBody>
-      </p:sp>
-      <p:sp>
-        <p:nvSpPr>
-          <p:cNvPr id="17" name="TextBox 16"/>
-          <p:cNvSpPr txBox="1"/>
-          <p:nvPr/>
-        </p:nvSpPr>
-        <p:spPr>
-          <a:xfrm>
-            <a:off x="548640" y="3840480"/>
-            <a:ext cx="10972800" cy="274320"/>
-          </a:xfrm>
-          <a:prstGeom prst="rect">
-            <a:avLst/>
-          </a:prstGeom>
-          <a:noFill/>
-        </p:spPr>
-        <p:txBody>
-          <a:bodyPr wrap="none">
-            <a:spAutoFit/>
-          </a:bodyPr>
-          <a:lstStyle/>
-          <a:p>
-            <a:pPr>
-              <a:defRPr sz="2000" b="1">
-                <a:solidFill>
-                  <a:srgbClr val="FFFFFF"/>
-                </a:solidFill>
-              </a:defRPr>
-            </a:pPr>
-            <a:r>
-              <a:t># {0: 0, 1: 1, 2: 4, 3: 9, 4: 16}</a:t>
-            </a:r>
-          </a:p>
-        </p:txBody>
-      </p:sp>
-      <p:sp>
-        <p:nvSpPr>
-          <p:cNvPr id="18" name="Rectangle 17"/>
-          <p:cNvSpPr/>
-          <p:nvPr/>
-        </p:nvSpPr>
-        <p:spPr>
-          <a:xfrm>
-            <a:off x="365760" y="4251960"/>
-            <a:ext cx="11430000" cy="365760"/>
-          </a:xfrm>
-          <a:prstGeom prst="rect">
-            <a:avLst/>
-          </a:prstGeom>
-          <a:solidFill>
-            <a:srgbClr val="0078D7"/>
-          </a:solidFill>
-          <a:ln>
-            <a:noFill/>
-          </a:ln>
-        </p:spPr>
-        <p:style>
-          <a:lnRef idx="1">
-            <a:schemeClr val="accent1"/>
-          </a:lnRef>
-          <a:fillRef idx="3">
-            <a:schemeClr val="accent1"/>
-          </a:fillRef>
-          <a:effectRef idx="2">
-            <a:schemeClr val="accent1"/>
-          </a:effectRef>
-          <a:fontRef idx="minor">
-            <a:schemeClr val="lt1"/>
-          </a:fontRef>
-        </p:style>
-        <p:txBody>
-          <a:bodyPr rtlCol="0" anchor="ctr"/>
-          <a:lstStyle/>
-          <a:p>
-            <a:pPr algn="ctr"/>
-          </a:p>
-        </p:txBody>
-      </p:sp>
-      <p:sp>
-        <p:nvSpPr>
-          <p:cNvPr id="19" name="TextBox 18"/>
-          <p:cNvSpPr txBox="1"/>
-          <p:nvPr/>
-        </p:nvSpPr>
-        <p:spPr>
-          <a:xfrm>
-            <a:off x="548640" y="4297680"/>
-            <a:ext cx="10972800" cy="274320"/>
-          </a:xfrm>
-          <a:prstGeom prst="rect">
-            <a:avLst/>
-          </a:prstGeom>
-          <a:noFill/>
-        </p:spPr>
-        <p:txBody>
-          <a:bodyPr wrap="none">
-            <a:spAutoFit/>
-          </a:bodyPr>
-          <a:lstStyle/>
-          <a:p>
-            <a:pPr>
-              <a:defRPr sz="2000" b="1">
-                <a:solidFill>
-                  <a:srgbClr val="FFFFFF"/>
-                </a:solidFill>
-              </a:defRPr>
-            </a:pPr>
-            <a:r>
-              <a:t>Filtering:</a:t>
-            </a:r>
-          </a:p>
-        </p:txBody>
-      </p:sp>
-      <p:sp>
-        <p:nvSpPr>
-          <p:cNvPr id="20" name="TextBox 19"/>
-          <p:cNvSpPr txBox="1"/>
-          <p:nvPr/>
-        </p:nvSpPr>
-        <p:spPr>
-          <a:xfrm>
-            <a:off x="457200" y="4754880"/>
-            <a:ext cx="11247120" cy="320040"/>
-          </a:xfrm>
-          <a:prstGeom prst="rect">
-            <a:avLst/>
-          </a:prstGeom>
-          <a:noFill/>
-        </p:spPr>
-        <p:txBody>
-          <a:bodyPr wrap="none">
-            <a:spAutoFit/>
-          </a:bodyPr>
-          <a:lstStyle/>
-          <a:p>
-            <a:pPr>
               <a:defRPr sz="1700">
                 <a:solidFill>
                   <a:srgbClr val="333333"/>
@@ -8138,210 +9429,7 @@
               </a:defRPr>
             </a:pPr>
             <a:r>
-              <a:t>scores = {"Alice": 90, "Bob": 75, "Charlie": 85}</a:t>
-            </a:r>
-          </a:p>
-        </p:txBody>
-      </p:sp>
-      <p:sp>
-        <p:nvSpPr>
-          <p:cNvPr id="21" name="Rectangle 20"/>
-          <p:cNvSpPr/>
-          <p:nvPr/>
-        </p:nvSpPr>
-        <p:spPr>
-          <a:xfrm>
-            <a:off x="640080" y="4983480"/>
-            <a:ext cx="10789920" cy="411480"/>
-          </a:xfrm>
-          <a:prstGeom prst="rect">
-            <a:avLst/>
-          </a:prstGeom>
-          <a:solidFill>
-            <a:srgbClr val="282C34"/>
-          </a:solidFill>
-          <a:ln>
-            <a:noFill/>
-          </a:ln>
-        </p:spPr>
-        <p:style>
-          <a:lnRef idx="1">
-            <a:schemeClr val="accent1"/>
-          </a:lnRef>
-          <a:fillRef idx="3">
-            <a:schemeClr val="accent1"/>
-          </a:fillRef>
-          <a:effectRef idx="2">
-            <a:schemeClr val="accent1"/>
-          </a:effectRef>
-          <a:fontRef idx="minor">
-            <a:schemeClr val="lt1"/>
-          </a:fontRef>
-        </p:style>
-        <p:txBody>
-          <a:bodyPr rtlCol="0" anchor="ctr"/>
-          <a:lstStyle/>
-          <a:p>
-            <a:pPr algn="ctr"/>
-          </a:p>
-        </p:txBody>
-      </p:sp>
-      <p:sp>
-        <p:nvSpPr>
-          <p:cNvPr id="22" name="Rectangle 21"/>
-          <p:cNvSpPr/>
-          <p:nvPr/>
-        </p:nvSpPr>
-        <p:spPr>
-          <a:xfrm>
-            <a:off x="640080" y="4983480"/>
-            <a:ext cx="73152" cy="411480"/>
-          </a:xfrm>
-          <a:prstGeom prst="rect">
-            <a:avLst/>
-          </a:prstGeom>
-          <a:solidFill>
-            <a:srgbClr val="61AFEF"/>
-          </a:solidFill>
-          <a:ln>
-            <a:noFill/>
-          </a:ln>
-        </p:spPr>
-        <p:style>
-          <a:lnRef idx="1">
-            <a:schemeClr val="accent1"/>
-          </a:lnRef>
-          <a:fillRef idx="3">
-            <a:schemeClr val="accent1"/>
-          </a:fillRef>
-          <a:effectRef idx="2">
-            <a:schemeClr val="accent1"/>
-          </a:effectRef>
-          <a:fontRef idx="minor">
-            <a:schemeClr val="lt1"/>
-          </a:fontRef>
-        </p:style>
-        <p:txBody>
-          <a:bodyPr rtlCol="0" anchor="ctr"/>
-          <a:lstStyle/>
-          <a:p>
-            <a:pPr algn="ctr"/>
-          </a:p>
-        </p:txBody>
-      </p:sp>
-      <p:sp>
-        <p:nvSpPr>
-          <p:cNvPr id="23" name="TextBox 22"/>
-          <p:cNvSpPr txBox="1"/>
-          <p:nvPr/>
-        </p:nvSpPr>
-        <p:spPr>
-          <a:xfrm>
-            <a:off x="914400" y="5029200"/>
-            <a:ext cx="10241280" cy="320040"/>
-          </a:xfrm>
-          <a:prstGeom prst="rect">
-            <a:avLst/>
-          </a:prstGeom>
-          <a:noFill/>
-        </p:spPr>
-        <p:txBody>
-          <a:bodyPr wrap="none">
-            <a:spAutoFit/>
-          </a:bodyPr>
-          <a:lstStyle/>
-          <a:p>
-            <a:pPr>
-              <a:spcAft>
-                <a:spcPts val="200"/>
-              </a:spcAft>
-              <a:defRPr sz="1400">
-                <a:solidFill>
-                  <a:srgbClr val="ABB2BF"/>
-                </a:solidFill>
-                <a:latin typeface="Consolas"/>
-              </a:defRPr>
-            </a:pPr>
-            <a:r>
-              <a:t>high_scores = {k: v for k, v in scores.items() if v &gt;= 80}</a:t>
-            </a:r>
-          </a:p>
-        </p:txBody>
-      </p:sp>
-      <p:sp>
-        <p:nvSpPr>
-          <p:cNvPr id="24" name="Rectangle 23"/>
-          <p:cNvSpPr/>
-          <p:nvPr/>
-        </p:nvSpPr>
-        <p:spPr>
-          <a:xfrm>
-            <a:off x="365760" y="5532120"/>
-            <a:ext cx="11430000" cy="365760"/>
-          </a:xfrm>
-          <a:prstGeom prst="rect">
-            <a:avLst/>
-          </a:prstGeom>
-          <a:solidFill>
-            <a:srgbClr val="0078D7"/>
-          </a:solidFill>
-          <a:ln>
-            <a:noFill/>
-          </a:ln>
-        </p:spPr>
-        <p:style>
-          <a:lnRef idx="1">
-            <a:schemeClr val="accent1"/>
-          </a:lnRef>
-          <a:fillRef idx="3">
-            <a:schemeClr val="accent1"/>
-          </a:fillRef>
-          <a:effectRef idx="2">
-            <a:schemeClr val="accent1"/>
-          </a:effectRef>
-          <a:fontRef idx="minor">
-            <a:schemeClr val="lt1"/>
-          </a:fontRef>
-        </p:style>
-        <p:txBody>
-          <a:bodyPr rtlCol="0" anchor="ctr"/>
-          <a:lstStyle/>
-          <a:p>
-            <a:pPr algn="ctr"/>
-          </a:p>
-        </p:txBody>
-      </p:sp>
-      <p:sp>
-        <p:nvSpPr>
-          <p:cNvPr id="25" name="TextBox 24"/>
-          <p:cNvSpPr txBox="1"/>
-          <p:nvPr/>
-        </p:nvSpPr>
-        <p:spPr>
-          <a:xfrm>
-            <a:off x="548640" y="5577840"/>
-            <a:ext cx="10972800" cy="274320"/>
-          </a:xfrm>
-          <a:prstGeom prst="rect">
-            <a:avLst/>
-          </a:prstGeom>
-          <a:noFill/>
-        </p:spPr>
-        <p:txBody>
-          <a:bodyPr wrap="none">
-            <a:spAutoFit/>
-          </a:bodyPr>
-          <a:lstStyle/>
-          <a:p>
-            <a:pPr>
-              <a:defRPr sz="2000" b="1">
-                <a:solidFill>
-                  <a:srgbClr val="FFFFFF"/>
-                </a:solidFill>
-              </a:defRPr>
-            </a:pPr>
-            <a:r>
-              <a:t>Case Transform:</a:t>
+              <a:t>"email" not in student  # True</a:t>
             </a:r>
           </a:p>
         </p:txBody>
@@ -8379,7 +9467,7 @@
             <a:avLst/>
           </a:prstGeom>
           <a:solidFill>
-            <a:srgbClr val="0066CC"/>
+            <a:srgbClr val="FAFAFA"/>
           </a:solidFill>
           <a:ln>
             <a:noFill/>
@@ -8415,14 +9503,14 @@
         </p:nvSpPr>
         <p:spPr>
           <a:xfrm>
-            <a:off x="0" y="2743200"/>
-            <a:ext cx="3657600" cy="137160"/>
-          </a:xfrm>
-          <a:prstGeom prst="rect">
-            <a:avLst/>
-          </a:prstGeom>
-          <a:solidFill>
-            <a:srgbClr val="FFBB33"/>
+            <a:off x="0" y="0"/>
+            <a:ext cx="12191695" cy="1097280"/>
+          </a:xfrm>
+          <a:prstGeom prst="rect">
+            <a:avLst/>
+          </a:prstGeom>
+          <a:solidFill>
+            <a:srgbClr val="0066CC"/>
           </a:solidFill>
           <a:ln>
             <a:noFill/>
@@ -8458,8 +9546,8 @@
         </p:nvSpPr>
         <p:spPr>
           <a:xfrm>
-            <a:off x="8531352" y="4114800"/>
-            <a:ext cx="3657600" cy="137160"/>
+            <a:off x="0" y="1097280"/>
+            <a:ext cx="137160" cy="5760720"/>
           </a:xfrm>
           <a:prstGeom prst="rect">
             <a:avLst/>
@@ -8501,8 +9589,8 @@
         </p:nvSpPr>
         <p:spPr>
           <a:xfrm>
-            <a:off x="914400" y="2560320"/>
-            <a:ext cx="10360152" cy="1371600"/>
+            <a:off x="365760" y="274320"/>
+            <a:ext cx="10972800" cy="640080"/>
           </a:xfrm>
           <a:prstGeom prst="rect">
             <a:avLst/>
@@ -8515,15 +9603,667 @@
           </a:bodyPr>
           <a:lstStyle/>
           <a:p>
-            <a:pPr algn="ctr">
-              <a:defRPr sz="4800" b="1">
+            <a:pPr>
+              <a:defRPr sz="3600" b="1">
                 <a:solidFill>
                   <a:srgbClr val="FFFFFF"/>
                 </a:solidFill>
               </a:defRPr>
             </a:pPr>
             <a:r>
-              <a:t>Nested Dictionaries</a:t>
+              <a:t>Dictionary Methods</a:t>
+            </a:r>
+          </a:p>
+        </p:txBody>
+      </p:sp>
+      <p:sp>
+        <p:nvSpPr>
+          <p:cNvPr id="6" name="Rectangle 5"/>
+          <p:cNvSpPr/>
+          <p:nvPr/>
+        </p:nvSpPr>
+        <p:spPr>
+          <a:xfrm>
+            <a:off x="365760" y="1325880"/>
+            <a:ext cx="11430000" cy="365760"/>
+          </a:xfrm>
+          <a:prstGeom prst="rect">
+            <a:avLst/>
+          </a:prstGeom>
+          <a:solidFill>
+            <a:srgbClr val="0078D7"/>
+          </a:solidFill>
+          <a:ln>
+            <a:noFill/>
+          </a:ln>
+        </p:spPr>
+        <p:style>
+          <a:lnRef idx="1">
+            <a:schemeClr val="accent1"/>
+          </a:lnRef>
+          <a:fillRef idx="3">
+            <a:schemeClr val="accent1"/>
+          </a:fillRef>
+          <a:effectRef idx="2">
+            <a:schemeClr val="accent1"/>
+          </a:effectRef>
+          <a:fontRef idx="minor">
+            <a:schemeClr val="lt1"/>
+          </a:fontRef>
+        </p:style>
+        <p:txBody>
+          <a:bodyPr rtlCol="0" anchor="ctr"/>
+          <a:lstStyle/>
+          <a:p>
+            <a:pPr algn="ctr"/>
+          </a:p>
+        </p:txBody>
+      </p:sp>
+      <p:sp>
+        <p:nvSpPr>
+          <p:cNvPr id="7" name="TextBox 6"/>
+          <p:cNvSpPr txBox="1"/>
+          <p:nvPr/>
+        </p:nvSpPr>
+        <p:spPr>
+          <a:xfrm>
+            <a:off x="548640" y="1371600"/>
+            <a:ext cx="10972800" cy="274320"/>
+          </a:xfrm>
+          <a:prstGeom prst="rect">
+            <a:avLst/>
+          </a:prstGeom>
+          <a:noFill/>
+        </p:spPr>
+        <p:txBody>
+          <a:bodyPr wrap="none">
+            <a:spAutoFit/>
+          </a:bodyPr>
+          <a:lstStyle/>
+          <a:p>
+            <a:pPr>
+              <a:defRPr sz="2000" b="1">
+                <a:solidFill>
+                  <a:srgbClr val="FFFFFF"/>
+                </a:solidFill>
+              </a:defRPr>
+            </a:pPr>
+            <a:r>
+              <a:t>Keys, Values, Items:</a:t>
+            </a:r>
+          </a:p>
+        </p:txBody>
+      </p:sp>
+      <p:sp>
+        <p:nvSpPr>
+          <p:cNvPr id="8" name="TextBox 7"/>
+          <p:cNvSpPr txBox="1"/>
+          <p:nvPr/>
+        </p:nvSpPr>
+        <p:spPr>
+          <a:xfrm>
+            <a:off x="457200" y="1828800"/>
+            <a:ext cx="11247120" cy="320040"/>
+          </a:xfrm>
+          <a:prstGeom prst="rect">
+            <a:avLst/>
+          </a:prstGeom>
+          <a:noFill/>
+        </p:spPr>
+        <p:txBody>
+          <a:bodyPr wrap="none">
+            <a:spAutoFit/>
+          </a:bodyPr>
+          <a:lstStyle/>
+          <a:p>
+            <a:pPr>
+              <a:defRPr sz="1700">
+                <a:solidFill>
+                  <a:srgbClr val="333333"/>
+                </a:solidFill>
+              </a:defRPr>
+            </a:pPr>
+            <a:r>
+              <a:t>student.keys()  # dict_keys([...])</a:t>
+            </a:r>
+          </a:p>
+        </p:txBody>
+      </p:sp>
+      <p:sp>
+        <p:nvSpPr>
+          <p:cNvPr id="9" name="TextBox 8"/>
+          <p:cNvSpPr txBox="1"/>
+          <p:nvPr/>
+        </p:nvSpPr>
+        <p:spPr>
+          <a:xfrm>
+            <a:off x="457200" y="2103120"/>
+            <a:ext cx="11247120" cy="320040"/>
+          </a:xfrm>
+          <a:prstGeom prst="rect">
+            <a:avLst/>
+          </a:prstGeom>
+          <a:noFill/>
+        </p:spPr>
+        <p:txBody>
+          <a:bodyPr wrap="none">
+            <a:spAutoFit/>
+          </a:bodyPr>
+          <a:lstStyle/>
+          <a:p>
+            <a:pPr>
+              <a:defRPr sz="1700">
+                <a:solidFill>
+                  <a:srgbClr val="333333"/>
+                </a:solidFill>
+              </a:defRPr>
+            </a:pPr>
+            <a:r>
+              <a:t>student.values()  # dict_values([...])</a:t>
+            </a:r>
+          </a:p>
+        </p:txBody>
+      </p:sp>
+      <p:sp>
+        <p:nvSpPr>
+          <p:cNvPr id="10" name="TextBox 9"/>
+          <p:cNvSpPr txBox="1"/>
+          <p:nvPr/>
+        </p:nvSpPr>
+        <p:spPr>
+          <a:xfrm>
+            <a:off x="457200" y="2377439"/>
+            <a:ext cx="11247120" cy="320040"/>
+          </a:xfrm>
+          <a:prstGeom prst="rect">
+            <a:avLst/>
+          </a:prstGeom>
+          <a:noFill/>
+        </p:spPr>
+        <p:txBody>
+          <a:bodyPr wrap="none">
+            <a:spAutoFit/>
+          </a:bodyPr>
+          <a:lstStyle/>
+          <a:p>
+            <a:pPr>
+              <a:defRPr sz="1700">
+                <a:solidFill>
+                  <a:srgbClr val="333333"/>
+                </a:solidFill>
+              </a:defRPr>
+            </a:pPr>
+            <a:r>
+              <a:t>student.items()  # dict_items([...])</a:t>
+            </a:r>
+          </a:p>
+        </p:txBody>
+      </p:sp>
+      <p:sp>
+        <p:nvSpPr>
+          <p:cNvPr id="11" name="Rectangle 10"/>
+          <p:cNvSpPr/>
+          <p:nvPr/>
+        </p:nvSpPr>
+        <p:spPr>
+          <a:xfrm>
+            <a:off x="365760" y="2606039"/>
+            <a:ext cx="11430000" cy="365760"/>
+          </a:xfrm>
+          <a:prstGeom prst="rect">
+            <a:avLst/>
+          </a:prstGeom>
+          <a:solidFill>
+            <a:srgbClr val="0078D7"/>
+          </a:solidFill>
+          <a:ln>
+            <a:noFill/>
+          </a:ln>
+        </p:spPr>
+        <p:style>
+          <a:lnRef idx="1">
+            <a:schemeClr val="accent1"/>
+          </a:lnRef>
+          <a:fillRef idx="3">
+            <a:schemeClr val="accent1"/>
+          </a:fillRef>
+          <a:effectRef idx="2">
+            <a:schemeClr val="accent1"/>
+          </a:effectRef>
+          <a:fontRef idx="minor">
+            <a:schemeClr val="lt1"/>
+          </a:fontRef>
+        </p:style>
+        <p:txBody>
+          <a:bodyPr rtlCol="0" anchor="ctr"/>
+          <a:lstStyle/>
+          <a:p>
+            <a:pPr algn="ctr"/>
+          </a:p>
+        </p:txBody>
+      </p:sp>
+      <p:sp>
+        <p:nvSpPr>
+          <p:cNvPr id="12" name="TextBox 11"/>
+          <p:cNvSpPr txBox="1"/>
+          <p:nvPr/>
+        </p:nvSpPr>
+        <p:spPr>
+          <a:xfrm>
+            <a:off x="548640" y="2651759"/>
+            <a:ext cx="10972800" cy="274320"/>
+          </a:xfrm>
+          <a:prstGeom prst="rect">
+            <a:avLst/>
+          </a:prstGeom>
+          <a:noFill/>
+        </p:spPr>
+        <p:txBody>
+          <a:bodyPr wrap="none">
+            <a:spAutoFit/>
+          </a:bodyPr>
+          <a:lstStyle/>
+          <a:p>
+            <a:pPr>
+              <a:defRPr sz="2000" b="1">
+                <a:solidFill>
+                  <a:srgbClr val="FFFFFF"/>
+                </a:solidFill>
+              </a:defRPr>
+            </a:pPr>
+            <a:r>
+              <a:t>Iterating:</a:t>
+            </a:r>
+          </a:p>
+        </p:txBody>
+      </p:sp>
+      <p:sp>
+        <p:nvSpPr>
+          <p:cNvPr id="13" name="Rectangle 12"/>
+          <p:cNvSpPr/>
+          <p:nvPr/>
+        </p:nvSpPr>
+        <p:spPr>
+          <a:xfrm>
+            <a:off x="640080" y="3063239"/>
+            <a:ext cx="10789920" cy="1097280"/>
+          </a:xfrm>
+          <a:prstGeom prst="rect">
+            <a:avLst/>
+          </a:prstGeom>
+          <a:solidFill>
+            <a:srgbClr val="282C34"/>
+          </a:solidFill>
+          <a:ln>
+            <a:noFill/>
+          </a:ln>
+        </p:spPr>
+        <p:style>
+          <a:lnRef idx="1">
+            <a:schemeClr val="accent1"/>
+          </a:lnRef>
+          <a:fillRef idx="3">
+            <a:schemeClr val="accent1"/>
+          </a:fillRef>
+          <a:effectRef idx="2">
+            <a:schemeClr val="accent1"/>
+          </a:effectRef>
+          <a:fontRef idx="minor">
+            <a:schemeClr val="lt1"/>
+          </a:fontRef>
+        </p:style>
+        <p:txBody>
+          <a:bodyPr rtlCol="0" anchor="ctr"/>
+          <a:lstStyle/>
+          <a:p>
+            <a:pPr algn="ctr"/>
+          </a:p>
+        </p:txBody>
+      </p:sp>
+      <p:sp>
+        <p:nvSpPr>
+          <p:cNvPr id="14" name="Rectangle 13"/>
+          <p:cNvSpPr/>
+          <p:nvPr/>
+        </p:nvSpPr>
+        <p:spPr>
+          <a:xfrm>
+            <a:off x="640080" y="3063239"/>
+            <a:ext cx="73152" cy="1097280"/>
+          </a:xfrm>
+          <a:prstGeom prst="rect">
+            <a:avLst/>
+          </a:prstGeom>
+          <a:solidFill>
+            <a:srgbClr val="61AFEF"/>
+          </a:solidFill>
+          <a:ln>
+            <a:noFill/>
+          </a:ln>
+        </p:spPr>
+        <p:style>
+          <a:lnRef idx="1">
+            <a:schemeClr val="accent1"/>
+          </a:lnRef>
+          <a:fillRef idx="3">
+            <a:schemeClr val="accent1"/>
+          </a:fillRef>
+          <a:effectRef idx="2">
+            <a:schemeClr val="accent1"/>
+          </a:effectRef>
+          <a:fontRef idx="minor">
+            <a:schemeClr val="lt1"/>
+          </a:fontRef>
+        </p:style>
+        <p:txBody>
+          <a:bodyPr rtlCol="0" anchor="ctr"/>
+          <a:lstStyle/>
+          <a:p>
+            <a:pPr algn="ctr"/>
+          </a:p>
+        </p:txBody>
+      </p:sp>
+      <p:sp>
+        <p:nvSpPr>
+          <p:cNvPr id="15" name="TextBox 14"/>
+          <p:cNvSpPr txBox="1"/>
+          <p:nvPr/>
+        </p:nvSpPr>
+        <p:spPr>
+          <a:xfrm>
+            <a:off x="914400" y="3108959"/>
+            <a:ext cx="10241280" cy="1005839"/>
+          </a:xfrm>
+          <a:prstGeom prst="rect">
+            <a:avLst/>
+          </a:prstGeom>
+          <a:noFill/>
+        </p:spPr>
+        <p:txBody>
+          <a:bodyPr wrap="none">
+            <a:spAutoFit/>
+          </a:bodyPr>
+          <a:lstStyle/>
+          <a:p>
+            <a:pPr>
+              <a:spcAft>
+                <a:spcPts val="200"/>
+              </a:spcAft>
+              <a:defRPr sz="1400">
+                <a:solidFill>
+                  <a:srgbClr val="ABB2BF"/>
+                </a:solidFill>
+                <a:latin typeface="Consolas"/>
+              </a:defRPr>
+            </a:pPr>
+            <a:r>
+              <a:t>for key in student:</a:t>
+            </a:r>
+          </a:p>
+          <a:p>
+            <a:pPr>
+              <a:spcAft>
+                <a:spcPts val="200"/>
+              </a:spcAft>
+              <a:defRPr sz="1400">
+                <a:solidFill>
+                  <a:srgbClr val="ABB2BF"/>
+                </a:solidFill>
+                <a:latin typeface="Consolas"/>
+              </a:defRPr>
+            </a:pPr>
+            <a:r>
+              <a:t>    print(key, student[key])</a:t>
+            </a:r>
+          </a:p>
+          <a:p>
+            <a:pPr>
+              <a:spcAft>
+                <a:spcPts val="200"/>
+              </a:spcAft>
+              <a:defRPr sz="1400">
+                <a:solidFill>
+                  <a:srgbClr val="ABB2BF"/>
+                </a:solidFill>
+                <a:latin typeface="Consolas"/>
+              </a:defRPr>
+            </a:pPr>
+            <a:r>
+              <a:t>for key, value in student.items():</a:t>
+            </a:r>
+          </a:p>
+          <a:p>
+            <a:pPr>
+              <a:spcAft>
+                <a:spcPts val="200"/>
+              </a:spcAft>
+              <a:defRPr sz="1400">
+                <a:solidFill>
+                  <a:srgbClr val="ABB2BF"/>
+                </a:solidFill>
+                <a:latin typeface="Consolas"/>
+              </a:defRPr>
+            </a:pPr>
+            <a:r>
+              <a:t>    print(f"{key}: {value}")</a:t>
+            </a:r>
+          </a:p>
+        </p:txBody>
+      </p:sp>
+      <p:sp>
+        <p:nvSpPr>
+          <p:cNvPr id="16" name="Rectangle 15"/>
+          <p:cNvSpPr/>
+          <p:nvPr/>
+        </p:nvSpPr>
+        <p:spPr>
+          <a:xfrm>
+            <a:off x="365760" y="4297680"/>
+            <a:ext cx="11430000" cy="365760"/>
+          </a:xfrm>
+          <a:prstGeom prst="rect">
+            <a:avLst/>
+          </a:prstGeom>
+          <a:solidFill>
+            <a:srgbClr val="0078D7"/>
+          </a:solidFill>
+          <a:ln>
+            <a:noFill/>
+          </a:ln>
+        </p:spPr>
+        <p:style>
+          <a:lnRef idx="1">
+            <a:schemeClr val="accent1"/>
+          </a:lnRef>
+          <a:fillRef idx="3">
+            <a:schemeClr val="accent1"/>
+          </a:fillRef>
+          <a:effectRef idx="2">
+            <a:schemeClr val="accent1"/>
+          </a:effectRef>
+          <a:fontRef idx="minor">
+            <a:schemeClr val="lt1"/>
+          </a:fontRef>
+        </p:style>
+        <p:txBody>
+          <a:bodyPr rtlCol="0" anchor="ctr"/>
+          <a:lstStyle/>
+          <a:p>
+            <a:pPr algn="ctr"/>
+          </a:p>
+        </p:txBody>
+      </p:sp>
+      <p:sp>
+        <p:nvSpPr>
+          <p:cNvPr id="17" name="TextBox 16"/>
+          <p:cNvSpPr txBox="1"/>
+          <p:nvPr/>
+        </p:nvSpPr>
+        <p:spPr>
+          <a:xfrm>
+            <a:off x="548640" y="4343400"/>
+            <a:ext cx="10972800" cy="274320"/>
+          </a:xfrm>
+          <a:prstGeom prst="rect">
+            <a:avLst/>
+          </a:prstGeom>
+          <a:noFill/>
+        </p:spPr>
+        <p:txBody>
+          <a:bodyPr wrap="none">
+            <a:spAutoFit/>
+          </a:bodyPr>
+          <a:lstStyle/>
+          <a:p>
+            <a:pPr>
+              <a:defRPr sz="2000" b="1">
+                <a:solidFill>
+                  <a:srgbClr val="FFFFFF"/>
+                </a:solidFill>
+              </a:defRPr>
+            </a:pPr>
+            <a:r>
+              <a:t>Other Methods:</a:t>
+            </a:r>
+          </a:p>
+        </p:txBody>
+      </p:sp>
+      <p:sp>
+        <p:nvSpPr>
+          <p:cNvPr id="18" name="TextBox 17"/>
+          <p:cNvSpPr txBox="1"/>
+          <p:nvPr/>
+        </p:nvSpPr>
+        <p:spPr>
+          <a:xfrm>
+            <a:off x="457200" y="4800600"/>
+            <a:ext cx="11247120" cy="320040"/>
+          </a:xfrm>
+          <a:prstGeom prst="rect">
+            <a:avLst/>
+          </a:prstGeom>
+          <a:noFill/>
+        </p:spPr>
+        <p:txBody>
+          <a:bodyPr wrap="none">
+            <a:spAutoFit/>
+          </a:bodyPr>
+          <a:lstStyle/>
+          <a:p>
+            <a:pPr>
+              <a:defRPr sz="1700">
+                <a:solidFill>
+                  <a:srgbClr val="333333"/>
+                </a:solidFill>
+              </a:defRPr>
+            </a:pPr>
+            <a:r>
+              <a:t>student.get(key, default)</a:t>
+            </a:r>
+          </a:p>
+        </p:txBody>
+      </p:sp>
+      <p:sp>
+        <p:nvSpPr>
+          <p:cNvPr id="19" name="TextBox 18"/>
+          <p:cNvSpPr txBox="1"/>
+          <p:nvPr/>
+        </p:nvSpPr>
+        <p:spPr>
+          <a:xfrm>
+            <a:off x="457200" y="5074920"/>
+            <a:ext cx="11247120" cy="320040"/>
+          </a:xfrm>
+          <a:prstGeom prst="rect">
+            <a:avLst/>
+          </a:prstGeom>
+          <a:noFill/>
+        </p:spPr>
+        <p:txBody>
+          <a:bodyPr wrap="none">
+            <a:spAutoFit/>
+          </a:bodyPr>
+          <a:lstStyle/>
+          <a:p>
+            <a:pPr>
+              <a:defRPr sz="1700">
+                <a:solidFill>
+                  <a:srgbClr val="333333"/>
+                </a:solidFill>
+              </a:defRPr>
+            </a:pPr>
+            <a:r>
+              <a:t>student.setdefault(key, default)</a:t>
+            </a:r>
+          </a:p>
+        </p:txBody>
+      </p:sp>
+      <p:sp>
+        <p:nvSpPr>
+          <p:cNvPr id="20" name="TextBox 19"/>
+          <p:cNvSpPr txBox="1"/>
+          <p:nvPr/>
+        </p:nvSpPr>
+        <p:spPr>
+          <a:xfrm>
+            <a:off x="457200" y="5349240"/>
+            <a:ext cx="11247120" cy="320040"/>
+          </a:xfrm>
+          <a:prstGeom prst="rect">
+            <a:avLst/>
+          </a:prstGeom>
+          <a:noFill/>
+        </p:spPr>
+        <p:txBody>
+          <a:bodyPr wrap="none">
+            <a:spAutoFit/>
+          </a:bodyPr>
+          <a:lstStyle/>
+          <a:p>
+            <a:pPr>
+              <a:defRPr sz="1700">
+                <a:solidFill>
+                  <a:srgbClr val="333333"/>
+                </a:solidFill>
+              </a:defRPr>
+            </a:pPr>
+            <a:r>
+              <a:t>student.update(other_dict)</a:t>
+            </a:r>
+          </a:p>
+        </p:txBody>
+      </p:sp>
+      <p:sp>
+        <p:nvSpPr>
+          <p:cNvPr id="21" name="TextBox 20"/>
+          <p:cNvSpPr txBox="1"/>
+          <p:nvPr/>
+        </p:nvSpPr>
+        <p:spPr>
+          <a:xfrm>
+            <a:off x="457200" y="5623559"/>
+            <a:ext cx="11247120" cy="320040"/>
+          </a:xfrm>
+          <a:prstGeom prst="rect">
+            <a:avLst/>
+          </a:prstGeom>
+          <a:noFill/>
+        </p:spPr>
+        <p:txBody>
+          <a:bodyPr wrap="none">
+            <a:spAutoFit/>
+          </a:bodyPr>
+          <a:lstStyle/>
+          <a:p>
+            <a:pPr>
+              <a:defRPr sz="1700">
+                <a:solidFill>
+                  <a:srgbClr val="333333"/>
+                </a:solidFill>
+              </a:defRPr>
+            </a:pPr>
+            <a:r>
+              <a:t>student.copy()  # Shallow copy</a:t>
             </a:r>
           </a:p>
         </p:txBody>
@@ -8705,7 +10445,7 @@
               </a:defRPr>
             </a:pPr>
             <a:r>
-              <a:t>Nested Dictionaries</a:t>
+              <a:t>Dictionary Comprehensions</a:t>
             </a:r>
           </a:p>
         </p:txBody>
@@ -8783,7 +10523,7 @@
               </a:defRPr>
             </a:pPr>
             <a:r>
-              <a:t>Structure:</a:t>
+              <a:t>Creating from Lists:</a:t>
             </a:r>
           </a:p>
         </p:txBody>
@@ -8908,7 +10648,7 @@
               </a:defRPr>
             </a:pPr>
             <a:r>
-              <a:t>students = {</a:t>
+              <a:t>keys = ["a", "b", "c"]</a:t>
             </a:r>
           </a:p>
           <a:p>
@@ -8924,7 +10664,7 @@
               </a:defRPr>
             </a:pPr>
             <a:r>
-              <a:t>    "student1": {"name": "Alice", "grade": "A"},</a:t>
+              <a:t>values = [1, 2, 3]</a:t>
             </a:r>
           </a:p>
           <a:p>
@@ -8940,55 +10680,20 @@
               </a:defRPr>
             </a:pPr>
             <a:r>
-              <a:t>    "student2": {"name": "Bob", "grade": "B"}</a:t>
-            </a:r>
-          </a:p>
-        </p:txBody>
-      </p:sp>
-      <p:sp>
-        <p:nvSpPr>
-          <p:cNvPr id="11" name="TextBox 10"/>
-          <p:cNvSpPr txBox="1"/>
-          <p:nvPr/>
-        </p:nvSpPr>
-        <p:spPr>
-          <a:xfrm>
-            <a:off x="457200" y="2834640"/>
-            <a:ext cx="11247120" cy="320040"/>
-          </a:xfrm>
-          <a:prstGeom prst="rect">
-            <a:avLst/>
-          </a:prstGeom>
-          <a:noFill/>
-        </p:spPr>
-        <p:txBody>
-          <a:bodyPr wrap="none">
-            <a:spAutoFit/>
-          </a:bodyPr>
-          <a:lstStyle/>
-          <a:p>
-            <a:pPr>
-              <a:defRPr sz="1700">
-                <a:solidFill>
-                  <a:srgbClr val="333333"/>
-                </a:solidFill>
-              </a:defRPr>
-            </a:pPr>
-            <a:r>
-              <a:t>}</a:t>
-            </a:r>
-          </a:p>
-        </p:txBody>
-      </p:sp>
-      <p:sp>
-        <p:nvSpPr>
-          <p:cNvPr id="12" name="Rectangle 11"/>
+              <a:t>d = {k: v for k, v in zip(keys, values)}</a:t>
+            </a:r>
+          </a:p>
+        </p:txBody>
+      </p:sp>
+      <p:sp>
+        <p:nvSpPr>
+          <p:cNvPr id="11" name="Rectangle 10"/>
           <p:cNvSpPr/>
           <p:nvPr/>
         </p:nvSpPr>
         <p:spPr>
           <a:xfrm>
-            <a:off x="365760" y="3063240"/>
+            <a:off x="365760" y="2788920"/>
             <a:ext cx="11430000" cy="365760"/>
           </a:xfrm>
           <a:prstGeom prst="rect">
@@ -9025,13 +10730,13 @@
       </p:sp>
       <p:sp>
         <p:nvSpPr>
-          <p:cNvPr id="13" name="TextBox 12"/>
+          <p:cNvPr id="12" name="TextBox 11"/>
           <p:cNvSpPr txBox="1"/>
           <p:nvPr/>
         </p:nvSpPr>
         <p:spPr>
           <a:xfrm>
-            <a:off x="548640" y="3108960"/>
+            <a:off x="548640" y="2834640"/>
             <a:ext cx="10972800" cy="274320"/>
           </a:xfrm>
           <a:prstGeom prst="rect">
@@ -9053,62 +10758,27 @@
               </a:defRPr>
             </a:pPr>
             <a:r>
-              <a:t>Accessing:</a:t>
-            </a:r>
-          </a:p>
-        </p:txBody>
-      </p:sp>
-      <p:sp>
-        <p:nvSpPr>
-          <p:cNvPr id="14" name="TextBox 13"/>
-          <p:cNvSpPr txBox="1"/>
-          <p:nvPr/>
-        </p:nvSpPr>
-        <p:spPr>
-          <a:xfrm>
-            <a:off x="457200" y="3566160"/>
-            <a:ext cx="11247120" cy="320040"/>
-          </a:xfrm>
-          <a:prstGeom prst="rect">
-            <a:avLst/>
-          </a:prstGeom>
-          <a:noFill/>
-        </p:spPr>
-        <p:txBody>
-          <a:bodyPr wrap="none">
-            <a:spAutoFit/>
-          </a:bodyPr>
-          <a:lstStyle/>
-          <a:p>
-            <a:pPr>
-              <a:defRPr sz="1700">
-                <a:solidFill>
-                  <a:srgbClr val="333333"/>
-                </a:solidFill>
-              </a:defRPr>
-            </a:pPr>
-            <a:r>
-              <a:t>students["student1"]["name"]  # "Alice"</a:t>
-            </a:r>
-          </a:p>
-        </p:txBody>
-      </p:sp>
-      <p:sp>
-        <p:nvSpPr>
-          <p:cNvPr id="15" name="Rectangle 14"/>
+              <a:t>Transforming:</a:t>
+            </a:r>
+          </a:p>
+        </p:txBody>
+      </p:sp>
+      <p:sp>
+        <p:nvSpPr>
+          <p:cNvPr id="13" name="Rectangle 12"/>
           <p:cNvSpPr/>
           <p:nvPr/>
         </p:nvSpPr>
         <p:spPr>
           <a:xfrm>
-            <a:off x="365760" y="3794760"/>
-            <a:ext cx="11430000" cy="365760"/>
-          </a:xfrm>
-          <a:prstGeom prst="rect">
-            <a:avLst/>
-          </a:prstGeom>
-          <a:solidFill>
-            <a:srgbClr val="0078D7"/>
+            <a:off x="640080" y="3246120"/>
+            <a:ext cx="10789920" cy="411480"/>
+          </a:xfrm>
+          <a:prstGeom prst="rect">
+            <a:avLst/>
+          </a:prstGeom>
+          <a:solidFill>
+            <a:srgbClr val="282C34"/>
           </a:solidFill>
           <a:ln>
             <a:noFill/>
@@ -9138,55 +10808,20 @@
       </p:sp>
       <p:sp>
         <p:nvSpPr>
-          <p:cNvPr id="16" name="TextBox 15"/>
-          <p:cNvSpPr txBox="1"/>
-          <p:nvPr/>
-        </p:nvSpPr>
-        <p:spPr>
-          <a:xfrm>
-            <a:off x="548640" y="3840480"/>
-            <a:ext cx="10972800" cy="274320"/>
-          </a:xfrm>
-          <a:prstGeom prst="rect">
-            <a:avLst/>
-          </a:prstGeom>
-          <a:noFill/>
-        </p:spPr>
-        <p:txBody>
-          <a:bodyPr wrap="none">
-            <a:spAutoFit/>
-          </a:bodyPr>
-          <a:lstStyle/>
-          <a:p>
-            <a:pPr>
-              <a:defRPr sz="2000" b="1">
-                <a:solidFill>
-                  <a:srgbClr val="FFFFFF"/>
-                </a:solidFill>
-              </a:defRPr>
-            </a:pPr>
-            <a:r>
-              <a:t>Iterating:</a:t>
-            </a:r>
-          </a:p>
-        </p:txBody>
-      </p:sp>
-      <p:sp>
-        <p:nvSpPr>
-          <p:cNvPr id="17" name="Rectangle 16"/>
+          <p:cNvPr id="14" name="Rectangle 13"/>
           <p:cNvSpPr/>
           <p:nvPr/>
         </p:nvSpPr>
         <p:spPr>
           <a:xfrm>
-            <a:off x="640080" y="4251960"/>
-            <a:ext cx="10789920" cy="1097280"/>
-          </a:xfrm>
-          <a:prstGeom prst="rect">
-            <a:avLst/>
-          </a:prstGeom>
-          <a:solidFill>
-            <a:srgbClr val="282C34"/>
+            <a:off x="640080" y="3246120"/>
+            <a:ext cx="73152" cy="411480"/>
+          </a:xfrm>
+          <a:prstGeom prst="rect">
+            <a:avLst/>
+          </a:prstGeom>
+          <a:solidFill>
+            <a:srgbClr val="61AFEF"/>
           </a:solidFill>
           <a:ln>
             <a:noFill/>
@@ -9216,20 +10851,59 @@
       </p:sp>
       <p:sp>
         <p:nvSpPr>
-          <p:cNvPr id="18" name="Rectangle 17"/>
+          <p:cNvPr id="15" name="TextBox 14"/>
+          <p:cNvSpPr txBox="1"/>
+          <p:nvPr/>
+        </p:nvSpPr>
+        <p:spPr>
+          <a:xfrm>
+            <a:off x="914400" y="3291840"/>
+            <a:ext cx="10241280" cy="320040"/>
+          </a:xfrm>
+          <a:prstGeom prst="rect">
+            <a:avLst/>
+          </a:prstGeom>
+          <a:noFill/>
+        </p:spPr>
+        <p:txBody>
+          <a:bodyPr wrap="none">
+            <a:spAutoFit/>
+          </a:bodyPr>
+          <a:lstStyle/>
+          <a:p>
+            <a:pPr>
+              <a:spcAft>
+                <a:spcPts val="200"/>
+              </a:spcAft>
+              <a:defRPr sz="1400">
+                <a:solidFill>
+                  <a:srgbClr val="ABB2BF"/>
+                </a:solidFill>
+                <a:latin typeface="Consolas"/>
+              </a:defRPr>
+            </a:pPr>
+            <a:r>
+              <a:t>squares = {x: x**2 for x in range(5)}</a:t>
+            </a:r>
+          </a:p>
+        </p:txBody>
+      </p:sp>
+      <p:sp>
+        <p:nvSpPr>
+          <p:cNvPr id="16" name="Rectangle 15"/>
           <p:cNvSpPr/>
           <p:nvPr/>
         </p:nvSpPr>
         <p:spPr>
           <a:xfrm>
-            <a:off x="640080" y="4251960"/>
-            <a:ext cx="73152" cy="1097280"/>
-          </a:xfrm>
-          <a:prstGeom prst="rect">
-            <a:avLst/>
-          </a:prstGeom>
-          <a:solidFill>
-            <a:srgbClr val="61AFEF"/>
+            <a:off x="365760" y="3794760"/>
+            <a:ext cx="11430000" cy="365760"/>
+          </a:xfrm>
+          <a:prstGeom prst="rect">
+            <a:avLst/>
+          </a:prstGeom>
+          <a:solidFill>
+            <a:srgbClr val="0078D7"/>
           </a:solidFill>
           <a:ln>
             <a:noFill/>
@@ -9259,14 +10933,248 @@
       </p:sp>
       <p:sp>
         <p:nvSpPr>
+          <p:cNvPr id="17" name="TextBox 16"/>
+          <p:cNvSpPr txBox="1"/>
+          <p:nvPr/>
+        </p:nvSpPr>
+        <p:spPr>
+          <a:xfrm>
+            <a:off x="548640" y="3840480"/>
+            <a:ext cx="10972800" cy="274320"/>
+          </a:xfrm>
+          <a:prstGeom prst="rect">
+            <a:avLst/>
+          </a:prstGeom>
+          <a:noFill/>
+        </p:spPr>
+        <p:txBody>
+          <a:bodyPr wrap="none">
+            <a:spAutoFit/>
+          </a:bodyPr>
+          <a:lstStyle/>
+          <a:p>
+            <a:pPr>
+              <a:defRPr sz="2000" b="1">
+                <a:solidFill>
+                  <a:srgbClr val="FFFFFF"/>
+                </a:solidFill>
+              </a:defRPr>
+            </a:pPr>
+            <a:r>
+              <a:t># {0: 0, 1: 1, 2: 4, 3: 9, 4: 16}</a:t>
+            </a:r>
+          </a:p>
+        </p:txBody>
+      </p:sp>
+      <p:sp>
+        <p:nvSpPr>
+          <p:cNvPr id="18" name="Rectangle 17"/>
+          <p:cNvSpPr/>
+          <p:nvPr/>
+        </p:nvSpPr>
+        <p:spPr>
+          <a:xfrm>
+            <a:off x="365760" y="4251960"/>
+            <a:ext cx="11430000" cy="365760"/>
+          </a:xfrm>
+          <a:prstGeom prst="rect">
+            <a:avLst/>
+          </a:prstGeom>
+          <a:solidFill>
+            <a:srgbClr val="0078D7"/>
+          </a:solidFill>
+          <a:ln>
+            <a:noFill/>
+          </a:ln>
+        </p:spPr>
+        <p:style>
+          <a:lnRef idx="1">
+            <a:schemeClr val="accent1"/>
+          </a:lnRef>
+          <a:fillRef idx="3">
+            <a:schemeClr val="accent1"/>
+          </a:fillRef>
+          <a:effectRef idx="2">
+            <a:schemeClr val="accent1"/>
+          </a:effectRef>
+          <a:fontRef idx="minor">
+            <a:schemeClr val="lt1"/>
+          </a:fontRef>
+        </p:style>
+        <p:txBody>
+          <a:bodyPr rtlCol="0" anchor="ctr"/>
+          <a:lstStyle/>
+          <a:p>
+            <a:pPr algn="ctr"/>
+          </a:p>
+        </p:txBody>
+      </p:sp>
+      <p:sp>
+        <p:nvSpPr>
           <p:cNvPr id="19" name="TextBox 18"/>
           <p:cNvSpPr txBox="1"/>
           <p:nvPr/>
         </p:nvSpPr>
         <p:spPr>
           <a:xfrm>
-            <a:off x="914400" y="4297680"/>
-            <a:ext cx="10241280" cy="1005839"/>
+            <a:off x="548640" y="4297680"/>
+            <a:ext cx="10972800" cy="274320"/>
+          </a:xfrm>
+          <a:prstGeom prst="rect">
+            <a:avLst/>
+          </a:prstGeom>
+          <a:noFill/>
+        </p:spPr>
+        <p:txBody>
+          <a:bodyPr wrap="none">
+            <a:spAutoFit/>
+          </a:bodyPr>
+          <a:lstStyle/>
+          <a:p>
+            <a:pPr>
+              <a:defRPr sz="2000" b="1">
+                <a:solidFill>
+                  <a:srgbClr val="FFFFFF"/>
+                </a:solidFill>
+              </a:defRPr>
+            </a:pPr>
+            <a:r>
+              <a:t>Filtering:</a:t>
+            </a:r>
+          </a:p>
+        </p:txBody>
+      </p:sp>
+      <p:sp>
+        <p:nvSpPr>
+          <p:cNvPr id="20" name="TextBox 19"/>
+          <p:cNvSpPr txBox="1"/>
+          <p:nvPr/>
+        </p:nvSpPr>
+        <p:spPr>
+          <a:xfrm>
+            <a:off x="457200" y="4754880"/>
+            <a:ext cx="11247120" cy="320040"/>
+          </a:xfrm>
+          <a:prstGeom prst="rect">
+            <a:avLst/>
+          </a:prstGeom>
+          <a:noFill/>
+        </p:spPr>
+        <p:txBody>
+          <a:bodyPr wrap="none">
+            <a:spAutoFit/>
+          </a:bodyPr>
+          <a:lstStyle/>
+          <a:p>
+            <a:pPr>
+              <a:defRPr sz="1700">
+                <a:solidFill>
+                  <a:srgbClr val="333333"/>
+                </a:solidFill>
+              </a:defRPr>
+            </a:pPr>
+            <a:r>
+              <a:t>scores = {"Alice": 90, "Bob": 75, "Charlie": 85}</a:t>
+            </a:r>
+          </a:p>
+        </p:txBody>
+      </p:sp>
+      <p:sp>
+        <p:nvSpPr>
+          <p:cNvPr id="21" name="Rectangle 20"/>
+          <p:cNvSpPr/>
+          <p:nvPr/>
+        </p:nvSpPr>
+        <p:spPr>
+          <a:xfrm>
+            <a:off x="640080" y="4983480"/>
+            <a:ext cx="10789920" cy="411480"/>
+          </a:xfrm>
+          <a:prstGeom prst="rect">
+            <a:avLst/>
+          </a:prstGeom>
+          <a:solidFill>
+            <a:srgbClr val="282C34"/>
+          </a:solidFill>
+          <a:ln>
+            <a:noFill/>
+          </a:ln>
+        </p:spPr>
+        <p:style>
+          <a:lnRef idx="1">
+            <a:schemeClr val="accent1"/>
+          </a:lnRef>
+          <a:fillRef idx="3">
+            <a:schemeClr val="accent1"/>
+          </a:fillRef>
+          <a:effectRef idx="2">
+            <a:schemeClr val="accent1"/>
+          </a:effectRef>
+          <a:fontRef idx="minor">
+            <a:schemeClr val="lt1"/>
+          </a:fontRef>
+        </p:style>
+        <p:txBody>
+          <a:bodyPr rtlCol="0" anchor="ctr"/>
+          <a:lstStyle/>
+          <a:p>
+            <a:pPr algn="ctr"/>
+          </a:p>
+        </p:txBody>
+      </p:sp>
+      <p:sp>
+        <p:nvSpPr>
+          <p:cNvPr id="22" name="Rectangle 21"/>
+          <p:cNvSpPr/>
+          <p:nvPr/>
+        </p:nvSpPr>
+        <p:spPr>
+          <a:xfrm>
+            <a:off x="640080" y="4983480"/>
+            <a:ext cx="73152" cy="411480"/>
+          </a:xfrm>
+          <a:prstGeom prst="rect">
+            <a:avLst/>
+          </a:prstGeom>
+          <a:solidFill>
+            <a:srgbClr val="61AFEF"/>
+          </a:solidFill>
+          <a:ln>
+            <a:noFill/>
+          </a:ln>
+        </p:spPr>
+        <p:style>
+          <a:lnRef idx="1">
+            <a:schemeClr val="accent1"/>
+          </a:lnRef>
+          <a:fillRef idx="3">
+            <a:schemeClr val="accent1"/>
+          </a:fillRef>
+          <a:effectRef idx="2">
+            <a:schemeClr val="accent1"/>
+          </a:effectRef>
+          <a:fontRef idx="minor">
+            <a:schemeClr val="lt1"/>
+          </a:fontRef>
+        </p:style>
+        <p:txBody>
+          <a:bodyPr rtlCol="0" anchor="ctr"/>
+          <a:lstStyle/>
+          <a:p>
+            <a:pPr algn="ctr"/>
+          </a:p>
+        </p:txBody>
+      </p:sp>
+      <p:sp>
+        <p:nvSpPr>
+          <p:cNvPr id="23" name="TextBox 22"/>
+          <p:cNvSpPr txBox="1"/>
+          <p:nvPr/>
+        </p:nvSpPr>
+        <p:spPr>
+          <a:xfrm>
+            <a:off x="914400" y="5029200"/>
+            <a:ext cx="10241280" cy="320040"/>
           </a:xfrm>
           <a:prstGeom prst="rect">
             <a:avLst/>
@@ -9291,9 +11199,196 @@
               </a:defRPr>
             </a:pPr>
             <a:r>
-              <a:t>for student_id, info in students.items():</a:t>
-            </a:r>
-          </a:p>
+              <a:t>high_scores = {k: v for k, v in scores.items() if v &gt;= 80}</a:t>
+            </a:r>
+          </a:p>
+        </p:txBody>
+      </p:sp>
+      <p:sp>
+        <p:nvSpPr>
+          <p:cNvPr id="24" name="Rectangle 23"/>
+          <p:cNvSpPr/>
+          <p:nvPr/>
+        </p:nvSpPr>
+        <p:spPr>
+          <a:xfrm>
+            <a:off x="365760" y="5532120"/>
+            <a:ext cx="11430000" cy="365760"/>
+          </a:xfrm>
+          <a:prstGeom prst="rect">
+            <a:avLst/>
+          </a:prstGeom>
+          <a:solidFill>
+            <a:srgbClr val="0078D7"/>
+          </a:solidFill>
+          <a:ln>
+            <a:noFill/>
+          </a:ln>
+        </p:spPr>
+        <p:style>
+          <a:lnRef idx="1">
+            <a:schemeClr val="accent1"/>
+          </a:lnRef>
+          <a:fillRef idx="3">
+            <a:schemeClr val="accent1"/>
+          </a:fillRef>
+          <a:effectRef idx="2">
+            <a:schemeClr val="accent1"/>
+          </a:effectRef>
+          <a:fontRef idx="minor">
+            <a:schemeClr val="lt1"/>
+          </a:fontRef>
+        </p:style>
+        <p:txBody>
+          <a:bodyPr rtlCol="0" anchor="ctr"/>
+          <a:lstStyle/>
+          <a:p>
+            <a:pPr algn="ctr"/>
+          </a:p>
+        </p:txBody>
+      </p:sp>
+      <p:sp>
+        <p:nvSpPr>
+          <p:cNvPr id="25" name="TextBox 24"/>
+          <p:cNvSpPr txBox="1"/>
+          <p:nvPr/>
+        </p:nvSpPr>
+        <p:spPr>
+          <a:xfrm>
+            <a:off x="548640" y="5577840"/>
+            <a:ext cx="10972800" cy="274320"/>
+          </a:xfrm>
+          <a:prstGeom prst="rect">
+            <a:avLst/>
+          </a:prstGeom>
+          <a:noFill/>
+        </p:spPr>
+        <p:txBody>
+          <a:bodyPr wrap="none">
+            <a:spAutoFit/>
+          </a:bodyPr>
+          <a:lstStyle/>
+          <a:p>
+            <a:pPr>
+              <a:defRPr sz="2000" b="1">
+                <a:solidFill>
+                  <a:srgbClr val="FFFFFF"/>
+                </a:solidFill>
+              </a:defRPr>
+            </a:pPr>
+            <a:r>
+              <a:t>Case Transform:</a:t>
+            </a:r>
+          </a:p>
+        </p:txBody>
+      </p:sp>
+      <p:sp>
+        <p:nvSpPr>
+          <p:cNvPr id="26" name="Rectangle 25"/>
+          <p:cNvSpPr/>
+          <p:nvPr/>
+        </p:nvSpPr>
+        <p:spPr>
+          <a:xfrm>
+            <a:off x="640080" y="5989320"/>
+            <a:ext cx="10789920" cy="411480"/>
+          </a:xfrm>
+          <a:prstGeom prst="rect">
+            <a:avLst/>
+          </a:prstGeom>
+          <a:solidFill>
+            <a:srgbClr val="282C34"/>
+          </a:solidFill>
+          <a:ln>
+            <a:noFill/>
+          </a:ln>
+        </p:spPr>
+        <p:style>
+          <a:lnRef idx="1">
+            <a:schemeClr val="accent1"/>
+          </a:lnRef>
+          <a:fillRef idx="3">
+            <a:schemeClr val="accent1"/>
+          </a:fillRef>
+          <a:effectRef idx="2">
+            <a:schemeClr val="accent1"/>
+          </a:effectRef>
+          <a:fontRef idx="minor">
+            <a:schemeClr val="lt1"/>
+          </a:fontRef>
+        </p:style>
+        <p:txBody>
+          <a:bodyPr rtlCol="0" anchor="ctr"/>
+          <a:lstStyle/>
+          <a:p>
+            <a:pPr algn="ctr"/>
+          </a:p>
+        </p:txBody>
+      </p:sp>
+      <p:sp>
+        <p:nvSpPr>
+          <p:cNvPr id="27" name="Rectangle 26"/>
+          <p:cNvSpPr/>
+          <p:nvPr/>
+        </p:nvSpPr>
+        <p:spPr>
+          <a:xfrm>
+            <a:off x="640080" y="5989320"/>
+            <a:ext cx="73152" cy="411480"/>
+          </a:xfrm>
+          <a:prstGeom prst="rect">
+            <a:avLst/>
+          </a:prstGeom>
+          <a:solidFill>
+            <a:srgbClr val="61AFEF"/>
+          </a:solidFill>
+          <a:ln>
+            <a:noFill/>
+          </a:ln>
+        </p:spPr>
+        <p:style>
+          <a:lnRef idx="1">
+            <a:schemeClr val="accent1"/>
+          </a:lnRef>
+          <a:fillRef idx="3">
+            <a:schemeClr val="accent1"/>
+          </a:fillRef>
+          <a:effectRef idx="2">
+            <a:schemeClr val="accent1"/>
+          </a:effectRef>
+          <a:fontRef idx="minor">
+            <a:schemeClr val="lt1"/>
+          </a:fontRef>
+        </p:style>
+        <p:txBody>
+          <a:bodyPr rtlCol="0" anchor="ctr"/>
+          <a:lstStyle/>
+          <a:p>
+            <a:pPr algn="ctr"/>
+          </a:p>
+        </p:txBody>
+      </p:sp>
+      <p:sp>
+        <p:nvSpPr>
+          <p:cNvPr id="28" name="TextBox 27"/>
+          <p:cNvSpPr txBox="1"/>
+          <p:nvPr/>
+        </p:nvSpPr>
+        <p:spPr>
+          <a:xfrm>
+            <a:off x="914400" y="6035040"/>
+            <a:ext cx="10241280" cy="320040"/>
+          </a:xfrm>
+          <a:prstGeom prst="rect">
+            <a:avLst/>
+          </a:prstGeom>
+          <a:noFill/>
+        </p:spPr>
+        <p:txBody>
+          <a:bodyPr wrap="none">
+            <a:spAutoFit/>
+          </a:bodyPr>
+          <a:lstStyle/>
           <a:p>
             <a:pPr>
               <a:spcAft>
@@ -9307,152 +11402,7 @@
               </a:defRPr>
             </a:pPr>
             <a:r>
-              <a:t>    print(f"{student_id}:")</a:t>
-            </a:r>
-          </a:p>
-          <a:p>
-            <a:pPr>
-              <a:spcAft>
-                <a:spcPts val="200"/>
-              </a:spcAft>
-              <a:defRPr sz="1400">
-                <a:solidFill>
-                  <a:srgbClr val="ABB2BF"/>
-                </a:solidFill>
-                <a:latin typeface="Consolas"/>
-              </a:defRPr>
-            </a:pPr>
-            <a:r>
-              <a:t>    for key, value in info.items():</a:t>
-            </a:r>
-          </a:p>
-          <a:p>
-            <a:pPr>
-              <a:spcAft>
-                <a:spcPts val="200"/>
-              </a:spcAft>
-              <a:defRPr sz="1400">
-                <a:solidFill>
-                  <a:srgbClr val="ABB2BF"/>
-                </a:solidFill>
-                <a:latin typeface="Consolas"/>
-              </a:defRPr>
-            </a:pPr>
-            <a:r>
-              <a:t>        print(f"  {key}: {value}")</a:t>
-            </a:r>
-          </a:p>
-        </p:txBody>
-      </p:sp>
-      <p:sp>
-        <p:nvSpPr>
-          <p:cNvPr id="20" name="Rectangle 19"/>
-          <p:cNvSpPr/>
-          <p:nvPr/>
-        </p:nvSpPr>
-        <p:spPr>
-          <a:xfrm>
-            <a:off x="365760" y="5486400"/>
-            <a:ext cx="11430000" cy="365760"/>
-          </a:xfrm>
-          <a:prstGeom prst="rect">
-            <a:avLst/>
-          </a:prstGeom>
-          <a:solidFill>
-            <a:srgbClr val="0078D7"/>
-          </a:solidFill>
-          <a:ln>
-            <a:noFill/>
-          </a:ln>
-        </p:spPr>
-        <p:style>
-          <a:lnRef idx="1">
-            <a:schemeClr val="accent1"/>
-          </a:lnRef>
-          <a:fillRef idx="3">
-            <a:schemeClr val="accent1"/>
-          </a:fillRef>
-          <a:effectRef idx="2">
-            <a:schemeClr val="accent1"/>
-          </a:effectRef>
-          <a:fontRef idx="minor">
-            <a:schemeClr val="lt1"/>
-          </a:fontRef>
-        </p:style>
-        <p:txBody>
-          <a:bodyPr rtlCol="0" anchor="ctr"/>
-          <a:lstStyle/>
-          <a:p>
-            <a:pPr algn="ctr"/>
-          </a:p>
-        </p:txBody>
-      </p:sp>
-      <p:sp>
-        <p:nvSpPr>
-          <p:cNvPr id="21" name="TextBox 20"/>
-          <p:cNvSpPr txBox="1"/>
-          <p:nvPr/>
-        </p:nvSpPr>
-        <p:spPr>
-          <a:xfrm>
-            <a:off x="548640" y="5532120"/>
-            <a:ext cx="10972800" cy="274320"/>
-          </a:xfrm>
-          <a:prstGeom prst="rect">
-            <a:avLst/>
-          </a:prstGeom>
-          <a:noFill/>
-        </p:spPr>
-        <p:txBody>
-          <a:bodyPr wrap="none">
-            <a:spAutoFit/>
-          </a:bodyPr>
-          <a:lstStyle/>
-          <a:p>
-            <a:pPr>
-              <a:defRPr sz="2000" b="1">
-                <a:solidFill>
-                  <a:srgbClr val="FFFFFF"/>
-                </a:solidFill>
-              </a:defRPr>
-            </a:pPr>
-            <a:r>
-              <a:t>Use Cases:</a:t>
-            </a:r>
-          </a:p>
-        </p:txBody>
-      </p:sp>
-      <p:sp>
-        <p:nvSpPr>
-          <p:cNvPr id="22" name="TextBox 21"/>
-          <p:cNvSpPr txBox="1"/>
-          <p:nvPr/>
-        </p:nvSpPr>
-        <p:spPr>
-          <a:xfrm>
-            <a:off x="457200" y="5989320"/>
-            <a:ext cx="11247120" cy="320040"/>
-          </a:xfrm>
-          <a:prstGeom prst="rect">
-            <a:avLst/>
-          </a:prstGeom>
-          <a:noFill/>
-        </p:spPr>
-        <p:txBody>
-          <a:bodyPr wrap="none">
-            <a:spAutoFit/>
-          </a:bodyPr>
-          <a:lstStyle/>
-          <a:p>
-            <a:pPr lvl="1">
-              <a:defRPr sz="1600">
-                <a:solidFill>
-                  <a:srgbClr val="333333"/>
-                </a:solidFill>
-              </a:defRPr>
-            </a:pPr>
-            <a:r>
-              <a:t>• Database-like structures</a:t>
+              <a:t>upper = {k.upper(): v for k, v in data.items()}</a:t>
             </a:r>
           </a:p>
         </p:txBody>
@@ -9634,7 +11584,7 @@
               </a:defRPr>
             </a:pPr>
             <a:r>
-              <a:t>Common Patterns</a:t>
+              <a:t>Nested Dictionaries</a:t>
             </a:r>
           </a:p>
         </p:txBody>
@@ -9712,7 +11662,7 @@
               </a:defRPr>
             </a:pPr>
             <a:r>
-              <a:t>Counting:</a:t>
+              <a:t>Structure:</a:t>
             </a:r>
           </a:p>
         </p:txBody>
@@ -9837,7 +11787,7 @@
               </a:defRPr>
             </a:pPr>
             <a:r>
-              <a:t>word_count = {}</a:t>
+              <a:t>students = {</a:t>
             </a:r>
           </a:p>
           <a:p>
@@ -9853,7 +11803,7 @@
               </a:defRPr>
             </a:pPr>
             <a:r>
-              <a:t>for word in words:</a:t>
+              <a:t>    "student1": {"name": "Alice", "grade": "A"},</a:t>
             </a:r>
           </a:p>
           <a:p>
@@ -9869,20 +11819,55 @@
               </a:defRPr>
             </a:pPr>
             <a:r>
-              <a:t>    word_count[word] = word_count.get(word, 0) + 1</a:t>
-            </a:r>
-          </a:p>
-        </p:txBody>
-      </p:sp>
-      <p:sp>
-        <p:nvSpPr>
-          <p:cNvPr id="11" name="Rectangle 10"/>
+              <a:t>    "student2": {"name": "Bob", "grade": "B"}</a:t>
+            </a:r>
+          </a:p>
+        </p:txBody>
+      </p:sp>
+      <p:sp>
+        <p:nvSpPr>
+          <p:cNvPr id="11" name="TextBox 10"/>
+          <p:cNvSpPr txBox="1"/>
+          <p:nvPr/>
+        </p:nvSpPr>
+        <p:spPr>
+          <a:xfrm>
+            <a:off x="457200" y="2834640"/>
+            <a:ext cx="11247120" cy="320040"/>
+          </a:xfrm>
+          <a:prstGeom prst="rect">
+            <a:avLst/>
+          </a:prstGeom>
+          <a:noFill/>
+        </p:spPr>
+        <p:txBody>
+          <a:bodyPr wrap="none">
+            <a:spAutoFit/>
+          </a:bodyPr>
+          <a:lstStyle/>
+          <a:p>
+            <a:pPr>
+              <a:defRPr sz="1700">
+                <a:solidFill>
+                  <a:srgbClr val="333333"/>
+                </a:solidFill>
+              </a:defRPr>
+            </a:pPr>
+            <a:r>
+              <a:t>}</a:t>
+            </a:r>
+          </a:p>
+        </p:txBody>
+      </p:sp>
+      <p:sp>
+        <p:nvSpPr>
+          <p:cNvPr id="12" name="Rectangle 11"/>
           <p:cNvSpPr/>
           <p:nvPr/>
         </p:nvSpPr>
         <p:spPr>
           <a:xfrm>
-            <a:off x="365760" y="2788920"/>
+            <a:off x="365760" y="3063240"/>
             <a:ext cx="11430000" cy="365760"/>
           </a:xfrm>
           <a:prstGeom prst="rect">
@@ -9919,13 +11904,13 @@
       </p:sp>
       <p:sp>
         <p:nvSpPr>
-          <p:cNvPr id="12" name="TextBox 11"/>
+          <p:cNvPr id="13" name="TextBox 12"/>
           <p:cNvSpPr txBox="1"/>
           <p:nvPr/>
         </p:nvSpPr>
         <p:spPr>
           <a:xfrm>
-            <a:off x="548640" y="2834640"/>
+            <a:off x="548640" y="3108960"/>
             <a:ext cx="10972800" cy="274320"/>
           </a:xfrm>
           <a:prstGeom prst="rect">
@@ -9947,27 +11932,62 @@
               </a:defRPr>
             </a:pPr>
             <a:r>
-              <a:t>Grouping:</a:t>
-            </a:r>
-          </a:p>
-        </p:txBody>
-      </p:sp>
-      <p:sp>
-        <p:nvSpPr>
-          <p:cNvPr id="13" name="Rectangle 12"/>
+              <a:t>Accessing:</a:t>
+            </a:r>
+          </a:p>
+        </p:txBody>
+      </p:sp>
+      <p:sp>
+        <p:nvSpPr>
+          <p:cNvPr id="14" name="TextBox 13"/>
+          <p:cNvSpPr txBox="1"/>
+          <p:nvPr/>
+        </p:nvSpPr>
+        <p:spPr>
+          <a:xfrm>
+            <a:off x="457200" y="3566160"/>
+            <a:ext cx="11247120" cy="320040"/>
+          </a:xfrm>
+          <a:prstGeom prst="rect">
+            <a:avLst/>
+          </a:prstGeom>
+          <a:noFill/>
+        </p:spPr>
+        <p:txBody>
+          <a:bodyPr wrap="none">
+            <a:spAutoFit/>
+          </a:bodyPr>
+          <a:lstStyle/>
+          <a:p>
+            <a:pPr>
+              <a:defRPr sz="1700">
+                <a:solidFill>
+                  <a:srgbClr val="333333"/>
+                </a:solidFill>
+              </a:defRPr>
+            </a:pPr>
+            <a:r>
+              <a:t>students["student1"]["name"]  # "Alice"</a:t>
+            </a:r>
+          </a:p>
+        </p:txBody>
+      </p:sp>
+      <p:sp>
+        <p:nvSpPr>
+          <p:cNvPr id="15" name="Rectangle 14"/>
           <p:cNvSpPr/>
           <p:nvPr/>
         </p:nvSpPr>
         <p:spPr>
           <a:xfrm>
-            <a:off x="640080" y="3246120"/>
-            <a:ext cx="10789920" cy="1554480"/>
-          </a:xfrm>
-          <a:prstGeom prst="rect">
-            <a:avLst/>
-          </a:prstGeom>
-          <a:solidFill>
-            <a:srgbClr val="282C34"/>
+            <a:off x="365760" y="3794760"/>
+            <a:ext cx="11430000" cy="365760"/>
+          </a:xfrm>
+          <a:prstGeom prst="rect">
+            <a:avLst/>
+          </a:prstGeom>
+          <a:solidFill>
+            <a:srgbClr val="0078D7"/>
           </a:solidFill>
           <a:ln>
             <a:noFill/>
@@ -9997,20 +12017,55 @@
       </p:sp>
       <p:sp>
         <p:nvSpPr>
-          <p:cNvPr id="14" name="Rectangle 13"/>
+          <p:cNvPr id="16" name="TextBox 15"/>
+          <p:cNvSpPr txBox="1"/>
+          <p:nvPr/>
+        </p:nvSpPr>
+        <p:spPr>
+          <a:xfrm>
+            <a:off x="548640" y="3840480"/>
+            <a:ext cx="10972800" cy="274320"/>
+          </a:xfrm>
+          <a:prstGeom prst="rect">
+            <a:avLst/>
+          </a:prstGeom>
+          <a:noFill/>
+        </p:spPr>
+        <p:txBody>
+          <a:bodyPr wrap="none">
+            <a:spAutoFit/>
+          </a:bodyPr>
+          <a:lstStyle/>
+          <a:p>
+            <a:pPr>
+              <a:defRPr sz="2000" b="1">
+                <a:solidFill>
+                  <a:srgbClr val="FFFFFF"/>
+                </a:solidFill>
+              </a:defRPr>
+            </a:pPr>
+            <a:r>
+              <a:t>Iterating:</a:t>
+            </a:r>
+          </a:p>
+        </p:txBody>
+      </p:sp>
+      <p:sp>
+        <p:nvSpPr>
+          <p:cNvPr id="17" name="Rectangle 16"/>
           <p:cNvSpPr/>
           <p:nvPr/>
         </p:nvSpPr>
         <p:spPr>
           <a:xfrm>
-            <a:off x="640080" y="3246120"/>
-            <a:ext cx="73152" cy="1554480"/>
-          </a:xfrm>
-          <a:prstGeom prst="rect">
-            <a:avLst/>
-          </a:prstGeom>
-          <a:solidFill>
-            <a:srgbClr val="61AFEF"/>
+            <a:off x="640080" y="4251960"/>
+            <a:ext cx="10789920" cy="1097280"/>
+          </a:xfrm>
+          <a:prstGeom prst="rect">
+            <a:avLst/>
+          </a:prstGeom>
+          <a:solidFill>
+            <a:srgbClr val="282C34"/>
           </a:solidFill>
           <a:ln>
             <a:noFill/>
@@ -10040,14 +12095,57 @@
       </p:sp>
       <p:sp>
         <p:nvSpPr>
-          <p:cNvPr id="15" name="TextBox 14"/>
+          <p:cNvPr id="18" name="Rectangle 17"/>
+          <p:cNvSpPr/>
+          <p:nvPr/>
+        </p:nvSpPr>
+        <p:spPr>
+          <a:xfrm>
+            <a:off x="640080" y="4251960"/>
+            <a:ext cx="73152" cy="1097280"/>
+          </a:xfrm>
+          <a:prstGeom prst="rect">
+            <a:avLst/>
+          </a:prstGeom>
+          <a:solidFill>
+            <a:srgbClr val="61AFEF"/>
+          </a:solidFill>
+          <a:ln>
+            <a:noFill/>
+          </a:ln>
+        </p:spPr>
+        <p:style>
+          <a:lnRef idx="1">
+            <a:schemeClr val="accent1"/>
+          </a:lnRef>
+          <a:fillRef idx="3">
+            <a:schemeClr val="accent1"/>
+          </a:fillRef>
+          <a:effectRef idx="2">
+            <a:schemeClr val="accent1"/>
+          </a:effectRef>
+          <a:fontRef idx="minor">
+            <a:schemeClr val="lt1"/>
+          </a:fontRef>
+        </p:style>
+        <p:txBody>
+          <a:bodyPr rtlCol="0" anchor="ctr"/>
+          <a:lstStyle/>
+          <a:p>
+            <a:pPr algn="ctr"/>
+          </a:p>
+        </p:txBody>
+      </p:sp>
+      <p:sp>
+        <p:nvSpPr>
+          <p:cNvPr id="19" name="TextBox 18"/>
           <p:cNvSpPr txBox="1"/>
           <p:nvPr/>
         </p:nvSpPr>
         <p:spPr>
           <a:xfrm>
-            <a:off x="914400" y="3291840"/>
-            <a:ext cx="10241280" cy="1463039"/>
+            <a:off x="914400" y="4297680"/>
+            <a:ext cx="10241280" cy="1005839"/>
           </a:xfrm>
           <a:prstGeom prst="rect">
             <a:avLst/>
@@ -10072,7 +12170,7 @@
               </a:defRPr>
             </a:pPr>
             <a:r>
-              <a:t>by_grade = {}</a:t>
+              <a:t>for student_id, info in students.items():</a:t>
             </a:r>
           </a:p>
           <a:p>
@@ -10088,7 +12186,7 @@
               </a:defRPr>
             </a:pPr>
             <a:r>
-              <a:t>for student in students:</a:t>
+              <a:t>    print(f"{student_id}:")</a:t>
             </a:r>
           </a:p>
           <a:p>
@@ -10104,7 +12202,7 @@
               </a:defRPr>
             </a:pPr>
             <a:r>
-              <a:t>    grade = student["grade"]</a:t>
+              <a:t>    for key, value in info.items():</a:t>
             </a:r>
           </a:p>
           <a:p>
@@ -10120,52 +12218,20 @@
               </a:defRPr>
             </a:pPr>
             <a:r>
-              <a:t>    if grade not in by_grade:</a:t>
-            </a:r>
-          </a:p>
-          <a:p>
-            <a:pPr>
-              <a:spcAft>
-                <a:spcPts val="200"/>
-              </a:spcAft>
-              <a:defRPr sz="1400">
-                <a:solidFill>
-                  <a:srgbClr val="ABB2BF"/>
-                </a:solidFill>
-                <a:latin typeface="Consolas"/>
-              </a:defRPr>
-            </a:pPr>
-            <a:r>
-              <a:t>        by_grade[grade] = []</a:t>
-            </a:r>
-          </a:p>
-          <a:p>
-            <a:pPr>
-              <a:spcAft>
-                <a:spcPts val="200"/>
-              </a:spcAft>
-              <a:defRPr sz="1400">
-                <a:solidFill>
-                  <a:srgbClr val="ABB2BF"/>
-                </a:solidFill>
-                <a:latin typeface="Consolas"/>
-              </a:defRPr>
-            </a:pPr>
-            <a:r>
-              <a:t>    by_grade[grade].append(student)</a:t>
-            </a:r>
-          </a:p>
-        </p:txBody>
-      </p:sp>
-      <p:sp>
-        <p:nvSpPr>
-          <p:cNvPr id="16" name="Rectangle 15"/>
+              <a:t>        print(f"  {key}: {value}")</a:t>
+            </a:r>
+          </a:p>
+        </p:txBody>
+      </p:sp>
+      <p:sp>
+        <p:nvSpPr>
+          <p:cNvPr id="20" name="Rectangle 19"/>
           <p:cNvSpPr/>
           <p:nvPr/>
         </p:nvSpPr>
         <p:spPr>
           <a:xfrm>
-            <a:off x="365760" y="4937760"/>
+            <a:off x="365760" y="5486400"/>
             <a:ext cx="11430000" cy="365760"/>
           </a:xfrm>
           <a:prstGeom prst="rect">
@@ -10202,13 +12268,13 @@
       </p:sp>
       <p:sp>
         <p:nvSpPr>
-          <p:cNvPr id="17" name="TextBox 16"/>
+          <p:cNvPr id="21" name="TextBox 20"/>
           <p:cNvSpPr txBox="1"/>
           <p:nvPr/>
         </p:nvSpPr>
         <p:spPr>
           <a:xfrm>
-            <a:off x="548640" y="4983480"/>
+            <a:off x="548640" y="5532120"/>
             <a:ext cx="10972800" cy="274320"/>
           </a:xfrm>
           <a:prstGeom prst="rect">
@@ -10230,183 +12296,7 @@
               </a:defRPr>
             </a:pPr>
             <a:r>
-              <a:t>Merging:</a:t>
-            </a:r>
-          </a:p>
-        </p:txBody>
-      </p:sp>
-      <p:sp>
-        <p:nvSpPr>
-          <p:cNvPr id="18" name="TextBox 17"/>
-          <p:cNvSpPr txBox="1"/>
-          <p:nvPr/>
-        </p:nvSpPr>
-        <p:spPr>
-          <a:xfrm>
-            <a:off x="457200" y="5440680"/>
-            <a:ext cx="11247120" cy="320040"/>
-          </a:xfrm>
-          <a:prstGeom prst="rect">
-            <a:avLst/>
-          </a:prstGeom>
-          <a:noFill/>
-        </p:spPr>
-        <p:txBody>
-          <a:bodyPr wrap="none">
-            <a:spAutoFit/>
-          </a:bodyPr>
-          <a:lstStyle/>
-          <a:p>
-            <a:pPr>
-              <a:defRPr sz="1700">
-                <a:solidFill>
-                  <a:srgbClr val="333333"/>
-                </a:solidFill>
-              </a:defRPr>
-            </a:pPr>
-            <a:r>
-              <a:t>dict1.update(dict2)</a:t>
-            </a:r>
-          </a:p>
-        </p:txBody>
-      </p:sp>
-      <p:sp>
-        <p:nvSpPr>
-          <p:cNvPr id="19" name="Rectangle 18"/>
-          <p:cNvSpPr/>
-          <p:nvPr/>
-        </p:nvSpPr>
-        <p:spPr>
-          <a:xfrm>
-            <a:off x="640080" y="5669280"/>
-            <a:ext cx="10789920" cy="640080"/>
-          </a:xfrm>
-          <a:prstGeom prst="rect">
-            <a:avLst/>
-          </a:prstGeom>
-          <a:solidFill>
-            <a:srgbClr val="282C34"/>
-          </a:solidFill>
-          <a:ln>
-            <a:noFill/>
-          </a:ln>
-        </p:spPr>
-        <p:style>
-          <a:lnRef idx="1">
-            <a:schemeClr val="accent1"/>
-          </a:lnRef>
-          <a:fillRef idx="3">
-            <a:schemeClr val="accent1"/>
-          </a:fillRef>
-          <a:effectRef idx="2">
-            <a:schemeClr val="accent1"/>
-          </a:effectRef>
-          <a:fontRef idx="minor">
-            <a:schemeClr val="lt1"/>
-          </a:fontRef>
-        </p:style>
-        <p:txBody>
-          <a:bodyPr rtlCol="0" anchor="ctr"/>
-          <a:lstStyle/>
-          <a:p>
-            <a:pPr algn="ctr"/>
-          </a:p>
-        </p:txBody>
-      </p:sp>
-      <p:sp>
-        <p:nvSpPr>
-          <p:cNvPr id="20" name="Rectangle 19"/>
-          <p:cNvSpPr/>
-          <p:nvPr/>
-        </p:nvSpPr>
-        <p:spPr>
-          <a:xfrm>
-            <a:off x="640080" y="5669280"/>
-            <a:ext cx="73152" cy="640080"/>
-          </a:xfrm>
-          <a:prstGeom prst="rect">
-            <a:avLst/>
-          </a:prstGeom>
-          <a:solidFill>
-            <a:srgbClr val="61AFEF"/>
-          </a:solidFill>
-          <a:ln>
-            <a:noFill/>
-          </a:ln>
-        </p:spPr>
-        <p:style>
-          <a:lnRef idx="1">
-            <a:schemeClr val="accent1"/>
-          </a:lnRef>
-          <a:fillRef idx="3">
-            <a:schemeClr val="accent1"/>
-          </a:fillRef>
-          <a:effectRef idx="2">
-            <a:schemeClr val="accent1"/>
-          </a:effectRef>
-          <a:fontRef idx="minor">
-            <a:schemeClr val="lt1"/>
-          </a:fontRef>
-        </p:style>
-        <p:txBody>
-          <a:bodyPr rtlCol="0" anchor="ctr"/>
-          <a:lstStyle/>
-          <a:p>
-            <a:pPr algn="ctr"/>
-          </a:p>
-        </p:txBody>
-      </p:sp>
-      <p:sp>
-        <p:nvSpPr>
-          <p:cNvPr id="21" name="TextBox 20"/>
-          <p:cNvSpPr txBox="1"/>
-          <p:nvPr/>
-        </p:nvSpPr>
-        <p:spPr>
-          <a:xfrm>
-            <a:off x="914400" y="5715000"/>
-            <a:ext cx="10241280" cy="548640"/>
-          </a:xfrm>
-          <a:prstGeom prst="rect">
-            <a:avLst/>
-          </a:prstGeom>
-          <a:noFill/>
-        </p:spPr>
-        <p:txBody>
-          <a:bodyPr wrap="none">
-            <a:spAutoFit/>
-          </a:bodyPr>
-          <a:lstStyle/>
-          <a:p>
-            <a:pPr>
-              <a:spcAft>
-                <a:spcPts val="200"/>
-              </a:spcAft>
-              <a:defRPr sz="1400">
-                <a:solidFill>
-                  <a:srgbClr val="ABB2BF"/>
-                </a:solidFill>
-                <a:latin typeface="Consolas"/>
-              </a:defRPr>
-            </a:pPr>
-            <a:r>
-              <a:t>merged = {**dict1, **dict2}  # Python 3.5+</a:t>
-            </a:r>
-          </a:p>
-          <a:p>
-            <a:pPr>
-              <a:spcAft>
-                <a:spcPts val="200"/>
-              </a:spcAft>
-              <a:defRPr sz="1400">
-                <a:solidFill>
-                  <a:srgbClr val="ABB2BF"/>
-                </a:solidFill>
-                <a:latin typeface="Consolas"/>
-              </a:defRPr>
-            </a:pPr>
-            <a:r>
-              <a:t>merged = dict1 | dict2  # Python 3.9+</a:t>
+              <a:t>Use Cases:</a:t>
             </a:r>
           </a:p>
         </p:txBody>
@@ -10588,64 +12478,21 @@
               </a:defRPr>
             </a:pPr>
             <a:r>
-              <a:t>Dictionary vs List</a:t>
-            </a:r>
-          </a:p>
-        </p:txBody>
-      </p:sp>
-      <p:sp>
-        <p:nvSpPr>
-          <p:cNvPr id="6" name="Rectangle 5"/>
-          <p:cNvSpPr/>
-          <p:nvPr/>
-        </p:nvSpPr>
-        <p:spPr>
-          <a:xfrm>
-            <a:off x="365760" y="1325880"/>
-            <a:ext cx="11430000" cy="365760"/>
-          </a:xfrm>
-          <a:prstGeom prst="rect">
-            <a:avLst/>
-          </a:prstGeom>
-          <a:solidFill>
-            <a:srgbClr val="0078D7"/>
-          </a:solidFill>
-          <a:ln>
-            <a:noFill/>
-          </a:ln>
-        </p:spPr>
-        <p:style>
-          <a:lnRef idx="1">
-            <a:schemeClr val="accent1"/>
-          </a:lnRef>
-          <a:fillRef idx="3">
-            <a:schemeClr val="accent1"/>
-          </a:fillRef>
-          <a:effectRef idx="2">
-            <a:schemeClr val="accent1"/>
-          </a:effectRef>
-          <a:fontRef idx="minor">
-            <a:schemeClr val="lt1"/>
-          </a:fontRef>
-        </p:style>
-        <p:txBody>
-          <a:bodyPr rtlCol="0" anchor="ctr"/>
-          <a:lstStyle/>
-          <a:p>
-            <a:pPr algn="ctr"/>
-          </a:p>
-        </p:txBody>
-      </p:sp>
-      <p:sp>
-        <p:nvSpPr>
-          <p:cNvPr id="7" name="TextBox 6"/>
+              <a:t>Nested Dictionaries (continued)</a:t>
+            </a:r>
+          </a:p>
+        </p:txBody>
+      </p:sp>
+      <p:sp>
+        <p:nvSpPr>
+          <p:cNvPr id="6" name="TextBox 5"/>
           <p:cNvSpPr txBox="1"/>
           <p:nvPr/>
         </p:nvSpPr>
         <p:spPr>
           <a:xfrm>
-            <a:off x="548640" y="1371600"/>
-            <a:ext cx="10972800" cy="274320"/>
+            <a:off x="457200" y="1371600"/>
+            <a:ext cx="11247120" cy="320040"/>
           </a:xfrm>
           <a:prstGeom prst="rect">
             <a:avLst/>
@@ -10658,28 +12505,28 @@
           </a:bodyPr>
           <a:lstStyle/>
           <a:p>
-            <a:pPr>
-              <a:defRPr sz="2000" b="1">
-                <a:solidFill>
-                  <a:srgbClr val="FFFFFF"/>
-                </a:solidFill>
-              </a:defRPr>
-            </a:pPr>
-            <a:r>
-              <a:t>Use Dictionary When:</a:t>
-            </a:r>
-          </a:p>
-        </p:txBody>
-      </p:sp>
-      <p:sp>
-        <p:nvSpPr>
-          <p:cNvPr id="8" name="TextBox 7"/>
+            <a:pPr lvl="1">
+              <a:defRPr sz="1600">
+                <a:solidFill>
+                  <a:srgbClr val="333333"/>
+                </a:solidFill>
+              </a:defRPr>
+            </a:pPr>
+            <a:r>
+              <a:t>• Database-like structures</a:t>
+            </a:r>
+          </a:p>
+        </p:txBody>
+      </p:sp>
+      <p:sp>
+        <p:nvSpPr>
+          <p:cNvPr id="7" name="TextBox 6"/>
           <p:cNvSpPr txBox="1"/>
           <p:nvPr/>
         </p:nvSpPr>
         <p:spPr>
           <a:xfrm>
-            <a:off x="457200" y="1828800"/>
+            <a:off x="457200" y="1645920"/>
             <a:ext cx="11247120" cy="320040"/>
           </a:xfrm>
           <a:prstGeom prst="rect">
@@ -10701,20 +12548,20 @@
               </a:defRPr>
             </a:pPr>
             <a:r>
-              <a:t>• Need key-value associations</a:t>
-            </a:r>
-          </a:p>
-        </p:txBody>
-      </p:sp>
-      <p:sp>
-        <p:nvSpPr>
-          <p:cNvPr id="9" name="TextBox 8"/>
+              <a:t>• Configuration files</a:t>
+            </a:r>
+          </a:p>
+        </p:txBody>
+      </p:sp>
+      <p:sp>
+        <p:nvSpPr>
+          <p:cNvPr id="8" name="TextBox 7"/>
           <p:cNvSpPr txBox="1"/>
           <p:nvPr/>
         </p:nvSpPr>
         <p:spPr>
           <a:xfrm>
-            <a:off x="457200" y="2103120"/>
+            <a:off x="457200" y="1920240"/>
             <a:ext cx="11247120" cy="320040"/>
           </a:xfrm>
           <a:prstGeom prst="rect">
@@ -10736,20 +12583,20 @@
               </a:defRPr>
             </a:pPr>
             <a:r>
-              <a:t>• Fast lookup is important</a:t>
-            </a:r>
-          </a:p>
-        </p:txBody>
-      </p:sp>
-      <p:sp>
-        <p:nvSpPr>
-          <p:cNvPr id="10" name="TextBox 9"/>
+              <a:t>• API responses</a:t>
+            </a:r>
+          </a:p>
+        </p:txBody>
+      </p:sp>
+      <p:sp>
+        <p:nvSpPr>
+          <p:cNvPr id="9" name="TextBox 8"/>
           <p:cNvSpPr txBox="1"/>
           <p:nvPr/>
         </p:nvSpPr>
         <p:spPr>
           <a:xfrm>
-            <a:off x="457200" y="2377439"/>
+            <a:off x="457200" y="2194560"/>
             <a:ext cx="11247120" cy="320040"/>
           </a:xfrm>
           <a:prstGeom prst="rect">
@@ -10771,521 +12618,7 @@
               </a:defRPr>
             </a:pPr>
             <a:r>
-              <a:t>• Keys are meaningful</a:t>
-            </a:r>
-          </a:p>
-        </p:txBody>
-      </p:sp>
-      <p:sp>
-        <p:nvSpPr>
-          <p:cNvPr id="11" name="TextBox 10"/>
-          <p:cNvSpPr txBox="1"/>
-          <p:nvPr/>
-        </p:nvSpPr>
-        <p:spPr>
-          <a:xfrm>
-            <a:off x="457200" y="2651759"/>
-            <a:ext cx="11247120" cy="320040"/>
-          </a:xfrm>
-          <a:prstGeom prst="rect">
-            <a:avLst/>
-          </a:prstGeom>
-          <a:noFill/>
-        </p:spPr>
-        <p:txBody>
-          <a:bodyPr wrap="none">
-            <a:spAutoFit/>
-          </a:bodyPr>
-          <a:lstStyle/>
-          <a:p>
-            <a:pPr lvl="1">
-              <a:defRPr sz="1600">
-                <a:solidFill>
-                  <a:srgbClr val="333333"/>
-                </a:solidFill>
-              </a:defRPr>
-            </a:pPr>
-            <a:r>
-              <a:t>• Order doesn't matter much</a:t>
-            </a:r>
-          </a:p>
-        </p:txBody>
-      </p:sp>
-      <p:sp>
-        <p:nvSpPr>
-          <p:cNvPr id="12" name="Rectangle 11"/>
-          <p:cNvSpPr/>
-          <p:nvPr/>
-        </p:nvSpPr>
-        <p:spPr>
-          <a:xfrm>
-            <a:off x="365760" y="2880359"/>
-            <a:ext cx="11430000" cy="365760"/>
-          </a:xfrm>
-          <a:prstGeom prst="rect">
-            <a:avLst/>
-          </a:prstGeom>
-          <a:solidFill>
-            <a:srgbClr val="0078D7"/>
-          </a:solidFill>
-          <a:ln>
-            <a:noFill/>
-          </a:ln>
-        </p:spPr>
-        <p:style>
-          <a:lnRef idx="1">
-            <a:schemeClr val="accent1"/>
-          </a:lnRef>
-          <a:fillRef idx="3">
-            <a:schemeClr val="accent1"/>
-          </a:fillRef>
-          <a:effectRef idx="2">
-            <a:schemeClr val="accent1"/>
-          </a:effectRef>
-          <a:fontRef idx="minor">
-            <a:schemeClr val="lt1"/>
-          </a:fontRef>
-        </p:style>
-        <p:txBody>
-          <a:bodyPr rtlCol="0" anchor="ctr"/>
-          <a:lstStyle/>
-          <a:p>
-            <a:pPr algn="ctr"/>
-          </a:p>
-        </p:txBody>
-      </p:sp>
-      <p:sp>
-        <p:nvSpPr>
-          <p:cNvPr id="13" name="TextBox 12"/>
-          <p:cNvSpPr txBox="1"/>
-          <p:nvPr/>
-        </p:nvSpPr>
-        <p:spPr>
-          <a:xfrm>
-            <a:off x="548640" y="2926079"/>
-            <a:ext cx="10972800" cy="274320"/>
-          </a:xfrm>
-          <a:prstGeom prst="rect">
-            <a:avLst/>
-          </a:prstGeom>
-          <a:noFill/>
-        </p:spPr>
-        <p:txBody>
-          <a:bodyPr wrap="none">
-            <a:spAutoFit/>
-          </a:bodyPr>
-          <a:lstStyle/>
-          <a:p>
-            <a:pPr>
-              <a:defRPr sz="2000" b="1">
-                <a:solidFill>
-                  <a:srgbClr val="FFFFFF"/>
-                </a:solidFill>
-              </a:defRPr>
-            </a:pPr>
-            <a:r>
-              <a:t>Use List When:</a:t>
-            </a:r>
-          </a:p>
-        </p:txBody>
-      </p:sp>
-      <p:sp>
-        <p:nvSpPr>
-          <p:cNvPr id="14" name="TextBox 13"/>
-          <p:cNvSpPr txBox="1"/>
-          <p:nvPr/>
-        </p:nvSpPr>
-        <p:spPr>
-          <a:xfrm>
-            <a:off x="457200" y="3383279"/>
-            <a:ext cx="11247120" cy="320040"/>
-          </a:xfrm>
-          <a:prstGeom prst="rect">
-            <a:avLst/>
-          </a:prstGeom>
-          <a:noFill/>
-        </p:spPr>
-        <p:txBody>
-          <a:bodyPr wrap="none">
-            <a:spAutoFit/>
-          </a:bodyPr>
-          <a:lstStyle/>
-          <a:p>
-            <a:pPr lvl="1">
-              <a:defRPr sz="1600">
-                <a:solidFill>
-                  <a:srgbClr val="333333"/>
-                </a:solidFill>
-              </a:defRPr>
-            </a:pPr>
-            <a:r>
-              <a:t>• Order is important</a:t>
-            </a:r>
-          </a:p>
-        </p:txBody>
-      </p:sp>
-      <p:sp>
-        <p:nvSpPr>
-          <p:cNvPr id="15" name="TextBox 14"/>
-          <p:cNvSpPr txBox="1"/>
-          <p:nvPr/>
-        </p:nvSpPr>
-        <p:spPr>
-          <a:xfrm>
-            <a:off x="457200" y="3657599"/>
-            <a:ext cx="11247120" cy="320040"/>
-          </a:xfrm>
-          <a:prstGeom prst="rect">
-            <a:avLst/>
-          </a:prstGeom>
-          <a:noFill/>
-        </p:spPr>
-        <p:txBody>
-          <a:bodyPr wrap="none">
-            <a:spAutoFit/>
-          </a:bodyPr>
-          <a:lstStyle/>
-          <a:p>
-            <a:pPr lvl="1">
-              <a:defRPr sz="1600">
-                <a:solidFill>
-                  <a:srgbClr val="333333"/>
-                </a:solidFill>
-              </a:defRPr>
-            </a:pPr>
-            <a:r>
-              <a:t>• Need indexing by position</a:t>
-            </a:r>
-          </a:p>
-        </p:txBody>
-      </p:sp>
-      <p:sp>
-        <p:nvSpPr>
-          <p:cNvPr id="16" name="TextBox 15"/>
-          <p:cNvSpPr txBox="1"/>
-          <p:nvPr/>
-        </p:nvSpPr>
-        <p:spPr>
-          <a:xfrm>
-            <a:off x="457200" y="3931919"/>
-            <a:ext cx="11247120" cy="320040"/>
-          </a:xfrm>
-          <a:prstGeom prst="rect">
-            <a:avLst/>
-          </a:prstGeom>
-          <a:noFill/>
-        </p:spPr>
-        <p:txBody>
-          <a:bodyPr wrap="none">
-            <a:spAutoFit/>
-          </a:bodyPr>
-          <a:lstStyle/>
-          <a:p>
-            <a:pPr lvl="1">
-              <a:defRPr sz="1600">
-                <a:solidFill>
-                  <a:srgbClr val="333333"/>
-                </a:solidFill>
-              </a:defRPr>
-            </a:pPr>
-            <a:r>
-              <a:t>• All items same type</a:t>
-            </a:r>
-          </a:p>
-        </p:txBody>
-      </p:sp>
-      <p:sp>
-        <p:nvSpPr>
-          <p:cNvPr id="17" name="TextBox 16"/>
-          <p:cNvSpPr txBox="1"/>
-          <p:nvPr/>
-        </p:nvSpPr>
-        <p:spPr>
-          <a:xfrm>
-            <a:off x="457200" y="4206239"/>
-            <a:ext cx="11247120" cy="320040"/>
-          </a:xfrm>
-          <a:prstGeom prst="rect">
-            <a:avLst/>
-          </a:prstGeom>
-          <a:noFill/>
-        </p:spPr>
-        <p:txBody>
-          <a:bodyPr wrap="none">
-            <a:spAutoFit/>
-          </a:bodyPr>
-          <a:lstStyle/>
-          <a:p>
-            <a:pPr lvl="1">
-              <a:defRPr sz="1600">
-                <a:solidFill>
-                  <a:srgbClr val="333333"/>
-                </a:solidFill>
-              </a:defRPr>
-            </a:pPr>
-            <a:r>
-              <a:t>• Frequent iteration</a:t>
-            </a:r>
-          </a:p>
-        </p:txBody>
-      </p:sp>
-      <p:sp>
-        <p:nvSpPr>
-          <p:cNvPr id="18" name="Rectangle 17"/>
-          <p:cNvSpPr/>
-          <p:nvPr/>
-        </p:nvSpPr>
-        <p:spPr>
-          <a:xfrm>
-            <a:off x="365760" y="4434839"/>
-            <a:ext cx="11430000" cy="365760"/>
-          </a:xfrm>
-          <a:prstGeom prst="rect">
-            <a:avLst/>
-          </a:prstGeom>
-          <a:solidFill>
-            <a:srgbClr val="0078D7"/>
-          </a:solidFill>
-          <a:ln>
-            <a:noFill/>
-          </a:ln>
-        </p:spPr>
-        <p:style>
-          <a:lnRef idx="1">
-            <a:schemeClr val="accent1"/>
-          </a:lnRef>
-          <a:fillRef idx="3">
-            <a:schemeClr val="accent1"/>
-          </a:fillRef>
-          <a:effectRef idx="2">
-            <a:schemeClr val="accent1"/>
-          </a:effectRef>
-          <a:fontRef idx="minor">
-            <a:schemeClr val="lt1"/>
-          </a:fontRef>
-        </p:style>
-        <p:txBody>
-          <a:bodyPr rtlCol="0" anchor="ctr"/>
-          <a:lstStyle/>
-          <a:p>
-            <a:pPr algn="ctr"/>
-          </a:p>
-        </p:txBody>
-      </p:sp>
-      <p:sp>
-        <p:nvSpPr>
-          <p:cNvPr id="19" name="TextBox 18"/>
-          <p:cNvSpPr txBox="1"/>
-          <p:nvPr/>
-        </p:nvSpPr>
-        <p:spPr>
-          <a:xfrm>
-            <a:off x="548640" y="4480559"/>
-            <a:ext cx="10972800" cy="274320"/>
-          </a:xfrm>
-          <a:prstGeom prst="rect">
-            <a:avLst/>
-          </a:prstGeom>
-          <a:noFill/>
-        </p:spPr>
-        <p:txBody>
-          <a:bodyPr wrap="none">
-            <a:spAutoFit/>
-          </a:bodyPr>
-          <a:lstStyle/>
-          <a:p>
-            <a:pPr>
-              <a:defRPr sz="2000" b="1">
-                <a:solidFill>
-                  <a:srgbClr val="FFFFFF"/>
-                </a:solidFill>
-              </a:defRPr>
-            </a:pPr>
-            <a:r>
-              <a:t>Performance:</a:t>
-            </a:r>
-          </a:p>
-        </p:txBody>
-      </p:sp>
-      <p:sp>
-        <p:nvSpPr>
-          <p:cNvPr id="20" name="TextBox 19"/>
-          <p:cNvSpPr txBox="1"/>
-          <p:nvPr/>
-        </p:nvSpPr>
-        <p:spPr>
-          <a:xfrm>
-            <a:off x="457200" y="4937759"/>
-            <a:ext cx="11247120" cy="320040"/>
-          </a:xfrm>
-          <a:prstGeom prst="rect">
-            <a:avLst/>
-          </a:prstGeom>
-          <a:noFill/>
-        </p:spPr>
-        <p:txBody>
-          <a:bodyPr wrap="none">
-            <a:spAutoFit/>
-          </a:bodyPr>
-          <a:lstStyle/>
-          <a:p>
-            <a:pPr lvl="1">
-              <a:defRPr sz="1600">
-                <a:solidFill>
-                  <a:srgbClr val="333333"/>
-                </a:solidFill>
-              </a:defRPr>
-            </a:pPr>
-            <a:r>
-              <a:t>• Dictionary lookup: O(1)</a:t>
-            </a:r>
-          </a:p>
-        </p:txBody>
-      </p:sp>
-      <p:sp>
-        <p:nvSpPr>
-          <p:cNvPr id="21" name="TextBox 20"/>
-          <p:cNvSpPr txBox="1"/>
-          <p:nvPr/>
-        </p:nvSpPr>
-        <p:spPr>
-          <a:xfrm>
-            <a:off x="457200" y="5212079"/>
-            <a:ext cx="11247120" cy="320040"/>
-          </a:xfrm>
-          <a:prstGeom prst="rect">
-            <a:avLst/>
-          </a:prstGeom>
-          <a:noFill/>
-        </p:spPr>
-        <p:txBody>
-          <a:bodyPr wrap="none">
-            <a:spAutoFit/>
-          </a:bodyPr>
-          <a:lstStyle/>
-          <a:p>
-            <a:pPr lvl="1">
-              <a:defRPr sz="1600">
-                <a:solidFill>
-                  <a:srgbClr val="333333"/>
-                </a:solidFill>
-              </a:defRPr>
-            </a:pPr>
-            <a:r>
-              <a:t>• List search: O(n)</a:t>
-            </a:r>
-          </a:p>
-        </p:txBody>
-      </p:sp>
-      <p:sp>
-        <p:nvSpPr>
-          <p:cNvPr id="22" name="TextBox 21"/>
-          <p:cNvSpPr txBox="1"/>
-          <p:nvPr/>
-        </p:nvSpPr>
-        <p:spPr>
-          <a:xfrm>
-            <a:off x="457200" y="5486399"/>
-            <a:ext cx="11247120" cy="320040"/>
-          </a:xfrm>
-          <a:prstGeom prst="rect">
-            <a:avLst/>
-          </a:prstGeom>
-          <a:noFill/>
-        </p:spPr>
-        <p:txBody>
-          <a:bodyPr wrap="none">
-            <a:spAutoFit/>
-          </a:bodyPr>
-          <a:lstStyle/>
-          <a:p>
-            <a:pPr lvl="1">
-              <a:defRPr sz="1600">
-                <a:solidFill>
-                  <a:srgbClr val="333333"/>
-                </a:solidFill>
-              </a:defRPr>
-            </a:pPr>
-            <a:r>
-              <a:t>• Dictionary more memory</a:t>
-            </a:r>
-          </a:p>
-        </p:txBody>
-      </p:sp>
-      <p:sp>
-        <p:nvSpPr>
-          <p:cNvPr id="23" name="Rectangle 22"/>
-          <p:cNvSpPr/>
-          <p:nvPr/>
-        </p:nvSpPr>
-        <p:spPr>
-          <a:xfrm>
-            <a:off x="365760" y="5714999"/>
-            <a:ext cx="11430000" cy="365760"/>
-          </a:xfrm>
-          <a:prstGeom prst="rect">
-            <a:avLst/>
-          </a:prstGeom>
-          <a:solidFill>
-            <a:srgbClr val="0078D7"/>
-          </a:solidFill>
-          <a:ln>
-            <a:noFill/>
-          </a:ln>
-        </p:spPr>
-        <p:style>
-          <a:lnRef idx="1">
-            <a:schemeClr val="accent1"/>
-          </a:lnRef>
-          <a:fillRef idx="3">
-            <a:schemeClr val="accent1"/>
-          </a:fillRef>
-          <a:effectRef idx="2">
-            <a:schemeClr val="accent1"/>
-          </a:effectRef>
-          <a:fontRef idx="minor">
-            <a:schemeClr val="lt1"/>
-          </a:fontRef>
-        </p:style>
-        <p:txBody>
-          <a:bodyPr rtlCol="0" anchor="ctr"/>
-          <a:lstStyle/>
-          <a:p>
-            <a:pPr algn="ctr"/>
-          </a:p>
-        </p:txBody>
-      </p:sp>
-      <p:sp>
-        <p:nvSpPr>
-          <p:cNvPr id="24" name="TextBox 23"/>
-          <p:cNvSpPr txBox="1"/>
-          <p:nvPr/>
-        </p:nvSpPr>
-        <p:spPr>
-          <a:xfrm>
-            <a:off x="548640" y="5760719"/>
-            <a:ext cx="10972800" cy="274320"/>
-          </a:xfrm>
-          <a:prstGeom prst="rect">
-            <a:avLst/>
-          </a:prstGeom>
-          <a:noFill/>
-        </p:spPr>
-        <p:txBody>
-          <a:bodyPr wrap="none">
-            <a:spAutoFit/>
-          </a:bodyPr>
-          <a:lstStyle/>
-          <a:p>
-            <a:pPr>
-              <a:defRPr sz="2000" b="1">
-                <a:solidFill>
-                  <a:srgbClr val="FFFFFF"/>
-                </a:solidFill>
-              </a:defRPr>
-            </a:pPr>
-            <a:r>
-              <a:t>Example:</a:t>
+              <a:t>• Complex data models</a:t>
             </a:r>
           </a:p>
         </p:txBody>
